--- a/Epstein_Transnational_Justice.pptx
+++ b/Epstein_Transnational_Justice.pptx
@@ -3179,7 +3179,7 @@
                 <a:solidFill>
                   <a:srgbClr val="C08A2B"/>
                 </a:solidFill>
-                <a:latin typeface="Calibri"/>
+                <a:latin typeface="Times New Roman"/>
               </a:rPr>
               <a:t>TRANSNATIONAL CRIME &amp; THE LIMITS OF INTERNATIONAL JUSTICE</a:t>
             </a:r>
@@ -3218,7 +3218,7 @@
                 <a:solidFill>
                   <a:srgbClr val="FFFFFF"/>
                 </a:solidFill>
-                <a:latin typeface="Calibri"/>
+                <a:latin typeface="Times New Roman"/>
               </a:rPr>
               <a:t>What the Epstein Case Reveals</a:t>
             </a:r>
@@ -3257,7 +3257,7 @@
                 <a:solidFill>
                   <a:srgbClr val="F2F4F7"/>
                 </a:solidFill>
-                <a:latin typeface="Calibri"/>
+                <a:latin typeface="Times New Roman"/>
               </a:rPr>
               <a:t>A case study in cross-border exploitation, jurisdiction, and accountability</a:t>
             </a:r>
@@ -3296,7 +3296,7 @@
                 <a:solidFill>
                   <a:srgbClr val="6B7682"/>
                 </a:solidFill>
-                <a:latin typeface="Calibri"/>
+                <a:latin typeface="Times New Roman"/>
               </a:rPr>
               <a:t>Group Presentation  •  Faculty of Law  •  2026</a:t>
             </a:r>
@@ -3449,7 +3449,7 @@
                 <a:solidFill>
                   <a:srgbClr val="C08A2B"/>
                 </a:solidFill>
-                <a:latin typeface="Calibri"/>
+                <a:latin typeface="Times New Roman"/>
               </a:rPr>
               <a:t>OVERVIEW</a:t>
             </a:r>
@@ -3488,7 +3488,7 @@
                 <a:solidFill>
                   <a:srgbClr val="FFFFFF"/>
                 </a:solidFill>
-                <a:latin typeface="Calibri"/>
+                <a:latin typeface="Times New Roman"/>
               </a:rPr>
               <a:t>Our Central Question &amp; Roadmap</a:t>
             </a:r>
@@ -3571,7 +3571,7 @@
                 <a:solidFill>
                   <a:srgbClr val="0F2A43"/>
                 </a:solidFill>
-                <a:latin typeface="Calibri"/>
+                <a:latin typeface="Times New Roman"/>
               </a:rPr>
               <a:t>Why is transnational sexual exploitation so hard to prosecute — and what do</a:t>
             </a:r>
@@ -3587,7 +3587,7 @@
                 <a:solidFill>
                   <a:srgbClr val="0F2A43"/>
                 </a:solidFill>
-                <a:latin typeface="Calibri"/>
+                <a:latin typeface="Times New Roman"/>
               </a:rPr>
               <a:t>international law and cross-border cooperation need in order to work?</a:t>
             </a:r>
@@ -3629,7 +3629,7 @@
                 <a:solidFill>
                   <a:srgbClr val="334455"/>
                 </a:solidFill>
-                <a:latin typeface="Calibri"/>
+                <a:latin typeface="Times New Roman"/>
               </a:rPr>
               <a:t>•  Part 1 — Framing &amp; the international scope of the case</a:t>
             </a:r>
@@ -3648,7 +3648,7 @@
                 <a:solidFill>
                   <a:srgbClr val="334455"/>
                 </a:solidFill>
-                <a:latin typeface="Calibri"/>
+                <a:latin typeface="Times New Roman"/>
               </a:rPr>
               <a:t>•  Part 2 — The international legal framework (Palermo Protocol, UNTOC, jurisdiction &amp; extradition)</a:t>
             </a:r>
@@ -3667,7 +3667,7 @@
                 <a:solidFill>
                   <a:srgbClr val="334455"/>
                 </a:solidFill>
-                <a:latin typeface="Calibri"/>
+                <a:latin typeface="Times New Roman"/>
               </a:rPr>
               <a:t>•  Part 3 — Wealth, mobility, and the problem of "elite impunity"</a:t>
             </a:r>
@@ -3686,7 +3686,7 @@
                 <a:solidFill>
                   <a:srgbClr val="334455"/>
                 </a:solidFill>
-                <a:latin typeface="Calibri"/>
+                <a:latin typeface="Times New Roman"/>
               </a:rPr>
               <a:t>•  Part 4 — Accountability, transparency &amp; lessons (incl. a Japan comparison)</a:t>
             </a:r>
@@ -3725,7 +3725,7 @@
                 <a:solidFill>
                   <a:srgbClr val="6B7682"/>
                 </a:solidFill>
-                <a:latin typeface="Calibri"/>
+                <a:latin typeface="Times New Roman"/>
               </a:rPr>
               <a:t>Note: This presentation centres victims and legal systems — not sensational detail.</a:t>
             </a:r>
@@ -3878,7 +3878,7 @@
                 <a:solidFill>
                   <a:srgbClr val="C08A2B"/>
                 </a:solidFill>
-                <a:latin typeface="Calibri"/>
+                <a:latin typeface="Times New Roman"/>
               </a:rPr>
               <a:t>PART 1  •  FRAMING</a:t>
             </a:r>
@@ -3917,7 +3917,7 @@
                 <a:solidFill>
                   <a:srgbClr val="FFFFFF"/>
                 </a:solidFill>
-                <a:latin typeface="Calibri"/>
+                <a:latin typeface="Times New Roman"/>
               </a:rPr>
               <a:t>Why This Is an International Story</a:t>
             </a:r>
@@ -3959,7 +3959,7 @@
                 <a:solidFill>
                   <a:srgbClr val="0F2A43"/>
                 </a:solidFill>
-                <a:latin typeface="Calibri"/>
+                <a:latin typeface="Times New Roman"/>
               </a:rPr>
               <a:t>•  Who: </a:t>
             </a:r>
@@ -3968,7 +3968,7 @@
                 <a:solidFill>
                   <a:srgbClr val="334455"/>
                 </a:solidFill>
-                <a:latin typeface="Calibri"/>
+                <a:latin typeface="Times New Roman"/>
               </a:rPr>
               <a:t>Jeffrey Epstein, a financier whose network spanned multiple countries.</a:t>
             </a:r>
@@ -3987,7 +3987,7 @@
                 <a:solidFill>
                   <a:srgbClr val="0F2A43"/>
                 </a:solidFill>
-                <a:latin typeface="Calibri"/>
+                <a:latin typeface="Times New Roman"/>
               </a:rPr>
               <a:t>•  2008: </a:t>
             </a:r>
@@ -3996,7 +3996,7 @@
                 <a:solidFill>
                   <a:srgbClr val="334455"/>
                 </a:solidFill>
-                <a:latin typeface="Calibri"/>
+                <a:latin typeface="Times New Roman"/>
               </a:rPr>
               <a:t>A lenient Florida plea deal — state charges, limited accountability.</a:t>
             </a:r>
@@ -4015,7 +4015,7 @@
                 <a:solidFill>
                   <a:srgbClr val="0F2A43"/>
                 </a:solidFill>
-                <a:latin typeface="Calibri"/>
+                <a:latin typeface="Times New Roman"/>
               </a:rPr>
               <a:t>•  2019: </a:t>
             </a:r>
@@ -4024,7 +4024,7 @@
                 <a:solidFill>
                   <a:srgbClr val="334455"/>
                 </a:solidFill>
-                <a:latin typeface="Calibri"/>
+                <a:latin typeface="Times New Roman"/>
               </a:rPr>
               <a:t>Federal sex-trafficking charges in New York; Epstein died in custody.</a:t>
             </a:r>
@@ -4043,7 +4043,7 @@
                 <a:solidFill>
                   <a:srgbClr val="334455"/>
                 </a:solidFill>
-                <a:latin typeface="Calibri"/>
+                <a:latin typeface="Times New Roman"/>
               </a:rPr>
               <a:t>•  Cross-border recruitment of victims, including minors and foreign nationals.</a:t>
             </a:r>
@@ -4062,7 +4062,7 @@
                 <a:solidFill>
                   <a:srgbClr val="334455"/>
                 </a:solidFill>
-                <a:latin typeface="Calibri"/>
+                <a:latin typeface="Times New Roman"/>
               </a:rPr>
               <a:t>•  Offshore wealth and properties across the US, US Virgin Islands and Paris.</a:t>
             </a:r>
@@ -4081,7 +4081,7 @@
                 <a:solidFill>
                   <a:srgbClr val="334455"/>
                 </a:solidFill>
-                <a:latin typeface="Calibri"/>
+                <a:latin typeface="Times New Roman"/>
               </a:rPr>
               <a:t>•  A globe-spanning social network of internationally prominent figures.</a:t>
             </a:r>
@@ -4164,7 +4164,7 @@
                 <a:solidFill>
                   <a:srgbClr val="C08A2B"/>
                 </a:solidFill>
-                <a:latin typeface="Calibri"/>
+                <a:latin typeface="Times New Roman"/>
               </a:rPr>
               <a:t>WHY IT'S "INTERNATIONAL"</a:t>
             </a:r>
@@ -4206,7 +4206,7 @@
                 <a:solidFill>
                   <a:srgbClr val="334455"/>
                 </a:solidFill>
-                <a:latin typeface="Calibri"/>
+                <a:latin typeface="Times New Roman"/>
               </a:rPr>
               <a:t>•  Victims moved across borders</a:t>
             </a:r>
@@ -4225,7 +4225,7 @@
                 <a:solidFill>
                   <a:srgbClr val="334455"/>
                 </a:solidFill>
-                <a:latin typeface="Calibri"/>
+                <a:latin typeface="Times New Roman"/>
               </a:rPr>
               <a:t>•  Money held offshore</a:t>
             </a:r>
@@ -4244,7 +4244,7 @@
                 <a:solidFill>
                   <a:srgbClr val="334455"/>
                 </a:solidFill>
-                <a:latin typeface="Calibri"/>
+                <a:latin typeface="Times New Roman"/>
               </a:rPr>
               <a:t>•  Multiple jurisdictions involved</a:t>
             </a:r>
@@ -4263,7 +4263,7 @@
                 <a:solidFill>
                   <a:srgbClr val="334455"/>
                 </a:solidFill>
-                <a:latin typeface="Calibri"/>
+                <a:latin typeface="Times New Roman"/>
               </a:rPr>
               <a:t>•  Foreign &amp; quasi-diplomatic figures</a:t>
             </a:r>
@@ -4282,7 +4282,7 @@
                 <a:solidFill>
                   <a:srgbClr val="334455"/>
                 </a:solidFill>
-                <a:latin typeface="Calibri"/>
+                <a:latin typeface="Times New Roman"/>
               </a:rPr>
               <a:t>•  → A test for international justice</a:t>
             </a:r>
@@ -4435,7 +4435,7 @@
                 <a:solidFill>
                   <a:srgbClr val="C08A2B"/>
                 </a:solidFill>
-                <a:latin typeface="Calibri"/>
+                <a:latin typeface="Times New Roman"/>
               </a:rPr>
               <a:t>PART 2  •  LEGAL FRAMEWORK</a:t>
             </a:r>
@@ -4474,7 +4474,7 @@
                 <a:solidFill>
                   <a:srgbClr val="FFFFFF"/>
                 </a:solidFill>
-                <a:latin typeface="Calibri"/>
+                <a:latin typeface="Times New Roman"/>
               </a:rPr>
               <a:t>Trafficking as a Transnational Crime</a:t>
             </a:r>
@@ -4516,7 +4516,7 @@
                 <a:solidFill>
                   <a:srgbClr val="0F2A43"/>
                 </a:solidFill>
-                <a:latin typeface="Calibri"/>
+                <a:latin typeface="Times New Roman"/>
               </a:rPr>
               <a:t>•  UN Palermo Protocol (2000): </a:t>
             </a:r>
@@ -4525,7 +4525,7 @@
                 <a:solidFill>
                   <a:srgbClr val="334455"/>
                 </a:solidFill>
-                <a:latin typeface="Calibri"/>
+                <a:latin typeface="Times New Roman"/>
               </a:rPr>
               <a:t>Defines trafficking in persons and obliges states to criminalise it.</a:t>
             </a:r>
@@ -4544,7 +4544,7 @@
                 <a:solidFill>
                   <a:srgbClr val="0F2A43"/>
                 </a:solidFill>
-                <a:latin typeface="Calibri"/>
+                <a:latin typeface="Times New Roman"/>
               </a:rPr>
               <a:t>•  UN Convention against Transnational Organized Crime (UNTOC): </a:t>
             </a:r>
@@ -4553,7 +4553,7 @@
                 <a:solidFill>
                   <a:srgbClr val="334455"/>
                 </a:solidFill>
-                <a:latin typeface="Calibri"/>
+                <a:latin typeface="Times New Roman"/>
               </a:rPr>
               <a:t>The parent framework for cooperation.</a:t>
             </a:r>
@@ -4572,7 +4572,7 @@
                 <a:solidFill>
                   <a:srgbClr val="0F2A43"/>
                 </a:solidFill>
-                <a:latin typeface="Calibri"/>
+                <a:latin typeface="Times New Roman"/>
               </a:rPr>
               <a:t>•  Jurisdiction: </a:t>
             </a:r>
@@ -4581,7 +4581,7 @@
                 <a:solidFill>
                   <a:srgbClr val="334455"/>
                 </a:solidFill>
-                <a:latin typeface="Calibri"/>
+                <a:latin typeface="Times New Roman"/>
               </a:rPr>
               <a:t>Which state may prosecute when conduct spans several countries?</a:t>
             </a:r>
@@ -4600,7 +4600,7 @@
                 <a:solidFill>
                   <a:srgbClr val="0F2A43"/>
                 </a:solidFill>
-                <a:latin typeface="Calibri"/>
+                <a:latin typeface="Times New Roman"/>
               </a:rPr>
               <a:t>•  Extradition &amp; MLATs: </a:t>
             </a:r>
@@ -4609,7 +4609,7 @@
                 <a:solidFill>
                   <a:srgbClr val="334455"/>
                 </a:solidFill>
-                <a:latin typeface="Calibri"/>
+                <a:latin typeface="Times New Roman"/>
               </a:rPr>
               <a:t>Mutual Legal Assistance Treaties enable evidence-sharing across borders.</a:t>
             </a:r>
@@ -4628,7 +4628,7 @@
                 <a:solidFill>
                   <a:srgbClr val="0F2A43"/>
                 </a:solidFill>
-                <a:latin typeface="Calibri"/>
+                <a:latin typeface="Times New Roman"/>
               </a:rPr>
               <a:t>•  Foreign nationals: </a:t>
             </a:r>
@@ -4637,7 +4637,7 @@
                 <a:solidFill>
                   <a:srgbClr val="334455"/>
                 </a:solidFill>
-                <a:latin typeface="Calibri"/>
+                <a:latin typeface="Times New Roman"/>
               </a:rPr>
               <a:t>Ghislaine Maxwell (UK) — convicted 2021 of sex-trafficking conspiracy.</a:t>
             </a:r>
@@ -4656,7 +4656,7 @@
                 <a:solidFill>
                   <a:srgbClr val="0F2A43"/>
                 </a:solidFill>
-                <a:latin typeface="Calibri"/>
+                <a:latin typeface="Times New Roman"/>
               </a:rPr>
               <a:t>•  Quasi-diplomatic complications: </a:t>
             </a:r>
@@ -4665,7 +4665,7 @@
                 <a:solidFill>
                   <a:srgbClr val="334455"/>
                 </a:solidFill>
-                <a:latin typeface="Calibri"/>
+                <a:latin typeface="Times New Roman"/>
               </a:rPr>
               <a:t>Prince Andrew settled a US civil case (2022) and later lost titles.</a:t>
             </a:r>
@@ -4704,7 +4704,7 @@
                 <a:solidFill>
                   <a:srgbClr val="0F2A43"/>
                 </a:solidFill>
-                <a:latin typeface="Calibri"/>
+                <a:latin typeface="Times New Roman"/>
               </a:rPr>
               <a:t>Takeaway: The law exists — the difficulty is coordinating sovereign systems.</a:t>
             </a:r>
@@ -4857,7 +4857,7 @@
                 <a:solidFill>
                   <a:srgbClr val="C08A2B"/>
                 </a:solidFill>
-                <a:latin typeface="Calibri"/>
+                <a:latin typeface="Times New Roman"/>
               </a:rPr>
               <a:t>PART 3  •  WEALTH &amp; MOBILITY</a:t>
             </a:r>
@@ -4896,7 +4896,7 @@
                 <a:solidFill>
                   <a:srgbClr val="FFFFFF"/>
                 </a:solidFill>
-                <a:latin typeface="Calibri"/>
+                <a:latin typeface="Times New Roman"/>
               </a:rPr>
               <a:t>How Wealth Enabled "Elite Impunity"</a:t>
             </a:r>
@@ -4938,7 +4938,7 @@
                 <a:solidFill>
                   <a:srgbClr val="334455"/>
                 </a:solidFill>
-                <a:latin typeface="Calibri"/>
+                <a:latin typeface="Times New Roman"/>
               </a:rPr>
               <a:t>•  Offshore structures and private wealth obscured assets and ownership.</a:t>
             </a:r>
@@ -4957,7 +4957,7 @@
                 <a:solidFill>
                   <a:srgbClr val="334455"/>
                 </a:solidFill>
-                <a:latin typeface="Calibri"/>
+                <a:latin typeface="Times New Roman"/>
               </a:rPr>
               <a:t>•  Property in several jurisdictions enabled mobility and evasion.</a:t>
             </a:r>
@@ -4976,7 +4976,7 @@
                 <a:solidFill>
                   <a:srgbClr val="0F2A43"/>
                 </a:solidFill>
-                <a:latin typeface="Calibri"/>
+                <a:latin typeface="Times New Roman"/>
               </a:rPr>
               <a:t>•  Identity documents: </a:t>
             </a:r>
@@ -4985,7 +4985,7 @@
                 <a:solidFill>
                   <a:srgbClr val="334455"/>
                 </a:solidFill>
-                <a:latin typeface="Calibri"/>
+                <a:latin typeface="Times New Roman"/>
               </a:rPr>
               <a:t>an expired passport bore Epstein's photo, a false name, and listed Saudi Arabia as residence.</a:t>
             </a:r>
@@ -5004,7 +5004,7 @@
                 <a:solidFill>
                   <a:srgbClr val="0F2A43"/>
                 </a:solidFill>
-                <a:latin typeface="Calibri"/>
+                <a:latin typeface="Times New Roman"/>
               </a:rPr>
               <a:t>•  Contrast: </a:t>
             </a:r>
@@ -5013,7 +5013,7 @@
                 <a:solidFill>
                   <a:srgbClr val="334455"/>
                 </a:solidFill>
-                <a:latin typeface="Calibri"/>
+                <a:latin typeface="Times New Roman"/>
               </a:rPr>
               <a:t>the lenient 2008 outcome vs. the 2019 federal prosecution.</a:t>
             </a:r>
@@ -5032,7 +5032,7 @@
                 <a:solidFill>
                   <a:srgbClr val="334455"/>
                 </a:solidFill>
-                <a:latin typeface="Calibri"/>
+                <a:latin typeface="Times New Roman"/>
               </a:rPr>
               <a:t>•  Maxwell's 2021 conviction showed accountability is possible — but slow.</a:t>
             </a:r>
@@ -5115,7 +5115,7 @@
                 <a:solidFill>
                   <a:srgbClr val="C08A2B"/>
                 </a:solidFill>
-                <a:latin typeface="Calibri"/>
+                <a:latin typeface="Times New Roman"/>
               </a:rPr>
               <a:t>COMPARATIVE QUESTION</a:t>
             </a:r>
@@ -5154,7 +5154,7 @@
                 <a:solidFill>
                   <a:srgbClr val="334455"/>
                 </a:solidFill>
-                <a:latin typeface="Calibri"/>
+                <a:latin typeface="Times New Roman"/>
               </a:rPr>
               <a:t>Would other legal systems — the UK, France, or Japan — have acted faster, or slower, against a defendant of comparable wealth and mobility?</a:t>
             </a:r>
@@ -5307,7 +5307,7 @@
                 <a:solidFill>
                   <a:srgbClr val="C08A2B"/>
                 </a:solidFill>
-                <a:latin typeface="Calibri"/>
+                <a:latin typeface="Times New Roman"/>
               </a:rPr>
               <a:t>PART 4  •  ACCOUNTABILITY</a:t>
             </a:r>
@@ -5346,7 +5346,7 @@
                 <a:solidFill>
                   <a:srgbClr val="FFFFFF"/>
                 </a:solidFill>
-                <a:latin typeface="Calibri"/>
+                <a:latin typeface="Times New Roman"/>
               </a:rPr>
               <a:t>Transparency, Survivors &amp; Lessons</a:t>
             </a:r>
@@ -5388,7 +5388,7 @@
                 <a:solidFill>
                   <a:srgbClr val="334455"/>
                 </a:solidFill>
-                <a:latin typeface="Calibri"/>
+                <a:latin typeface="Times New Roman"/>
               </a:rPr>
               <a:t>•  2025 document-release wave under US transparency legislation brought new scrutiny.</a:t>
             </a:r>
@@ -5407,7 +5407,7 @@
                 <a:solidFill>
                   <a:srgbClr val="0F2A43"/>
                 </a:solidFill>
-                <a:latin typeface="Calibri"/>
+                <a:latin typeface="Times New Roman"/>
               </a:rPr>
               <a:t>•  Survivors' concern: </a:t>
             </a:r>
@@ -5416,7 +5416,7 @@
                 <a:solidFill>
                   <a:srgbClr val="334455"/>
                 </a:solidFill>
-                <a:latin typeface="Calibri"/>
+                <a:latin typeface="Times New Roman"/>
               </a:rPr>
               <a:t>disclosures made it easy to identify victims — but not the enablers.</a:t>
             </a:r>
@@ -5435,7 +5435,7 @@
                 <a:solidFill>
                   <a:srgbClr val="0F2A43"/>
                 </a:solidFill>
-                <a:latin typeface="Calibri"/>
+                <a:latin typeface="Times New Roman"/>
               </a:rPr>
               <a:t>•  Lesson: </a:t>
             </a:r>
@@ -5444,7 +5444,7 @@
                 <a:solidFill>
                   <a:srgbClr val="334455"/>
                 </a:solidFill>
-                <a:latin typeface="Calibri"/>
+                <a:latin typeface="Times New Roman"/>
               </a:rPr>
               <a:t>transparency must be designed to protect victims while exposing accountability.</a:t>
             </a:r>
@@ -5463,7 +5463,7 @@
                 <a:solidFill>
                   <a:srgbClr val="0F2A43"/>
                 </a:solidFill>
-                <a:latin typeface="Calibri"/>
+                <a:latin typeface="Times New Roman"/>
               </a:rPr>
               <a:t>•  Reform: </a:t>
             </a:r>
@@ -5472,7 +5472,7 @@
                 <a:solidFill>
                   <a:srgbClr val="334455"/>
                 </a:solidFill>
-                <a:latin typeface="Calibri"/>
+                <a:latin typeface="Times New Roman"/>
               </a:rPr>
               <a:t>stronger MLATs, faster extradition, victim-centred disclosure, asset tracing.</a:t>
             </a:r>
@@ -5491,7 +5491,7 @@
                 <a:solidFill>
                   <a:srgbClr val="0F2A43"/>
                 </a:solidFill>
-                <a:latin typeface="Calibri"/>
+                <a:latin typeface="Times New Roman"/>
               </a:rPr>
               <a:t>•  Japan comparison: </a:t>
             </a:r>
@@ -5500,7 +5500,7 @@
                 <a:solidFill>
                   <a:srgbClr val="334455"/>
                 </a:solidFill>
-                <a:latin typeface="Calibri"/>
+                <a:latin typeface="Times New Roman"/>
               </a:rPr>
               <a:t>anti-trafficking framework &amp; US State Dept. TIP assessments offer a benchmark.</a:t>
             </a:r>
@@ -5583,7 +5583,7 @@
                 <a:solidFill>
                   <a:srgbClr val="FFFFFF"/>
                 </a:solidFill>
-                <a:latin typeface="Calibri"/>
+                <a:latin typeface="Times New Roman"/>
               </a:rPr>
               <a:t>Closing: Justice across borders depends less on new laws than on the will to cooperate.</a:t>
             </a:r>
@@ -5736,7 +5736,7 @@
                 <a:solidFill>
                   <a:srgbClr val="C08A2B"/>
                 </a:solidFill>
-                <a:latin typeface="Calibri"/>
+                <a:latin typeface="Times New Roman"/>
               </a:rPr>
               <a:t>CONCLUSION</a:t>
             </a:r>
@@ -5775,7 +5775,7 @@
                 <a:solidFill>
                   <a:srgbClr val="FFFFFF"/>
                 </a:solidFill>
-                <a:latin typeface="Calibri"/>
+                <a:latin typeface="Times New Roman"/>
               </a:rPr>
               <a:t>Four Takeaways</a:t>
             </a:r>
@@ -5858,7 +5858,7 @@
                 <a:solidFill>
                   <a:srgbClr val="FFFFFF"/>
                 </a:solidFill>
-                <a:latin typeface="Calibri"/>
+                <a:latin typeface="Times New Roman"/>
               </a:rPr>
               <a:t>01</a:t>
             </a:r>
@@ -5897,7 +5897,7 @@
                 <a:solidFill>
                   <a:srgbClr val="0F2A43"/>
                 </a:solidFill>
-                <a:latin typeface="Calibri"/>
+                <a:latin typeface="Times New Roman"/>
               </a:rPr>
               <a:t>Crime crosses borders — justice often doesn't.</a:t>
             </a:r>
@@ -5936,7 +5936,7 @@
                 <a:solidFill>
                   <a:srgbClr val="334455"/>
                 </a:solidFill>
-                <a:latin typeface="Calibri"/>
+                <a:latin typeface="Times New Roman"/>
               </a:rPr>
               <a:t>Networks are global; enforcement is national.</a:t>
             </a:r>
@@ -6019,7 +6019,7 @@
                 <a:solidFill>
                   <a:srgbClr val="FFFFFF"/>
                 </a:solidFill>
-                <a:latin typeface="Calibri"/>
+                <a:latin typeface="Times New Roman"/>
               </a:rPr>
               <a:t>02</a:t>
             </a:r>
@@ -6058,7 +6058,7 @@
                 <a:solidFill>
                   <a:srgbClr val="0F2A43"/>
                 </a:solidFill>
-                <a:latin typeface="Calibri"/>
+                <a:latin typeface="Times New Roman"/>
               </a:rPr>
               <a:t>The legal tools exist.</a:t>
             </a:r>
@@ -6097,7 +6097,7 @@
                 <a:solidFill>
                   <a:srgbClr val="334455"/>
                 </a:solidFill>
-                <a:latin typeface="Calibri"/>
+                <a:latin typeface="Times New Roman"/>
               </a:rPr>
               <a:t>Palermo &amp; UNTOC provide the framework; coordination is the gap.</a:t>
             </a:r>
@@ -6180,7 +6180,7 @@
                 <a:solidFill>
                   <a:srgbClr val="FFFFFF"/>
                 </a:solidFill>
-                <a:latin typeface="Calibri"/>
+                <a:latin typeface="Times New Roman"/>
               </a:rPr>
               <a:t>03</a:t>
             </a:r>
@@ -6219,7 +6219,7 @@
                 <a:solidFill>
                   <a:srgbClr val="0F2A43"/>
                 </a:solidFill>
-                <a:latin typeface="Calibri"/>
+                <a:latin typeface="Times New Roman"/>
               </a:rPr>
               <a:t>Wealth buys time, not immunity.</a:t>
             </a:r>
@@ -6258,7 +6258,7 @@
                 <a:solidFill>
                   <a:srgbClr val="334455"/>
                 </a:solidFill>
-                <a:latin typeface="Calibri"/>
+                <a:latin typeface="Times New Roman"/>
               </a:rPr>
               <a:t>Mobility delayed — but did not prevent — accountability.</a:t>
             </a:r>
@@ -6341,7 +6341,7 @@
                 <a:solidFill>
                   <a:srgbClr val="FFFFFF"/>
                 </a:solidFill>
-                <a:latin typeface="Calibri"/>
+                <a:latin typeface="Times New Roman"/>
               </a:rPr>
               <a:t>04</a:t>
             </a:r>
@@ -6380,7 +6380,7 @@
                 <a:solidFill>
                   <a:srgbClr val="0F2A43"/>
                 </a:solidFill>
-                <a:latin typeface="Calibri"/>
+                <a:latin typeface="Times New Roman"/>
               </a:rPr>
               <a:t>Transparency must protect victims.</a:t>
             </a:r>
@@ -6419,7 +6419,7 @@
                 <a:solidFill>
                   <a:srgbClr val="334455"/>
                 </a:solidFill>
-                <a:latin typeface="Calibri"/>
+                <a:latin typeface="Times New Roman"/>
               </a:rPr>
               <a:t>Disclosure should expose enablers, not endanger survivors.</a:t>
             </a:r>
@@ -6528,7 +6528,7 @@
                 <a:solidFill>
                   <a:srgbClr val="FFFFFF"/>
                 </a:solidFill>
-                <a:latin typeface="Calibri"/>
+                <a:latin typeface="Times New Roman"/>
               </a:rPr>
               <a:t>Thank You</a:t>
             </a:r>
@@ -6567,7 +6567,7 @@
                 <a:solidFill>
                   <a:srgbClr val="F2F4F7"/>
                 </a:solidFill>
-                <a:latin typeface="Calibri"/>
+                <a:latin typeface="Times New Roman"/>
               </a:rPr>
               <a:t>Questions &amp; Discussion</a:t>
             </a:r>
@@ -6606,7 +6606,7 @@
                 <a:solidFill>
                   <a:srgbClr val="C08A2B"/>
                 </a:solidFill>
-                <a:latin typeface="Calibri"/>
+                <a:latin typeface="Times New Roman"/>
               </a:rPr>
               <a:t>SELECTED SOURCES &amp; INSTRUMENTS</a:t>
             </a:r>
@@ -6648,7 +6648,7 @@
                 <a:solidFill>
                   <a:srgbClr val="F2F4F7"/>
                 </a:solidFill>
-                <a:latin typeface="Calibri"/>
+                <a:latin typeface="Times New Roman"/>
               </a:rPr>
               <a:t>•  UN Protocol to Prevent, Suppress and Punish Trafficking in Persons (Palermo Protocol, 2000)</a:t>
             </a:r>
@@ -6667,7 +6667,7 @@
                 <a:solidFill>
                   <a:srgbClr val="F2F4F7"/>
                 </a:solidFill>
-                <a:latin typeface="Calibri"/>
+                <a:latin typeface="Times New Roman"/>
               </a:rPr>
               <a:t>•  UN Convention against Transnational Organized Crime (UNTOC)</a:t>
             </a:r>
@@ -6686,7 +6686,7 @@
                 <a:solidFill>
                   <a:srgbClr val="F2F4F7"/>
                 </a:solidFill>
-                <a:latin typeface="Calibri"/>
+                <a:latin typeface="Times New Roman"/>
               </a:rPr>
               <a:t>•  US Dept. of Justice filings: US v. Epstein (2019); US v. Maxwell (2021)</a:t>
             </a:r>
@@ -6705,7 +6705,7 @@
                 <a:solidFill>
                   <a:srgbClr val="F2F4F7"/>
                 </a:solidFill>
-                <a:latin typeface="Calibri"/>
+                <a:latin typeface="Times New Roman"/>
               </a:rPr>
               <a:t>•  US State Department Trafficking in Persons (TIP) Reports</a:t>
             </a:r>
@@ -6724,7 +6724,7 @@
                 <a:solidFill>
                   <a:srgbClr val="F2F4F7"/>
                 </a:solidFill>
-                <a:latin typeface="Calibri"/>
+                <a:latin typeface="Times New Roman"/>
               </a:rPr>
               <a:t>•  Contemporary news reporting on 2025 document disclosures</a:t>
             </a:r>

--- a/Epstein_Transnational_Justice.pptx
+++ b/Epstein_Transnational_Justice.pptx
@@ -13,6 +13,18 @@
     <p:sldId id="261" r:id="rId12"/>
     <p:sldId id="262" r:id="rId13"/>
     <p:sldId id="263" r:id="rId14"/>
+    <p:sldId id="264" r:id="rId15"/>
+    <p:sldId id="265" r:id="rId16"/>
+    <p:sldId id="266" r:id="rId17"/>
+    <p:sldId id="267" r:id="rId18"/>
+    <p:sldId id="268" r:id="rId19"/>
+    <p:sldId id="269" r:id="rId20"/>
+    <p:sldId id="270" r:id="rId21"/>
+    <p:sldId id="271" r:id="rId22"/>
+    <p:sldId id="272" r:id="rId23"/>
+    <p:sldId id="273" r:id="rId24"/>
+    <p:sldId id="274" r:id="rId25"/>
+    <p:sldId id="275" r:id="rId26"/>
   </p:sldIdLst>
   <p:sldSz cx="12191695" cy="6858000" type="screen4x3"/>
   <p:notesSz cx="6858000" cy="9144000"/>
@@ -3155,8 +3167,8 @@
         </p:nvSpPr>
         <p:spPr>
           <a:xfrm>
-            <a:off x="914400" y="1371600"/>
-            <a:ext cx="10332720" cy="457200"/>
+            <a:off x="914400" y="1325880"/>
+            <a:ext cx="10332720" cy="731520"/>
           </a:xfrm>
           <a:prstGeom prst="rect">
             <a:avLst/>
@@ -3164,7 +3176,7 @@
           <a:noFill/>
         </p:spPr>
         <p:txBody>
-          <a:bodyPr wrap="square" anchor="t">
+          <a:bodyPr wrap="square">
             <a:spAutoFit/>
           </a:bodyPr>
           <a:lstStyle/>
@@ -3194,7 +3206,7 @@
         </p:nvSpPr>
         <p:spPr>
           <a:xfrm>
-            <a:off x="914400" y="1828800"/>
+            <a:off x="914400" y="1783080"/>
             <a:ext cx="10332720" cy="1005840"/>
           </a:xfrm>
           <a:prstGeom prst="rect">
@@ -3203,7 +3215,7 @@
           <a:noFill/>
         </p:spPr>
         <p:txBody>
-          <a:bodyPr wrap="square" anchor="t">
+          <a:bodyPr wrap="square">
             <a:spAutoFit/>
           </a:bodyPr>
           <a:lstStyle/>
@@ -3234,7 +3246,7 @@
         <p:spPr>
           <a:xfrm>
             <a:off x="914400" y="3063240"/>
-            <a:ext cx="10332720" cy="548640"/>
+            <a:ext cx="10332720" cy="731520"/>
           </a:xfrm>
           <a:prstGeom prst="rect">
             <a:avLst/>
@@ -3242,7 +3254,7 @@
           <a:noFill/>
         </p:spPr>
         <p:txBody>
-          <a:bodyPr wrap="square" anchor="t">
+          <a:bodyPr wrap="square">
             <a:spAutoFit/>
           </a:bodyPr>
           <a:lstStyle/>
@@ -3272,8 +3284,8 @@
         </p:nvSpPr>
         <p:spPr>
           <a:xfrm>
-            <a:off x="914400" y="5852160"/>
-            <a:ext cx="10332720" cy="457200"/>
+            <a:off x="914400" y="5897880"/>
+            <a:ext cx="10332720" cy="731520"/>
           </a:xfrm>
           <a:prstGeom prst="rect">
             <a:avLst/>
@@ -3281,7 +3293,7 @@
           <a:noFill/>
         </p:spPr>
         <p:txBody>
-          <a:bodyPr wrap="square" anchor="t">
+          <a:bodyPr wrap="square">
             <a:spAutoFit/>
           </a:bodyPr>
           <a:lstStyle/>
@@ -3298,7 +3310,3543 @@
                 </a:solidFill>
                 <a:latin typeface="Times New Roman"/>
               </a:rPr>
-              <a:t>Group Presentation  •  Faculty of Law  •  2026</a:t>
+              <a:t>Group Presentation  •  May 2026</a:t>
+            </a:r>
+          </a:p>
+        </p:txBody>
+      </p:sp>
+    </p:spTree>
+  </p:cSld>
+  <p:clrMapOvr>
+    <a:masterClrMapping/>
+  </p:clrMapOvr>
+</p:sld>
+</file>
+
+<file path=ppt/slides/slide10.xml><?xml version="1.0" encoding="utf-8"?>
+<p:sld xmlns:a="http://schemas.openxmlformats.org/drawingml/2006/main" xmlns:p="http://schemas.openxmlformats.org/presentationml/2006/main" xmlns:r="http://schemas.openxmlformats.org/officeDocument/2006/relationships">
+  <p:cSld>
+    <p:bg>
+      <p:bgPr>
+        <a:solidFill>
+          <a:srgbClr val="FFFFFF"/>
+        </a:solidFill>
+        <a:effectLst/>
+      </p:bgPr>
+    </p:bg>
+    <p:spTree>
+      <p:nvGrpSpPr>
+        <p:cNvPr id="1" name=""/>
+        <p:cNvGrpSpPr/>
+        <p:nvPr/>
+      </p:nvGrpSpPr>
+      <p:grpSpPr/>
+      <p:sp>
+        <p:nvSpPr>
+          <p:cNvPr id="2" name="Rectangle 1"/>
+          <p:cNvSpPr/>
+          <p:nvPr/>
+        </p:nvSpPr>
+        <p:spPr>
+          <a:xfrm>
+            <a:off x="0" y="0"/>
+            <a:ext cx="12191695" cy="1143000"/>
+          </a:xfrm>
+          <a:prstGeom prst="rect">
+            <a:avLst/>
+          </a:prstGeom>
+          <a:solidFill>
+            <a:srgbClr val="0F2A43"/>
+          </a:solidFill>
+          <a:ln>
+            <a:noFill/>
+          </a:ln>
+          <a:effectLst/>
+        </p:spPr>
+        <p:style>
+          <a:lnRef idx="1">
+            <a:schemeClr val="accent1"/>
+          </a:lnRef>
+          <a:fillRef idx="3">
+            <a:schemeClr val="accent1"/>
+          </a:fillRef>
+          <a:effectRef idx="2">
+            <a:schemeClr val="accent1"/>
+          </a:effectRef>
+          <a:fontRef idx="minor">
+            <a:schemeClr val="lt1"/>
+          </a:fontRef>
+        </p:style>
+        <p:txBody>
+          <a:bodyPr rtlCol="0" anchor="ctr"/>
+          <a:lstStyle/>
+          <a:p>
+            <a:pPr algn="ctr"/>
+          </a:p>
+        </p:txBody>
+      </p:sp>
+      <p:sp>
+        <p:nvSpPr>
+          <p:cNvPr id="3" name="Rectangle 2"/>
+          <p:cNvSpPr/>
+          <p:nvPr/>
+        </p:nvSpPr>
+        <p:spPr>
+          <a:xfrm>
+            <a:off x="0" y="1143000"/>
+            <a:ext cx="12191695" cy="54864"/>
+          </a:xfrm>
+          <a:prstGeom prst="rect">
+            <a:avLst/>
+          </a:prstGeom>
+          <a:solidFill>
+            <a:srgbClr val="C08A2B"/>
+          </a:solidFill>
+          <a:ln>
+            <a:noFill/>
+          </a:ln>
+          <a:effectLst/>
+        </p:spPr>
+        <p:style>
+          <a:lnRef idx="1">
+            <a:schemeClr val="accent1"/>
+          </a:lnRef>
+          <a:fillRef idx="3">
+            <a:schemeClr val="accent1"/>
+          </a:fillRef>
+          <a:effectRef idx="2">
+            <a:schemeClr val="accent1"/>
+          </a:effectRef>
+          <a:fontRef idx="minor">
+            <a:schemeClr val="lt1"/>
+          </a:fontRef>
+        </p:style>
+        <p:txBody>
+          <a:bodyPr rtlCol="0" anchor="ctr"/>
+          <a:lstStyle/>
+          <a:p>
+            <a:pPr algn="ctr"/>
+          </a:p>
+        </p:txBody>
+      </p:sp>
+      <p:sp>
+        <p:nvSpPr>
+          <p:cNvPr id="4" name="TextBox 3"/>
+          <p:cNvSpPr txBox="1"/>
+          <p:nvPr/>
+        </p:nvSpPr>
+        <p:spPr>
+          <a:xfrm>
+            <a:off x="548640" y="182880"/>
+            <a:ext cx="10515600" cy="731520"/>
+          </a:xfrm>
+          <a:prstGeom prst="rect">
+            <a:avLst/>
+          </a:prstGeom>
+          <a:noFill/>
+        </p:spPr>
+        <p:txBody>
+          <a:bodyPr wrap="square">
+            <a:spAutoFit/>
+          </a:bodyPr>
+          <a:lstStyle/>
+          <a:p>
+            <a:pPr algn="l">
+              <a:lnSpc>
+                <a:spcPct val="100000"/>
+              </a:lnSpc>
+            </a:pPr>
+            <a:r>
+              <a:rPr sz="1300" b="1" i="0">
+                <a:solidFill>
+                  <a:srgbClr val="C08A2B"/>
+                </a:solidFill>
+                <a:latin typeface="Times New Roman"/>
+              </a:rPr>
+              <a:t>PART 2  •  INSTRUMENTS</a:t>
+            </a:r>
+          </a:p>
+        </p:txBody>
+      </p:sp>
+      <p:sp>
+        <p:nvSpPr>
+          <p:cNvPr id="5" name="TextBox 4"/>
+          <p:cNvSpPr txBox="1"/>
+          <p:nvPr/>
+        </p:nvSpPr>
+        <p:spPr>
+          <a:xfrm>
+            <a:off x="548640" y="475488"/>
+            <a:ext cx="11064240" cy="731520"/>
+          </a:xfrm>
+          <a:prstGeom prst="rect">
+            <a:avLst/>
+          </a:prstGeom>
+          <a:noFill/>
+        </p:spPr>
+        <p:txBody>
+          <a:bodyPr wrap="square">
+            <a:spAutoFit/>
+          </a:bodyPr>
+          <a:lstStyle/>
+          <a:p>
+            <a:pPr algn="l">
+              <a:lnSpc>
+                <a:spcPct val="100000"/>
+              </a:lnSpc>
+            </a:pPr>
+            <a:r>
+              <a:rPr sz="2600" b="1" i="0">
+                <a:solidFill>
+                  <a:srgbClr val="FFFFFF"/>
+                </a:solidFill>
+                <a:latin typeface="Times New Roman"/>
+              </a:rPr>
+              <a:t>UNTOC &amp; Cross-Border Cooperation</a:t>
+            </a:r>
+          </a:p>
+        </p:txBody>
+      </p:sp>
+      <p:sp>
+        <p:nvSpPr>
+          <p:cNvPr id="6" name="TextBox 5"/>
+          <p:cNvSpPr txBox="1"/>
+          <p:nvPr/>
+        </p:nvSpPr>
+        <p:spPr>
+          <a:xfrm>
+            <a:off x="640080" y="1554480"/>
+            <a:ext cx="10972800" cy="4572000"/>
+          </a:xfrm>
+          <a:prstGeom prst="rect">
+            <a:avLst/>
+          </a:prstGeom>
+          <a:noFill/>
+        </p:spPr>
+        <p:txBody>
+          <a:bodyPr wrap="square">
+            <a:spAutoFit/>
+          </a:bodyPr>
+          <a:lstStyle/>
+          <a:p>
+            <a:pPr>
+              <a:lnSpc>
+                <a:spcPct val="105000"/>
+              </a:lnSpc>
+              <a:spcAft>
+                <a:spcPts val="1600"/>
+              </a:spcAft>
+            </a:pPr>
+            <a:r>
+              <a:rPr sz="1900" b="1">
+                <a:solidFill>
+                  <a:srgbClr val="0F2A43"/>
+                </a:solidFill>
+                <a:latin typeface="Times New Roman"/>
+              </a:rPr>
+              <a:t>•  Parent treaty: </a:t>
+            </a:r>
+            <a:r>
+              <a:rPr sz="1900">
+                <a:solidFill>
+                  <a:srgbClr val="334455"/>
+                </a:solidFill>
+                <a:latin typeface="Times New Roman"/>
+              </a:rPr>
+              <a:t>the UN Convention against Transnational Organized Crime.</a:t>
+            </a:r>
+          </a:p>
+          <a:p>
+            <a:pPr>
+              <a:lnSpc>
+                <a:spcPct val="105000"/>
+              </a:lnSpc>
+              <a:spcAft>
+                <a:spcPts val="1600"/>
+              </a:spcAft>
+            </a:pPr>
+            <a:r>
+              <a:rPr sz="1900">
+                <a:solidFill>
+                  <a:srgbClr val="334455"/>
+                </a:solidFill>
+                <a:latin typeface="Times New Roman"/>
+              </a:rPr>
+              <a:t>•  The Palermo Protocol supplements it; the two operate together.</a:t>
+            </a:r>
+          </a:p>
+          <a:p>
+            <a:pPr>
+              <a:lnSpc>
+                <a:spcPct val="105000"/>
+              </a:lnSpc>
+              <a:spcAft>
+                <a:spcPts val="1600"/>
+              </a:spcAft>
+            </a:pPr>
+            <a:r>
+              <a:rPr sz="1900">
+                <a:solidFill>
+                  <a:srgbClr val="334455"/>
+                </a:solidFill>
+                <a:latin typeface="Times New Roman"/>
+              </a:rPr>
+              <a:t>•  Provides a framework for extradition, mutual legal assistance and joint investigations.</a:t>
+            </a:r>
+          </a:p>
+          <a:p>
+            <a:pPr>
+              <a:lnSpc>
+                <a:spcPct val="105000"/>
+              </a:lnSpc>
+              <a:spcAft>
+                <a:spcPts val="1600"/>
+              </a:spcAft>
+            </a:pPr>
+            <a:r>
+              <a:rPr sz="1900">
+                <a:solidFill>
+                  <a:srgbClr val="334455"/>
+                </a:solidFill>
+                <a:latin typeface="Times New Roman"/>
+              </a:rPr>
+              <a:t>•  Can serve as a legal basis for cooperation even where no bilateral treaty exists.</a:t>
+            </a:r>
+          </a:p>
+          <a:p>
+            <a:pPr>
+              <a:lnSpc>
+                <a:spcPct val="105000"/>
+              </a:lnSpc>
+              <a:spcAft>
+                <a:spcPts val="1600"/>
+              </a:spcAft>
+            </a:pPr>
+            <a:r>
+              <a:rPr sz="1900">
+                <a:solidFill>
+                  <a:srgbClr val="334455"/>
+                </a:solidFill>
+                <a:latin typeface="Times New Roman"/>
+              </a:rPr>
+              <a:t>•  Encourages asset confiscation and protection of victims and witnesses.</a:t>
+            </a:r>
+          </a:p>
+        </p:txBody>
+      </p:sp>
+      <p:sp>
+        <p:nvSpPr>
+          <p:cNvPr id="7" name="TextBox 6"/>
+          <p:cNvSpPr txBox="1"/>
+          <p:nvPr/>
+        </p:nvSpPr>
+        <p:spPr>
+          <a:xfrm>
+            <a:off x="640080" y="5989320"/>
+            <a:ext cx="10972800" cy="731520"/>
+          </a:xfrm>
+          <a:prstGeom prst="rect">
+            <a:avLst/>
+          </a:prstGeom>
+          <a:noFill/>
+        </p:spPr>
+        <p:txBody>
+          <a:bodyPr wrap="square">
+            <a:spAutoFit/>
+          </a:bodyPr>
+          <a:lstStyle/>
+          <a:p>
+            <a:pPr algn="l">
+              <a:lnSpc>
+                <a:spcPct val="100000"/>
+              </a:lnSpc>
+            </a:pPr>
+            <a:r>
+              <a:rPr sz="1500" b="0" i="1">
+                <a:solidFill>
+                  <a:srgbClr val="0F2A43"/>
+                </a:solidFill>
+                <a:latin typeface="Times New Roman"/>
+              </a:rPr>
+              <a:t>In short: the machinery for international cooperation already exists on paper.</a:t>
+            </a:r>
+          </a:p>
+        </p:txBody>
+      </p:sp>
+    </p:spTree>
+  </p:cSld>
+  <p:clrMapOvr>
+    <a:masterClrMapping/>
+  </p:clrMapOvr>
+</p:sld>
+</file>
+
+<file path=ppt/slides/slide11.xml><?xml version="1.0" encoding="utf-8"?>
+<p:sld xmlns:a="http://schemas.openxmlformats.org/drawingml/2006/main" xmlns:p="http://schemas.openxmlformats.org/presentationml/2006/main" xmlns:r="http://schemas.openxmlformats.org/officeDocument/2006/relationships">
+  <p:cSld>
+    <p:bg>
+      <p:bgPr>
+        <a:solidFill>
+          <a:srgbClr val="FFFFFF"/>
+        </a:solidFill>
+        <a:effectLst/>
+      </p:bgPr>
+    </p:bg>
+    <p:spTree>
+      <p:nvGrpSpPr>
+        <p:cNvPr id="1" name=""/>
+        <p:cNvGrpSpPr/>
+        <p:nvPr/>
+      </p:nvGrpSpPr>
+      <p:grpSpPr/>
+      <p:sp>
+        <p:nvSpPr>
+          <p:cNvPr id="2" name="Rectangle 1"/>
+          <p:cNvSpPr/>
+          <p:nvPr/>
+        </p:nvSpPr>
+        <p:spPr>
+          <a:xfrm>
+            <a:off x="0" y="0"/>
+            <a:ext cx="12191695" cy="1143000"/>
+          </a:xfrm>
+          <a:prstGeom prst="rect">
+            <a:avLst/>
+          </a:prstGeom>
+          <a:solidFill>
+            <a:srgbClr val="0F2A43"/>
+          </a:solidFill>
+          <a:ln>
+            <a:noFill/>
+          </a:ln>
+          <a:effectLst/>
+        </p:spPr>
+        <p:style>
+          <a:lnRef idx="1">
+            <a:schemeClr val="accent1"/>
+          </a:lnRef>
+          <a:fillRef idx="3">
+            <a:schemeClr val="accent1"/>
+          </a:fillRef>
+          <a:effectRef idx="2">
+            <a:schemeClr val="accent1"/>
+          </a:effectRef>
+          <a:fontRef idx="minor">
+            <a:schemeClr val="lt1"/>
+          </a:fontRef>
+        </p:style>
+        <p:txBody>
+          <a:bodyPr rtlCol="0" anchor="ctr"/>
+          <a:lstStyle/>
+          <a:p>
+            <a:pPr algn="ctr"/>
+          </a:p>
+        </p:txBody>
+      </p:sp>
+      <p:sp>
+        <p:nvSpPr>
+          <p:cNvPr id="3" name="Rectangle 2"/>
+          <p:cNvSpPr/>
+          <p:nvPr/>
+        </p:nvSpPr>
+        <p:spPr>
+          <a:xfrm>
+            <a:off x="0" y="1143000"/>
+            <a:ext cx="12191695" cy="54864"/>
+          </a:xfrm>
+          <a:prstGeom prst="rect">
+            <a:avLst/>
+          </a:prstGeom>
+          <a:solidFill>
+            <a:srgbClr val="C08A2B"/>
+          </a:solidFill>
+          <a:ln>
+            <a:noFill/>
+          </a:ln>
+          <a:effectLst/>
+        </p:spPr>
+        <p:style>
+          <a:lnRef idx="1">
+            <a:schemeClr val="accent1"/>
+          </a:lnRef>
+          <a:fillRef idx="3">
+            <a:schemeClr val="accent1"/>
+          </a:fillRef>
+          <a:effectRef idx="2">
+            <a:schemeClr val="accent1"/>
+          </a:effectRef>
+          <a:fontRef idx="minor">
+            <a:schemeClr val="lt1"/>
+          </a:fontRef>
+        </p:style>
+        <p:txBody>
+          <a:bodyPr rtlCol="0" anchor="ctr"/>
+          <a:lstStyle/>
+          <a:p>
+            <a:pPr algn="ctr"/>
+          </a:p>
+        </p:txBody>
+      </p:sp>
+      <p:sp>
+        <p:nvSpPr>
+          <p:cNvPr id="4" name="TextBox 3"/>
+          <p:cNvSpPr txBox="1"/>
+          <p:nvPr/>
+        </p:nvSpPr>
+        <p:spPr>
+          <a:xfrm>
+            <a:off x="548640" y="182880"/>
+            <a:ext cx="10515600" cy="731520"/>
+          </a:xfrm>
+          <a:prstGeom prst="rect">
+            <a:avLst/>
+          </a:prstGeom>
+          <a:noFill/>
+        </p:spPr>
+        <p:txBody>
+          <a:bodyPr wrap="square">
+            <a:spAutoFit/>
+          </a:bodyPr>
+          <a:lstStyle/>
+          <a:p>
+            <a:pPr algn="l">
+              <a:lnSpc>
+                <a:spcPct val="100000"/>
+              </a:lnSpc>
+            </a:pPr>
+            <a:r>
+              <a:rPr sz="1300" b="1" i="0">
+                <a:solidFill>
+                  <a:srgbClr val="C08A2B"/>
+                </a:solidFill>
+                <a:latin typeface="Times New Roman"/>
+              </a:rPr>
+              <a:t>PART 2  •  ENFORCEMENT</a:t>
+            </a:r>
+          </a:p>
+        </p:txBody>
+      </p:sp>
+      <p:sp>
+        <p:nvSpPr>
+          <p:cNvPr id="5" name="TextBox 4"/>
+          <p:cNvSpPr txBox="1"/>
+          <p:nvPr/>
+        </p:nvSpPr>
+        <p:spPr>
+          <a:xfrm>
+            <a:off x="548640" y="475488"/>
+            <a:ext cx="11064240" cy="731520"/>
+          </a:xfrm>
+          <a:prstGeom prst="rect">
+            <a:avLst/>
+          </a:prstGeom>
+          <a:noFill/>
+        </p:spPr>
+        <p:txBody>
+          <a:bodyPr wrap="square">
+            <a:spAutoFit/>
+          </a:bodyPr>
+          <a:lstStyle/>
+          <a:p>
+            <a:pPr algn="l">
+              <a:lnSpc>
+                <a:spcPct val="100000"/>
+              </a:lnSpc>
+            </a:pPr>
+            <a:r>
+              <a:rPr sz="2600" b="1" i="0">
+                <a:solidFill>
+                  <a:srgbClr val="FFFFFF"/>
+                </a:solidFill>
+                <a:latin typeface="Times New Roman"/>
+              </a:rPr>
+              <a:t>Jurisdiction, Extradition &amp; MLATs</a:t>
+            </a:r>
+          </a:p>
+        </p:txBody>
+      </p:sp>
+      <p:sp>
+        <p:nvSpPr>
+          <p:cNvPr id="6" name="TextBox 5"/>
+          <p:cNvSpPr txBox="1"/>
+          <p:nvPr/>
+        </p:nvSpPr>
+        <p:spPr>
+          <a:xfrm>
+            <a:off x="640080" y="1554480"/>
+            <a:ext cx="10972800" cy="4572000"/>
+          </a:xfrm>
+          <a:prstGeom prst="rect">
+            <a:avLst/>
+          </a:prstGeom>
+          <a:noFill/>
+        </p:spPr>
+        <p:txBody>
+          <a:bodyPr wrap="square">
+            <a:spAutoFit/>
+          </a:bodyPr>
+          <a:lstStyle/>
+          <a:p>
+            <a:pPr>
+              <a:lnSpc>
+                <a:spcPct val="105000"/>
+              </a:lnSpc>
+              <a:spcAft>
+                <a:spcPts val="1500"/>
+              </a:spcAft>
+            </a:pPr>
+            <a:r>
+              <a:rPr sz="1900" b="1">
+                <a:solidFill>
+                  <a:srgbClr val="0F2A43"/>
+                </a:solidFill>
+                <a:latin typeface="Times New Roman"/>
+              </a:rPr>
+              <a:t>•  Jurisdiction: </a:t>
+            </a:r>
+            <a:r>
+              <a:rPr sz="1900">
+                <a:solidFill>
+                  <a:srgbClr val="334455"/>
+                </a:solidFill>
+                <a:latin typeface="Times New Roman"/>
+              </a:rPr>
+              <a:t>states may claim it by territory or by nationality of offender/victim.</a:t>
+            </a:r>
+          </a:p>
+          <a:p>
+            <a:pPr>
+              <a:lnSpc>
+                <a:spcPct val="105000"/>
+              </a:lnSpc>
+              <a:spcAft>
+                <a:spcPts val="1500"/>
+              </a:spcAft>
+            </a:pPr>
+            <a:r>
+              <a:rPr sz="1900" b="1">
+                <a:solidFill>
+                  <a:srgbClr val="0F2A43"/>
+                </a:solidFill>
+                <a:latin typeface="Times New Roman"/>
+              </a:rPr>
+              <a:t>•  Concurrent claims: </a:t>
+            </a:r>
+            <a:r>
+              <a:rPr sz="1900">
+                <a:solidFill>
+                  <a:srgbClr val="334455"/>
+                </a:solidFill>
+                <a:latin typeface="Times New Roman"/>
+              </a:rPr>
+              <a:t>several states may have a right to prosecute the same conduct.</a:t>
+            </a:r>
+          </a:p>
+          <a:p>
+            <a:pPr>
+              <a:lnSpc>
+                <a:spcPct val="105000"/>
+              </a:lnSpc>
+              <a:spcAft>
+                <a:spcPts val="1500"/>
+              </a:spcAft>
+            </a:pPr>
+            <a:r>
+              <a:rPr sz="1900" b="1">
+                <a:solidFill>
+                  <a:srgbClr val="0F2A43"/>
+                </a:solidFill>
+                <a:latin typeface="Times New Roman"/>
+              </a:rPr>
+              <a:t>•  Extradition: </a:t>
+            </a:r>
+            <a:r>
+              <a:rPr sz="1900">
+                <a:solidFill>
+                  <a:srgbClr val="334455"/>
+                </a:solidFill>
+                <a:latin typeface="Times New Roman"/>
+              </a:rPr>
+              <a:t>typically needs a treaty plus "dual criminality" (an offence in both states).</a:t>
+            </a:r>
+          </a:p>
+          <a:p>
+            <a:pPr>
+              <a:lnSpc>
+                <a:spcPct val="105000"/>
+              </a:lnSpc>
+              <a:spcAft>
+                <a:spcPts val="1500"/>
+              </a:spcAft>
+            </a:pPr>
+            <a:r>
+              <a:rPr sz="1900" b="1">
+                <a:solidFill>
+                  <a:srgbClr val="0F2A43"/>
+                </a:solidFill>
+                <a:latin typeface="Times New Roman"/>
+              </a:rPr>
+              <a:t>•  MLATs: </a:t>
+            </a:r>
+            <a:r>
+              <a:rPr sz="1900">
+                <a:solidFill>
+                  <a:srgbClr val="334455"/>
+                </a:solidFill>
+                <a:latin typeface="Times New Roman"/>
+              </a:rPr>
+              <a:t>Mutual Legal Assistance Treaties move evidence, testimony and records across borders.</a:t>
+            </a:r>
+          </a:p>
+          <a:p>
+            <a:pPr>
+              <a:lnSpc>
+                <a:spcPct val="105000"/>
+              </a:lnSpc>
+              <a:spcAft>
+                <a:spcPts val="1500"/>
+              </a:spcAft>
+            </a:pPr>
+            <a:r>
+              <a:rPr sz="1900" b="1">
+                <a:solidFill>
+                  <a:srgbClr val="0F2A43"/>
+                </a:solidFill>
+                <a:latin typeface="Times New Roman"/>
+              </a:rPr>
+              <a:t>•  The friction: </a:t>
+            </a:r>
+            <a:r>
+              <a:rPr sz="1900">
+                <a:solidFill>
+                  <a:srgbClr val="334455"/>
+                </a:solidFill>
+                <a:latin typeface="Times New Roman"/>
+              </a:rPr>
+              <a:t>requests are slow, can be refused, and stall when suspects are wealthy or well-connected.</a:t>
+            </a:r>
+          </a:p>
+        </p:txBody>
+      </p:sp>
+      <p:sp>
+        <p:nvSpPr>
+          <p:cNvPr id="7" name="TextBox 6"/>
+          <p:cNvSpPr txBox="1"/>
+          <p:nvPr/>
+        </p:nvSpPr>
+        <p:spPr>
+          <a:xfrm>
+            <a:off x="640080" y="6126480"/>
+            <a:ext cx="10972800" cy="731520"/>
+          </a:xfrm>
+          <a:prstGeom prst="rect">
+            <a:avLst/>
+          </a:prstGeom>
+          <a:noFill/>
+        </p:spPr>
+        <p:txBody>
+          <a:bodyPr wrap="square">
+            <a:spAutoFit/>
+          </a:bodyPr>
+          <a:lstStyle/>
+          <a:p>
+            <a:pPr algn="l">
+              <a:lnSpc>
+                <a:spcPct val="100000"/>
+              </a:lnSpc>
+            </a:pPr>
+            <a:r>
+              <a:rPr sz="1500" b="0" i="1">
+                <a:solidFill>
+                  <a:srgbClr val="0F2A43"/>
+                </a:solidFill>
+                <a:latin typeface="Times New Roman"/>
+              </a:rPr>
+              <a:t>The tools exist — but speed and political will decide whether they work.</a:t>
+            </a:r>
+          </a:p>
+        </p:txBody>
+      </p:sp>
+    </p:spTree>
+  </p:cSld>
+  <p:clrMapOvr>
+    <a:masterClrMapping/>
+  </p:clrMapOvr>
+</p:sld>
+</file>
+
+<file path=ppt/slides/slide12.xml><?xml version="1.0" encoding="utf-8"?>
+<p:sld xmlns:a="http://schemas.openxmlformats.org/drawingml/2006/main" xmlns:p="http://schemas.openxmlformats.org/presentationml/2006/main" xmlns:r="http://schemas.openxmlformats.org/officeDocument/2006/relationships">
+  <p:cSld>
+    <p:bg>
+      <p:bgPr>
+        <a:solidFill>
+          <a:srgbClr val="FFFFFF"/>
+        </a:solidFill>
+        <a:effectLst/>
+      </p:bgPr>
+    </p:bg>
+    <p:spTree>
+      <p:nvGrpSpPr>
+        <p:cNvPr id="1" name=""/>
+        <p:cNvGrpSpPr/>
+        <p:nvPr/>
+      </p:nvGrpSpPr>
+      <p:grpSpPr/>
+      <p:sp>
+        <p:nvSpPr>
+          <p:cNvPr id="2" name="Rectangle 1"/>
+          <p:cNvSpPr/>
+          <p:nvPr/>
+        </p:nvSpPr>
+        <p:spPr>
+          <a:xfrm>
+            <a:off x="0" y="0"/>
+            <a:ext cx="12191695" cy="1143000"/>
+          </a:xfrm>
+          <a:prstGeom prst="rect">
+            <a:avLst/>
+          </a:prstGeom>
+          <a:solidFill>
+            <a:srgbClr val="0F2A43"/>
+          </a:solidFill>
+          <a:ln>
+            <a:noFill/>
+          </a:ln>
+          <a:effectLst/>
+        </p:spPr>
+        <p:style>
+          <a:lnRef idx="1">
+            <a:schemeClr val="accent1"/>
+          </a:lnRef>
+          <a:fillRef idx="3">
+            <a:schemeClr val="accent1"/>
+          </a:fillRef>
+          <a:effectRef idx="2">
+            <a:schemeClr val="accent1"/>
+          </a:effectRef>
+          <a:fontRef idx="minor">
+            <a:schemeClr val="lt1"/>
+          </a:fontRef>
+        </p:style>
+        <p:txBody>
+          <a:bodyPr rtlCol="0" anchor="ctr"/>
+          <a:lstStyle/>
+          <a:p>
+            <a:pPr algn="ctr"/>
+          </a:p>
+        </p:txBody>
+      </p:sp>
+      <p:sp>
+        <p:nvSpPr>
+          <p:cNvPr id="3" name="Rectangle 2"/>
+          <p:cNvSpPr/>
+          <p:nvPr/>
+        </p:nvSpPr>
+        <p:spPr>
+          <a:xfrm>
+            <a:off x="0" y="1143000"/>
+            <a:ext cx="12191695" cy="54864"/>
+          </a:xfrm>
+          <a:prstGeom prst="rect">
+            <a:avLst/>
+          </a:prstGeom>
+          <a:solidFill>
+            <a:srgbClr val="C08A2B"/>
+          </a:solidFill>
+          <a:ln>
+            <a:noFill/>
+          </a:ln>
+          <a:effectLst/>
+        </p:spPr>
+        <p:style>
+          <a:lnRef idx="1">
+            <a:schemeClr val="accent1"/>
+          </a:lnRef>
+          <a:fillRef idx="3">
+            <a:schemeClr val="accent1"/>
+          </a:fillRef>
+          <a:effectRef idx="2">
+            <a:schemeClr val="accent1"/>
+          </a:effectRef>
+          <a:fontRef idx="minor">
+            <a:schemeClr val="lt1"/>
+          </a:fontRef>
+        </p:style>
+        <p:txBody>
+          <a:bodyPr rtlCol="0" anchor="ctr"/>
+          <a:lstStyle/>
+          <a:p>
+            <a:pPr algn="ctr"/>
+          </a:p>
+        </p:txBody>
+      </p:sp>
+      <p:sp>
+        <p:nvSpPr>
+          <p:cNvPr id="4" name="TextBox 3"/>
+          <p:cNvSpPr txBox="1"/>
+          <p:nvPr/>
+        </p:nvSpPr>
+        <p:spPr>
+          <a:xfrm>
+            <a:off x="548640" y="182880"/>
+            <a:ext cx="10515600" cy="731520"/>
+          </a:xfrm>
+          <a:prstGeom prst="rect">
+            <a:avLst/>
+          </a:prstGeom>
+          <a:noFill/>
+        </p:spPr>
+        <p:txBody>
+          <a:bodyPr wrap="square">
+            <a:spAutoFit/>
+          </a:bodyPr>
+          <a:lstStyle/>
+          <a:p>
+            <a:pPr algn="l">
+              <a:lnSpc>
+                <a:spcPct val="100000"/>
+              </a:lnSpc>
+            </a:pPr>
+            <a:r>
+              <a:rPr sz="1300" b="1" i="0">
+                <a:solidFill>
+                  <a:srgbClr val="C08A2B"/>
+                </a:solidFill>
+                <a:latin typeface="Times New Roman"/>
+              </a:rPr>
+              <a:t>PART 2  •  ACTORS</a:t>
+            </a:r>
+          </a:p>
+        </p:txBody>
+      </p:sp>
+      <p:sp>
+        <p:nvSpPr>
+          <p:cNvPr id="5" name="TextBox 4"/>
+          <p:cNvSpPr txBox="1"/>
+          <p:nvPr/>
+        </p:nvSpPr>
+        <p:spPr>
+          <a:xfrm>
+            <a:off x="548640" y="475488"/>
+            <a:ext cx="11064240" cy="731520"/>
+          </a:xfrm>
+          <a:prstGeom prst="rect">
+            <a:avLst/>
+          </a:prstGeom>
+          <a:noFill/>
+        </p:spPr>
+        <p:txBody>
+          <a:bodyPr wrap="square">
+            <a:spAutoFit/>
+          </a:bodyPr>
+          <a:lstStyle/>
+          <a:p>
+            <a:pPr algn="l">
+              <a:lnSpc>
+                <a:spcPct val="100000"/>
+              </a:lnSpc>
+            </a:pPr>
+            <a:r>
+              <a:rPr sz="2600" b="1" i="0">
+                <a:solidFill>
+                  <a:srgbClr val="FFFFFF"/>
+                </a:solidFill>
+                <a:latin typeface="Times New Roman"/>
+              </a:rPr>
+              <a:t>Foreign Nationals &amp; Quasi-Diplomatic Figures</a:t>
+            </a:r>
+          </a:p>
+        </p:txBody>
+      </p:sp>
+      <p:sp>
+        <p:nvSpPr>
+          <p:cNvPr id="6" name="TextBox 5"/>
+          <p:cNvSpPr txBox="1"/>
+          <p:nvPr/>
+        </p:nvSpPr>
+        <p:spPr>
+          <a:xfrm>
+            <a:off x="640080" y="1554480"/>
+            <a:ext cx="10972800" cy="4572000"/>
+          </a:xfrm>
+          <a:prstGeom prst="rect">
+            <a:avLst/>
+          </a:prstGeom>
+          <a:noFill/>
+        </p:spPr>
+        <p:txBody>
+          <a:bodyPr wrap="square">
+            <a:spAutoFit/>
+          </a:bodyPr>
+          <a:lstStyle/>
+          <a:p>
+            <a:pPr>
+              <a:lnSpc>
+                <a:spcPct val="105000"/>
+              </a:lnSpc>
+              <a:spcAft>
+                <a:spcPts val="1700"/>
+              </a:spcAft>
+            </a:pPr>
+            <a:r>
+              <a:rPr sz="1900" b="1">
+                <a:solidFill>
+                  <a:srgbClr val="0F2A43"/>
+                </a:solidFill>
+                <a:latin typeface="Times New Roman"/>
+              </a:rPr>
+              <a:t>•  Ghislaine Maxwell (UK): </a:t>
+            </a:r>
+            <a:r>
+              <a:rPr sz="1900">
+                <a:solidFill>
+                  <a:srgbClr val="334455"/>
+                </a:solidFill>
+                <a:latin typeface="Times New Roman"/>
+              </a:rPr>
+              <a:t>convicted in 2021 of sex-trafficking conspiracy in a US court.</a:t>
+            </a:r>
+          </a:p>
+          <a:p>
+            <a:pPr>
+              <a:lnSpc>
+                <a:spcPct val="105000"/>
+              </a:lnSpc>
+              <a:spcAft>
+                <a:spcPts val="1700"/>
+              </a:spcAft>
+            </a:pPr>
+            <a:r>
+              <a:rPr sz="1900" b="1">
+                <a:solidFill>
+                  <a:srgbClr val="0F2A43"/>
+                </a:solidFill>
+                <a:latin typeface="Times New Roman"/>
+              </a:rPr>
+              <a:t>•  Prince Andrew: </a:t>
+            </a:r>
+            <a:r>
+              <a:rPr sz="1900">
+                <a:solidFill>
+                  <a:srgbClr val="334455"/>
+                </a:solidFill>
+                <a:latin typeface="Times New Roman"/>
+              </a:rPr>
+              <a:t>settled a US civil claim in 2022 and later stepped back from royal titles.</a:t>
+            </a:r>
+          </a:p>
+          <a:p>
+            <a:pPr>
+              <a:lnSpc>
+                <a:spcPct val="105000"/>
+              </a:lnSpc>
+              <a:spcAft>
+                <a:spcPts val="1700"/>
+              </a:spcAft>
+            </a:pPr>
+            <a:r>
+              <a:rPr sz="1900">
+                <a:solidFill>
+                  <a:srgbClr val="334455"/>
+                </a:solidFill>
+                <a:latin typeface="Times New Roman"/>
+              </a:rPr>
+              <a:t>•  High status confers no criminal immunity — but it can create practical and diplomatic hurdles.</a:t>
+            </a:r>
+          </a:p>
+          <a:p>
+            <a:pPr>
+              <a:lnSpc>
+                <a:spcPct val="105000"/>
+              </a:lnSpc>
+              <a:spcAft>
+                <a:spcPts val="1700"/>
+              </a:spcAft>
+            </a:pPr>
+            <a:r>
+              <a:rPr sz="1900">
+                <a:solidFill>
+                  <a:srgbClr val="334455"/>
+                </a:solidFill>
+                <a:latin typeface="Times New Roman"/>
+              </a:rPr>
+              <a:t>•  Foreign nationality complicates arrest, extradition and the gathering of evidence abroad.</a:t>
+            </a:r>
+          </a:p>
+        </p:txBody>
+      </p:sp>
+      <p:sp>
+        <p:nvSpPr>
+          <p:cNvPr id="7" name="TextBox 6"/>
+          <p:cNvSpPr txBox="1"/>
+          <p:nvPr/>
+        </p:nvSpPr>
+        <p:spPr>
+          <a:xfrm>
+            <a:off x="640080" y="5989320"/>
+            <a:ext cx="10972800" cy="731520"/>
+          </a:xfrm>
+          <a:prstGeom prst="rect">
+            <a:avLst/>
+          </a:prstGeom>
+          <a:noFill/>
+        </p:spPr>
+        <p:txBody>
+          <a:bodyPr wrap="square">
+            <a:spAutoFit/>
+          </a:bodyPr>
+          <a:lstStyle/>
+          <a:p>
+            <a:pPr algn="l">
+              <a:lnSpc>
+                <a:spcPct val="100000"/>
+              </a:lnSpc>
+            </a:pPr>
+            <a:r>
+              <a:rPr sz="1500" b="0" i="1">
+                <a:solidFill>
+                  <a:srgbClr val="0F2A43"/>
+                </a:solidFill>
+                <a:latin typeface="Times New Roman"/>
+              </a:rPr>
+              <a:t>Stick to what is adjudicated: charges, a conviction, a settled civil case — not speculation.</a:t>
+            </a:r>
+          </a:p>
+        </p:txBody>
+      </p:sp>
+    </p:spTree>
+  </p:cSld>
+  <p:clrMapOvr>
+    <a:masterClrMapping/>
+  </p:clrMapOvr>
+</p:sld>
+</file>
+
+<file path=ppt/slides/slide13.xml><?xml version="1.0" encoding="utf-8"?>
+<p:sld xmlns:a="http://schemas.openxmlformats.org/drawingml/2006/main" xmlns:p="http://schemas.openxmlformats.org/presentationml/2006/main" xmlns:r="http://schemas.openxmlformats.org/officeDocument/2006/relationships">
+  <p:cSld>
+    <p:bg>
+      <p:bgPr>
+        <a:solidFill>
+          <a:srgbClr val="0F2A43"/>
+        </a:solidFill>
+        <a:effectLst/>
+      </p:bgPr>
+    </p:bg>
+    <p:spTree>
+      <p:nvGrpSpPr>
+        <p:cNvPr id="1" name=""/>
+        <p:cNvGrpSpPr/>
+        <p:nvPr/>
+      </p:nvGrpSpPr>
+      <p:grpSpPr/>
+      <p:sp>
+        <p:nvSpPr>
+          <p:cNvPr id="2" name="Rectangle 1"/>
+          <p:cNvSpPr/>
+          <p:nvPr/>
+        </p:nvSpPr>
+        <p:spPr>
+          <a:xfrm>
+            <a:off x="822960" y="3246120"/>
+            <a:ext cx="2926080" cy="54864"/>
+          </a:xfrm>
+          <a:prstGeom prst="rect">
+            <a:avLst/>
+          </a:prstGeom>
+          <a:solidFill>
+            <a:srgbClr val="C08A2B"/>
+          </a:solidFill>
+          <a:ln>
+            <a:noFill/>
+          </a:ln>
+          <a:effectLst/>
+        </p:spPr>
+        <p:style>
+          <a:lnRef idx="1">
+            <a:schemeClr val="accent1"/>
+          </a:lnRef>
+          <a:fillRef idx="3">
+            <a:schemeClr val="accent1"/>
+          </a:fillRef>
+          <a:effectRef idx="2">
+            <a:schemeClr val="accent1"/>
+          </a:effectRef>
+          <a:fontRef idx="minor">
+            <a:schemeClr val="lt1"/>
+          </a:fontRef>
+        </p:style>
+        <p:txBody>
+          <a:bodyPr rtlCol="0" anchor="ctr"/>
+          <a:lstStyle/>
+          <a:p>
+            <a:pPr algn="ctr"/>
+          </a:p>
+        </p:txBody>
+      </p:sp>
+      <p:sp>
+        <p:nvSpPr>
+          <p:cNvPr id="3" name="TextBox 2"/>
+          <p:cNvSpPr txBox="1"/>
+          <p:nvPr/>
+        </p:nvSpPr>
+        <p:spPr>
+          <a:xfrm>
+            <a:off x="822960" y="2148840"/>
+            <a:ext cx="10515600" cy="731520"/>
+          </a:xfrm>
+          <a:prstGeom prst="rect">
+            <a:avLst/>
+          </a:prstGeom>
+          <a:noFill/>
+        </p:spPr>
+        <p:txBody>
+          <a:bodyPr wrap="square">
+            <a:spAutoFit/>
+          </a:bodyPr>
+          <a:lstStyle/>
+          <a:p>
+            <a:pPr algn="l">
+              <a:lnSpc>
+                <a:spcPct val="100000"/>
+              </a:lnSpc>
+            </a:pPr>
+            <a:r>
+              <a:rPr sz="2000" b="1" i="0">
+                <a:solidFill>
+                  <a:srgbClr val="C08A2B"/>
+                </a:solidFill>
+                <a:latin typeface="Times New Roman"/>
+              </a:rPr>
+              <a:t>PART 3</a:t>
+            </a:r>
+          </a:p>
+        </p:txBody>
+      </p:sp>
+      <p:sp>
+        <p:nvSpPr>
+          <p:cNvPr id="4" name="TextBox 3"/>
+          <p:cNvSpPr txBox="1"/>
+          <p:nvPr/>
+        </p:nvSpPr>
+        <p:spPr>
+          <a:xfrm>
+            <a:off x="822960" y="2514600"/>
+            <a:ext cx="10515600" cy="731520"/>
+          </a:xfrm>
+          <a:prstGeom prst="rect">
+            <a:avLst/>
+          </a:prstGeom>
+          <a:noFill/>
+        </p:spPr>
+        <p:txBody>
+          <a:bodyPr wrap="square">
+            <a:spAutoFit/>
+          </a:bodyPr>
+          <a:lstStyle/>
+          <a:p>
+            <a:pPr algn="l">
+              <a:lnSpc>
+                <a:spcPct val="100000"/>
+              </a:lnSpc>
+            </a:pPr>
+            <a:r>
+              <a:rPr sz="3400" b="1" i="0">
+                <a:solidFill>
+                  <a:srgbClr val="FFFFFF"/>
+                </a:solidFill>
+                <a:latin typeface="Times New Roman"/>
+              </a:rPr>
+              <a:t>Wealth, Mobility &amp; Impunity</a:t>
+            </a:r>
+          </a:p>
+        </p:txBody>
+      </p:sp>
+      <p:sp>
+        <p:nvSpPr>
+          <p:cNvPr id="5" name="TextBox 4"/>
+          <p:cNvSpPr txBox="1"/>
+          <p:nvPr/>
+        </p:nvSpPr>
+        <p:spPr>
+          <a:xfrm>
+            <a:off x="822960" y="3474720"/>
+            <a:ext cx="9601200" cy="731520"/>
+          </a:xfrm>
+          <a:prstGeom prst="rect">
+            <a:avLst/>
+          </a:prstGeom>
+          <a:noFill/>
+        </p:spPr>
+        <p:txBody>
+          <a:bodyPr wrap="square">
+            <a:spAutoFit/>
+          </a:bodyPr>
+          <a:lstStyle/>
+          <a:p>
+            <a:pPr algn="l">
+              <a:lnSpc>
+                <a:spcPct val="110000"/>
+              </a:lnSpc>
+            </a:pPr>
+            <a:r>
+              <a:rPr sz="1800" b="0" i="1">
+                <a:solidFill>
+                  <a:srgbClr val="F2F4F7"/>
+                </a:solidFill>
+                <a:latin typeface="Times New Roman"/>
+              </a:rPr>
+              <a:t>How resources can delay — though not always defeat — accountability</a:t>
+            </a:r>
+          </a:p>
+        </p:txBody>
+      </p:sp>
+    </p:spTree>
+  </p:cSld>
+  <p:clrMapOvr>
+    <a:masterClrMapping/>
+  </p:clrMapOvr>
+</p:sld>
+</file>
+
+<file path=ppt/slides/slide14.xml><?xml version="1.0" encoding="utf-8"?>
+<p:sld xmlns:a="http://schemas.openxmlformats.org/drawingml/2006/main" xmlns:p="http://schemas.openxmlformats.org/presentationml/2006/main" xmlns:r="http://schemas.openxmlformats.org/officeDocument/2006/relationships">
+  <p:cSld>
+    <p:bg>
+      <p:bgPr>
+        <a:solidFill>
+          <a:srgbClr val="FFFFFF"/>
+        </a:solidFill>
+        <a:effectLst/>
+      </p:bgPr>
+    </p:bg>
+    <p:spTree>
+      <p:nvGrpSpPr>
+        <p:cNvPr id="1" name=""/>
+        <p:cNvGrpSpPr/>
+        <p:nvPr/>
+      </p:nvGrpSpPr>
+      <p:grpSpPr/>
+      <p:sp>
+        <p:nvSpPr>
+          <p:cNvPr id="2" name="Rectangle 1"/>
+          <p:cNvSpPr/>
+          <p:nvPr/>
+        </p:nvSpPr>
+        <p:spPr>
+          <a:xfrm>
+            <a:off x="0" y="0"/>
+            <a:ext cx="12191695" cy="1143000"/>
+          </a:xfrm>
+          <a:prstGeom prst="rect">
+            <a:avLst/>
+          </a:prstGeom>
+          <a:solidFill>
+            <a:srgbClr val="0F2A43"/>
+          </a:solidFill>
+          <a:ln>
+            <a:noFill/>
+          </a:ln>
+          <a:effectLst/>
+        </p:spPr>
+        <p:style>
+          <a:lnRef idx="1">
+            <a:schemeClr val="accent1"/>
+          </a:lnRef>
+          <a:fillRef idx="3">
+            <a:schemeClr val="accent1"/>
+          </a:fillRef>
+          <a:effectRef idx="2">
+            <a:schemeClr val="accent1"/>
+          </a:effectRef>
+          <a:fontRef idx="minor">
+            <a:schemeClr val="lt1"/>
+          </a:fontRef>
+        </p:style>
+        <p:txBody>
+          <a:bodyPr rtlCol="0" anchor="ctr"/>
+          <a:lstStyle/>
+          <a:p>
+            <a:pPr algn="ctr"/>
+          </a:p>
+        </p:txBody>
+      </p:sp>
+      <p:sp>
+        <p:nvSpPr>
+          <p:cNvPr id="3" name="Rectangle 2"/>
+          <p:cNvSpPr/>
+          <p:nvPr/>
+        </p:nvSpPr>
+        <p:spPr>
+          <a:xfrm>
+            <a:off x="0" y="1143000"/>
+            <a:ext cx="12191695" cy="54864"/>
+          </a:xfrm>
+          <a:prstGeom prst="rect">
+            <a:avLst/>
+          </a:prstGeom>
+          <a:solidFill>
+            <a:srgbClr val="C08A2B"/>
+          </a:solidFill>
+          <a:ln>
+            <a:noFill/>
+          </a:ln>
+          <a:effectLst/>
+        </p:spPr>
+        <p:style>
+          <a:lnRef idx="1">
+            <a:schemeClr val="accent1"/>
+          </a:lnRef>
+          <a:fillRef idx="3">
+            <a:schemeClr val="accent1"/>
+          </a:fillRef>
+          <a:effectRef idx="2">
+            <a:schemeClr val="accent1"/>
+          </a:effectRef>
+          <a:fontRef idx="minor">
+            <a:schemeClr val="lt1"/>
+          </a:fontRef>
+        </p:style>
+        <p:txBody>
+          <a:bodyPr rtlCol="0" anchor="ctr"/>
+          <a:lstStyle/>
+          <a:p>
+            <a:pPr algn="ctr"/>
+          </a:p>
+        </p:txBody>
+      </p:sp>
+      <p:sp>
+        <p:nvSpPr>
+          <p:cNvPr id="4" name="TextBox 3"/>
+          <p:cNvSpPr txBox="1"/>
+          <p:nvPr/>
+        </p:nvSpPr>
+        <p:spPr>
+          <a:xfrm>
+            <a:off x="548640" y="182880"/>
+            <a:ext cx="10515600" cy="731520"/>
+          </a:xfrm>
+          <a:prstGeom prst="rect">
+            <a:avLst/>
+          </a:prstGeom>
+          <a:noFill/>
+        </p:spPr>
+        <p:txBody>
+          <a:bodyPr wrap="square">
+            <a:spAutoFit/>
+          </a:bodyPr>
+          <a:lstStyle/>
+          <a:p>
+            <a:pPr algn="l">
+              <a:lnSpc>
+                <a:spcPct val="100000"/>
+              </a:lnSpc>
+            </a:pPr>
+            <a:r>
+              <a:rPr sz="1300" b="1" i="0">
+                <a:solidFill>
+                  <a:srgbClr val="C08A2B"/>
+                </a:solidFill>
+                <a:latin typeface="Times New Roman"/>
+              </a:rPr>
+              <a:t>PART 3  •  MECHANICS</a:t>
+            </a:r>
+          </a:p>
+        </p:txBody>
+      </p:sp>
+      <p:sp>
+        <p:nvSpPr>
+          <p:cNvPr id="5" name="TextBox 4"/>
+          <p:cNvSpPr txBox="1"/>
+          <p:nvPr/>
+        </p:nvSpPr>
+        <p:spPr>
+          <a:xfrm>
+            <a:off x="548640" y="475488"/>
+            <a:ext cx="11064240" cy="731520"/>
+          </a:xfrm>
+          <a:prstGeom prst="rect">
+            <a:avLst/>
+          </a:prstGeom>
+          <a:noFill/>
+        </p:spPr>
+        <p:txBody>
+          <a:bodyPr wrap="square">
+            <a:spAutoFit/>
+          </a:bodyPr>
+          <a:lstStyle/>
+          <a:p>
+            <a:pPr algn="l">
+              <a:lnSpc>
+                <a:spcPct val="100000"/>
+              </a:lnSpc>
+            </a:pPr>
+            <a:r>
+              <a:rPr sz="2600" b="1" i="0">
+                <a:solidFill>
+                  <a:srgbClr val="FFFFFF"/>
+                </a:solidFill>
+                <a:latin typeface="Times New Roman"/>
+              </a:rPr>
+              <a:t>Offshore Wealth &amp; Global Mobility</a:t>
+            </a:r>
+          </a:p>
+        </p:txBody>
+      </p:sp>
+      <p:sp>
+        <p:nvSpPr>
+          <p:cNvPr id="6" name="TextBox 5"/>
+          <p:cNvSpPr txBox="1"/>
+          <p:nvPr/>
+        </p:nvSpPr>
+        <p:spPr>
+          <a:xfrm>
+            <a:off x="640080" y="1554480"/>
+            <a:ext cx="10972800" cy="4572000"/>
+          </a:xfrm>
+          <a:prstGeom prst="rect">
+            <a:avLst/>
+          </a:prstGeom>
+          <a:noFill/>
+        </p:spPr>
+        <p:txBody>
+          <a:bodyPr wrap="square">
+            <a:spAutoFit/>
+          </a:bodyPr>
+          <a:lstStyle/>
+          <a:p>
+            <a:pPr>
+              <a:lnSpc>
+                <a:spcPct val="105000"/>
+              </a:lnSpc>
+              <a:spcAft>
+                <a:spcPts val="1500"/>
+              </a:spcAft>
+            </a:pPr>
+            <a:r>
+              <a:rPr sz="1900">
+                <a:solidFill>
+                  <a:srgbClr val="334455"/>
+                </a:solidFill>
+                <a:latin typeface="Times New Roman"/>
+              </a:rPr>
+              <a:t>•  Offshore structures and trusts can obscure who really owns assets.</a:t>
+            </a:r>
+          </a:p>
+          <a:p>
+            <a:pPr>
+              <a:lnSpc>
+                <a:spcPct val="105000"/>
+              </a:lnSpc>
+              <a:spcAft>
+                <a:spcPts val="1500"/>
+              </a:spcAft>
+            </a:pPr>
+            <a:r>
+              <a:rPr sz="1900">
+                <a:solidFill>
+                  <a:srgbClr val="334455"/>
+                </a:solidFill>
+                <a:latin typeface="Times New Roman"/>
+              </a:rPr>
+              <a:t>•  Property in several jurisdictions provides places to live, store value and move between.</a:t>
+            </a:r>
+          </a:p>
+          <a:p>
+            <a:pPr>
+              <a:lnSpc>
+                <a:spcPct val="105000"/>
+              </a:lnSpc>
+              <a:spcAft>
+                <a:spcPts val="1500"/>
+              </a:spcAft>
+            </a:pPr>
+            <a:r>
+              <a:rPr sz="1900">
+                <a:solidFill>
+                  <a:srgbClr val="334455"/>
+                </a:solidFill>
+                <a:latin typeface="Times New Roman"/>
+              </a:rPr>
+              <a:t>•  Private travel reduces the friction and scrutiny of ordinary border crossings.</a:t>
+            </a:r>
+          </a:p>
+          <a:p>
+            <a:pPr>
+              <a:lnSpc>
+                <a:spcPct val="105000"/>
+              </a:lnSpc>
+              <a:spcAft>
+                <a:spcPts val="1500"/>
+              </a:spcAft>
+            </a:pPr>
+            <a:r>
+              <a:rPr sz="1900">
+                <a:solidFill>
+                  <a:srgbClr val="334455"/>
+                </a:solidFill>
+                <a:latin typeface="Times New Roman"/>
+              </a:rPr>
+              <a:t>•  Multiple identity documents — including the false-name passport — illustrate evasion capacity.</a:t>
+            </a:r>
+          </a:p>
+          <a:p>
+            <a:pPr>
+              <a:lnSpc>
+                <a:spcPct val="105000"/>
+              </a:lnSpc>
+              <a:spcAft>
+                <a:spcPts val="1500"/>
+              </a:spcAft>
+            </a:pPr>
+            <a:r>
+              <a:rPr sz="1900">
+                <a:solidFill>
+                  <a:srgbClr val="334455"/>
+                </a:solidFill>
+                <a:latin typeface="Times New Roman"/>
+              </a:rPr>
+              <a:t>•  Together these convert wealth into mobility, and mobility into delay.</a:t>
+            </a:r>
+          </a:p>
+        </p:txBody>
+      </p:sp>
+      <p:sp>
+        <p:nvSpPr>
+          <p:cNvPr id="7" name="TextBox 6"/>
+          <p:cNvSpPr txBox="1"/>
+          <p:nvPr/>
+        </p:nvSpPr>
+        <p:spPr>
+          <a:xfrm>
+            <a:off x="640080" y="6126480"/>
+            <a:ext cx="10972800" cy="731520"/>
+          </a:xfrm>
+          <a:prstGeom prst="rect">
+            <a:avLst/>
+          </a:prstGeom>
+          <a:noFill/>
+        </p:spPr>
+        <p:txBody>
+          <a:bodyPr wrap="square">
+            <a:spAutoFit/>
+          </a:bodyPr>
+          <a:lstStyle/>
+          <a:p>
+            <a:pPr algn="l">
+              <a:lnSpc>
+                <a:spcPct val="100000"/>
+              </a:lnSpc>
+            </a:pPr>
+            <a:r>
+              <a:rPr sz="1500" b="0" i="1">
+                <a:solidFill>
+                  <a:srgbClr val="0F2A43"/>
+                </a:solidFill>
+                <a:latin typeface="Times New Roman"/>
+              </a:rPr>
+              <a:t>None of this is unique to one man — it is how illicit elite wealth tends to behave.</a:t>
+            </a:r>
+          </a:p>
+        </p:txBody>
+      </p:sp>
+    </p:spTree>
+  </p:cSld>
+  <p:clrMapOvr>
+    <a:masterClrMapping/>
+  </p:clrMapOvr>
+</p:sld>
+</file>
+
+<file path=ppt/slides/slide15.xml><?xml version="1.0" encoding="utf-8"?>
+<p:sld xmlns:a="http://schemas.openxmlformats.org/drawingml/2006/main" xmlns:p="http://schemas.openxmlformats.org/presentationml/2006/main" xmlns:r="http://schemas.openxmlformats.org/officeDocument/2006/relationships">
+  <p:cSld>
+    <p:bg>
+      <p:bgPr>
+        <a:solidFill>
+          <a:srgbClr val="FFFFFF"/>
+        </a:solidFill>
+        <a:effectLst/>
+      </p:bgPr>
+    </p:bg>
+    <p:spTree>
+      <p:nvGrpSpPr>
+        <p:cNvPr id="1" name=""/>
+        <p:cNvGrpSpPr/>
+        <p:nvPr/>
+      </p:nvGrpSpPr>
+      <p:grpSpPr/>
+      <p:sp>
+        <p:nvSpPr>
+          <p:cNvPr id="2" name="Rectangle 1"/>
+          <p:cNvSpPr/>
+          <p:nvPr/>
+        </p:nvSpPr>
+        <p:spPr>
+          <a:xfrm>
+            <a:off x="0" y="0"/>
+            <a:ext cx="12191695" cy="1143000"/>
+          </a:xfrm>
+          <a:prstGeom prst="rect">
+            <a:avLst/>
+          </a:prstGeom>
+          <a:solidFill>
+            <a:srgbClr val="0F2A43"/>
+          </a:solidFill>
+          <a:ln>
+            <a:noFill/>
+          </a:ln>
+          <a:effectLst/>
+        </p:spPr>
+        <p:style>
+          <a:lnRef idx="1">
+            <a:schemeClr val="accent1"/>
+          </a:lnRef>
+          <a:fillRef idx="3">
+            <a:schemeClr val="accent1"/>
+          </a:fillRef>
+          <a:effectRef idx="2">
+            <a:schemeClr val="accent1"/>
+          </a:effectRef>
+          <a:fontRef idx="minor">
+            <a:schemeClr val="lt1"/>
+          </a:fontRef>
+        </p:style>
+        <p:txBody>
+          <a:bodyPr rtlCol="0" anchor="ctr"/>
+          <a:lstStyle/>
+          <a:p>
+            <a:pPr algn="ctr"/>
+          </a:p>
+        </p:txBody>
+      </p:sp>
+      <p:sp>
+        <p:nvSpPr>
+          <p:cNvPr id="3" name="Rectangle 2"/>
+          <p:cNvSpPr/>
+          <p:nvPr/>
+        </p:nvSpPr>
+        <p:spPr>
+          <a:xfrm>
+            <a:off x="0" y="1143000"/>
+            <a:ext cx="12191695" cy="54864"/>
+          </a:xfrm>
+          <a:prstGeom prst="rect">
+            <a:avLst/>
+          </a:prstGeom>
+          <a:solidFill>
+            <a:srgbClr val="C08A2B"/>
+          </a:solidFill>
+          <a:ln>
+            <a:noFill/>
+          </a:ln>
+          <a:effectLst/>
+        </p:spPr>
+        <p:style>
+          <a:lnRef idx="1">
+            <a:schemeClr val="accent1"/>
+          </a:lnRef>
+          <a:fillRef idx="3">
+            <a:schemeClr val="accent1"/>
+          </a:fillRef>
+          <a:effectRef idx="2">
+            <a:schemeClr val="accent1"/>
+          </a:effectRef>
+          <a:fontRef idx="minor">
+            <a:schemeClr val="lt1"/>
+          </a:fontRef>
+        </p:style>
+        <p:txBody>
+          <a:bodyPr rtlCol="0" anchor="ctr"/>
+          <a:lstStyle/>
+          <a:p>
+            <a:pPr algn="ctr"/>
+          </a:p>
+        </p:txBody>
+      </p:sp>
+      <p:sp>
+        <p:nvSpPr>
+          <p:cNvPr id="4" name="TextBox 3"/>
+          <p:cNvSpPr txBox="1"/>
+          <p:nvPr/>
+        </p:nvSpPr>
+        <p:spPr>
+          <a:xfrm>
+            <a:off x="548640" y="182880"/>
+            <a:ext cx="10515600" cy="731520"/>
+          </a:xfrm>
+          <a:prstGeom prst="rect">
+            <a:avLst/>
+          </a:prstGeom>
+          <a:noFill/>
+        </p:spPr>
+        <p:txBody>
+          <a:bodyPr wrap="square">
+            <a:spAutoFit/>
+          </a:bodyPr>
+          <a:lstStyle/>
+          <a:p>
+            <a:pPr algn="l">
+              <a:lnSpc>
+                <a:spcPct val="100000"/>
+              </a:lnSpc>
+            </a:pPr>
+            <a:r>
+              <a:rPr sz="1300" b="1" i="0">
+                <a:solidFill>
+                  <a:srgbClr val="C08A2B"/>
+                </a:solidFill>
+                <a:latin typeface="Times New Roman"/>
+              </a:rPr>
+              <a:t>PART 3  •  COMPARISON</a:t>
+            </a:r>
+          </a:p>
+        </p:txBody>
+      </p:sp>
+      <p:sp>
+        <p:nvSpPr>
+          <p:cNvPr id="5" name="TextBox 4"/>
+          <p:cNvSpPr txBox="1"/>
+          <p:nvPr/>
+        </p:nvSpPr>
+        <p:spPr>
+          <a:xfrm>
+            <a:off x="548640" y="475488"/>
+            <a:ext cx="11064240" cy="731520"/>
+          </a:xfrm>
+          <a:prstGeom prst="rect">
+            <a:avLst/>
+          </a:prstGeom>
+          <a:noFill/>
+        </p:spPr>
+        <p:txBody>
+          <a:bodyPr wrap="square">
+            <a:spAutoFit/>
+          </a:bodyPr>
+          <a:lstStyle/>
+          <a:p>
+            <a:pPr algn="l">
+              <a:lnSpc>
+                <a:spcPct val="100000"/>
+              </a:lnSpc>
+            </a:pPr>
+            <a:r>
+              <a:rPr sz="2600" b="1" i="0">
+                <a:solidFill>
+                  <a:srgbClr val="FFFFFF"/>
+                </a:solidFill>
+                <a:latin typeface="Times New Roman"/>
+              </a:rPr>
+              <a:t>"Elite Impunity": 2008 vs 2019</a:t>
+            </a:r>
+          </a:p>
+        </p:txBody>
+      </p:sp>
+      <p:sp>
+        <p:nvSpPr>
+          <p:cNvPr id="6" name="Rectangle 5"/>
+          <p:cNvSpPr/>
+          <p:nvPr/>
+        </p:nvSpPr>
+        <p:spPr>
+          <a:xfrm>
+            <a:off x="640080" y="1554480"/>
+            <a:ext cx="5349240" cy="4297680"/>
+          </a:xfrm>
+          <a:prstGeom prst="rect">
+            <a:avLst/>
+          </a:prstGeom>
+          <a:solidFill>
+            <a:srgbClr val="E8ECF1"/>
+          </a:solidFill>
+          <a:ln>
+            <a:noFill/>
+          </a:ln>
+          <a:effectLst/>
+        </p:spPr>
+        <p:style>
+          <a:lnRef idx="1">
+            <a:schemeClr val="accent1"/>
+          </a:lnRef>
+          <a:fillRef idx="3">
+            <a:schemeClr val="accent1"/>
+          </a:fillRef>
+          <a:effectRef idx="2">
+            <a:schemeClr val="accent1"/>
+          </a:effectRef>
+          <a:fontRef idx="minor">
+            <a:schemeClr val="lt1"/>
+          </a:fontRef>
+        </p:style>
+        <p:txBody>
+          <a:bodyPr rtlCol="0" anchor="ctr"/>
+          <a:lstStyle/>
+          <a:p>
+            <a:pPr algn="ctr"/>
+          </a:p>
+        </p:txBody>
+      </p:sp>
+      <p:sp>
+        <p:nvSpPr>
+          <p:cNvPr id="7" name="TextBox 6"/>
+          <p:cNvSpPr txBox="1"/>
+          <p:nvPr/>
+        </p:nvSpPr>
+        <p:spPr>
+          <a:xfrm>
+            <a:off x="914400" y="1783080"/>
+            <a:ext cx="4846320" cy="731520"/>
+          </a:xfrm>
+          <a:prstGeom prst="rect">
+            <a:avLst/>
+          </a:prstGeom>
+          <a:noFill/>
+        </p:spPr>
+        <p:txBody>
+          <a:bodyPr wrap="square">
+            <a:spAutoFit/>
+          </a:bodyPr>
+          <a:lstStyle/>
+          <a:p>
+            <a:pPr algn="l">
+              <a:lnSpc>
+                <a:spcPct val="100000"/>
+              </a:lnSpc>
+            </a:pPr>
+            <a:r>
+              <a:rPr sz="1600" b="1" i="0">
+                <a:solidFill>
+                  <a:srgbClr val="C08A2B"/>
+                </a:solidFill>
+                <a:latin typeface="Times New Roman"/>
+              </a:rPr>
+              <a:t>2008 — FLORIDA</a:t>
+            </a:r>
+          </a:p>
+        </p:txBody>
+      </p:sp>
+      <p:sp>
+        <p:nvSpPr>
+          <p:cNvPr id="8" name="TextBox 7"/>
+          <p:cNvSpPr txBox="1"/>
+          <p:nvPr/>
+        </p:nvSpPr>
+        <p:spPr>
+          <a:xfrm>
+            <a:off x="914400" y="2286000"/>
+            <a:ext cx="4846320" cy="4572000"/>
+          </a:xfrm>
+          <a:prstGeom prst="rect">
+            <a:avLst/>
+          </a:prstGeom>
+          <a:noFill/>
+        </p:spPr>
+        <p:txBody>
+          <a:bodyPr wrap="square">
+            <a:spAutoFit/>
+          </a:bodyPr>
+          <a:lstStyle/>
+          <a:p>
+            <a:pPr>
+              <a:lnSpc>
+                <a:spcPct val="105000"/>
+              </a:lnSpc>
+              <a:spcAft>
+                <a:spcPts val="1200"/>
+              </a:spcAft>
+            </a:pPr>
+            <a:r>
+              <a:rPr sz="1500">
+                <a:solidFill>
+                  <a:srgbClr val="334455"/>
+                </a:solidFill>
+                <a:latin typeface="Times New Roman"/>
+              </a:rPr>
+              <a:t>•  State-level plea deal</a:t>
+            </a:r>
+          </a:p>
+          <a:p>
+            <a:pPr>
+              <a:lnSpc>
+                <a:spcPct val="105000"/>
+              </a:lnSpc>
+              <a:spcAft>
+                <a:spcPts val="1200"/>
+              </a:spcAft>
+            </a:pPr>
+            <a:r>
+              <a:rPr sz="1500">
+                <a:solidFill>
+                  <a:srgbClr val="334455"/>
+                </a:solidFill>
+                <a:latin typeface="Times New Roman"/>
+              </a:rPr>
+              <a:t>•  Served ~13 months, with work release</a:t>
+            </a:r>
+          </a:p>
+          <a:p>
+            <a:pPr>
+              <a:lnSpc>
+                <a:spcPct val="105000"/>
+              </a:lnSpc>
+              <a:spcAft>
+                <a:spcPts val="1200"/>
+              </a:spcAft>
+            </a:pPr>
+            <a:r>
+              <a:rPr sz="1500">
+                <a:solidFill>
+                  <a:srgbClr val="334455"/>
+                </a:solidFill>
+                <a:latin typeface="Times New Roman"/>
+              </a:rPr>
+              <a:t>•  Non-prosecution agreement shielded others</a:t>
+            </a:r>
+          </a:p>
+          <a:p>
+            <a:pPr>
+              <a:lnSpc>
+                <a:spcPct val="105000"/>
+              </a:lnSpc>
+              <a:spcAft>
+                <a:spcPts val="1200"/>
+              </a:spcAft>
+            </a:pPr>
+            <a:r>
+              <a:rPr sz="1500">
+                <a:solidFill>
+                  <a:srgbClr val="334455"/>
+                </a:solidFill>
+                <a:latin typeface="Times New Roman"/>
+              </a:rPr>
+              <a:t>•  Victims said they were not consulted</a:t>
+            </a:r>
+          </a:p>
+        </p:txBody>
+      </p:sp>
+      <p:sp>
+        <p:nvSpPr>
+          <p:cNvPr id="9" name="Rectangle 8"/>
+          <p:cNvSpPr/>
+          <p:nvPr/>
+        </p:nvSpPr>
+        <p:spPr>
+          <a:xfrm>
+            <a:off x="6217920" y="1554480"/>
+            <a:ext cx="5349240" cy="4297680"/>
+          </a:xfrm>
+          <a:prstGeom prst="rect">
+            <a:avLst/>
+          </a:prstGeom>
+          <a:solidFill>
+            <a:srgbClr val="0F2A43"/>
+          </a:solidFill>
+          <a:ln>
+            <a:noFill/>
+          </a:ln>
+          <a:effectLst/>
+        </p:spPr>
+        <p:style>
+          <a:lnRef idx="1">
+            <a:schemeClr val="accent1"/>
+          </a:lnRef>
+          <a:fillRef idx="3">
+            <a:schemeClr val="accent1"/>
+          </a:fillRef>
+          <a:effectRef idx="2">
+            <a:schemeClr val="accent1"/>
+          </a:effectRef>
+          <a:fontRef idx="minor">
+            <a:schemeClr val="lt1"/>
+          </a:fontRef>
+        </p:style>
+        <p:txBody>
+          <a:bodyPr rtlCol="0" anchor="ctr"/>
+          <a:lstStyle/>
+          <a:p>
+            <a:pPr algn="ctr"/>
+          </a:p>
+        </p:txBody>
+      </p:sp>
+      <p:sp>
+        <p:nvSpPr>
+          <p:cNvPr id="10" name="TextBox 9"/>
+          <p:cNvSpPr txBox="1"/>
+          <p:nvPr/>
+        </p:nvSpPr>
+        <p:spPr>
+          <a:xfrm>
+            <a:off x="6492240" y="1783080"/>
+            <a:ext cx="4846320" cy="731520"/>
+          </a:xfrm>
+          <a:prstGeom prst="rect">
+            <a:avLst/>
+          </a:prstGeom>
+          <a:noFill/>
+        </p:spPr>
+        <p:txBody>
+          <a:bodyPr wrap="square">
+            <a:spAutoFit/>
+          </a:bodyPr>
+          <a:lstStyle/>
+          <a:p>
+            <a:pPr algn="l">
+              <a:lnSpc>
+                <a:spcPct val="100000"/>
+              </a:lnSpc>
+            </a:pPr>
+            <a:r>
+              <a:rPr sz="1600" b="1" i="0">
+                <a:solidFill>
+                  <a:srgbClr val="C08A2B"/>
+                </a:solidFill>
+                <a:latin typeface="Times New Roman"/>
+              </a:rPr>
+              <a:t>2019 — FEDERAL (NY)</a:t>
+            </a:r>
+          </a:p>
+        </p:txBody>
+      </p:sp>
+      <p:sp>
+        <p:nvSpPr>
+          <p:cNvPr id="11" name="TextBox 10"/>
+          <p:cNvSpPr txBox="1"/>
+          <p:nvPr/>
+        </p:nvSpPr>
+        <p:spPr>
+          <a:xfrm>
+            <a:off x="6492240" y="2286000"/>
+            <a:ext cx="4846320" cy="4572000"/>
+          </a:xfrm>
+          <a:prstGeom prst="rect">
+            <a:avLst/>
+          </a:prstGeom>
+          <a:noFill/>
+        </p:spPr>
+        <p:txBody>
+          <a:bodyPr wrap="square">
+            <a:spAutoFit/>
+          </a:bodyPr>
+          <a:lstStyle/>
+          <a:p>
+            <a:pPr>
+              <a:lnSpc>
+                <a:spcPct val="105000"/>
+              </a:lnSpc>
+              <a:spcAft>
+                <a:spcPts val="1200"/>
+              </a:spcAft>
+            </a:pPr>
+            <a:r>
+              <a:rPr sz="1500">
+                <a:solidFill>
+                  <a:srgbClr val="F2F4F7"/>
+                </a:solidFill>
+                <a:latin typeface="Times New Roman"/>
+              </a:rPr>
+              <a:t>•  Federal sex-trafficking charges</a:t>
+            </a:r>
+          </a:p>
+          <a:p>
+            <a:pPr>
+              <a:lnSpc>
+                <a:spcPct val="105000"/>
+              </a:lnSpc>
+              <a:spcAft>
+                <a:spcPts val="1200"/>
+              </a:spcAft>
+            </a:pPr>
+            <a:r>
+              <a:rPr sz="1500">
+                <a:solidFill>
+                  <a:srgbClr val="F2F4F7"/>
+                </a:solidFill>
+                <a:latin typeface="Times New Roman"/>
+              </a:rPr>
+              <a:t>•  Held without bail</a:t>
+            </a:r>
+          </a:p>
+          <a:p>
+            <a:pPr>
+              <a:lnSpc>
+                <a:spcPct val="105000"/>
+              </a:lnSpc>
+              <a:spcAft>
+                <a:spcPts val="1200"/>
+              </a:spcAft>
+            </a:pPr>
+            <a:r>
+              <a:rPr sz="1500">
+                <a:solidFill>
+                  <a:srgbClr val="F2F4F7"/>
+                </a:solidFill>
+                <a:latin typeface="Times New Roman"/>
+              </a:rPr>
+              <a:t>•  Treated as serious organised wrongdoing</a:t>
+            </a:r>
+          </a:p>
+          <a:p>
+            <a:pPr>
+              <a:lnSpc>
+                <a:spcPct val="105000"/>
+              </a:lnSpc>
+              <a:spcAft>
+                <a:spcPts val="1200"/>
+              </a:spcAft>
+            </a:pPr>
+            <a:r>
+              <a:rPr sz="1500">
+                <a:solidFill>
+                  <a:srgbClr val="F2F4F7"/>
+                </a:solidFill>
+                <a:latin typeface="Times New Roman"/>
+              </a:rPr>
+              <a:t>•  Case ended only with his death in custody</a:t>
+            </a:r>
+          </a:p>
+        </p:txBody>
+      </p:sp>
+      <p:sp>
+        <p:nvSpPr>
+          <p:cNvPr id="12" name="TextBox 11"/>
+          <p:cNvSpPr txBox="1"/>
+          <p:nvPr/>
+        </p:nvSpPr>
+        <p:spPr>
+          <a:xfrm>
+            <a:off x="640080" y="6035040"/>
+            <a:ext cx="10972800" cy="731520"/>
+          </a:xfrm>
+          <a:prstGeom prst="rect">
+            <a:avLst/>
+          </a:prstGeom>
+          <a:noFill/>
+        </p:spPr>
+        <p:txBody>
+          <a:bodyPr wrap="square">
+            <a:spAutoFit/>
+          </a:bodyPr>
+          <a:lstStyle/>
+          <a:p>
+            <a:pPr algn="l">
+              <a:lnSpc>
+                <a:spcPct val="100000"/>
+              </a:lnSpc>
+            </a:pPr>
+            <a:r>
+              <a:rPr sz="1500" b="0" i="1">
+                <a:solidFill>
+                  <a:srgbClr val="0F2A43"/>
+                </a:solidFill>
+                <a:latin typeface="Times New Roman"/>
+              </a:rPr>
+              <a:t>The same conduct, two very different responses — a decade apart.</a:t>
+            </a:r>
+          </a:p>
+        </p:txBody>
+      </p:sp>
+    </p:spTree>
+  </p:cSld>
+  <p:clrMapOvr>
+    <a:masterClrMapping/>
+  </p:clrMapOvr>
+</p:sld>
+</file>
+
+<file path=ppt/slides/slide16.xml><?xml version="1.0" encoding="utf-8"?>
+<p:sld xmlns:a="http://schemas.openxmlformats.org/drawingml/2006/main" xmlns:p="http://schemas.openxmlformats.org/presentationml/2006/main" xmlns:r="http://schemas.openxmlformats.org/officeDocument/2006/relationships">
+  <p:cSld>
+    <p:bg>
+      <p:bgPr>
+        <a:solidFill>
+          <a:srgbClr val="FFFFFF"/>
+        </a:solidFill>
+        <a:effectLst/>
+      </p:bgPr>
+    </p:bg>
+    <p:spTree>
+      <p:nvGrpSpPr>
+        <p:cNvPr id="1" name=""/>
+        <p:cNvGrpSpPr/>
+        <p:nvPr/>
+      </p:nvGrpSpPr>
+      <p:grpSpPr/>
+      <p:sp>
+        <p:nvSpPr>
+          <p:cNvPr id="2" name="Rectangle 1"/>
+          <p:cNvSpPr/>
+          <p:nvPr/>
+        </p:nvSpPr>
+        <p:spPr>
+          <a:xfrm>
+            <a:off x="0" y="0"/>
+            <a:ext cx="12191695" cy="1143000"/>
+          </a:xfrm>
+          <a:prstGeom prst="rect">
+            <a:avLst/>
+          </a:prstGeom>
+          <a:solidFill>
+            <a:srgbClr val="0F2A43"/>
+          </a:solidFill>
+          <a:ln>
+            <a:noFill/>
+          </a:ln>
+          <a:effectLst/>
+        </p:spPr>
+        <p:style>
+          <a:lnRef idx="1">
+            <a:schemeClr val="accent1"/>
+          </a:lnRef>
+          <a:fillRef idx="3">
+            <a:schemeClr val="accent1"/>
+          </a:fillRef>
+          <a:effectRef idx="2">
+            <a:schemeClr val="accent1"/>
+          </a:effectRef>
+          <a:fontRef idx="minor">
+            <a:schemeClr val="lt1"/>
+          </a:fontRef>
+        </p:style>
+        <p:txBody>
+          <a:bodyPr rtlCol="0" anchor="ctr"/>
+          <a:lstStyle/>
+          <a:p>
+            <a:pPr algn="ctr"/>
+          </a:p>
+        </p:txBody>
+      </p:sp>
+      <p:sp>
+        <p:nvSpPr>
+          <p:cNvPr id="3" name="Rectangle 2"/>
+          <p:cNvSpPr/>
+          <p:nvPr/>
+        </p:nvSpPr>
+        <p:spPr>
+          <a:xfrm>
+            <a:off x="0" y="1143000"/>
+            <a:ext cx="12191695" cy="54864"/>
+          </a:xfrm>
+          <a:prstGeom prst="rect">
+            <a:avLst/>
+          </a:prstGeom>
+          <a:solidFill>
+            <a:srgbClr val="C08A2B"/>
+          </a:solidFill>
+          <a:ln>
+            <a:noFill/>
+          </a:ln>
+          <a:effectLst/>
+        </p:spPr>
+        <p:style>
+          <a:lnRef idx="1">
+            <a:schemeClr val="accent1"/>
+          </a:lnRef>
+          <a:fillRef idx="3">
+            <a:schemeClr val="accent1"/>
+          </a:fillRef>
+          <a:effectRef idx="2">
+            <a:schemeClr val="accent1"/>
+          </a:effectRef>
+          <a:fontRef idx="minor">
+            <a:schemeClr val="lt1"/>
+          </a:fontRef>
+        </p:style>
+        <p:txBody>
+          <a:bodyPr rtlCol="0" anchor="ctr"/>
+          <a:lstStyle/>
+          <a:p>
+            <a:pPr algn="ctr"/>
+          </a:p>
+        </p:txBody>
+      </p:sp>
+      <p:sp>
+        <p:nvSpPr>
+          <p:cNvPr id="4" name="TextBox 3"/>
+          <p:cNvSpPr txBox="1"/>
+          <p:nvPr/>
+        </p:nvSpPr>
+        <p:spPr>
+          <a:xfrm>
+            <a:off x="548640" y="182880"/>
+            <a:ext cx="10515600" cy="731520"/>
+          </a:xfrm>
+          <a:prstGeom prst="rect">
+            <a:avLst/>
+          </a:prstGeom>
+          <a:noFill/>
+        </p:spPr>
+        <p:txBody>
+          <a:bodyPr wrap="square">
+            <a:spAutoFit/>
+          </a:bodyPr>
+          <a:lstStyle/>
+          <a:p>
+            <a:pPr algn="l">
+              <a:lnSpc>
+                <a:spcPct val="100000"/>
+              </a:lnSpc>
+            </a:pPr>
+            <a:r>
+              <a:rPr sz="1300" b="1" i="0">
+                <a:solidFill>
+                  <a:srgbClr val="C08A2B"/>
+                </a:solidFill>
+                <a:latin typeface="Times New Roman"/>
+              </a:rPr>
+              <a:t>PART 3  •  COMPARATIVE LAW</a:t>
+            </a:r>
+          </a:p>
+        </p:txBody>
+      </p:sp>
+      <p:sp>
+        <p:nvSpPr>
+          <p:cNvPr id="5" name="TextBox 4"/>
+          <p:cNvSpPr txBox="1"/>
+          <p:nvPr/>
+        </p:nvSpPr>
+        <p:spPr>
+          <a:xfrm>
+            <a:off x="548640" y="475488"/>
+            <a:ext cx="11064240" cy="731520"/>
+          </a:xfrm>
+          <a:prstGeom prst="rect">
+            <a:avLst/>
+          </a:prstGeom>
+          <a:noFill/>
+        </p:spPr>
+        <p:txBody>
+          <a:bodyPr wrap="square">
+            <a:spAutoFit/>
+          </a:bodyPr>
+          <a:lstStyle/>
+          <a:p>
+            <a:pPr algn="l">
+              <a:lnSpc>
+                <a:spcPct val="100000"/>
+              </a:lnSpc>
+            </a:pPr>
+            <a:r>
+              <a:rPr sz="2600" b="1" i="0">
+                <a:solidFill>
+                  <a:srgbClr val="FFFFFF"/>
+                </a:solidFill>
+                <a:latin typeface="Times New Roman"/>
+              </a:rPr>
+              <a:t>Would Other Systems Have Acted Differently?</a:t>
+            </a:r>
+          </a:p>
+        </p:txBody>
+      </p:sp>
+      <p:sp>
+        <p:nvSpPr>
+          <p:cNvPr id="6" name="TextBox 5"/>
+          <p:cNvSpPr txBox="1"/>
+          <p:nvPr/>
+        </p:nvSpPr>
+        <p:spPr>
+          <a:xfrm>
+            <a:off x="640080" y="1554480"/>
+            <a:ext cx="10972800" cy="4572000"/>
+          </a:xfrm>
+          <a:prstGeom prst="rect">
+            <a:avLst/>
+          </a:prstGeom>
+          <a:noFill/>
+        </p:spPr>
+        <p:txBody>
+          <a:bodyPr wrap="square">
+            <a:spAutoFit/>
+          </a:bodyPr>
+          <a:lstStyle/>
+          <a:p>
+            <a:pPr>
+              <a:lnSpc>
+                <a:spcPct val="105000"/>
+              </a:lnSpc>
+              <a:spcAft>
+                <a:spcPts val="1600"/>
+              </a:spcAft>
+            </a:pPr>
+            <a:r>
+              <a:rPr sz="1900" b="1">
+                <a:solidFill>
+                  <a:srgbClr val="0F2A43"/>
+                </a:solidFill>
+                <a:latin typeface="Times New Roman"/>
+              </a:rPr>
+              <a:t>•  Adversarial vs inquisitorial: </a:t>
+            </a:r>
+            <a:r>
+              <a:rPr sz="1900">
+                <a:solidFill>
+                  <a:srgbClr val="334455"/>
+                </a:solidFill>
+                <a:latin typeface="Times New Roman"/>
+              </a:rPr>
+              <a:t>France's investigating magistrates can drive cases differently from US prosecutors.</a:t>
+            </a:r>
+          </a:p>
+          <a:p>
+            <a:pPr>
+              <a:lnSpc>
+                <a:spcPct val="105000"/>
+              </a:lnSpc>
+              <a:spcAft>
+                <a:spcPts val="1600"/>
+              </a:spcAft>
+            </a:pPr>
+            <a:r>
+              <a:rPr sz="1900" b="1">
+                <a:solidFill>
+                  <a:srgbClr val="0F2A43"/>
+                </a:solidFill>
+                <a:latin typeface="Times New Roman"/>
+              </a:rPr>
+              <a:t>•  Victim participation: </a:t>
+            </a:r>
+            <a:r>
+              <a:rPr sz="1900">
+                <a:solidFill>
+                  <a:srgbClr val="334455"/>
+                </a:solidFill>
+                <a:latin typeface="Times New Roman"/>
+              </a:rPr>
+              <a:t>some systems give victims a formal role earlier in proceedings.</a:t>
+            </a:r>
+          </a:p>
+          <a:p>
+            <a:pPr>
+              <a:lnSpc>
+                <a:spcPct val="105000"/>
+              </a:lnSpc>
+              <a:spcAft>
+                <a:spcPts val="1600"/>
+              </a:spcAft>
+            </a:pPr>
+            <a:r>
+              <a:rPr sz="1900" b="1">
+                <a:solidFill>
+                  <a:srgbClr val="0F2A43"/>
+                </a:solidFill>
+                <a:latin typeface="Times New Roman"/>
+              </a:rPr>
+              <a:t>•  Limitation periods: </a:t>
+            </a:r>
+            <a:r>
+              <a:rPr sz="1900">
+                <a:solidFill>
+                  <a:srgbClr val="334455"/>
+                </a:solidFill>
+                <a:latin typeface="Times New Roman"/>
+              </a:rPr>
+              <a:t>how long after the abuse can charges still be brought?</a:t>
+            </a:r>
+          </a:p>
+          <a:p>
+            <a:pPr>
+              <a:lnSpc>
+                <a:spcPct val="105000"/>
+              </a:lnSpc>
+              <a:spcAft>
+                <a:spcPts val="1600"/>
+              </a:spcAft>
+            </a:pPr>
+            <a:r>
+              <a:rPr sz="1900" b="1">
+                <a:solidFill>
+                  <a:srgbClr val="0F2A43"/>
+                </a:solidFill>
+                <a:latin typeface="Times New Roman"/>
+              </a:rPr>
+              <a:t>•  Plea bargaining: </a:t>
+            </a:r>
+            <a:r>
+              <a:rPr sz="1900">
+                <a:solidFill>
+                  <a:srgbClr val="334455"/>
+                </a:solidFill>
+                <a:latin typeface="Times New Roman"/>
+              </a:rPr>
+              <a:t>less central in many civil-law systems, changing the incentive to settle quietly.</a:t>
+            </a:r>
+          </a:p>
+        </p:txBody>
+      </p:sp>
+      <p:sp>
+        <p:nvSpPr>
+          <p:cNvPr id="7" name="TextBox 6"/>
+          <p:cNvSpPr txBox="1"/>
+          <p:nvPr/>
+        </p:nvSpPr>
+        <p:spPr>
+          <a:xfrm>
+            <a:off x="640080" y="5989320"/>
+            <a:ext cx="10972800" cy="731520"/>
+          </a:xfrm>
+          <a:prstGeom prst="rect">
+            <a:avLst/>
+          </a:prstGeom>
+          <a:noFill/>
+        </p:spPr>
+        <p:txBody>
+          <a:bodyPr wrap="square">
+            <a:spAutoFit/>
+          </a:bodyPr>
+          <a:lstStyle/>
+          <a:p>
+            <a:pPr algn="l">
+              <a:lnSpc>
+                <a:spcPct val="100000"/>
+              </a:lnSpc>
+            </a:pPr>
+            <a:r>
+              <a:rPr sz="1500" b="1" i="1">
+                <a:solidFill>
+                  <a:srgbClr val="0F2A43"/>
+                </a:solidFill>
+                <a:latin typeface="Times New Roman"/>
+              </a:rPr>
+              <a:t>Central question: would the UK, France or Japan have acted faster — or slower?</a:t>
+            </a:r>
+          </a:p>
+        </p:txBody>
+      </p:sp>
+    </p:spTree>
+  </p:cSld>
+  <p:clrMapOvr>
+    <a:masterClrMapping/>
+  </p:clrMapOvr>
+</p:sld>
+</file>
+
+<file path=ppt/slides/slide17.xml><?xml version="1.0" encoding="utf-8"?>
+<p:sld xmlns:a="http://schemas.openxmlformats.org/drawingml/2006/main" xmlns:p="http://schemas.openxmlformats.org/presentationml/2006/main" xmlns:r="http://schemas.openxmlformats.org/officeDocument/2006/relationships">
+  <p:cSld>
+    <p:bg>
+      <p:bgPr>
+        <a:solidFill>
+          <a:srgbClr val="0F2A43"/>
+        </a:solidFill>
+        <a:effectLst/>
+      </p:bgPr>
+    </p:bg>
+    <p:spTree>
+      <p:nvGrpSpPr>
+        <p:cNvPr id="1" name=""/>
+        <p:cNvGrpSpPr/>
+        <p:nvPr/>
+      </p:nvGrpSpPr>
+      <p:grpSpPr/>
+      <p:sp>
+        <p:nvSpPr>
+          <p:cNvPr id="2" name="Rectangle 1"/>
+          <p:cNvSpPr/>
+          <p:nvPr/>
+        </p:nvSpPr>
+        <p:spPr>
+          <a:xfrm>
+            <a:off x="822960" y="3246120"/>
+            <a:ext cx="2926080" cy="54864"/>
+          </a:xfrm>
+          <a:prstGeom prst="rect">
+            <a:avLst/>
+          </a:prstGeom>
+          <a:solidFill>
+            <a:srgbClr val="C08A2B"/>
+          </a:solidFill>
+          <a:ln>
+            <a:noFill/>
+          </a:ln>
+          <a:effectLst/>
+        </p:spPr>
+        <p:style>
+          <a:lnRef idx="1">
+            <a:schemeClr val="accent1"/>
+          </a:lnRef>
+          <a:fillRef idx="3">
+            <a:schemeClr val="accent1"/>
+          </a:fillRef>
+          <a:effectRef idx="2">
+            <a:schemeClr val="accent1"/>
+          </a:effectRef>
+          <a:fontRef idx="minor">
+            <a:schemeClr val="lt1"/>
+          </a:fontRef>
+        </p:style>
+        <p:txBody>
+          <a:bodyPr rtlCol="0" anchor="ctr"/>
+          <a:lstStyle/>
+          <a:p>
+            <a:pPr algn="ctr"/>
+          </a:p>
+        </p:txBody>
+      </p:sp>
+      <p:sp>
+        <p:nvSpPr>
+          <p:cNvPr id="3" name="TextBox 2"/>
+          <p:cNvSpPr txBox="1"/>
+          <p:nvPr/>
+        </p:nvSpPr>
+        <p:spPr>
+          <a:xfrm>
+            <a:off x="822960" y="2148840"/>
+            <a:ext cx="10515600" cy="731520"/>
+          </a:xfrm>
+          <a:prstGeom prst="rect">
+            <a:avLst/>
+          </a:prstGeom>
+          <a:noFill/>
+        </p:spPr>
+        <p:txBody>
+          <a:bodyPr wrap="square">
+            <a:spAutoFit/>
+          </a:bodyPr>
+          <a:lstStyle/>
+          <a:p>
+            <a:pPr algn="l">
+              <a:lnSpc>
+                <a:spcPct val="100000"/>
+              </a:lnSpc>
+            </a:pPr>
+            <a:r>
+              <a:rPr sz="2000" b="1" i="0">
+                <a:solidFill>
+                  <a:srgbClr val="C08A2B"/>
+                </a:solidFill>
+                <a:latin typeface="Times New Roman"/>
+              </a:rPr>
+              <a:t>PART 4</a:t>
+            </a:r>
+          </a:p>
+        </p:txBody>
+      </p:sp>
+      <p:sp>
+        <p:nvSpPr>
+          <p:cNvPr id="4" name="TextBox 3"/>
+          <p:cNvSpPr txBox="1"/>
+          <p:nvPr/>
+        </p:nvSpPr>
+        <p:spPr>
+          <a:xfrm>
+            <a:off x="822960" y="2514600"/>
+            <a:ext cx="10515600" cy="731520"/>
+          </a:xfrm>
+          <a:prstGeom prst="rect">
+            <a:avLst/>
+          </a:prstGeom>
+          <a:noFill/>
+        </p:spPr>
+        <p:txBody>
+          <a:bodyPr wrap="square">
+            <a:spAutoFit/>
+          </a:bodyPr>
+          <a:lstStyle/>
+          <a:p>
+            <a:pPr algn="l">
+              <a:lnSpc>
+                <a:spcPct val="100000"/>
+              </a:lnSpc>
+            </a:pPr>
+            <a:r>
+              <a:rPr sz="3400" b="1" i="0">
+                <a:solidFill>
+                  <a:srgbClr val="FFFFFF"/>
+                </a:solidFill>
+                <a:latin typeface="Times New Roman"/>
+              </a:rPr>
+              <a:t>Accountability, Transparency &amp; Lessons</a:t>
+            </a:r>
+          </a:p>
+        </p:txBody>
+      </p:sp>
+      <p:sp>
+        <p:nvSpPr>
+          <p:cNvPr id="5" name="TextBox 4"/>
+          <p:cNvSpPr txBox="1"/>
+          <p:nvPr/>
+        </p:nvSpPr>
+        <p:spPr>
+          <a:xfrm>
+            <a:off x="822960" y="3474720"/>
+            <a:ext cx="9601200" cy="731520"/>
+          </a:xfrm>
+          <a:prstGeom prst="rect">
+            <a:avLst/>
+          </a:prstGeom>
+          <a:noFill/>
+        </p:spPr>
+        <p:txBody>
+          <a:bodyPr wrap="square">
+            <a:spAutoFit/>
+          </a:bodyPr>
+          <a:lstStyle/>
+          <a:p>
+            <a:pPr algn="l">
+              <a:lnSpc>
+                <a:spcPct val="110000"/>
+              </a:lnSpc>
+            </a:pPr>
+            <a:r>
+              <a:rPr sz="1800" b="0" i="1">
+                <a:solidFill>
+                  <a:srgbClr val="F2F4F7"/>
+                </a:solidFill>
+                <a:latin typeface="Times New Roman"/>
+              </a:rPr>
+              <a:t>Designing cross-border justice that actually protects victims</a:t>
+            </a:r>
+          </a:p>
+        </p:txBody>
+      </p:sp>
+    </p:spTree>
+  </p:cSld>
+  <p:clrMapOvr>
+    <a:masterClrMapping/>
+  </p:clrMapOvr>
+</p:sld>
+</file>
+
+<file path=ppt/slides/slide18.xml><?xml version="1.0" encoding="utf-8"?>
+<p:sld xmlns:a="http://schemas.openxmlformats.org/drawingml/2006/main" xmlns:p="http://schemas.openxmlformats.org/presentationml/2006/main" xmlns:r="http://schemas.openxmlformats.org/officeDocument/2006/relationships">
+  <p:cSld>
+    <p:bg>
+      <p:bgPr>
+        <a:solidFill>
+          <a:srgbClr val="FFFFFF"/>
+        </a:solidFill>
+        <a:effectLst/>
+      </p:bgPr>
+    </p:bg>
+    <p:spTree>
+      <p:nvGrpSpPr>
+        <p:cNvPr id="1" name=""/>
+        <p:cNvGrpSpPr/>
+        <p:nvPr/>
+      </p:nvGrpSpPr>
+      <p:grpSpPr/>
+      <p:sp>
+        <p:nvSpPr>
+          <p:cNvPr id="2" name="Rectangle 1"/>
+          <p:cNvSpPr/>
+          <p:nvPr/>
+        </p:nvSpPr>
+        <p:spPr>
+          <a:xfrm>
+            <a:off x="0" y="0"/>
+            <a:ext cx="12191695" cy="1143000"/>
+          </a:xfrm>
+          <a:prstGeom prst="rect">
+            <a:avLst/>
+          </a:prstGeom>
+          <a:solidFill>
+            <a:srgbClr val="0F2A43"/>
+          </a:solidFill>
+          <a:ln>
+            <a:noFill/>
+          </a:ln>
+          <a:effectLst/>
+        </p:spPr>
+        <p:style>
+          <a:lnRef idx="1">
+            <a:schemeClr val="accent1"/>
+          </a:lnRef>
+          <a:fillRef idx="3">
+            <a:schemeClr val="accent1"/>
+          </a:fillRef>
+          <a:effectRef idx="2">
+            <a:schemeClr val="accent1"/>
+          </a:effectRef>
+          <a:fontRef idx="minor">
+            <a:schemeClr val="lt1"/>
+          </a:fontRef>
+        </p:style>
+        <p:txBody>
+          <a:bodyPr rtlCol="0" anchor="ctr"/>
+          <a:lstStyle/>
+          <a:p>
+            <a:pPr algn="ctr"/>
+          </a:p>
+        </p:txBody>
+      </p:sp>
+      <p:sp>
+        <p:nvSpPr>
+          <p:cNvPr id="3" name="Rectangle 2"/>
+          <p:cNvSpPr/>
+          <p:nvPr/>
+        </p:nvSpPr>
+        <p:spPr>
+          <a:xfrm>
+            <a:off x="0" y="1143000"/>
+            <a:ext cx="12191695" cy="54864"/>
+          </a:xfrm>
+          <a:prstGeom prst="rect">
+            <a:avLst/>
+          </a:prstGeom>
+          <a:solidFill>
+            <a:srgbClr val="C08A2B"/>
+          </a:solidFill>
+          <a:ln>
+            <a:noFill/>
+          </a:ln>
+          <a:effectLst/>
+        </p:spPr>
+        <p:style>
+          <a:lnRef idx="1">
+            <a:schemeClr val="accent1"/>
+          </a:lnRef>
+          <a:fillRef idx="3">
+            <a:schemeClr val="accent1"/>
+          </a:fillRef>
+          <a:effectRef idx="2">
+            <a:schemeClr val="accent1"/>
+          </a:effectRef>
+          <a:fontRef idx="minor">
+            <a:schemeClr val="lt1"/>
+          </a:fontRef>
+        </p:style>
+        <p:txBody>
+          <a:bodyPr rtlCol="0" anchor="ctr"/>
+          <a:lstStyle/>
+          <a:p>
+            <a:pPr algn="ctr"/>
+          </a:p>
+        </p:txBody>
+      </p:sp>
+      <p:sp>
+        <p:nvSpPr>
+          <p:cNvPr id="4" name="TextBox 3"/>
+          <p:cNvSpPr txBox="1"/>
+          <p:nvPr/>
+        </p:nvSpPr>
+        <p:spPr>
+          <a:xfrm>
+            <a:off x="548640" y="182880"/>
+            <a:ext cx="10515600" cy="731520"/>
+          </a:xfrm>
+          <a:prstGeom prst="rect">
+            <a:avLst/>
+          </a:prstGeom>
+          <a:noFill/>
+        </p:spPr>
+        <p:txBody>
+          <a:bodyPr wrap="square">
+            <a:spAutoFit/>
+          </a:bodyPr>
+          <a:lstStyle/>
+          <a:p>
+            <a:pPr algn="l">
+              <a:lnSpc>
+                <a:spcPct val="100000"/>
+              </a:lnSpc>
+            </a:pPr>
+            <a:r>
+              <a:rPr sz="1300" b="1" i="0">
+                <a:solidFill>
+                  <a:srgbClr val="C08A2B"/>
+                </a:solidFill>
+                <a:latin typeface="Times New Roman"/>
+              </a:rPr>
+              <a:t>PART 4  •  TRANSPARENCY</a:t>
+            </a:r>
+          </a:p>
+        </p:txBody>
+      </p:sp>
+      <p:sp>
+        <p:nvSpPr>
+          <p:cNvPr id="5" name="TextBox 4"/>
+          <p:cNvSpPr txBox="1"/>
+          <p:nvPr/>
+        </p:nvSpPr>
+        <p:spPr>
+          <a:xfrm>
+            <a:off x="548640" y="475488"/>
+            <a:ext cx="11064240" cy="731520"/>
+          </a:xfrm>
+          <a:prstGeom prst="rect">
+            <a:avLst/>
+          </a:prstGeom>
+          <a:noFill/>
+        </p:spPr>
+        <p:txBody>
+          <a:bodyPr wrap="square">
+            <a:spAutoFit/>
+          </a:bodyPr>
+          <a:lstStyle/>
+          <a:p>
+            <a:pPr algn="l">
+              <a:lnSpc>
+                <a:spcPct val="100000"/>
+              </a:lnSpc>
+            </a:pPr>
+            <a:r>
+              <a:rPr sz="2600" b="1" i="0">
+                <a:solidFill>
+                  <a:srgbClr val="FFFFFF"/>
+                </a:solidFill>
+                <a:latin typeface="Times New Roman"/>
+              </a:rPr>
+              <a:t>The 2025 Document-Release Wave</a:t>
+            </a:r>
+          </a:p>
+        </p:txBody>
+      </p:sp>
+      <p:sp>
+        <p:nvSpPr>
+          <p:cNvPr id="6" name="TextBox 5"/>
+          <p:cNvSpPr txBox="1"/>
+          <p:nvPr/>
+        </p:nvSpPr>
+        <p:spPr>
+          <a:xfrm>
+            <a:off x="640080" y="1554480"/>
+            <a:ext cx="10972800" cy="4572000"/>
+          </a:xfrm>
+          <a:prstGeom prst="rect">
+            <a:avLst/>
+          </a:prstGeom>
+          <a:noFill/>
+        </p:spPr>
+        <p:txBody>
+          <a:bodyPr wrap="square">
+            <a:spAutoFit/>
+          </a:bodyPr>
+          <a:lstStyle/>
+          <a:p>
+            <a:pPr>
+              <a:lnSpc>
+                <a:spcPct val="105000"/>
+              </a:lnSpc>
+              <a:spcAft>
+                <a:spcPts val="1700"/>
+              </a:spcAft>
+            </a:pPr>
+            <a:r>
+              <a:rPr sz="1900">
+                <a:solidFill>
+                  <a:srgbClr val="334455"/>
+                </a:solidFill>
+                <a:latin typeface="Times New Roman"/>
+              </a:rPr>
+              <a:t>•  US transparency legislation drove a large release of case-related documents.</a:t>
+            </a:r>
+          </a:p>
+          <a:p>
+            <a:pPr>
+              <a:lnSpc>
+                <a:spcPct val="105000"/>
+              </a:lnSpc>
+              <a:spcAft>
+                <a:spcPts val="1700"/>
+              </a:spcAft>
+            </a:pPr>
+            <a:r>
+              <a:rPr sz="1900">
+                <a:solidFill>
+                  <a:srgbClr val="334455"/>
+                </a:solidFill>
+                <a:latin typeface="Times New Roman"/>
+              </a:rPr>
+              <a:t>•  Intended to answer public demand for accountability and openness.</a:t>
+            </a:r>
+          </a:p>
+          <a:p>
+            <a:pPr>
+              <a:lnSpc>
+                <a:spcPct val="105000"/>
+              </a:lnSpc>
+              <a:spcAft>
+                <a:spcPts val="1700"/>
+              </a:spcAft>
+            </a:pPr>
+            <a:r>
+              <a:rPr sz="1900" b="1">
+                <a:solidFill>
+                  <a:srgbClr val="0F2A43"/>
+                </a:solidFill>
+                <a:latin typeface="Times New Roman"/>
+              </a:rPr>
+              <a:t>•  Survivors' concern: </a:t>
+            </a:r>
+            <a:r>
+              <a:rPr sz="1900">
+                <a:solidFill>
+                  <a:srgbClr val="334455"/>
+                </a:solidFill>
+                <a:latin typeface="Times New Roman"/>
+              </a:rPr>
+              <a:t>the disclosures made it easy to identify those abused — but not those who may have been involved.</a:t>
+            </a:r>
+          </a:p>
+          <a:p>
+            <a:pPr>
+              <a:lnSpc>
+                <a:spcPct val="105000"/>
+              </a:lnSpc>
+              <a:spcAft>
+                <a:spcPts val="1700"/>
+              </a:spcAft>
+            </a:pPr>
+            <a:r>
+              <a:rPr sz="1900">
+                <a:solidFill>
+                  <a:srgbClr val="334455"/>
+                </a:solidFill>
+                <a:latin typeface="Times New Roman"/>
+              </a:rPr>
+              <a:t>•  A real tension emerges between public transparency and the privacy and safety of victims.</a:t>
+            </a:r>
+          </a:p>
+        </p:txBody>
+      </p:sp>
+      <p:sp>
+        <p:nvSpPr>
+          <p:cNvPr id="7" name="TextBox 6"/>
+          <p:cNvSpPr txBox="1"/>
+          <p:nvPr/>
+        </p:nvSpPr>
+        <p:spPr>
+          <a:xfrm>
+            <a:off x="640080" y="5989320"/>
+            <a:ext cx="10972800" cy="731520"/>
+          </a:xfrm>
+          <a:prstGeom prst="rect">
+            <a:avLst/>
+          </a:prstGeom>
+          <a:noFill/>
+        </p:spPr>
+        <p:txBody>
+          <a:bodyPr wrap="square">
+            <a:spAutoFit/>
+          </a:bodyPr>
+          <a:lstStyle/>
+          <a:p>
+            <a:pPr algn="l">
+              <a:lnSpc>
+                <a:spcPct val="100000"/>
+              </a:lnSpc>
+            </a:pPr>
+            <a:r>
+              <a:rPr sz="1500" b="0" i="1">
+                <a:solidFill>
+                  <a:srgbClr val="0F2A43"/>
+                </a:solidFill>
+                <a:latin typeface="Times New Roman"/>
+              </a:rPr>
+              <a:t>Transparency is not automatically just — its design determines who it protects.</a:t>
+            </a:r>
+          </a:p>
+        </p:txBody>
+      </p:sp>
+    </p:spTree>
+  </p:cSld>
+  <p:clrMapOvr>
+    <a:masterClrMapping/>
+  </p:clrMapOvr>
+</p:sld>
+</file>
+
+<file path=ppt/slides/slide19.xml><?xml version="1.0" encoding="utf-8"?>
+<p:sld xmlns:a="http://schemas.openxmlformats.org/drawingml/2006/main" xmlns:p="http://schemas.openxmlformats.org/presentationml/2006/main" xmlns:r="http://schemas.openxmlformats.org/officeDocument/2006/relationships">
+  <p:cSld>
+    <p:bg>
+      <p:bgPr>
+        <a:solidFill>
+          <a:srgbClr val="FFFFFF"/>
+        </a:solidFill>
+        <a:effectLst/>
+      </p:bgPr>
+    </p:bg>
+    <p:spTree>
+      <p:nvGrpSpPr>
+        <p:cNvPr id="1" name=""/>
+        <p:cNvGrpSpPr/>
+        <p:nvPr/>
+      </p:nvGrpSpPr>
+      <p:grpSpPr/>
+      <p:sp>
+        <p:nvSpPr>
+          <p:cNvPr id="2" name="Rectangle 1"/>
+          <p:cNvSpPr/>
+          <p:nvPr/>
+        </p:nvSpPr>
+        <p:spPr>
+          <a:xfrm>
+            <a:off x="0" y="0"/>
+            <a:ext cx="12191695" cy="1143000"/>
+          </a:xfrm>
+          <a:prstGeom prst="rect">
+            <a:avLst/>
+          </a:prstGeom>
+          <a:solidFill>
+            <a:srgbClr val="0F2A43"/>
+          </a:solidFill>
+          <a:ln>
+            <a:noFill/>
+          </a:ln>
+          <a:effectLst/>
+        </p:spPr>
+        <p:style>
+          <a:lnRef idx="1">
+            <a:schemeClr val="accent1"/>
+          </a:lnRef>
+          <a:fillRef idx="3">
+            <a:schemeClr val="accent1"/>
+          </a:fillRef>
+          <a:effectRef idx="2">
+            <a:schemeClr val="accent1"/>
+          </a:effectRef>
+          <a:fontRef idx="minor">
+            <a:schemeClr val="lt1"/>
+          </a:fontRef>
+        </p:style>
+        <p:txBody>
+          <a:bodyPr rtlCol="0" anchor="ctr"/>
+          <a:lstStyle/>
+          <a:p>
+            <a:pPr algn="ctr"/>
+          </a:p>
+        </p:txBody>
+      </p:sp>
+      <p:sp>
+        <p:nvSpPr>
+          <p:cNvPr id="3" name="Rectangle 2"/>
+          <p:cNvSpPr/>
+          <p:nvPr/>
+        </p:nvSpPr>
+        <p:spPr>
+          <a:xfrm>
+            <a:off x="0" y="1143000"/>
+            <a:ext cx="12191695" cy="54864"/>
+          </a:xfrm>
+          <a:prstGeom prst="rect">
+            <a:avLst/>
+          </a:prstGeom>
+          <a:solidFill>
+            <a:srgbClr val="C08A2B"/>
+          </a:solidFill>
+          <a:ln>
+            <a:noFill/>
+          </a:ln>
+          <a:effectLst/>
+        </p:spPr>
+        <p:style>
+          <a:lnRef idx="1">
+            <a:schemeClr val="accent1"/>
+          </a:lnRef>
+          <a:fillRef idx="3">
+            <a:schemeClr val="accent1"/>
+          </a:fillRef>
+          <a:effectRef idx="2">
+            <a:schemeClr val="accent1"/>
+          </a:effectRef>
+          <a:fontRef idx="minor">
+            <a:schemeClr val="lt1"/>
+          </a:fontRef>
+        </p:style>
+        <p:txBody>
+          <a:bodyPr rtlCol="0" anchor="ctr"/>
+          <a:lstStyle/>
+          <a:p>
+            <a:pPr algn="ctr"/>
+          </a:p>
+        </p:txBody>
+      </p:sp>
+      <p:sp>
+        <p:nvSpPr>
+          <p:cNvPr id="4" name="TextBox 3"/>
+          <p:cNvSpPr txBox="1"/>
+          <p:nvPr/>
+        </p:nvSpPr>
+        <p:spPr>
+          <a:xfrm>
+            <a:off x="548640" y="182880"/>
+            <a:ext cx="10515600" cy="731520"/>
+          </a:xfrm>
+          <a:prstGeom prst="rect">
+            <a:avLst/>
+          </a:prstGeom>
+          <a:noFill/>
+        </p:spPr>
+        <p:txBody>
+          <a:bodyPr wrap="square">
+            <a:spAutoFit/>
+          </a:bodyPr>
+          <a:lstStyle/>
+          <a:p>
+            <a:pPr algn="l">
+              <a:lnSpc>
+                <a:spcPct val="100000"/>
+              </a:lnSpc>
+            </a:pPr>
+            <a:r>
+              <a:rPr sz="1300" b="1" i="0">
+                <a:solidFill>
+                  <a:srgbClr val="C08A2B"/>
+                </a:solidFill>
+                <a:latin typeface="Times New Roman"/>
+              </a:rPr>
+              <a:t>PART 4  •  LESSONS</a:t>
+            </a:r>
+          </a:p>
+        </p:txBody>
+      </p:sp>
+      <p:sp>
+        <p:nvSpPr>
+          <p:cNvPr id="5" name="TextBox 4"/>
+          <p:cNvSpPr txBox="1"/>
+          <p:nvPr/>
+        </p:nvSpPr>
+        <p:spPr>
+          <a:xfrm>
+            <a:off x="548640" y="475488"/>
+            <a:ext cx="11064240" cy="731520"/>
+          </a:xfrm>
+          <a:prstGeom prst="rect">
+            <a:avLst/>
+          </a:prstGeom>
+          <a:noFill/>
+        </p:spPr>
+        <p:txBody>
+          <a:bodyPr wrap="square">
+            <a:spAutoFit/>
+          </a:bodyPr>
+          <a:lstStyle/>
+          <a:p>
+            <a:pPr algn="l">
+              <a:lnSpc>
+                <a:spcPct val="100000"/>
+              </a:lnSpc>
+            </a:pPr>
+            <a:r>
+              <a:rPr sz="2600" b="1" i="0">
+                <a:solidFill>
+                  <a:srgbClr val="FFFFFF"/>
+                </a:solidFill>
+                <a:latin typeface="Times New Roman"/>
+              </a:rPr>
+              <a:t>Reform Proposals &amp; a Japan Comparison</a:t>
+            </a:r>
+          </a:p>
+        </p:txBody>
+      </p:sp>
+      <p:sp>
+        <p:nvSpPr>
+          <p:cNvPr id="6" name="TextBox 5"/>
+          <p:cNvSpPr txBox="1"/>
+          <p:nvPr/>
+        </p:nvSpPr>
+        <p:spPr>
+          <a:xfrm>
+            <a:off x="640080" y="1463040"/>
+            <a:ext cx="6766560" cy="4572000"/>
+          </a:xfrm>
+          <a:prstGeom prst="rect">
+            <a:avLst/>
+          </a:prstGeom>
+          <a:noFill/>
+        </p:spPr>
+        <p:txBody>
+          <a:bodyPr wrap="square">
+            <a:spAutoFit/>
+          </a:bodyPr>
+          <a:lstStyle/>
+          <a:p>
+            <a:pPr>
+              <a:lnSpc>
+                <a:spcPct val="105000"/>
+              </a:lnSpc>
+              <a:spcAft>
+                <a:spcPts val="1500"/>
+              </a:spcAft>
+            </a:pPr>
+            <a:r>
+              <a:rPr sz="1800">
+                <a:solidFill>
+                  <a:srgbClr val="334455"/>
+                </a:solidFill>
+                <a:latin typeface="Times New Roman"/>
+              </a:rPr>
+              <a:t>•  Faster, better-resourced MLAT and extradition channels.</a:t>
+            </a:r>
+          </a:p>
+          <a:p>
+            <a:pPr>
+              <a:lnSpc>
+                <a:spcPct val="105000"/>
+              </a:lnSpc>
+              <a:spcAft>
+                <a:spcPts val="1500"/>
+              </a:spcAft>
+            </a:pPr>
+            <a:r>
+              <a:rPr sz="1800">
+                <a:solidFill>
+                  <a:srgbClr val="334455"/>
+                </a:solidFill>
+                <a:latin typeface="Times New Roman"/>
+              </a:rPr>
+              <a:t>•  Victim-centred disclosure rules that shield identities by default.</a:t>
+            </a:r>
+          </a:p>
+          <a:p>
+            <a:pPr>
+              <a:lnSpc>
+                <a:spcPct val="105000"/>
+              </a:lnSpc>
+              <a:spcAft>
+                <a:spcPts val="1500"/>
+              </a:spcAft>
+            </a:pPr>
+            <a:r>
+              <a:rPr sz="1800">
+                <a:solidFill>
+                  <a:srgbClr val="334455"/>
+                </a:solidFill>
+                <a:latin typeface="Times New Roman"/>
+              </a:rPr>
+              <a:t>•  Stronger cross-border asset tracing and recovery.</a:t>
+            </a:r>
+          </a:p>
+          <a:p>
+            <a:pPr>
+              <a:lnSpc>
+                <a:spcPct val="105000"/>
+              </a:lnSpc>
+              <a:spcAft>
+                <a:spcPts val="1500"/>
+              </a:spcAft>
+            </a:pPr>
+            <a:r>
+              <a:rPr sz="1800">
+                <a:solidFill>
+                  <a:srgbClr val="334455"/>
+                </a:solidFill>
+                <a:latin typeface="Times New Roman"/>
+              </a:rPr>
+              <a:t>•  Harmonised definitions so cooperation isn't blocked by mismatched laws.</a:t>
+            </a:r>
+          </a:p>
+        </p:txBody>
+      </p:sp>
+      <p:sp>
+        <p:nvSpPr>
+          <p:cNvPr id="7" name="Rectangle 6"/>
+          <p:cNvSpPr/>
+          <p:nvPr/>
+        </p:nvSpPr>
+        <p:spPr>
+          <a:xfrm>
+            <a:off x="7680960" y="1554480"/>
+            <a:ext cx="3931920" cy="4480560"/>
+          </a:xfrm>
+          <a:prstGeom prst="rect">
+            <a:avLst/>
+          </a:prstGeom>
+          <a:solidFill>
+            <a:srgbClr val="F2F4F7"/>
+          </a:solidFill>
+          <a:ln>
+            <a:noFill/>
+          </a:ln>
+          <a:effectLst/>
+        </p:spPr>
+        <p:style>
+          <a:lnRef idx="1">
+            <a:schemeClr val="accent1"/>
+          </a:lnRef>
+          <a:fillRef idx="3">
+            <a:schemeClr val="accent1"/>
+          </a:fillRef>
+          <a:effectRef idx="2">
+            <a:schemeClr val="accent1"/>
+          </a:effectRef>
+          <a:fontRef idx="minor">
+            <a:schemeClr val="lt1"/>
+          </a:fontRef>
+        </p:style>
+        <p:txBody>
+          <a:bodyPr rtlCol="0" anchor="ctr"/>
+          <a:lstStyle/>
+          <a:p>
+            <a:pPr algn="ctr"/>
+          </a:p>
+        </p:txBody>
+      </p:sp>
+      <p:sp>
+        <p:nvSpPr>
+          <p:cNvPr id="8" name="TextBox 7"/>
+          <p:cNvSpPr txBox="1"/>
+          <p:nvPr/>
+        </p:nvSpPr>
+        <p:spPr>
+          <a:xfrm>
+            <a:off x="7955279" y="1783080"/>
+            <a:ext cx="3474720" cy="731520"/>
+          </a:xfrm>
+          <a:prstGeom prst="rect">
+            <a:avLst/>
+          </a:prstGeom>
+          <a:noFill/>
+        </p:spPr>
+        <p:txBody>
+          <a:bodyPr wrap="square">
+            <a:spAutoFit/>
+          </a:bodyPr>
+          <a:lstStyle/>
+          <a:p>
+            <a:pPr algn="l">
+              <a:lnSpc>
+                <a:spcPct val="100000"/>
+              </a:lnSpc>
+            </a:pPr>
+            <a:r>
+              <a:rPr sz="1400" b="1" i="0">
+                <a:solidFill>
+                  <a:srgbClr val="C08A2B"/>
+                </a:solidFill>
+                <a:latin typeface="Times New Roman"/>
+              </a:rPr>
+              <a:t>JAPAN ANGLE</a:t>
+            </a:r>
+          </a:p>
+        </p:txBody>
+      </p:sp>
+      <p:sp>
+        <p:nvSpPr>
+          <p:cNvPr id="9" name="TextBox 8"/>
+          <p:cNvSpPr txBox="1"/>
+          <p:nvPr/>
+        </p:nvSpPr>
+        <p:spPr>
+          <a:xfrm>
+            <a:off x="7955279" y="2286000"/>
+            <a:ext cx="3474720" cy="3657600"/>
+          </a:xfrm>
+          <a:prstGeom prst="rect">
+            <a:avLst/>
+          </a:prstGeom>
+          <a:noFill/>
+        </p:spPr>
+        <p:txBody>
+          <a:bodyPr wrap="square">
+            <a:spAutoFit/>
+          </a:bodyPr>
+          <a:lstStyle/>
+          <a:p>
+            <a:pPr algn="l">
+              <a:lnSpc>
+                <a:spcPct val="120000"/>
+              </a:lnSpc>
+            </a:pPr>
+            <a:r>
+              <a:rPr sz="1500" b="0" i="1">
+                <a:solidFill>
+                  <a:srgbClr val="334455"/>
+                </a:solidFill>
+                <a:latin typeface="Times New Roman"/>
+              </a:rPr>
+              <a:t>Japan has an anti-trafficking action framework and is assessed annually in the US State Department's TIP Report — a useful benchmark for how a non-Western system measures up on cross-border cooperation.</a:t>
             </a:r>
           </a:p>
         </p:txBody>
@@ -3425,8 +6973,8 @@
         </p:nvSpPr>
         <p:spPr>
           <a:xfrm>
-            <a:off x="548640" y="164592"/>
-            <a:ext cx="10058400" cy="365760"/>
+            <a:off x="548640" y="182880"/>
+            <a:ext cx="10515600" cy="731520"/>
           </a:xfrm>
           <a:prstGeom prst="rect">
             <a:avLst/>
@@ -3434,7 +6982,7 @@
           <a:noFill/>
         </p:spPr>
         <p:txBody>
-          <a:bodyPr wrap="square" anchor="t">
+          <a:bodyPr wrap="square">
             <a:spAutoFit/>
           </a:bodyPr>
           <a:lstStyle/>
@@ -3464,8 +7012,8 @@
         </p:nvSpPr>
         <p:spPr>
           <a:xfrm>
-            <a:off x="548640" y="457200"/>
-            <a:ext cx="10972800" cy="640080"/>
+            <a:off x="548640" y="475488"/>
+            <a:ext cx="11064240" cy="731520"/>
           </a:xfrm>
           <a:prstGeom prst="rect">
             <a:avLst/>
@@ -3473,7 +7021,7 @@
           <a:noFill/>
         </p:spPr>
         <p:txBody>
-          <a:bodyPr wrap="square" anchor="t">
+          <a:bodyPr wrap="square">
             <a:spAutoFit/>
           </a:bodyPr>
           <a:lstStyle/>
@@ -3547,63 +7095,8 @@
         </p:nvSpPr>
         <p:spPr>
           <a:xfrm>
-            <a:off x="822960" y="1627632"/>
+            <a:off x="822960" y="1664208"/>
             <a:ext cx="10515600" cy="914400"/>
-          </a:xfrm>
-          <a:prstGeom prst="rect">
-            <a:avLst/>
-          </a:prstGeom>
-          <a:noFill/>
-        </p:spPr>
-        <p:txBody>
-          <a:bodyPr wrap="square" anchor="t">
-            <a:spAutoFit/>
-          </a:bodyPr>
-          <a:lstStyle/>
-          <a:p>
-            <a:pPr algn="l">
-              <a:lnSpc>
-                <a:spcPct val="110000"/>
-              </a:lnSpc>
-            </a:pPr>
-            <a:r>
-              <a:rPr sz="1900" b="1" i="1">
-                <a:solidFill>
-                  <a:srgbClr val="0F2A43"/>
-                </a:solidFill>
-                <a:latin typeface="Times New Roman"/>
-              </a:rPr>
-              <a:t>Why is transnational sexual exploitation so hard to prosecute — and what do</a:t>
-            </a:r>
-          </a:p>
-          <a:p>
-            <a:pPr algn="l">
-              <a:lnSpc>
-                <a:spcPct val="110000"/>
-              </a:lnSpc>
-            </a:pPr>
-            <a:r>
-              <a:rPr sz="1900" b="1" i="1">
-                <a:solidFill>
-                  <a:srgbClr val="0F2A43"/>
-                </a:solidFill>
-                <a:latin typeface="Times New Roman"/>
-              </a:rPr>
-              <a:t>international law and cross-border cooperation need in order to work?</a:t>
-            </a:r>
-          </a:p>
-        </p:txBody>
-      </p:sp>
-      <p:sp>
-        <p:nvSpPr>
-          <p:cNvPr id="8" name="TextBox 7"/>
-          <p:cNvSpPr txBox="1"/>
-          <p:nvPr/>
-        </p:nvSpPr>
-        <p:spPr>
-          <a:xfrm>
-            <a:off x="640080" y="2926080"/>
-            <a:ext cx="10972800" cy="3291840"/>
           </a:xfrm>
           <a:prstGeom prst="rect">
             <a:avLst/>
@@ -3616,12 +7109,51 @@
           </a:bodyPr>
           <a:lstStyle/>
           <a:p>
+            <a:pPr algn="l">
+              <a:lnSpc>
+                <a:spcPct val="110000"/>
+              </a:lnSpc>
+            </a:pPr>
+            <a:r>
+              <a:rPr sz="1900" b="1" i="1">
+                <a:solidFill>
+                  <a:srgbClr val="0F2A43"/>
+                </a:solidFill>
+                <a:latin typeface="Times New Roman"/>
+              </a:rPr>
+              <a:t>Why is transnational sexual exploitation so hard to prosecute — and what do international law and cross-border cooperation need in order to work?</a:t>
+            </a:r>
+          </a:p>
+        </p:txBody>
+      </p:sp>
+      <p:sp>
+        <p:nvSpPr>
+          <p:cNvPr id="8" name="TextBox 7"/>
+          <p:cNvSpPr txBox="1"/>
+          <p:nvPr/>
+        </p:nvSpPr>
+        <p:spPr>
+          <a:xfrm>
+            <a:off x="640080" y="2971800"/>
+            <a:ext cx="10972800" cy="4572000"/>
+          </a:xfrm>
+          <a:prstGeom prst="rect">
+            <a:avLst/>
+          </a:prstGeom>
+          <a:noFill/>
+        </p:spPr>
+        <p:txBody>
+          <a:bodyPr wrap="square">
+            <a:spAutoFit/>
+          </a:bodyPr>
+          <a:lstStyle/>
+          <a:p>
             <a:pPr>
               <a:lnSpc>
                 <a:spcPct val="105000"/>
               </a:lnSpc>
               <a:spcAft>
-                <a:spcPts val="1400"/>
+                <a:spcPts val="1500"/>
               </a:spcAft>
             </a:pPr>
             <a:r>
@@ -3640,7 +7172,7 @@
                 <a:spcPct val="105000"/>
               </a:lnSpc>
               <a:spcAft>
-                <a:spcPts val="1400"/>
+                <a:spcPts val="1500"/>
               </a:spcAft>
             </a:pPr>
             <a:r>
@@ -3659,7 +7191,7 @@
                 <a:spcPct val="105000"/>
               </a:lnSpc>
               <a:spcAft>
-                <a:spcPts val="1400"/>
+                <a:spcPts val="1500"/>
               </a:spcAft>
             </a:pPr>
             <a:r>
@@ -3678,7 +7210,7 @@
                 <a:spcPct val="105000"/>
               </a:lnSpc>
               <a:spcAft>
-                <a:spcPts val="1400"/>
+                <a:spcPts val="1500"/>
               </a:spcAft>
             </a:pPr>
             <a:r>
@@ -3701,8 +7233,8 @@
         </p:nvSpPr>
         <p:spPr>
           <a:xfrm>
-            <a:off x="640080" y="6126480"/>
-            <a:ext cx="10972800" cy="365760"/>
+            <a:off x="640080" y="6172200"/>
+            <a:ext cx="10972800" cy="731520"/>
           </a:xfrm>
           <a:prstGeom prst="rect">
             <a:avLst/>
@@ -3710,7 +7242,7 @@
           <a:noFill/>
         </p:spPr>
         <p:txBody>
-          <a:bodyPr wrap="square" anchor="t">
+          <a:bodyPr wrap="square">
             <a:spAutoFit/>
           </a:bodyPr>
           <a:lstStyle/>
@@ -3740,7 +7272,7 @@
 </p:sld>
 </file>
 
-<file path=ppt/slides/slide3.xml><?xml version="1.0" encoding="utf-8"?>
+<file path=ppt/slides/slide20.xml><?xml version="1.0" encoding="utf-8"?>
 <p:sld xmlns:a="http://schemas.openxmlformats.org/drawingml/2006/main" xmlns:p="http://schemas.openxmlformats.org/presentationml/2006/main" xmlns:r="http://schemas.openxmlformats.org/officeDocument/2006/relationships">
   <p:cSld>
     <p:bg>
@@ -3854,86 +7386,8 @@
         </p:nvSpPr>
         <p:spPr>
           <a:xfrm>
-            <a:off x="548640" y="164592"/>
-            <a:ext cx="10058400" cy="365760"/>
-          </a:xfrm>
-          <a:prstGeom prst="rect">
-            <a:avLst/>
-          </a:prstGeom>
-          <a:noFill/>
-        </p:spPr>
-        <p:txBody>
-          <a:bodyPr wrap="square" anchor="t">
-            <a:spAutoFit/>
-          </a:bodyPr>
-          <a:lstStyle/>
-          <a:p>
-            <a:pPr algn="l">
-              <a:lnSpc>
-                <a:spcPct val="100000"/>
-              </a:lnSpc>
-            </a:pPr>
-            <a:r>
-              <a:rPr sz="1300" b="1" i="0">
-                <a:solidFill>
-                  <a:srgbClr val="C08A2B"/>
-                </a:solidFill>
-                <a:latin typeface="Times New Roman"/>
-              </a:rPr>
-              <a:t>PART 1  •  FRAMING</a:t>
-            </a:r>
-          </a:p>
-        </p:txBody>
-      </p:sp>
-      <p:sp>
-        <p:nvSpPr>
-          <p:cNvPr id="5" name="TextBox 4"/>
-          <p:cNvSpPr txBox="1"/>
-          <p:nvPr/>
-        </p:nvSpPr>
-        <p:spPr>
-          <a:xfrm>
-            <a:off x="548640" y="457200"/>
-            <a:ext cx="10972800" cy="640080"/>
-          </a:xfrm>
-          <a:prstGeom prst="rect">
-            <a:avLst/>
-          </a:prstGeom>
-          <a:noFill/>
-        </p:spPr>
-        <p:txBody>
-          <a:bodyPr wrap="square" anchor="t">
-            <a:spAutoFit/>
-          </a:bodyPr>
-          <a:lstStyle/>
-          <a:p>
-            <a:pPr algn="l">
-              <a:lnSpc>
-                <a:spcPct val="100000"/>
-              </a:lnSpc>
-            </a:pPr>
-            <a:r>
-              <a:rPr sz="2600" b="1" i="0">
-                <a:solidFill>
-                  <a:srgbClr val="FFFFFF"/>
-                </a:solidFill>
-                <a:latin typeface="Times New Roman"/>
-              </a:rPr>
-              <a:t>Why This Is an International Story</a:t>
-            </a:r>
-          </a:p>
-        </p:txBody>
-      </p:sp>
-      <p:sp>
-        <p:nvSpPr>
-          <p:cNvPr id="6" name="TextBox 5"/>
-          <p:cNvSpPr txBox="1"/>
-          <p:nvPr/>
-        </p:nvSpPr>
-        <p:spPr>
-          <a:xfrm>
-            <a:off x="640080" y="1463040"/>
-            <a:ext cx="6766560" cy="4937760"/>
+            <a:off x="548640" y="182880"/>
+            <a:ext cx="10515600" cy="731520"/>
           </a:xfrm>
           <a:prstGeom prst="rect">
             <a:avLst/>
@@ -3946,158 +7400,716 @@
           </a:bodyPr>
           <a:lstStyle/>
           <a:p>
-            <a:pPr>
-              <a:lnSpc>
-                <a:spcPct val="105000"/>
-              </a:lnSpc>
-              <a:spcAft>
-                <a:spcPts val="1400"/>
-              </a:spcAft>
-            </a:pPr>
-            <a:r>
-              <a:rPr sz="1800" b="1">
+            <a:pPr algn="l">
+              <a:lnSpc>
+                <a:spcPct val="100000"/>
+              </a:lnSpc>
+            </a:pPr>
+            <a:r>
+              <a:rPr sz="1300" b="1" i="0">
+                <a:solidFill>
+                  <a:srgbClr val="C08A2B"/>
+                </a:solidFill>
+                <a:latin typeface="Times New Roman"/>
+              </a:rPr>
+              <a:t>CONCLUSION</a:t>
+            </a:r>
+          </a:p>
+        </p:txBody>
+      </p:sp>
+      <p:sp>
+        <p:nvSpPr>
+          <p:cNvPr id="5" name="TextBox 4"/>
+          <p:cNvSpPr txBox="1"/>
+          <p:nvPr/>
+        </p:nvSpPr>
+        <p:spPr>
+          <a:xfrm>
+            <a:off x="548640" y="475488"/>
+            <a:ext cx="11064240" cy="731520"/>
+          </a:xfrm>
+          <a:prstGeom prst="rect">
+            <a:avLst/>
+          </a:prstGeom>
+          <a:noFill/>
+        </p:spPr>
+        <p:txBody>
+          <a:bodyPr wrap="square">
+            <a:spAutoFit/>
+          </a:bodyPr>
+          <a:lstStyle/>
+          <a:p>
+            <a:pPr algn="l">
+              <a:lnSpc>
+                <a:spcPct val="100000"/>
+              </a:lnSpc>
+            </a:pPr>
+            <a:r>
+              <a:rPr sz="2600" b="1" i="0">
+                <a:solidFill>
+                  <a:srgbClr val="FFFFFF"/>
+                </a:solidFill>
+                <a:latin typeface="Times New Roman"/>
+              </a:rPr>
+              <a:t>Four Takeaways</a:t>
+            </a:r>
+          </a:p>
+        </p:txBody>
+      </p:sp>
+      <p:sp>
+        <p:nvSpPr>
+          <p:cNvPr id="6" name="Rectangle 5"/>
+          <p:cNvSpPr/>
+          <p:nvPr/>
+        </p:nvSpPr>
+        <p:spPr>
+          <a:xfrm>
+            <a:off x="640080" y="1417320"/>
+            <a:ext cx="731520" cy="868680"/>
+          </a:xfrm>
+          <a:prstGeom prst="rect">
+            <a:avLst/>
+          </a:prstGeom>
+          <a:solidFill>
+            <a:srgbClr val="C08A2B"/>
+          </a:solidFill>
+          <a:ln>
+            <a:noFill/>
+          </a:ln>
+          <a:effectLst/>
+        </p:spPr>
+        <p:style>
+          <a:lnRef idx="1">
+            <a:schemeClr val="accent1"/>
+          </a:lnRef>
+          <a:fillRef idx="3">
+            <a:schemeClr val="accent1"/>
+          </a:fillRef>
+          <a:effectRef idx="2">
+            <a:schemeClr val="accent1"/>
+          </a:effectRef>
+          <a:fontRef idx="minor">
+            <a:schemeClr val="lt1"/>
+          </a:fontRef>
+        </p:style>
+        <p:txBody>
+          <a:bodyPr rtlCol="0" anchor="ctr"/>
+          <a:lstStyle/>
+          <a:p>
+            <a:pPr algn="ctr"/>
+          </a:p>
+        </p:txBody>
+      </p:sp>
+      <p:sp>
+        <p:nvSpPr>
+          <p:cNvPr id="7" name="TextBox 6"/>
+          <p:cNvSpPr txBox="1"/>
+          <p:nvPr/>
+        </p:nvSpPr>
+        <p:spPr>
+          <a:xfrm>
+            <a:off x="640080" y="1600200"/>
+            <a:ext cx="731520" cy="731520"/>
+          </a:xfrm>
+          <a:prstGeom prst="rect">
+            <a:avLst/>
+          </a:prstGeom>
+          <a:noFill/>
+        </p:spPr>
+        <p:txBody>
+          <a:bodyPr wrap="square">
+            <a:spAutoFit/>
+          </a:bodyPr>
+          <a:lstStyle/>
+          <a:p>
+            <a:pPr algn="ctr">
+              <a:lnSpc>
+                <a:spcPct val="100000"/>
+              </a:lnSpc>
+            </a:pPr>
+            <a:r>
+              <a:rPr sz="2400" b="1" i="0">
+                <a:solidFill>
+                  <a:srgbClr val="FFFFFF"/>
+                </a:solidFill>
+                <a:latin typeface="Times New Roman"/>
+              </a:rPr>
+              <a:t>01</a:t>
+            </a:r>
+          </a:p>
+        </p:txBody>
+      </p:sp>
+      <p:sp>
+        <p:nvSpPr>
+          <p:cNvPr id="8" name="TextBox 7"/>
+          <p:cNvSpPr txBox="1"/>
+          <p:nvPr/>
+        </p:nvSpPr>
+        <p:spPr>
+          <a:xfrm>
+            <a:off x="1508760" y="1453896"/>
+            <a:ext cx="9966960" cy="731520"/>
+          </a:xfrm>
+          <a:prstGeom prst="rect">
+            <a:avLst/>
+          </a:prstGeom>
+          <a:noFill/>
+        </p:spPr>
+        <p:txBody>
+          <a:bodyPr wrap="square">
+            <a:spAutoFit/>
+          </a:bodyPr>
+          <a:lstStyle/>
+          <a:p>
+            <a:pPr algn="l">
+              <a:lnSpc>
+                <a:spcPct val="100000"/>
+              </a:lnSpc>
+            </a:pPr>
+            <a:r>
+              <a:rPr sz="1800" b="1" i="0">
                 <a:solidFill>
                   <a:srgbClr val="0F2A43"/>
                 </a:solidFill>
                 <a:latin typeface="Times New Roman"/>
               </a:rPr>
-              <a:t>•  Who: </a:t>
-            </a:r>
-            <a:r>
-              <a:rPr sz="1800">
+              <a:t>Crime crosses borders — justice often doesn't.</a:t>
+            </a:r>
+          </a:p>
+        </p:txBody>
+      </p:sp>
+      <p:sp>
+        <p:nvSpPr>
+          <p:cNvPr id="9" name="TextBox 8"/>
+          <p:cNvSpPr txBox="1"/>
+          <p:nvPr/>
+        </p:nvSpPr>
+        <p:spPr>
+          <a:xfrm>
+            <a:off x="1508760" y="1837944"/>
+            <a:ext cx="9966960" cy="731520"/>
+          </a:xfrm>
+          <a:prstGeom prst="rect">
+            <a:avLst/>
+          </a:prstGeom>
+          <a:noFill/>
+        </p:spPr>
+        <p:txBody>
+          <a:bodyPr wrap="square">
+            <a:spAutoFit/>
+          </a:bodyPr>
+          <a:lstStyle/>
+          <a:p>
+            <a:pPr algn="l">
+              <a:lnSpc>
+                <a:spcPct val="100000"/>
+              </a:lnSpc>
+            </a:pPr>
+            <a:r>
+              <a:rPr sz="1400" b="0" i="1">
                 <a:solidFill>
                   <a:srgbClr val="334455"/>
                 </a:solidFill>
                 <a:latin typeface="Times New Roman"/>
               </a:rPr>
-              <a:t>Jeffrey Epstein, a financier whose network spanned multiple countries.</a:t>
-            </a:r>
-          </a:p>
-          <a:p>
-            <a:pPr>
-              <a:lnSpc>
-                <a:spcPct val="105000"/>
-              </a:lnSpc>
-              <a:spcAft>
-                <a:spcPts val="1400"/>
-              </a:spcAft>
-            </a:pPr>
-            <a:r>
-              <a:rPr sz="1800" b="1">
+              <a:t>Networks are global; enforcement is national.</a:t>
+            </a:r>
+          </a:p>
+        </p:txBody>
+      </p:sp>
+      <p:sp>
+        <p:nvSpPr>
+          <p:cNvPr id="10" name="Rectangle 9"/>
+          <p:cNvSpPr/>
+          <p:nvPr/>
+        </p:nvSpPr>
+        <p:spPr>
+          <a:xfrm>
+            <a:off x="640080" y="2404872"/>
+            <a:ext cx="731520" cy="868680"/>
+          </a:xfrm>
+          <a:prstGeom prst="rect">
+            <a:avLst/>
+          </a:prstGeom>
+          <a:solidFill>
+            <a:srgbClr val="C08A2B"/>
+          </a:solidFill>
+          <a:ln>
+            <a:noFill/>
+          </a:ln>
+          <a:effectLst/>
+        </p:spPr>
+        <p:style>
+          <a:lnRef idx="1">
+            <a:schemeClr val="accent1"/>
+          </a:lnRef>
+          <a:fillRef idx="3">
+            <a:schemeClr val="accent1"/>
+          </a:fillRef>
+          <a:effectRef idx="2">
+            <a:schemeClr val="accent1"/>
+          </a:effectRef>
+          <a:fontRef idx="minor">
+            <a:schemeClr val="lt1"/>
+          </a:fontRef>
+        </p:style>
+        <p:txBody>
+          <a:bodyPr rtlCol="0" anchor="ctr"/>
+          <a:lstStyle/>
+          <a:p>
+            <a:pPr algn="ctr"/>
+          </a:p>
+        </p:txBody>
+      </p:sp>
+      <p:sp>
+        <p:nvSpPr>
+          <p:cNvPr id="11" name="TextBox 10"/>
+          <p:cNvSpPr txBox="1"/>
+          <p:nvPr/>
+        </p:nvSpPr>
+        <p:spPr>
+          <a:xfrm>
+            <a:off x="640080" y="2587752"/>
+            <a:ext cx="731520" cy="731520"/>
+          </a:xfrm>
+          <a:prstGeom prst="rect">
+            <a:avLst/>
+          </a:prstGeom>
+          <a:noFill/>
+        </p:spPr>
+        <p:txBody>
+          <a:bodyPr wrap="square">
+            <a:spAutoFit/>
+          </a:bodyPr>
+          <a:lstStyle/>
+          <a:p>
+            <a:pPr algn="ctr">
+              <a:lnSpc>
+                <a:spcPct val="100000"/>
+              </a:lnSpc>
+            </a:pPr>
+            <a:r>
+              <a:rPr sz="2400" b="1" i="0">
+                <a:solidFill>
+                  <a:srgbClr val="FFFFFF"/>
+                </a:solidFill>
+                <a:latin typeface="Times New Roman"/>
+              </a:rPr>
+              <a:t>02</a:t>
+            </a:r>
+          </a:p>
+        </p:txBody>
+      </p:sp>
+      <p:sp>
+        <p:nvSpPr>
+          <p:cNvPr id="12" name="TextBox 11"/>
+          <p:cNvSpPr txBox="1"/>
+          <p:nvPr/>
+        </p:nvSpPr>
+        <p:spPr>
+          <a:xfrm>
+            <a:off x="1508760" y="2441448"/>
+            <a:ext cx="9966960" cy="731520"/>
+          </a:xfrm>
+          <a:prstGeom prst="rect">
+            <a:avLst/>
+          </a:prstGeom>
+          <a:noFill/>
+        </p:spPr>
+        <p:txBody>
+          <a:bodyPr wrap="square">
+            <a:spAutoFit/>
+          </a:bodyPr>
+          <a:lstStyle/>
+          <a:p>
+            <a:pPr algn="l">
+              <a:lnSpc>
+                <a:spcPct val="100000"/>
+              </a:lnSpc>
+            </a:pPr>
+            <a:r>
+              <a:rPr sz="1800" b="1" i="0">
                 <a:solidFill>
                   <a:srgbClr val="0F2A43"/>
                 </a:solidFill>
                 <a:latin typeface="Times New Roman"/>
               </a:rPr>
-              <a:t>•  2008: </a:t>
-            </a:r>
-            <a:r>
-              <a:rPr sz="1800">
+              <a:t>The legal tools already exist.</a:t>
+            </a:r>
+          </a:p>
+        </p:txBody>
+      </p:sp>
+      <p:sp>
+        <p:nvSpPr>
+          <p:cNvPr id="13" name="TextBox 12"/>
+          <p:cNvSpPr txBox="1"/>
+          <p:nvPr/>
+        </p:nvSpPr>
+        <p:spPr>
+          <a:xfrm>
+            <a:off x="1508760" y="2825496"/>
+            <a:ext cx="9966960" cy="731520"/>
+          </a:xfrm>
+          <a:prstGeom prst="rect">
+            <a:avLst/>
+          </a:prstGeom>
+          <a:noFill/>
+        </p:spPr>
+        <p:txBody>
+          <a:bodyPr wrap="square">
+            <a:spAutoFit/>
+          </a:bodyPr>
+          <a:lstStyle/>
+          <a:p>
+            <a:pPr algn="l">
+              <a:lnSpc>
+                <a:spcPct val="100000"/>
+              </a:lnSpc>
+            </a:pPr>
+            <a:r>
+              <a:rPr sz="1400" b="0" i="1">
                 <a:solidFill>
                   <a:srgbClr val="334455"/>
                 </a:solidFill>
                 <a:latin typeface="Times New Roman"/>
               </a:rPr>
-              <a:t>A lenient Florida plea deal — state charges, limited accountability.</a:t>
-            </a:r>
-          </a:p>
-          <a:p>
-            <a:pPr>
-              <a:lnSpc>
-                <a:spcPct val="105000"/>
-              </a:lnSpc>
-              <a:spcAft>
-                <a:spcPts val="1400"/>
-              </a:spcAft>
-            </a:pPr>
-            <a:r>
-              <a:rPr sz="1800" b="1">
+              <a:t>Palermo &amp; UNTOC provide the framework; coordination is the gap.</a:t>
+            </a:r>
+          </a:p>
+        </p:txBody>
+      </p:sp>
+      <p:sp>
+        <p:nvSpPr>
+          <p:cNvPr id="14" name="Rectangle 13"/>
+          <p:cNvSpPr/>
+          <p:nvPr/>
+        </p:nvSpPr>
+        <p:spPr>
+          <a:xfrm>
+            <a:off x="640080" y="3392424"/>
+            <a:ext cx="731520" cy="868680"/>
+          </a:xfrm>
+          <a:prstGeom prst="rect">
+            <a:avLst/>
+          </a:prstGeom>
+          <a:solidFill>
+            <a:srgbClr val="C08A2B"/>
+          </a:solidFill>
+          <a:ln>
+            <a:noFill/>
+          </a:ln>
+          <a:effectLst/>
+        </p:spPr>
+        <p:style>
+          <a:lnRef idx="1">
+            <a:schemeClr val="accent1"/>
+          </a:lnRef>
+          <a:fillRef idx="3">
+            <a:schemeClr val="accent1"/>
+          </a:fillRef>
+          <a:effectRef idx="2">
+            <a:schemeClr val="accent1"/>
+          </a:effectRef>
+          <a:fontRef idx="minor">
+            <a:schemeClr val="lt1"/>
+          </a:fontRef>
+        </p:style>
+        <p:txBody>
+          <a:bodyPr rtlCol="0" anchor="ctr"/>
+          <a:lstStyle/>
+          <a:p>
+            <a:pPr algn="ctr"/>
+          </a:p>
+        </p:txBody>
+      </p:sp>
+      <p:sp>
+        <p:nvSpPr>
+          <p:cNvPr id="15" name="TextBox 14"/>
+          <p:cNvSpPr txBox="1"/>
+          <p:nvPr/>
+        </p:nvSpPr>
+        <p:spPr>
+          <a:xfrm>
+            <a:off x="640080" y="3575304"/>
+            <a:ext cx="731520" cy="731520"/>
+          </a:xfrm>
+          <a:prstGeom prst="rect">
+            <a:avLst/>
+          </a:prstGeom>
+          <a:noFill/>
+        </p:spPr>
+        <p:txBody>
+          <a:bodyPr wrap="square">
+            <a:spAutoFit/>
+          </a:bodyPr>
+          <a:lstStyle/>
+          <a:p>
+            <a:pPr algn="ctr">
+              <a:lnSpc>
+                <a:spcPct val="100000"/>
+              </a:lnSpc>
+            </a:pPr>
+            <a:r>
+              <a:rPr sz="2400" b="1" i="0">
+                <a:solidFill>
+                  <a:srgbClr val="FFFFFF"/>
+                </a:solidFill>
+                <a:latin typeface="Times New Roman"/>
+              </a:rPr>
+              <a:t>03</a:t>
+            </a:r>
+          </a:p>
+        </p:txBody>
+      </p:sp>
+      <p:sp>
+        <p:nvSpPr>
+          <p:cNvPr id="16" name="TextBox 15"/>
+          <p:cNvSpPr txBox="1"/>
+          <p:nvPr/>
+        </p:nvSpPr>
+        <p:spPr>
+          <a:xfrm>
+            <a:off x="1508760" y="3429000"/>
+            <a:ext cx="9966960" cy="731520"/>
+          </a:xfrm>
+          <a:prstGeom prst="rect">
+            <a:avLst/>
+          </a:prstGeom>
+          <a:noFill/>
+        </p:spPr>
+        <p:txBody>
+          <a:bodyPr wrap="square">
+            <a:spAutoFit/>
+          </a:bodyPr>
+          <a:lstStyle/>
+          <a:p>
+            <a:pPr algn="l">
+              <a:lnSpc>
+                <a:spcPct val="100000"/>
+              </a:lnSpc>
+            </a:pPr>
+            <a:r>
+              <a:rPr sz="1800" b="1" i="0">
                 <a:solidFill>
                   <a:srgbClr val="0F2A43"/>
                 </a:solidFill>
                 <a:latin typeface="Times New Roman"/>
               </a:rPr>
-              <a:t>•  2019: </a:t>
-            </a:r>
-            <a:r>
-              <a:rPr sz="1800">
+              <a:t>Wealth buys time, not immunity.</a:t>
+            </a:r>
+          </a:p>
+        </p:txBody>
+      </p:sp>
+      <p:sp>
+        <p:nvSpPr>
+          <p:cNvPr id="17" name="TextBox 16"/>
+          <p:cNvSpPr txBox="1"/>
+          <p:nvPr/>
+        </p:nvSpPr>
+        <p:spPr>
+          <a:xfrm>
+            <a:off x="1508760" y="3813048"/>
+            <a:ext cx="9966960" cy="731520"/>
+          </a:xfrm>
+          <a:prstGeom prst="rect">
+            <a:avLst/>
+          </a:prstGeom>
+          <a:noFill/>
+        </p:spPr>
+        <p:txBody>
+          <a:bodyPr wrap="square">
+            <a:spAutoFit/>
+          </a:bodyPr>
+          <a:lstStyle/>
+          <a:p>
+            <a:pPr algn="l">
+              <a:lnSpc>
+                <a:spcPct val="100000"/>
+              </a:lnSpc>
+            </a:pPr>
+            <a:r>
+              <a:rPr sz="1400" b="0" i="1">
                 <a:solidFill>
                   <a:srgbClr val="334455"/>
                 </a:solidFill>
                 <a:latin typeface="Times New Roman"/>
               </a:rPr>
-              <a:t>Federal sex-trafficking charges in New York; Epstein died in custody.</a:t>
-            </a:r>
-          </a:p>
-          <a:p>
-            <a:pPr>
-              <a:lnSpc>
-                <a:spcPct val="105000"/>
-              </a:lnSpc>
-              <a:spcAft>
-                <a:spcPts val="1400"/>
-              </a:spcAft>
-            </a:pPr>
-            <a:r>
-              <a:rPr sz="1800">
+              <a:t>Mobility delayed — but did not finally prevent — accountability.</a:t>
+            </a:r>
+          </a:p>
+        </p:txBody>
+      </p:sp>
+      <p:sp>
+        <p:nvSpPr>
+          <p:cNvPr id="18" name="Rectangle 17"/>
+          <p:cNvSpPr/>
+          <p:nvPr/>
+        </p:nvSpPr>
+        <p:spPr>
+          <a:xfrm>
+            <a:off x="640080" y="4379976"/>
+            <a:ext cx="731520" cy="868680"/>
+          </a:xfrm>
+          <a:prstGeom prst="rect">
+            <a:avLst/>
+          </a:prstGeom>
+          <a:solidFill>
+            <a:srgbClr val="C08A2B"/>
+          </a:solidFill>
+          <a:ln>
+            <a:noFill/>
+          </a:ln>
+          <a:effectLst/>
+        </p:spPr>
+        <p:style>
+          <a:lnRef idx="1">
+            <a:schemeClr val="accent1"/>
+          </a:lnRef>
+          <a:fillRef idx="3">
+            <a:schemeClr val="accent1"/>
+          </a:fillRef>
+          <a:effectRef idx="2">
+            <a:schemeClr val="accent1"/>
+          </a:effectRef>
+          <a:fontRef idx="minor">
+            <a:schemeClr val="lt1"/>
+          </a:fontRef>
+        </p:style>
+        <p:txBody>
+          <a:bodyPr rtlCol="0" anchor="ctr"/>
+          <a:lstStyle/>
+          <a:p>
+            <a:pPr algn="ctr"/>
+          </a:p>
+        </p:txBody>
+      </p:sp>
+      <p:sp>
+        <p:nvSpPr>
+          <p:cNvPr id="19" name="TextBox 18"/>
+          <p:cNvSpPr txBox="1"/>
+          <p:nvPr/>
+        </p:nvSpPr>
+        <p:spPr>
+          <a:xfrm>
+            <a:off x="640080" y="4562856"/>
+            <a:ext cx="731520" cy="731520"/>
+          </a:xfrm>
+          <a:prstGeom prst="rect">
+            <a:avLst/>
+          </a:prstGeom>
+          <a:noFill/>
+        </p:spPr>
+        <p:txBody>
+          <a:bodyPr wrap="square">
+            <a:spAutoFit/>
+          </a:bodyPr>
+          <a:lstStyle/>
+          <a:p>
+            <a:pPr algn="ctr">
+              <a:lnSpc>
+                <a:spcPct val="100000"/>
+              </a:lnSpc>
+            </a:pPr>
+            <a:r>
+              <a:rPr sz="2400" b="1" i="0">
+                <a:solidFill>
+                  <a:srgbClr val="FFFFFF"/>
+                </a:solidFill>
+                <a:latin typeface="Times New Roman"/>
+              </a:rPr>
+              <a:t>04</a:t>
+            </a:r>
+          </a:p>
+        </p:txBody>
+      </p:sp>
+      <p:sp>
+        <p:nvSpPr>
+          <p:cNvPr id="20" name="TextBox 19"/>
+          <p:cNvSpPr txBox="1"/>
+          <p:nvPr/>
+        </p:nvSpPr>
+        <p:spPr>
+          <a:xfrm>
+            <a:off x="1508760" y="4416552"/>
+            <a:ext cx="9966960" cy="731520"/>
+          </a:xfrm>
+          <a:prstGeom prst="rect">
+            <a:avLst/>
+          </a:prstGeom>
+          <a:noFill/>
+        </p:spPr>
+        <p:txBody>
+          <a:bodyPr wrap="square">
+            <a:spAutoFit/>
+          </a:bodyPr>
+          <a:lstStyle/>
+          <a:p>
+            <a:pPr algn="l">
+              <a:lnSpc>
+                <a:spcPct val="100000"/>
+              </a:lnSpc>
+            </a:pPr>
+            <a:r>
+              <a:rPr sz="1800" b="1" i="0">
+                <a:solidFill>
+                  <a:srgbClr val="0F2A43"/>
+                </a:solidFill>
+                <a:latin typeface="Times New Roman"/>
+              </a:rPr>
+              <a:t>Transparency must protect victims.</a:t>
+            </a:r>
+          </a:p>
+        </p:txBody>
+      </p:sp>
+      <p:sp>
+        <p:nvSpPr>
+          <p:cNvPr id="21" name="TextBox 20"/>
+          <p:cNvSpPr txBox="1"/>
+          <p:nvPr/>
+        </p:nvSpPr>
+        <p:spPr>
+          <a:xfrm>
+            <a:off x="1508760" y="4800600"/>
+            <a:ext cx="9966960" cy="731520"/>
+          </a:xfrm>
+          <a:prstGeom prst="rect">
+            <a:avLst/>
+          </a:prstGeom>
+          <a:noFill/>
+        </p:spPr>
+        <p:txBody>
+          <a:bodyPr wrap="square">
+            <a:spAutoFit/>
+          </a:bodyPr>
+          <a:lstStyle/>
+          <a:p>
+            <a:pPr algn="l">
+              <a:lnSpc>
+                <a:spcPct val="100000"/>
+              </a:lnSpc>
+            </a:pPr>
+            <a:r>
+              <a:rPr sz="1400" b="0" i="1">
                 <a:solidFill>
                   <a:srgbClr val="334455"/>
                 </a:solidFill>
                 <a:latin typeface="Times New Roman"/>
               </a:rPr>
-              <a:t>•  Cross-border recruitment of victims, including minors and foreign nationals.</a:t>
-            </a:r>
-          </a:p>
-          <a:p>
-            <a:pPr>
-              <a:lnSpc>
-                <a:spcPct val="105000"/>
-              </a:lnSpc>
-              <a:spcAft>
-                <a:spcPts val="1400"/>
-              </a:spcAft>
-            </a:pPr>
-            <a:r>
-              <a:rPr sz="1800">
-                <a:solidFill>
-                  <a:srgbClr val="334455"/>
-                </a:solidFill>
-                <a:latin typeface="Times New Roman"/>
-              </a:rPr>
-              <a:t>•  Offshore wealth and properties across the US, US Virgin Islands and Paris.</a:t>
-            </a:r>
-          </a:p>
-          <a:p>
-            <a:pPr>
-              <a:lnSpc>
-                <a:spcPct val="105000"/>
-              </a:lnSpc>
-              <a:spcAft>
-                <a:spcPts val="1400"/>
-              </a:spcAft>
-            </a:pPr>
-            <a:r>
-              <a:rPr sz="1800">
-                <a:solidFill>
-                  <a:srgbClr val="334455"/>
-                </a:solidFill>
-                <a:latin typeface="Times New Roman"/>
-              </a:rPr>
-              <a:t>•  A globe-spanning social network of internationally prominent figures.</a:t>
-            </a:r>
-          </a:p>
-        </p:txBody>
-      </p:sp>
-      <p:sp>
-        <p:nvSpPr>
-          <p:cNvPr id="7" name="Rectangle 6"/>
+              <a:t>Disclosure should expose enablers, not endanger survivors.</a:t>
+            </a:r>
+          </a:p>
+        </p:txBody>
+      </p:sp>
+      <p:sp>
+        <p:nvSpPr>
+          <p:cNvPr id="22" name="Rectangle 21"/>
           <p:cNvSpPr/>
           <p:nvPr/>
         </p:nvSpPr>
         <p:spPr>
           <a:xfrm>
-            <a:off x="7680960" y="1554480"/>
-            <a:ext cx="3931920" cy="4480560"/>
+            <a:off x="548640" y="5532120"/>
+            <a:ext cx="11064240" cy="1051560"/>
           </a:xfrm>
           <a:prstGeom prst="rect">
             <a:avLst/>
@@ -4134,53 +8146,14 @@
       </p:sp>
       <p:sp>
         <p:nvSpPr>
-          <p:cNvPr id="8" name="TextBox 7"/>
+          <p:cNvPr id="23" name="TextBox 22"/>
           <p:cNvSpPr txBox="1"/>
           <p:nvPr/>
         </p:nvSpPr>
         <p:spPr>
           <a:xfrm>
-            <a:off x="7955279" y="1783080"/>
-            <a:ext cx="3474720" cy="457200"/>
-          </a:xfrm>
-          <a:prstGeom prst="rect">
-            <a:avLst/>
-          </a:prstGeom>
-          <a:noFill/>
-        </p:spPr>
-        <p:txBody>
-          <a:bodyPr wrap="square" anchor="t">
-            <a:spAutoFit/>
-          </a:bodyPr>
-          <a:lstStyle/>
-          <a:p>
-            <a:pPr algn="l">
-              <a:lnSpc>
-                <a:spcPct val="100000"/>
-              </a:lnSpc>
-            </a:pPr>
-            <a:r>
-              <a:rPr sz="1400" b="1" i="0">
-                <a:solidFill>
-                  <a:srgbClr val="C08A2B"/>
-                </a:solidFill>
-                <a:latin typeface="Times New Roman"/>
-              </a:rPr>
-              <a:t>WHY IT'S "INTERNATIONAL"</a:t>
-            </a:r>
-          </a:p>
-        </p:txBody>
-      </p:sp>
-      <p:sp>
-        <p:nvSpPr>
-          <p:cNvPr id="9" name="TextBox 8"/>
-          <p:cNvSpPr txBox="1"/>
-          <p:nvPr/>
-        </p:nvSpPr>
-        <p:spPr>
-          <a:xfrm>
-            <a:off x="7955279" y="2286000"/>
-            <a:ext cx="3474720" cy="3657600"/>
+            <a:off x="777240" y="5650992"/>
+            <a:ext cx="10607040" cy="731520"/>
           </a:xfrm>
           <a:prstGeom prst="rect">
             <a:avLst/>
@@ -4193,98 +8166,245 @@
           </a:bodyPr>
           <a:lstStyle/>
           <a:p>
-            <a:pPr>
-              <a:lnSpc>
-                <a:spcPct val="105000"/>
-              </a:lnSpc>
-              <a:spcAft>
-                <a:spcPts val="1200"/>
-              </a:spcAft>
-            </a:pPr>
-            <a:r>
-              <a:rPr sz="1600">
+            <a:pPr algn="l">
+              <a:lnSpc>
+                <a:spcPct val="100000"/>
+              </a:lnSpc>
+            </a:pPr>
+            <a:r>
+              <a:rPr sz="1100" b="1" i="0">
+                <a:solidFill>
+                  <a:srgbClr val="C08A2B"/>
+                </a:solidFill>
+                <a:latin typeface="Times New Roman"/>
+              </a:rPr>
+              <a:t>SELECTED SOURCES &amp; INSTRUMENTS</a:t>
+            </a:r>
+          </a:p>
+        </p:txBody>
+      </p:sp>
+      <p:sp>
+        <p:nvSpPr>
+          <p:cNvPr id="24" name="TextBox 23"/>
+          <p:cNvSpPr txBox="1"/>
+          <p:nvPr/>
+        </p:nvSpPr>
+        <p:spPr>
+          <a:xfrm>
+            <a:off x="777240" y="5943600"/>
+            <a:ext cx="10607040" cy="640080"/>
+          </a:xfrm>
+          <a:prstGeom prst="rect">
+            <a:avLst/>
+          </a:prstGeom>
+          <a:noFill/>
+        </p:spPr>
+        <p:txBody>
+          <a:bodyPr wrap="square">
+            <a:spAutoFit/>
+          </a:bodyPr>
+          <a:lstStyle/>
+          <a:p>
+            <a:pPr algn="l">
+              <a:lnSpc>
+                <a:spcPct val="115000"/>
+              </a:lnSpc>
+            </a:pPr>
+            <a:r>
+              <a:rPr sz="1100" b="0" i="0">
                 <a:solidFill>
                   <a:srgbClr val="334455"/>
                 </a:solidFill>
                 <a:latin typeface="Times New Roman"/>
               </a:rPr>
-              <a:t>•  Victims moved across borders</a:t>
-            </a:r>
-          </a:p>
-          <a:p>
-            <a:pPr>
-              <a:lnSpc>
-                <a:spcPct val="105000"/>
-              </a:lnSpc>
-              <a:spcAft>
-                <a:spcPts val="1200"/>
-              </a:spcAft>
-            </a:pPr>
-            <a:r>
-              <a:rPr sz="1600">
-                <a:solidFill>
-                  <a:srgbClr val="334455"/>
-                </a:solidFill>
-                <a:latin typeface="Times New Roman"/>
-              </a:rPr>
-              <a:t>•  Money held offshore</a:t>
-            </a:r>
-          </a:p>
-          <a:p>
-            <a:pPr>
-              <a:lnSpc>
-                <a:spcPct val="105000"/>
-              </a:lnSpc>
-              <a:spcAft>
-                <a:spcPts val="1200"/>
-              </a:spcAft>
-            </a:pPr>
-            <a:r>
-              <a:rPr sz="1600">
-                <a:solidFill>
-                  <a:srgbClr val="334455"/>
-                </a:solidFill>
-                <a:latin typeface="Times New Roman"/>
-              </a:rPr>
-              <a:t>•  Multiple jurisdictions involved</a:t>
-            </a:r>
-          </a:p>
-          <a:p>
-            <a:pPr>
-              <a:lnSpc>
-                <a:spcPct val="105000"/>
-              </a:lnSpc>
-              <a:spcAft>
-                <a:spcPts val="1200"/>
-              </a:spcAft>
-            </a:pPr>
-            <a:r>
-              <a:rPr sz="1600">
-                <a:solidFill>
-                  <a:srgbClr val="334455"/>
-                </a:solidFill>
-                <a:latin typeface="Times New Roman"/>
-              </a:rPr>
-              <a:t>•  Foreign &amp; quasi-diplomatic figures</a:t>
-            </a:r>
-          </a:p>
-          <a:p>
-            <a:pPr>
-              <a:lnSpc>
-                <a:spcPct val="105000"/>
-              </a:lnSpc>
-              <a:spcAft>
-                <a:spcPts val="1200"/>
-              </a:spcAft>
-            </a:pPr>
-            <a:r>
-              <a:rPr sz="1600">
-                <a:solidFill>
-                  <a:srgbClr val="334455"/>
-                </a:solidFill>
-                <a:latin typeface="Times New Roman"/>
-              </a:rPr>
-              <a:t>•  → A test for international justice</a:t>
+              <a:t>Palermo Protocol (2000) · UN Convention against Transnational Organized Crime · US DOJ filings (US v. Epstein 2019; US v. Maxwell 2021) · US State Dept. Trafficking in Persons Reports · contemporary reporting on 2025 disclosures.</a:t>
+            </a:r>
+          </a:p>
+        </p:txBody>
+      </p:sp>
+    </p:spTree>
+  </p:cSld>
+  <p:clrMapOvr>
+    <a:masterClrMapping/>
+  </p:clrMapOvr>
+</p:sld>
+</file>
+
+<file path=ppt/slides/slide3.xml><?xml version="1.0" encoding="utf-8"?>
+<p:sld xmlns:a="http://schemas.openxmlformats.org/drawingml/2006/main" xmlns:p="http://schemas.openxmlformats.org/presentationml/2006/main" xmlns:r="http://schemas.openxmlformats.org/officeDocument/2006/relationships">
+  <p:cSld>
+    <p:bg>
+      <p:bgPr>
+        <a:solidFill>
+          <a:srgbClr val="0F2A43"/>
+        </a:solidFill>
+        <a:effectLst/>
+      </p:bgPr>
+    </p:bg>
+    <p:spTree>
+      <p:nvGrpSpPr>
+        <p:cNvPr id="1" name=""/>
+        <p:cNvGrpSpPr/>
+        <p:nvPr/>
+      </p:nvGrpSpPr>
+      <p:grpSpPr/>
+      <p:sp>
+        <p:nvSpPr>
+          <p:cNvPr id="2" name="Rectangle 1"/>
+          <p:cNvSpPr/>
+          <p:nvPr/>
+        </p:nvSpPr>
+        <p:spPr>
+          <a:xfrm>
+            <a:off x="822960" y="3246120"/>
+            <a:ext cx="2926080" cy="54864"/>
+          </a:xfrm>
+          <a:prstGeom prst="rect">
+            <a:avLst/>
+          </a:prstGeom>
+          <a:solidFill>
+            <a:srgbClr val="C08A2B"/>
+          </a:solidFill>
+          <a:ln>
+            <a:noFill/>
+          </a:ln>
+          <a:effectLst/>
+        </p:spPr>
+        <p:style>
+          <a:lnRef idx="1">
+            <a:schemeClr val="accent1"/>
+          </a:lnRef>
+          <a:fillRef idx="3">
+            <a:schemeClr val="accent1"/>
+          </a:fillRef>
+          <a:effectRef idx="2">
+            <a:schemeClr val="accent1"/>
+          </a:effectRef>
+          <a:fontRef idx="minor">
+            <a:schemeClr val="lt1"/>
+          </a:fontRef>
+        </p:style>
+        <p:txBody>
+          <a:bodyPr rtlCol="0" anchor="ctr"/>
+          <a:lstStyle/>
+          <a:p>
+            <a:pPr algn="ctr"/>
+          </a:p>
+        </p:txBody>
+      </p:sp>
+      <p:sp>
+        <p:nvSpPr>
+          <p:cNvPr id="3" name="TextBox 2"/>
+          <p:cNvSpPr txBox="1"/>
+          <p:nvPr/>
+        </p:nvSpPr>
+        <p:spPr>
+          <a:xfrm>
+            <a:off x="822960" y="2148840"/>
+            <a:ext cx="10515600" cy="731520"/>
+          </a:xfrm>
+          <a:prstGeom prst="rect">
+            <a:avLst/>
+          </a:prstGeom>
+          <a:noFill/>
+        </p:spPr>
+        <p:txBody>
+          <a:bodyPr wrap="square">
+            <a:spAutoFit/>
+          </a:bodyPr>
+          <a:lstStyle/>
+          <a:p>
+            <a:pPr algn="l">
+              <a:lnSpc>
+                <a:spcPct val="100000"/>
+              </a:lnSpc>
+            </a:pPr>
+            <a:r>
+              <a:rPr sz="2000" b="1" i="0">
+                <a:solidFill>
+                  <a:srgbClr val="C08A2B"/>
+                </a:solidFill>
+                <a:latin typeface="Times New Roman"/>
+              </a:rPr>
+              <a:t>PART 1</a:t>
+            </a:r>
+          </a:p>
+        </p:txBody>
+      </p:sp>
+      <p:sp>
+        <p:nvSpPr>
+          <p:cNvPr id="4" name="TextBox 3"/>
+          <p:cNvSpPr txBox="1"/>
+          <p:nvPr/>
+        </p:nvSpPr>
+        <p:spPr>
+          <a:xfrm>
+            <a:off x="822960" y="2514600"/>
+            <a:ext cx="10515600" cy="731520"/>
+          </a:xfrm>
+          <a:prstGeom prst="rect">
+            <a:avLst/>
+          </a:prstGeom>
+          <a:noFill/>
+        </p:spPr>
+        <p:txBody>
+          <a:bodyPr wrap="square">
+            <a:spAutoFit/>
+          </a:bodyPr>
+          <a:lstStyle/>
+          <a:p>
+            <a:pPr algn="l">
+              <a:lnSpc>
+                <a:spcPct val="100000"/>
+              </a:lnSpc>
+            </a:pPr>
+            <a:r>
+              <a:rPr sz="3400" b="1" i="0">
+                <a:solidFill>
+                  <a:srgbClr val="FFFFFF"/>
+                </a:solidFill>
+                <a:latin typeface="Times New Roman"/>
+              </a:rPr>
+              <a:t>Framing &amp; the International Scope</a:t>
+            </a:r>
+          </a:p>
+        </p:txBody>
+      </p:sp>
+      <p:sp>
+        <p:nvSpPr>
+          <p:cNvPr id="5" name="TextBox 4"/>
+          <p:cNvSpPr txBox="1"/>
+          <p:nvPr/>
+        </p:nvSpPr>
+        <p:spPr>
+          <a:xfrm>
+            <a:off x="822960" y="3474720"/>
+            <a:ext cx="9601200" cy="731520"/>
+          </a:xfrm>
+          <a:prstGeom prst="rect">
+            <a:avLst/>
+          </a:prstGeom>
+          <a:noFill/>
+        </p:spPr>
+        <p:txBody>
+          <a:bodyPr wrap="square">
+            <a:spAutoFit/>
+          </a:bodyPr>
+          <a:lstStyle/>
+          <a:p>
+            <a:pPr algn="l">
+              <a:lnSpc>
+                <a:spcPct val="110000"/>
+              </a:lnSpc>
+            </a:pPr>
+            <a:r>
+              <a:rPr sz="1800" b="0" i="1">
+                <a:solidFill>
+                  <a:srgbClr val="F2F4F7"/>
+                </a:solidFill>
+                <a:latin typeface="Times New Roman"/>
+              </a:rPr>
+              <a:t>Who Epstein was — and why this case crosses borders</a:t>
             </a:r>
           </a:p>
         </p:txBody>
@@ -4411,86 +8531,8 @@
         </p:nvSpPr>
         <p:spPr>
           <a:xfrm>
-            <a:off x="548640" y="164592"/>
-            <a:ext cx="10058400" cy="365760"/>
-          </a:xfrm>
-          <a:prstGeom prst="rect">
-            <a:avLst/>
-          </a:prstGeom>
-          <a:noFill/>
-        </p:spPr>
-        <p:txBody>
-          <a:bodyPr wrap="square" anchor="t">
-            <a:spAutoFit/>
-          </a:bodyPr>
-          <a:lstStyle/>
-          <a:p>
-            <a:pPr algn="l">
-              <a:lnSpc>
-                <a:spcPct val="100000"/>
-              </a:lnSpc>
-            </a:pPr>
-            <a:r>
-              <a:rPr sz="1300" b="1" i="0">
-                <a:solidFill>
-                  <a:srgbClr val="C08A2B"/>
-                </a:solidFill>
-                <a:latin typeface="Times New Roman"/>
-              </a:rPr>
-              <a:t>PART 2  •  LEGAL FRAMEWORK</a:t>
-            </a:r>
-          </a:p>
-        </p:txBody>
-      </p:sp>
-      <p:sp>
-        <p:nvSpPr>
-          <p:cNvPr id="5" name="TextBox 4"/>
-          <p:cNvSpPr txBox="1"/>
-          <p:nvPr/>
-        </p:nvSpPr>
-        <p:spPr>
-          <a:xfrm>
-            <a:off x="548640" y="457200"/>
-            <a:ext cx="10972800" cy="640080"/>
-          </a:xfrm>
-          <a:prstGeom prst="rect">
-            <a:avLst/>
-          </a:prstGeom>
-          <a:noFill/>
-        </p:spPr>
-        <p:txBody>
-          <a:bodyPr wrap="square" anchor="t">
-            <a:spAutoFit/>
-          </a:bodyPr>
-          <a:lstStyle/>
-          <a:p>
-            <a:pPr algn="l">
-              <a:lnSpc>
-                <a:spcPct val="100000"/>
-              </a:lnSpc>
-            </a:pPr>
-            <a:r>
-              <a:rPr sz="2600" b="1" i="0">
-                <a:solidFill>
-                  <a:srgbClr val="FFFFFF"/>
-                </a:solidFill>
-                <a:latin typeface="Times New Roman"/>
-              </a:rPr>
-              <a:t>Trafficking as a Transnational Crime</a:t>
-            </a:r>
-          </a:p>
-        </p:txBody>
-      </p:sp>
-      <p:sp>
-        <p:nvSpPr>
-          <p:cNvPr id="6" name="TextBox 5"/>
-          <p:cNvSpPr txBox="1"/>
-          <p:nvPr/>
-        </p:nvSpPr>
-        <p:spPr>
-          <a:xfrm>
-            <a:off x="640080" y="1463040"/>
-            <a:ext cx="10972800" cy="4937760"/>
+            <a:off x="548640" y="182880"/>
+            <a:ext cx="10515600" cy="731520"/>
           </a:xfrm>
           <a:prstGeom prst="rect">
             <a:avLst/>
@@ -4503,185 +8545,33 @@
           </a:bodyPr>
           <a:lstStyle/>
           <a:p>
-            <a:pPr>
-              <a:lnSpc>
-                <a:spcPct val="105000"/>
-              </a:lnSpc>
-              <a:spcAft>
-                <a:spcPts val="1400"/>
-              </a:spcAft>
-            </a:pPr>
-            <a:r>
-              <a:rPr sz="1800" b="1">
-                <a:solidFill>
-                  <a:srgbClr val="0F2A43"/>
-                </a:solidFill>
-                <a:latin typeface="Times New Roman"/>
-              </a:rPr>
-              <a:t>•  UN Palermo Protocol (2000): </a:t>
-            </a:r>
-            <a:r>
-              <a:rPr sz="1800">
-                <a:solidFill>
-                  <a:srgbClr val="334455"/>
-                </a:solidFill>
-                <a:latin typeface="Times New Roman"/>
-              </a:rPr>
-              <a:t>Defines trafficking in persons and obliges states to criminalise it.</a:t>
-            </a:r>
-          </a:p>
-          <a:p>
-            <a:pPr>
-              <a:lnSpc>
-                <a:spcPct val="105000"/>
-              </a:lnSpc>
-              <a:spcAft>
-                <a:spcPts val="1400"/>
-              </a:spcAft>
-            </a:pPr>
-            <a:r>
-              <a:rPr sz="1800" b="1">
-                <a:solidFill>
-                  <a:srgbClr val="0F2A43"/>
-                </a:solidFill>
-                <a:latin typeface="Times New Roman"/>
-              </a:rPr>
-              <a:t>•  UN Convention against Transnational Organized Crime (UNTOC): </a:t>
-            </a:r>
-            <a:r>
-              <a:rPr sz="1800">
-                <a:solidFill>
-                  <a:srgbClr val="334455"/>
-                </a:solidFill>
-                <a:latin typeface="Times New Roman"/>
-              </a:rPr>
-              <a:t>The parent framework for cooperation.</a:t>
-            </a:r>
-          </a:p>
-          <a:p>
-            <a:pPr>
-              <a:lnSpc>
-                <a:spcPct val="105000"/>
-              </a:lnSpc>
-              <a:spcAft>
-                <a:spcPts val="1400"/>
-              </a:spcAft>
-            </a:pPr>
-            <a:r>
-              <a:rPr sz="1800" b="1">
-                <a:solidFill>
-                  <a:srgbClr val="0F2A43"/>
-                </a:solidFill>
-                <a:latin typeface="Times New Roman"/>
-              </a:rPr>
-              <a:t>•  Jurisdiction: </a:t>
-            </a:r>
-            <a:r>
-              <a:rPr sz="1800">
-                <a:solidFill>
-                  <a:srgbClr val="334455"/>
-                </a:solidFill>
-                <a:latin typeface="Times New Roman"/>
-              </a:rPr>
-              <a:t>Which state may prosecute when conduct spans several countries?</a:t>
-            </a:r>
-          </a:p>
-          <a:p>
-            <a:pPr>
-              <a:lnSpc>
-                <a:spcPct val="105000"/>
-              </a:lnSpc>
-              <a:spcAft>
-                <a:spcPts val="1400"/>
-              </a:spcAft>
-            </a:pPr>
-            <a:r>
-              <a:rPr sz="1800" b="1">
-                <a:solidFill>
-                  <a:srgbClr val="0F2A43"/>
-                </a:solidFill>
-                <a:latin typeface="Times New Roman"/>
-              </a:rPr>
-              <a:t>•  Extradition &amp; MLATs: </a:t>
-            </a:r>
-            <a:r>
-              <a:rPr sz="1800">
-                <a:solidFill>
-                  <a:srgbClr val="334455"/>
-                </a:solidFill>
-                <a:latin typeface="Times New Roman"/>
-              </a:rPr>
-              <a:t>Mutual Legal Assistance Treaties enable evidence-sharing across borders.</a:t>
-            </a:r>
-          </a:p>
-          <a:p>
-            <a:pPr>
-              <a:lnSpc>
-                <a:spcPct val="105000"/>
-              </a:lnSpc>
-              <a:spcAft>
-                <a:spcPts val="1400"/>
-              </a:spcAft>
-            </a:pPr>
-            <a:r>
-              <a:rPr sz="1800" b="1">
-                <a:solidFill>
-                  <a:srgbClr val="0F2A43"/>
-                </a:solidFill>
-                <a:latin typeface="Times New Roman"/>
-              </a:rPr>
-              <a:t>•  Foreign nationals: </a:t>
-            </a:r>
-            <a:r>
-              <a:rPr sz="1800">
-                <a:solidFill>
-                  <a:srgbClr val="334455"/>
-                </a:solidFill>
-                <a:latin typeface="Times New Roman"/>
-              </a:rPr>
-              <a:t>Ghislaine Maxwell (UK) — convicted 2021 of sex-trafficking conspiracy.</a:t>
-            </a:r>
-          </a:p>
-          <a:p>
-            <a:pPr>
-              <a:lnSpc>
-                <a:spcPct val="105000"/>
-              </a:lnSpc>
-              <a:spcAft>
-                <a:spcPts val="1400"/>
-              </a:spcAft>
-            </a:pPr>
-            <a:r>
-              <a:rPr sz="1800" b="1">
-                <a:solidFill>
-                  <a:srgbClr val="0F2A43"/>
-                </a:solidFill>
-                <a:latin typeface="Times New Roman"/>
-              </a:rPr>
-              <a:t>•  Quasi-diplomatic complications: </a:t>
-            </a:r>
-            <a:r>
-              <a:rPr sz="1800">
-                <a:solidFill>
-                  <a:srgbClr val="334455"/>
-                </a:solidFill>
-                <a:latin typeface="Times New Roman"/>
-              </a:rPr>
-              <a:t>Prince Andrew settled a US civil case (2022) and later lost titles.</a:t>
-            </a:r>
-          </a:p>
-        </p:txBody>
-      </p:sp>
-      <p:sp>
-        <p:nvSpPr>
-          <p:cNvPr id="7" name="TextBox 6"/>
+            <a:pPr algn="l">
+              <a:lnSpc>
+                <a:spcPct val="100000"/>
+              </a:lnSpc>
+            </a:pPr>
+            <a:r>
+              <a:rPr sz="1300" b="1" i="0">
+                <a:solidFill>
+                  <a:srgbClr val="C08A2B"/>
+                </a:solidFill>
+                <a:latin typeface="Times New Roman"/>
+              </a:rPr>
+              <a:t>PART 1  •  BACKGROUND</a:t>
+            </a:r>
+          </a:p>
+        </p:txBody>
+      </p:sp>
+      <p:sp>
+        <p:nvSpPr>
+          <p:cNvPr id="5" name="TextBox 4"/>
           <p:cNvSpPr txBox="1"/>
           <p:nvPr/>
         </p:nvSpPr>
         <p:spPr>
           <a:xfrm>
-            <a:off x="640080" y="6126480"/>
-            <a:ext cx="10972800" cy="365760"/>
+            <a:off x="548640" y="475488"/>
+            <a:ext cx="11064240" cy="731520"/>
           </a:xfrm>
           <a:prstGeom prst="rect">
             <a:avLst/>
@@ -4689,7 +8579,7 @@
           <a:noFill/>
         </p:spPr>
         <p:txBody>
-          <a:bodyPr wrap="square" anchor="t">
+          <a:bodyPr wrap="square">
             <a:spAutoFit/>
           </a:bodyPr>
           <a:lstStyle/>
@@ -4700,13 +8590,280 @@
               </a:lnSpc>
             </a:pPr>
             <a:r>
-              <a:rPr sz="1400" b="1" i="1">
+              <a:rPr sz="2600" b="1" i="0">
+                <a:solidFill>
+                  <a:srgbClr val="FFFFFF"/>
+                </a:solidFill>
+                <a:latin typeface="Times New Roman"/>
+              </a:rPr>
+              <a:t>Who Was Jeffrey Epstein?</a:t>
+            </a:r>
+          </a:p>
+        </p:txBody>
+      </p:sp>
+      <p:sp>
+        <p:nvSpPr>
+          <p:cNvPr id="6" name="TextBox 5"/>
+          <p:cNvSpPr txBox="1"/>
+          <p:nvPr/>
+        </p:nvSpPr>
+        <p:spPr>
+          <a:xfrm>
+            <a:off x="640080" y="1463040"/>
+            <a:ext cx="6766560" cy="4572000"/>
+          </a:xfrm>
+          <a:prstGeom prst="rect">
+            <a:avLst/>
+          </a:prstGeom>
+          <a:noFill/>
+        </p:spPr>
+        <p:txBody>
+          <a:bodyPr wrap="square">
+            <a:spAutoFit/>
+          </a:bodyPr>
+          <a:lstStyle/>
+          <a:p>
+            <a:pPr>
+              <a:lnSpc>
+                <a:spcPct val="105000"/>
+              </a:lnSpc>
+              <a:spcAft>
+                <a:spcPts val="1600"/>
+              </a:spcAft>
+            </a:pPr>
+            <a:r>
+              <a:rPr sz="1800">
+                <a:solidFill>
+                  <a:srgbClr val="334455"/>
+                </a:solidFill>
+                <a:latin typeface="Times New Roman"/>
+              </a:rPr>
+              <a:t>•  A US financier who built extraordinary wealth and a network of powerful international contacts.</a:t>
+            </a:r>
+          </a:p>
+          <a:p>
+            <a:pPr>
+              <a:lnSpc>
+                <a:spcPct val="105000"/>
+              </a:lnSpc>
+              <a:spcAft>
+                <a:spcPts val="1600"/>
+              </a:spcAft>
+            </a:pPr>
+            <a:r>
+              <a:rPr sz="1800" b="1">
                 <a:solidFill>
                   <a:srgbClr val="0F2A43"/>
                 </a:solidFill>
                 <a:latin typeface="Times New Roman"/>
               </a:rPr>
-              <a:t>Takeaway: The law exists — the difficulty is coordinating sovereign systems.</a:t>
+              <a:t>•  2005–06: </a:t>
+            </a:r>
+            <a:r>
+              <a:rPr sz="1800">
+                <a:solidFill>
+                  <a:srgbClr val="334455"/>
+                </a:solidFill>
+                <a:latin typeface="Times New Roman"/>
+              </a:rPr>
+              <a:t>A Palm Beach (Florida) police investigation into abuse of minors.</a:t>
+            </a:r>
+          </a:p>
+          <a:p>
+            <a:pPr>
+              <a:lnSpc>
+                <a:spcPct val="105000"/>
+              </a:lnSpc>
+              <a:spcAft>
+                <a:spcPts val="1600"/>
+              </a:spcAft>
+            </a:pPr>
+            <a:r>
+              <a:rPr sz="1800" b="1">
+                <a:solidFill>
+                  <a:srgbClr val="0F2A43"/>
+                </a:solidFill>
+                <a:latin typeface="Times New Roman"/>
+              </a:rPr>
+              <a:t>•  2008: </a:t>
+            </a:r>
+            <a:r>
+              <a:rPr sz="1800">
+                <a:solidFill>
+                  <a:srgbClr val="334455"/>
+                </a:solidFill>
+                <a:latin typeface="Times New Roman"/>
+              </a:rPr>
+              <a:t>A controversial state plea deal; he registered as a sex offender.</a:t>
+            </a:r>
+          </a:p>
+          <a:p>
+            <a:pPr>
+              <a:lnSpc>
+                <a:spcPct val="105000"/>
+              </a:lnSpc>
+              <a:spcAft>
+                <a:spcPts val="1600"/>
+              </a:spcAft>
+            </a:pPr>
+            <a:r>
+              <a:rPr sz="1800" b="1">
+                <a:solidFill>
+                  <a:srgbClr val="0F2A43"/>
+                </a:solidFill>
+                <a:latin typeface="Times New Roman"/>
+              </a:rPr>
+              <a:t>•  2019: </a:t>
+            </a:r>
+            <a:r>
+              <a:rPr sz="1800">
+                <a:solidFill>
+                  <a:srgbClr val="334455"/>
+                </a:solidFill>
+                <a:latin typeface="Times New Roman"/>
+              </a:rPr>
+              <a:t>Arrested on federal sex-trafficking charges in New York.</a:t>
+            </a:r>
+          </a:p>
+          <a:p>
+            <a:pPr>
+              <a:lnSpc>
+                <a:spcPct val="105000"/>
+              </a:lnSpc>
+              <a:spcAft>
+                <a:spcPts val="1600"/>
+              </a:spcAft>
+            </a:pPr>
+            <a:r>
+              <a:rPr sz="1800">
+                <a:solidFill>
+                  <a:srgbClr val="334455"/>
+                </a:solidFill>
+                <a:latin typeface="Times New Roman"/>
+              </a:rPr>
+              <a:t>•  Died in custody in August 2019 (ruled a suicide) — ending the criminal case against him.</a:t>
+            </a:r>
+          </a:p>
+        </p:txBody>
+      </p:sp>
+      <p:sp>
+        <p:nvSpPr>
+          <p:cNvPr id="7" name="Rectangle 6"/>
+          <p:cNvSpPr/>
+          <p:nvPr/>
+        </p:nvSpPr>
+        <p:spPr>
+          <a:xfrm>
+            <a:off x="7680960" y="1554480"/>
+            <a:ext cx="3931920" cy="4480560"/>
+          </a:xfrm>
+          <a:prstGeom prst="rect">
+            <a:avLst/>
+          </a:prstGeom>
+          <a:solidFill>
+            <a:srgbClr val="F2F4F7"/>
+          </a:solidFill>
+          <a:ln>
+            <a:noFill/>
+          </a:ln>
+          <a:effectLst/>
+        </p:spPr>
+        <p:style>
+          <a:lnRef idx="1">
+            <a:schemeClr val="accent1"/>
+          </a:lnRef>
+          <a:fillRef idx="3">
+            <a:schemeClr val="accent1"/>
+          </a:fillRef>
+          <a:effectRef idx="2">
+            <a:schemeClr val="accent1"/>
+          </a:effectRef>
+          <a:fontRef idx="minor">
+            <a:schemeClr val="lt1"/>
+          </a:fontRef>
+        </p:style>
+        <p:txBody>
+          <a:bodyPr rtlCol="0" anchor="ctr"/>
+          <a:lstStyle/>
+          <a:p>
+            <a:pPr algn="ctr"/>
+          </a:p>
+        </p:txBody>
+      </p:sp>
+      <p:sp>
+        <p:nvSpPr>
+          <p:cNvPr id="8" name="TextBox 7"/>
+          <p:cNvSpPr txBox="1"/>
+          <p:nvPr/>
+        </p:nvSpPr>
+        <p:spPr>
+          <a:xfrm>
+            <a:off x="7955279" y="1783080"/>
+            <a:ext cx="3474720" cy="731520"/>
+          </a:xfrm>
+          <a:prstGeom prst="rect">
+            <a:avLst/>
+          </a:prstGeom>
+          <a:noFill/>
+        </p:spPr>
+        <p:txBody>
+          <a:bodyPr wrap="square">
+            <a:spAutoFit/>
+          </a:bodyPr>
+          <a:lstStyle/>
+          <a:p>
+            <a:pPr algn="l">
+              <a:lnSpc>
+                <a:spcPct val="100000"/>
+              </a:lnSpc>
+            </a:pPr>
+            <a:r>
+              <a:rPr sz="1400" b="1" i="0">
+                <a:solidFill>
+                  <a:srgbClr val="C08A2B"/>
+                </a:solidFill>
+                <a:latin typeface="Times New Roman"/>
+              </a:rPr>
+              <a:t>WHY HE MATTERS HERE</a:t>
+            </a:r>
+          </a:p>
+        </p:txBody>
+      </p:sp>
+      <p:sp>
+        <p:nvSpPr>
+          <p:cNvPr id="9" name="TextBox 8"/>
+          <p:cNvSpPr txBox="1"/>
+          <p:nvPr/>
+        </p:nvSpPr>
+        <p:spPr>
+          <a:xfrm>
+            <a:off x="7955279" y="2286000"/>
+            <a:ext cx="3474720" cy="3474720"/>
+          </a:xfrm>
+          <a:prstGeom prst="rect">
+            <a:avLst/>
+          </a:prstGeom>
+          <a:noFill/>
+        </p:spPr>
+        <p:txBody>
+          <a:bodyPr wrap="square">
+            <a:spAutoFit/>
+          </a:bodyPr>
+          <a:lstStyle/>
+          <a:p>
+            <a:pPr algn="l">
+              <a:lnSpc>
+                <a:spcPct val="118000"/>
+              </a:lnSpc>
+            </a:pPr>
+            <a:r>
+              <a:rPr sz="1600" b="0" i="1">
+                <a:solidFill>
+                  <a:srgbClr val="334455"/>
+                </a:solidFill>
+                <a:latin typeface="Times New Roman"/>
+              </a:rPr>
+              <a:t>His death meant accountability had to be pursued through others — and across borders. The case became a test of how legal systems cooperate.</a:t>
             </a:r>
           </a:p>
         </p:txBody>
@@ -4833,86 +8990,8 @@
         </p:nvSpPr>
         <p:spPr>
           <a:xfrm>
-            <a:off x="548640" y="164592"/>
-            <a:ext cx="10058400" cy="365760"/>
-          </a:xfrm>
-          <a:prstGeom prst="rect">
-            <a:avLst/>
-          </a:prstGeom>
-          <a:noFill/>
-        </p:spPr>
-        <p:txBody>
-          <a:bodyPr wrap="square" anchor="t">
-            <a:spAutoFit/>
-          </a:bodyPr>
-          <a:lstStyle/>
-          <a:p>
-            <a:pPr algn="l">
-              <a:lnSpc>
-                <a:spcPct val="100000"/>
-              </a:lnSpc>
-            </a:pPr>
-            <a:r>
-              <a:rPr sz="1300" b="1" i="0">
-                <a:solidFill>
-                  <a:srgbClr val="C08A2B"/>
-                </a:solidFill>
-                <a:latin typeface="Times New Roman"/>
-              </a:rPr>
-              <a:t>PART 3  •  WEALTH &amp; MOBILITY</a:t>
-            </a:r>
-          </a:p>
-        </p:txBody>
-      </p:sp>
-      <p:sp>
-        <p:nvSpPr>
-          <p:cNvPr id="5" name="TextBox 4"/>
-          <p:cNvSpPr txBox="1"/>
-          <p:nvPr/>
-        </p:nvSpPr>
-        <p:spPr>
-          <a:xfrm>
-            <a:off x="548640" y="457200"/>
-            <a:ext cx="10972800" cy="640080"/>
-          </a:xfrm>
-          <a:prstGeom prst="rect">
-            <a:avLst/>
-          </a:prstGeom>
-          <a:noFill/>
-        </p:spPr>
-        <p:txBody>
-          <a:bodyPr wrap="square" anchor="t">
-            <a:spAutoFit/>
-          </a:bodyPr>
-          <a:lstStyle/>
-          <a:p>
-            <a:pPr algn="l">
-              <a:lnSpc>
-                <a:spcPct val="100000"/>
-              </a:lnSpc>
-            </a:pPr>
-            <a:r>
-              <a:rPr sz="2600" b="1" i="0">
-                <a:solidFill>
-                  <a:srgbClr val="FFFFFF"/>
-                </a:solidFill>
-                <a:latin typeface="Times New Roman"/>
-              </a:rPr>
-              <a:t>How Wealth Enabled "Elite Impunity"</a:t>
-            </a:r>
-          </a:p>
-        </p:txBody>
-      </p:sp>
-      <p:sp>
-        <p:nvSpPr>
-          <p:cNvPr id="6" name="TextBox 5"/>
-          <p:cNvSpPr txBox="1"/>
-          <p:nvPr/>
-        </p:nvSpPr>
-        <p:spPr>
-          <a:xfrm>
-            <a:off x="640080" y="1463040"/>
-            <a:ext cx="6766560" cy="4937760"/>
+            <a:off x="548640" y="182880"/>
+            <a:ext cx="10515600" cy="731520"/>
           </a:xfrm>
           <a:prstGeom prst="rect">
             <a:avLst/>
@@ -4925,136 +9004,78 @@
           </a:bodyPr>
           <a:lstStyle/>
           <a:p>
-            <a:pPr>
-              <a:lnSpc>
-                <a:spcPct val="105000"/>
-              </a:lnSpc>
-              <a:spcAft>
-                <a:spcPts val="1300"/>
-              </a:spcAft>
-            </a:pPr>
-            <a:r>
-              <a:rPr sz="1800">
-                <a:solidFill>
-                  <a:srgbClr val="334455"/>
-                </a:solidFill>
-                <a:latin typeface="Times New Roman"/>
-              </a:rPr>
-              <a:t>•  Offshore structures and private wealth obscured assets and ownership.</a:t>
-            </a:r>
-          </a:p>
-          <a:p>
-            <a:pPr>
-              <a:lnSpc>
-                <a:spcPct val="105000"/>
-              </a:lnSpc>
-              <a:spcAft>
-                <a:spcPts val="1300"/>
-              </a:spcAft>
-            </a:pPr>
-            <a:r>
-              <a:rPr sz="1800">
-                <a:solidFill>
-                  <a:srgbClr val="334455"/>
-                </a:solidFill>
-                <a:latin typeface="Times New Roman"/>
-              </a:rPr>
-              <a:t>•  Property in several jurisdictions enabled mobility and evasion.</a:t>
-            </a:r>
-          </a:p>
-          <a:p>
-            <a:pPr>
-              <a:lnSpc>
-                <a:spcPct val="105000"/>
-              </a:lnSpc>
-              <a:spcAft>
-                <a:spcPts val="1300"/>
-              </a:spcAft>
-            </a:pPr>
-            <a:r>
-              <a:rPr sz="1800" b="1">
-                <a:solidFill>
-                  <a:srgbClr val="0F2A43"/>
-                </a:solidFill>
-                <a:latin typeface="Times New Roman"/>
-              </a:rPr>
-              <a:t>•  Identity documents: </a:t>
-            </a:r>
-            <a:r>
-              <a:rPr sz="1800">
-                <a:solidFill>
-                  <a:srgbClr val="334455"/>
-                </a:solidFill>
-                <a:latin typeface="Times New Roman"/>
-              </a:rPr>
-              <a:t>an expired passport bore Epstein's photo, a false name, and listed Saudi Arabia as residence.</a:t>
-            </a:r>
-          </a:p>
-          <a:p>
-            <a:pPr>
-              <a:lnSpc>
-                <a:spcPct val="105000"/>
-              </a:lnSpc>
-              <a:spcAft>
-                <a:spcPts val="1300"/>
-              </a:spcAft>
-            </a:pPr>
-            <a:r>
-              <a:rPr sz="1800" b="1">
-                <a:solidFill>
-                  <a:srgbClr val="0F2A43"/>
-                </a:solidFill>
-                <a:latin typeface="Times New Roman"/>
-              </a:rPr>
-              <a:t>•  Contrast: </a:t>
-            </a:r>
-            <a:r>
-              <a:rPr sz="1800">
-                <a:solidFill>
-                  <a:srgbClr val="334455"/>
-                </a:solidFill>
-                <a:latin typeface="Times New Roman"/>
-              </a:rPr>
-              <a:t>the lenient 2008 outcome vs. the 2019 federal prosecution.</a:t>
-            </a:r>
-          </a:p>
-          <a:p>
-            <a:pPr>
-              <a:lnSpc>
-                <a:spcPct val="105000"/>
-              </a:lnSpc>
-              <a:spcAft>
-                <a:spcPts val="1300"/>
-              </a:spcAft>
-            </a:pPr>
-            <a:r>
-              <a:rPr sz="1800">
-                <a:solidFill>
-                  <a:srgbClr val="334455"/>
-                </a:solidFill>
-                <a:latin typeface="Times New Roman"/>
-              </a:rPr>
-              <a:t>•  Maxwell's 2021 conviction showed accountability is possible — but slow.</a:t>
-            </a:r>
-          </a:p>
-        </p:txBody>
-      </p:sp>
-      <p:sp>
-        <p:nvSpPr>
-          <p:cNvPr id="7" name="Rectangle 6"/>
+            <a:pPr algn="l">
+              <a:lnSpc>
+                <a:spcPct val="100000"/>
+              </a:lnSpc>
+            </a:pPr>
+            <a:r>
+              <a:rPr sz="1300" b="1" i="0">
+                <a:solidFill>
+                  <a:srgbClr val="C08A2B"/>
+                </a:solidFill>
+                <a:latin typeface="Times New Roman"/>
+              </a:rPr>
+              <a:t>PART 1  •  CHRONOLOGY</a:t>
+            </a:r>
+          </a:p>
+        </p:txBody>
+      </p:sp>
+      <p:sp>
+        <p:nvSpPr>
+          <p:cNvPr id="5" name="TextBox 4"/>
+          <p:cNvSpPr txBox="1"/>
+          <p:nvPr/>
+        </p:nvSpPr>
+        <p:spPr>
+          <a:xfrm>
+            <a:off x="548640" y="475488"/>
+            <a:ext cx="11064240" cy="731520"/>
+          </a:xfrm>
+          <a:prstGeom prst="rect">
+            <a:avLst/>
+          </a:prstGeom>
+          <a:noFill/>
+        </p:spPr>
+        <p:txBody>
+          <a:bodyPr wrap="square">
+            <a:spAutoFit/>
+          </a:bodyPr>
+          <a:lstStyle/>
+          <a:p>
+            <a:pPr algn="l">
+              <a:lnSpc>
+                <a:spcPct val="100000"/>
+              </a:lnSpc>
+            </a:pPr>
+            <a:r>
+              <a:rPr sz="2600" b="1" i="0">
+                <a:solidFill>
+                  <a:srgbClr val="FFFFFF"/>
+                </a:solidFill>
+                <a:latin typeface="Times New Roman"/>
+              </a:rPr>
+              <a:t>A Case That Spanned Two Decades</a:t>
+            </a:r>
+          </a:p>
+        </p:txBody>
+      </p:sp>
+      <p:sp>
+        <p:nvSpPr>
+          <p:cNvPr id="6" name="Rectangle 5"/>
           <p:cNvSpPr/>
           <p:nvPr/>
         </p:nvSpPr>
         <p:spPr>
           <a:xfrm>
-            <a:off x="7680960" y="1554480"/>
-            <a:ext cx="3931920" cy="4480560"/>
+            <a:off x="640080" y="2011680"/>
+            <a:ext cx="2606040" cy="777240"/>
           </a:xfrm>
           <a:prstGeom prst="rect">
             <a:avLst/>
           </a:prstGeom>
           <a:solidFill>
-            <a:srgbClr val="F2F4F7"/>
+            <a:srgbClr val="0F2A43"/>
           </a:solidFill>
           <a:ln>
             <a:noFill/>
@@ -5085,14 +9106,14 @@
       </p:sp>
       <p:sp>
         <p:nvSpPr>
-          <p:cNvPr id="8" name="TextBox 7"/>
+          <p:cNvPr id="7" name="TextBox 6"/>
           <p:cNvSpPr txBox="1"/>
           <p:nvPr/>
         </p:nvSpPr>
         <p:spPr>
           <a:xfrm>
-            <a:off x="7955279" y="1783080"/>
-            <a:ext cx="3474720" cy="548640"/>
+            <a:off x="640080" y="2157984"/>
+            <a:ext cx="2606040" cy="731520"/>
           </a:xfrm>
           <a:prstGeom prst="rect">
             <a:avLst/>
@@ -5100,25 +9121,69 @@
           <a:noFill/>
         </p:spPr>
         <p:txBody>
-          <a:bodyPr wrap="square" anchor="t">
+          <a:bodyPr wrap="square">
             <a:spAutoFit/>
           </a:bodyPr>
           <a:lstStyle/>
           <a:p>
-            <a:pPr algn="l">
+            <a:pPr algn="ctr">
               <a:lnSpc>
                 <a:spcPct val="100000"/>
               </a:lnSpc>
             </a:pPr>
             <a:r>
-              <a:rPr sz="1400" b="1" i="0">
-                <a:solidFill>
-                  <a:srgbClr val="C08A2B"/>
-                </a:solidFill>
-                <a:latin typeface="Times New Roman"/>
-              </a:rPr>
-              <a:t>COMPARATIVE QUESTION</a:t>
-            </a:r>
+              <a:rPr sz="2800" b="1" i="0">
+                <a:solidFill>
+                  <a:srgbClr val="FFFFFF"/>
+                </a:solidFill>
+                <a:latin typeface="Times New Roman"/>
+              </a:rPr>
+              <a:t>2008</a:t>
+            </a:r>
+          </a:p>
+        </p:txBody>
+      </p:sp>
+      <p:sp>
+        <p:nvSpPr>
+          <p:cNvPr id="8" name="Rectangle 7"/>
+          <p:cNvSpPr/>
+          <p:nvPr/>
+        </p:nvSpPr>
+        <p:spPr>
+          <a:xfrm>
+            <a:off x="1915668" y="2788920"/>
+            <a:ext cx="54864" cy="320040"/>
+          </a:xfrm>
+          <a:prstGeom prst="rect">
+            <a:avLst/>
+          </a:prstGeom>
+          <a:solidFill>
+            <a:srgbClr val="C08A2B"/>
+          </a:solidFill>
+          <a:ln>
+            <a:noFill/>
+          </a:ln>
+          <a:effectLst/>
+        </p:spPr>
+        <p:style>
+          <a:lnRef idx="1">
+            <a:schemeClr val="accent1"/>
+          </a:lnRef>
+          <a:fillRef idx="3">
+            <a:schemeClr val="accent1"/>
+          </a:fillRef>
+          <a:effectRef idx="2">
+            <a:schemeClr val="accent1"/>
+          </a:effectRef>
+          <a:fontRef idx="minor">
+            <a:schemeClr val="lt1"/>
+          </a:fontRef>
+        </p:style>
+        <p:txBody>
+          <a:bodyPr rtlCol="0" anchor="ctr"/>
+          <a:lstStyle/>
+          <a:p>
+            <a:pPr algn="ctr"/>
           </a:p>
         </p:txBody>
       </p:sp>
@@ -5130,8 +9195,8 @@
         </p:nvSpPr>
         <p:spPr>
           <a:xfrm>
-            <a:off x="7955279" y="2377440"/>
-            <a:ext cx="3474720" cy="3474720"/>
+            <a:off x="640080" y="3246120"/>
+            <a:ext cx="2606040" cy="2011680"/>
           </a:xfrm>
           <a:prstGeom prst="rect">
             <a:avLst/>
@@ -5139,7 +9204,7 @@
           <a:noFill/>
         </p:spPr>
         <p:txBody>
-          <a:bodyPr wrap="square" anchor="t">
+          <a:bodyPr wrap="square">
             <a:spAutoFit/>
           </a:bodyPr>
           <a:lstStyle/>
@@ -5150,13 +9215,550 @@
               </a:lnSpc>
             </a:pPr>
             <a:r>
-              <a:rPr sz="1700" b="0" i="1">
+              <a:rPr sz="1400" b="0" i="0">
                 <a:solidFill>
                   <a:srgbClr val="334455"/>
                 </a:solidFill>
                 <a:latin typeface="Times New Roman"/>
               </a:rPr>
-              <a:t>Would other legal systems — the UK, France, or Japan — have acted faster, or slower, against a defendant of comparable wealth and mobility?</a:t>
+              <a:t>Florida state plea deal — widely criticised as lenient.</a:t>
+            </a:r>
+          </a:p>
+        </p:txBody>
+      </p:sp>
+      <p:sp>
+        <p:nvSpPr>
+          <p:cNvPr id="10" name="Rectangle 9"/>
+          <p:cNvSpPr/>
+          <p:nvPr/>
+        </p:nvSpPr>
+        <p:spPr>
+          <a:xfrm>
+            <a:off x="3410712" y="2011680"/>
+            <a:ext cx="2606040" cy="777240"/>
+          </a:xfrm>
+          <a:prstGeom prst="rect">
+            <a:avLst/>
+          </a:prstGeom>
+          <a:solidFill>
+            <a:srgbClr val="0F2A43"/>
+          </a:solidFill>
+          <a:ln>
+            <a:noFill/>
+          </a:ln>
+          <a:effectLst/>
+        </p:spPr>
+        <p:style>
+          <a:lnRef idx="1">
+            <a:schemeClr val="accent1"/>
+          </a:lnRef>
+          <a:fillRef idx="3">
+            <a:schemeClr val="accent1"/>
+          </a:fillRef>
+          <a:effectRef idx="2">
+            <a:schemeClr val="accent1"/>
+          </a:effectRef>
+          <a:fontRef idx="minor">
+            <a:schemeClr val="lt1"/>
+          </a:fontRef>
+        </p:style>
+        <p:txBody>
+          <a:bodyPr rtlCol="0" anchor="ctr"/>
+          <a:lstStyle/>
+          <a:p>
+            <a:pPr algn="ctr"/>
+          </a:p>
+        </p:txBody>
+      </p:sp>
+      <p:sp>
+        <p:nvSpPr>
+          <p:cNvPr id="11" name="TextBox 10"/>
+          <p:cNvSpPr txBox="1"/>
+          <p:nvPr/>
+        </p:nvSpPr>
+        <p:spPr>
+          <a:xfrm>
+            <a:off x="3410712" y="2157984"/>
+            <a:ext cx="2606040" cy="731520"/>
+          </a:xfrm>
+          <a:prstGeom prst="rect">
+            <a:avLst/>
+          </a:prstGeom>
+          <a:noFill/>
+        </p:spPr>
+        <p:txBody>
+          <a:bodyPr wrap="square">
+            <a:spAutoFit/>
+          </a:bodyPr>
+          <a:lstStyle/>
+          <a:p>
+            <a:pPr algn="ctr">
+              <a:lnSpc>
+                <a:spcPct val="100000"/>
+              </a:lnSpc>
+            </a:pPr>
+            <a:r>
+              <a:rPr sz="2800" b="1" i="0">
+                <a:solidFill>
+                  <a:srgbClr val="FFFFFF"/>
+                </a:solidFill>
+                <a:latin typeface="Times New Roman"/>
+              </a:rPr>
+              <a:t>2019</a:t>
+            </a:r>
+          </a:p>
+        </p:txBody>
+      </p:sp>
+      <p:sp>
+        <p:nvSpPr>
+          <p:cNvPr id="12" name="Rectangle 11"/>
+          <p:cNvSpPr/>
+          <p:nvPr/>
+        </p:nvSpPr>
+        <p:spPr>
+          <a:xfrm>
+            <a:off x="4686300" y="2788920"/>
+            <a:ext cx="54864" cy="320040"/>
+          </a:xfrm>
+          <a:prstGeom prst="rect">
+            <a:avLst/>
+          </a:prstGeom>
+          <a:solidFill>
+            <a:srgbClr val="C08A2B"/>
+          </a:solidFill>
+          <a:ln>
+            <a:noFill/>
+          </a:ln>
+          <a:effectLst/>
+        </p:spPr>
+        <p:style>
+          <a:lnRef idx="1">
+            <a:schemeClr val="accent1"/>
+          </a:lnRef>
+          <a:fillRef idx="3">
+            <a:schemeClr val="accent1"/>
+          </a:fillRef>
+          <a:effectRef idx="2">
+            <a:schemeClr val="accent1"/>
+          </a:effectRef>
+          <a:fontRef idx="minor">
+            <a:schemeClr val="lt1"/>
+          </a:fontRef>
+        </p:style>
+        <p:txBody>
+          <a:bodyPr rtlCol="0" anchor="ctr"/>
+          <a:lstStyle/>
+          <a:p>
+            <a:pPr algn="ctr"/>
+          </a:p>
+        </p:txBody>
+      </p:sp>
+      <p:sp>
+        <p:nvSpPr>
+          <p:cNvPr id="13" name="TextBox 12"/>
+          <p:cNvSpPr txBox="1"/>
+          <p:nvPr/>
+        </p:nvSpPr>
+        <p:spPr>
+          <a:xfrm>
+            <a:off x="3410712" y="3246120"/>
+            <a:ext cx="2606040" cy="2011680"/>
+          </a:xfrm>
+          <a:prstGeom prst="rect">
+            <a:avLst/>
+          </a:prstGeom>
+          <a:noFill/>
+        </p:spPr>
+        <p:txBody>
+          <a:bodyPr wrap="square">
+            <a:spAutoFit/>
+          </a:bodyPr>
+          <a:lstStyle/>
+          <a:p>
+            <a:pPr algn="l">
+              <a:lnSpc>
+                <a:spcPct val="115000"/>
+              </a:lnSpc>
+            </a:pPr>
+            <a:r>
+              <a:rPr sz="1400" b="0" i="0">
+                <a:solidFill>
+                  <a:srgbClr val="334455"/>
+                </a:solidFill>
+                <a:latin typeface="Times New Roman"/>
+              </a:rPr>
+              <a:t>Federal trafficking charges in New York; death in custody.</a:t>
+            </a:r>
+          </a:p>
+        </p:txBody>
+      </p:sp>
+      <p:sp>
+        <p:nvSpPr>
+          <p:cNvPr id="14" name="Rectangle 13"/>
+          <p:cNvSpPr/>
+          <p:nvPr/>
+        </p:nvSpPr>
+        <p:spPr>
+          <a:xfrm>
+            <a:off x="6181344" y="2011680"/>
+            <a:ext cx="2606040" cy="777240"/>
+          </a:xfrm>
+          <a:prstGeom prst="rect">
+            <a:avLst/>
+          </a:prstGeom>
+          <a:solidFill>
+            <a:srgbClr val="0F2A43"/>
+          </a:solidFill>
+          <a:ln>
+            <a:noFill/>
+          </a:ln>
+          <a:effectLst/>
+        </p:spPr>
+        <p:style>
+          <a:lnRef idx="1">
+            <a:schemeClr val="accent1"/>
+          </a:lnRef>
+          <a:fillRef idx="3">
+            <a:schemeClr val="accent1"/>
+          </a:fillRef>
+          <a:effectRef idx="2">
+            <a:schemeClr val="accent1"/>
+          </a:effectRef>
+          <a:fontRef idx="minor">
+            <a:schemeClr val="lt1"/>
+          </a:fontRef>
+        </p:style>
+        <p:txBody>
+          <a:bodyPr rtlCol="0" anchor="ctr"/>
+          <a:lstStyle/>
+          <a:p>
+            <a:pPr algn="ctr"/>
+          </a:p>
+        </p:txBody>
+      </p:sp>
+      <p:sp>
+        <p:nvSpPr>
+          <p:cNvPr id="15" name="TextBox 14"/>
+          <p:cNvSpPr txBox="1"/>
+          <p:nvPr/>
+        </p:nvSpPr>
+        <p:spPr>
+          <a:xfrm>
+            <a:off x="6181344" y="2157984"/>
+            <a:ext cx="2606040" cy="731520"/>
+          </a:xfrm>
+          <a:prstGeom prst="rect">
+            <a:avLst/>
+          </a:prstGeom>
+          <a:noFill/>
+        </p:spPr>
+        <p:txBody>
+          <a:bodyPr wrap="square">
+            <a:spAutoFit/>
+          </a:bodyPr>
+          <a:lstStyle/>
+          <a:p>
+            <a:pPr algn="ctr">
+              <a:lnSpc>
+                <a:spcPct val="100000"/>
+              </a:lnSpc>
+            </a:pPr>
+            <a:r>
+              <a:rPr sz="2800" b="1" i="0">
+                <a:solidFill>
+                  <a:srgbClr val="FFFFFF"/>
+                </a:solidFill>
+                <a:latin typeface="Times New Roman"/>
+              </a:rPr>
+              <a:t>2021</a:t>
+            </a:r>
+          </a:p>
+        </p:txBody>
+      </p:sp>
+      <p:sp>
+        <p:nvSpPr>
+          <p:cNvPr id="16" name="Rectangle 15"/>
+          <p:cNvSpPr/>
+          <p:nvPr/>
+        </p:nvSpPr>
+        <p:spPr>
+          <a:xfrm>
+            <a:off x="7456932" y="2788920"/>
+            <a:ext cx="54864" cy="320040"/>
+          </a:xfrm>
+          <a:prstGeom prst="rect">
+            <a:avLst/>
+          </a:prstGeom>
+          <a:solidFill>
+            <a:srgbClr val="C08A2B"/>
+          </a:solidFill>
+          <a:ln>
+            <a:noFill/>
+          </a:ln>
+          <a:effectLst/>
+        </p:spPr>
+        <p:style>
+          <a:lnRef idx="1">
+            <a:schemeClr val="accent1"/>
+          </a:lnRef>
+          <a:fillRef idx="3">
+            <a:schemeClr val="accent1"/>
+          </a:fillRef>
+          <a:effectRef idx="2">
+            <a:schemeClr val="accent1"/>
+          </a:effectRef>
+          <a:fontRef idx="minor">
+            <a:schemeClr val="lt1"/>
+          </a:fontRef>
+        </p:style>
+        <p:txBody>
+          <a:bodyPr rtlCol="0" anchor="ctr"/>
+          <a:lstStyle/>
+          <a:p>
+            <a:pPr algn="ctr"/>
+          </a:p>
+        </p:txBody>
+      </p:sp>
+      <p:sp>
+        <p:nvSpPr>
+          <p:cNvPr id="17" name="TextBox 16"/>
+          <p:cNvSpPr txBox="1"/>
+          <p:nvPr/>
+        </p:nvSpPr>
+        <p:spPr>
+          <a:xfrm>
+            <a:off x="6181344" y="3246120"/>
+            <a:ext cx="2606040" cy="2011680"/>
+          </a:xfrm>
+          <a:prstGeom prst="rect">
+            <a:avLst/>
+          </a:prstGeom>
+          <a:noFill/>
+        </p:spPr>
+        <p:txBody>
+          <a:bodyPr wrap="square">
+            <a:spAutoFit/>
+          </a:bodyPr>
+          <a:lstStyle/>
+          <a:p>
+            <a:pPr algn="l">
+              <a:lnSpc>
+                <a:spcPct val="115000"/>
+              </a:lnSpc>
+            </a:pPr>
+            <a:r>
+              <a:rPr sz="1400" b="0" i="0">
+                <a:solidFill>
+                  <a:srgbClr val="334455"/>
+                </a:solidFill>
+                <a:latin typeface="Times New Roman"/>
+              </a:rPr>
+              <a:t>Ghislaine Maxwell convicted of sex-trafficking conspiracy.</a:t>
+            </a:r>
+          </a:p>
+        </p:txBody>
+      </p:sp>
+      <p:sp>
+        <p:nvSpPr>
+          <p:cNvPr id="18" name="Rectangle 17"/>
+          <p:cNvSpPr/>
+          <p:nvPr/>
+        </p:nvSpPr>
+        <p:spPr>
+          <a:xfrm>
+            <a:off x="8951976" y="2011680"/>
+            <a:ext cx="2606040" cy="777240"/>
+          </a:xfrm>
+          <a:prstGeom prst="rect">
+            <a:avLst/>
+          </a:prstGeom>
+          <a:solidFill>
+            <a:srgbClr val="0F2A43"/>
+          </a:solidFill>
+          <a:ln>
+            <a:noFill/>
+          </a:ln>
+          <a:effectLst/>
+        </p:spPr>
+        <p:style>
+          <a:lnRef idx="1">
+            <a:schemeClr val="accent1"/>
+          </a:lnRef>
+          <a:fillRef idx="3">
+            <a:schemeClr val="accent1"/>
+          </a:fillRef>
+          <a:effectRef idx="2">
+            <a:schemeClr val="accent1"/>
+          </a:effectRef>
+          <a:fontRef idx="minor">
+            <a:schemeClr val="lt1"/>
+          </a:fontRef>
+        </p:style>
+        <p:txBody>
+          <a:bodyPr rtlCol="0" anchor="ctr"/>
+          <a:lstStyle/>
+          <a:p>
+            <a:pPr algn="ctr"/>
+          </a:p>
+        </p:txBody>
+      </p:sp>
+      <p:sp>
+        <p:nvSpPr>
+          <p:cNvPr id="19" name="TextBox 18"/>
+          <p:cNvSpPr txBox="1"/>
+          <p:nvPr/>
+        </p:nvSpPr>
+        <p:spPr>
+          <a:xfrm>
+            <a:off x="8951976" y="2157984"/>
+            <a:ext cx="2606040" cy="731520"/>
+          </a:xfrm>
+          <a:prstGeom prst="rect">
+            <a:avLst/>
+          </a:prstGeom>
+          <a:noFill/>
+        </p:spPr>
+        <p:txBody>
+          <a:bodyPr wrap="square">
+            <a:spAutoFit/>
+          </a:bodyPr>
+          <a:lstStyle/>
+          <a:p>
+            <a:pPr algn="ctr">
+              <a:lnSpc>
+                <a:spcPct val="100000"/>
+              </a:lnSpc>
+            </a:pPr>
+            <a:r>
+              <a:rPr sz="2800" b="1" i="0">
+                <a:solidFill>
+                  <a:srgbClr val="FFFFFF"/>
+                </a:solidFill>
+                <a:latin typeface="Times New Roman"/>
+              </a:rPr>
+              <a:t>2025</a:t>
+            </a:r>
+          </a:p>
+        </p:txBody>
+      </p:sp>
+      <p:sp>
+        <p:nvSpPr>
+          <p:cNvPr id="20" name="Rectangle 19"/>
+          <p:cNvSpPr/>
+          <p:nvPr/>
+        </p:nvSpPr>
+        <p:spPr>
+          <a:xfrm>
+            <a:off x="10227564" y="2788920"/>
+            <a:ext cx="54864" cy="320040"/>
+          </a:xfrm>
+          <a:prstGeom prst="rect">
+            <a:avLst/>
+          </a:prstGeom>
+          <a:solidFill>
+            <a:srgbClr val="C08A2B"/>
+          </a:solidFill>
+          <a:ln>
+            <a:noFill/>
+          </a:ln>
+          <a:effectLst/>
+        </p:spPr>
+        <p:style>
+          <a:lnRef idx="1">
+            <a:schemeClr val="accent1"/>
+          </a:lnRef>
+          <a:fillRef idx="3">
+            <a:schemeClr val="accent1"/>
+          </a:fillRef>
+          <a:effectRef idx="2">
+            <a:schemeClr val="accent1"/>
+          </a:effectRef>
+          <a:fontRef idx="minor">
+            <a:schemeClr val="lt1"/>
+          </a:fontRef>
+        </p:style>
+        <p:txBody>
+          <a:bodyPr rtlCol="0" anchor="ctr"/>
+          <a:lstStyle/>
+          <a:p>
+            <a:pPr algn="ctr"/>
+          </a:p>
+        </p:txBody>
+      </p:sp>
+      <p:sp>
+        <p:nvSpPr>
+          <p:cNvPr id="21" name="TextBox 20"/>
+          <p:cNvSpPr txBox="1"/>
+          <p:nvPr/>
+        </p:nvSpPr>
+        <p:spPr>
+          <a:xfrm>
+            <a:off x="8951976" y="3246120"/>
+            <a:ext cx="2606040" cy="2011680"/>
+          </a:xfrm>
+          <a:prstGeom prst="rect">
+            <a:avLst/>
+          </a:prstGeom>
+          <a:noFill/>
+        </p:spPr>
+        <p:txBody>
+          <a:bodyPr wrap="square">
+            <a:spAutoFit/>
+          </a:bodyPr>
+          <a:lstStyle/>
+          <a:p>
+            <a:pPr algn="l">
+              <a:lnSpc>
+                <a:spcPct val="115000"/>
+              </a:lnSpc>
+            </a:pPr>
+            <a:r>
+              <a:rPr sz="1400" b="0" i="0">
+                <a:solidFill>
+                  <a:srgbClr val="334455"/>
+                </a:solidFill>
+                <a:latin typeface="Times New Roman"/>
+              </a:rPr>
+              <a:t>Document-release wave renews scrutiny and debate.</a:t>
+            </a:r>
+          </a:p>
+        </p:txBody>
+      </p:sp>
+      <p:sp>
+        <p:nvSpPr>
+          <p:cNvPr id="22" name="TextBox 21"/>
+          <p:cNvSpPr txBox="1"/>
+          <p:nvPr/>
+        </p:nvSpPr>
+        <p:spPr>
+          <a:xfrm>
+            <a:off x="640080" y="5394960"/>
+            <a:ext cx="10972800" cy="914400"/>
+          </a:xfrm>
+          <a:prstGeom prst="rect">
+            <a:avLst/>
+          </a:prstGeom>
+          <a:noFill/>
+        </p:spPr>
+        <p:txBody>
+          <a:bodyPr wrap="square">
+            <a:spAutoFit/>
+          </a:bodyPr>
+          <a:lstStyle/>
+          <a:p>
+            <a:pPr algn="l">
+              <a:lnSpc>
+                <a:spcPct val="115000"/>
+              </a:lnSpc>
+            </a:pPr>
+            <a:r>
+              <a:rPr sz="1500" b="0" i="1">
+                <a:solidFill>
+                  <a:srgbClr val="0F2A43"/>
+                </a:solidFill>
+                <a:latin typeface="Times New Roman"/>
+              </a:rPr>
+              <a:t>Across two decades the case moved from a local plea bargain to a global question about justice, wealth, and cross-border accountability.</a:t>
             </a:r>
           </a:p>
         </p:txBody>
@@ -5283,86 +9885,8 @@
         </p:nvSpPr>
         <p:spPr>
           <a:xfrm>
-            <a:off x="548640" y="164592"/>
-            <a:ext cx="10058400" cy="365760"/>
-          </a:xfrm>
-          <a:prstGeom prst="rect">
-            <a:avLst/>
-          </a:prstGeom>
-          <a:noFill/>
-        </p:spPr>
-        <p:txBody>
-          <a:bodyPr wrap="square" anchor="t">
-            <a:spAutoFit/>
-          </a:bodyPr>
-          <a:lstStyle/>
-          <a:p>
-            <a:pPr algn="l">
-              <a:lnSpc>
-                <a:spcPct val="100000"/>
-              </a:lnSpc>
-            </a:pPr>
-            <a:r>
-              <a:rPr sz="1300" b="1" i="0">
-                <a:solidFill>
-                  <a:srgbClr val="C08A2B"/>
-                </a:solidFill>
-                <a:latin typeface="Times New Roman"/>
-              </a:rPr>
-              <a:t>PART 4  •  ACCOUNTABILITY</a:t>
-            </a:r>
-          </a:p>
-        </p:txBody>
-      </p:sp>
-      <p:sp>
-        <p:nvSpPr>
-          <p:cNvPr id="5" name="TextBox 4"/>
-          <p:cNvSpPr txBox="1"/>
-          <p:nvPr/>
-        </p:nvSpPr>
-        <p:spPr>
-          <a:xfrm>
-            <a:off x="548640" y="457200"/>
-            <a:ext cx="10972800" cy="640080"/>
-          </a:xfrm>
-          <a:prstGeom prst="rect">
-            <a:avLst/>
-          </a:prstGeom>
-          <a:noFill/>
-        </p:spPr>
-        <p:txBody>
-          <a:bodyPr wrap="square" anchor="t">
-            <a:spAutoFit/>
-          </a:bodyPr>
-          <a:lstStyle/>
-          <a:p>
-            <a:pPr algn="l">
-              <a:lnSpc>
-                <a:spcPct val="100000"/>
-              </a:lnSpc>
-            </a:pPr>
-            <a:r>
-              <a:rPr sz="2600" b="1" i="0">
-                <a:solidFill>
-                  <a:srgbClr val="FFFFFF"/>
-                </a:solidFill>
-                <a:latin typeface="Times New Roman"/>
-              </a:rPr>
-              <a:t>Transparency, Survivors &amp; Lessons</a:t>
-            </a:r>
-          </a:p>
-        </p:txBody>
-      </p:sp>
-      <p:sp>
-        <p:nvSpPr>
-          <p:cNvPr id="6" name="TextBox 5"/>
-          <p:cNvSpPr txBox="1"/>
-          <p:nvPr/>
-        </p:nvSpPr>
-        <p:spPr>
-          <a:xfrm>
-            <a:off x="640080" y="1463040"/>
-            <a:ext cx="10972800" cy="4206240"/>
+            <a:off x="548640" y="182880"/>
+            <a:ext cx="10515600" cy="731520"/>
           </a:xfrm>
           <a:prstGeom prst="rect">
             <a:avLst/>
@@ -5375,6 +9899,84 @@
           </a:bodyPr>
           <a:lstStyle/>
           <a:p>
+            <a:pPr algn="l">
+              <a:lnSpc>
+                <a:spcPct val="100000"/>
+              </a:lnSpc>
+            </a:pPr>
+            <a:r>
+              <a:rPr sz="1300" b="1" i="0">
+                <a:solidFill>
+                  <a:srgbClr val="C08A2B"/>
+                </a:solidFill>
+                <a:latin typeface="Times New Roman"/>
+              </a:rPr>
+              <a:t>PART 1  •  SCOPE</a:t>
+            </a:r>
+          </a:p>
+        </p:txBody>
+      </p:sp>
+      <p:sp>
+        <p:nvSpPr>
+          <p:cNvPr id="5" name="TextBox 4"/>
+          <p:cNvSpPr txBox="1"/>
+          <p:nvPr/>
+        </p:nvSpPr>
+        <p:spPr>
+          <a:xfrm>
+            <a:off x="548640" y="475488"/>
+            <a:ext cx="11064240" cy="731520"/>
+          </a:xfrm>
+          <a:prstGeom prst="rect">
+            <a:avLst/>
+          </a:prstGeom>
+          <a:noFill/>
+        </p:spPr>
+        <p:txBody>
+          <a:bodyPr wrap="square">
+            <a:spAutoFit/>
+          </a:bodyPr>
+          <a:lstStyle/>
+          <a:p>
+            <a:pPr algn="l">
+              <a:lnSpc>
+                <a:spcPct val="100000"/>
+              </a:lnSpc>
+            </a:pPr>
+            <a:r>
+              <a:rPr sz="2600" b="1" i="0">
+                <a:solidFill>
+                  <a:srgbClr val="FFFFFF"/>
+                </a:solidFill>
+                <a:latin typeface="Times New Roman"/>
+              </a:rPr>
+              <a:t>Why This Is an International Story</a:t>
+            </a:r>
+          </a:p>
+        </p:txBody>
+      </p:sp>
+      <p:sp>
+        <p:nvSpPr>
+          <p:cNvPr id="6" name="TextBox 5"/>
+          <p:cNvSpPr txBox="1"/>
+          <p:nvPr/>
+        </p:nvSpPr>
+        <p:spPr>
+          <a:xfrm>
+            <a:off x="640080" y="1463040"/>
+            <a:ext cx="6766560" cy="4572000"/>
+          </a:xfrm>
+          <a:prstGeom prst="rect">
+            <a:avLst/>
+          </a:prstGeom>
+          <a:noFill/>
+        </p:spPr>
+        <p:txBody>
+          <a:bodyPr wrap="square">
+            <a:spAutoFit/>
+          </a:bodyPr>
+          <a:lstStyle/>
+          <a:p>
             <a:pPr>
               <a:lnSpc>
                 <a:spcPct val="105000"/>
@@ -5384,13 +9986,22 @@
               </a:spcAft>
             </a:pPr>
             <a:r>
+              <a:rPr sz="1800" b="1">
+                <a:solidFill>
+                  <a:srgbClr val="0F2A43"/>
+                </a:solidFill>
+                <a:latin typeface="Times New Roman"/>
+              </a:rPr>
+              <a:t>•  Recruitment: </a:t>
+            </a:r>
+            <a:r>
               <a:rPr sz="1800">
                 <a:solidFill>
                   <a:srgbClr val="334455"/>
                 </a:solidFill>
                 <a:latin typeface="Times New Roman"/>
               </a:rPr>
-              <a:t>•  2025 document-release wave under US transparency legislation brought new scrutiny.</a:t>
+              <a:t>victims, including minors and foreign nationals, moved across borders.</a:t>
             </a:r>
           </a:p>
           <a:p>
@@ -5409,7 +10020,7 @@
                 </a:solidFill>
                 <a:latin typeface="Times New Roman"/>
               </a:rPr>
-              <a:t>•  Survivors' concern: </a:t>
+              <a:t>•  Finance: </a:t>
             </a:r>
             <a:r>
               <a:rPr sz="1800">
@@ -5418,7 +10029,7 @@
                 </a:solidFill>
                 <a:latin typeface="Times New Roman"/>
               </a:rPr>
-              <a:t>disclosures made it easy to identify victims — but not the enablers.</a:t>
+              <a:t>wealth held through offshore structures, obscuring ownership.</a:t>
             </a:r>
           </a:p>
           <a:p>
@@ -5437,7 +10048,7 @@
                 </a:solidFill>
                 <a:latin typeface="Times New Roman"/>
               </a:rPr>
-              <a:t>•  Lesson: </a:t>
+              <a:t>•  Property: </a:t>
             </a:r>
             <a:r>
               <a:rPr sz="1800">
@@ -5446,7 +10057,7 @@
                 </a:solidFill>
                 <a:latin typeface="Times New Roman"/>
               </a:rPr>
-              <a:t>transparency must be designed to protect victims while exposing accountability.</a:t>
+              <a:t>residences across the US, the US Virgin Islands and Paris.</a:t>
             </a:r>
           </a:p>
           <a:p>
@@ -5465,7 +10076,7 @@
                 </a:solidFill>
                 <a:latin typeface="Times New Roman"/>
               </a:rPr>
-              <a:t>•  Reform: </a:t>
+              <a:t>•  Identity: </a:t>
             </a:r>
             <a:r>
               <a:rPr sz="1800">
@@ -5474,7 +10085,7 @@
                 </a:solidFill>
                 <a:latin typeface="Times New Roman"/>
               </a:rPr>
-              <a:t>stronger MLATs, faster extradition, victim-centred disclosure, asset tracing.</a:t>
+              <a:t>an expired passport bore his photo, a false name, and listed Saudi Arabia as residence.</a:t>
             </a:r>
           </a:p>
           <a:p>
@@ -5493,7 +10104,7 @@
                 </a:solidFill>
                 <a:latin typeface="Times New Roman"/>
               </a:rPr>
-              <a:t>•  Japan comparison: </a:t>
+              <a:t>•  Network: </a:t>
             </a:r>
             <a:r>
               <a:rPr sz="1800">
@@ -5502,7 +10113,7 @@
                 </a:solidFill>
                 <a:latin typeface="Times New Roman"/>
               </a:rPr>
-              <a:t>anti-trafficking framework &amp; US State Dept. TIP assessments offer a benchmark.</a:t>
+              <a:t>associates spanning several countries and high office.</a:t>
             </a:r>
           </a:p>
         </p:txBody>
@@ -5515,14 +10126,14 @@
         </p:nvSpPr>
         <p:spPr>
           <a:xfrm>
-            <a:off x="548640" y="5806440"/>
-            <a:ext cx="11064240" cy="685800"/>
+            <a:off x="7680960" y="1554480"/>
+            <a:ext cx="3931920" cy="4480560"/>
           </a:xfrm>
           <a:prstGeom prst="rect">
             <a:avLst/>
           </a:prstGeom>
           <a:solidFill>
-            <a:srgbClr val="0F2A43"/>
+            <a:srgbClr val="F2F4F7"/>
           </a:solidFill>
           <a:ln>
             <a:noFill/>
@@ -5559,8 +10170,8 @@
         </p:nvSpPr>
         <p:spPr>
           <a:xfrm>
-            <a:off x="822960" y="5925312"/>
-            <a:ext cx="10515600" cy="457200"/>
+            <a:off x="7955279" y="1783080"/>
+            <a:ext cx="3474720" cy="731520"/>
           </a:xfrm>
           <a:prstGeom prst="rect">
             <a:avLst/>
@@ -5568,7 +10179,7 @@
           <a:noFill/>
         </p:spPr>
         <p:txBody>
-          <a:bodyPr wrap="square" anchor="t">
+          <a:bodyPr wrap="square">
             <a:spAutoFit/>
           </a:bodyPr>
           <a:lstStyle/>
@@ -5579,13 +10190,52 @@
               </a:lnSpc>
             </a:pPr>
             <a:r>
-              <a:rPr sz="1600" b="1" i="1">
-                <a:solidFill>
-                  <a:srgbClr val="FFFFFF"/>
-                </a:solidFill>
-                <a:latin typeface="Times New Roman"/>
-              </a:rPr>
-              <a:t>Closing: Justice across borders depends less on new laws than on the will to cooperate.</a:t>
+              <a:rPr sz="1400" b="1" i="0">
+                <a:solidFill>
+                  <a:srgbClr val="C08A2B"/>
+                </a:solidFill>
+                <a:latin typeface="Times New Roman"/>
+              </a:rPr>
+              <a:t>THE CORE TENSION</a:t>
+            </a:r>
+          </a:p>
+        </p:txBody>
+      </p:sp>
+      <p:sp>
+        <p:nvSpPr>
+          <p:cNvPr id="9" name="TextBox 8"/>
+          <p:cNvSpPr txBox="1"/>
+          <p:nvPr/>
+        </p:nvSpPr>
+        <p:spPr>
+          <a:xfrm>
+            <a:off x="7955279" y="2286000"/>
+            <a:ext cx="3474720" cy="3291840"/>
+          </a:xfrm>
+          <a:prstGeom prst="rect">
+            <a:avLst/>
+          </a:prstGeom>
+          <a:noFill/>
+        </p:spPr>
+        <p:txBody>
+          <a:bodyPr wrap="square">
+            <a:spAutoFit/>
+          </a:bodyPr>
+          <a:lstStyle/>
+          <a:p>
+            <a:pPr algn="l">
+              <a:lnSpc>
+                <a:spcPct val="118000"/>
+              </a:lnSpc>
+            </a:pPr>
+            <a:r>
+              <a:rPr sz="1600" b="0" i="1">
+                <a:solidFill>
+                  <a:srgbClr val="334455"/>
+                </a:solidFill>
+                <a:latin typeface="Times New Roman"/>
+              </a:rPr>
+              <a:t>The network was global, but criminal enforcement is national. That gap is the heart of our presentation.</a:t>
             </a:r>
           </a:p>
         </p:txBody>
@@ -5599,6 +10249,193 @@
 </file>
 
 <file path=ppt/slides/slide7.xml><?xml version="1.0" encoding="utf-8"?>
+<p:sld xmlns:a="http://schemas.openxmlformats.org/drawingml/2006/main" xmlns:p="http://schemas.openxmlformats.org/presentationml/2006/main" xmlns:r="http://schemas.openxmlformats.org/officeDocument/2006/relationships">
+  <p:cSld>
+    <p:bg>
+      <p:bgPr>
+        <a:solidFill>
+          <a:srgbClr val="0F2A43"/>
+        </a:solidFill>
+        <a:effectLst/>
+      </p:bgPr>
+    </p:bg>
+    <p:spTree>
+      <p:nvGrpSpPr>
+        <p:cNvPr id="1" name=""/>
+        <p:cNvGrpSpPr/>
+        <p:nvPr/>
+      </p:nvGrpSpPr>
+      <p:grpSpPr/>
+      <p:sp>
+        <p:nvSpPr>
+          <p:cNvPr id="2" name="Rectangle 1"/>
+          <p:cNvSpPr/>
+          <p:nvPr/>
+        </p:nvSpPr>
+        <p:spPr>
+          <a:xfrm>
+            <a:off x="822960" y="3246120"/>
+            <a:ext cx="2926080" cy="54864"/>
+          </a:xfrm>
+          <a:prstGeom prst="rect">
+            <a:avLst/>
+          </a:prstGeom>
+          <a:solidFill>
+            <a:srgbClr val="C08A2B"/>
+          </a:solidFill>
+          <a:ln>
+            <a:noFill/>
+          </a:ln>
+          <a:effectLst/>
+        </p:spPr>
+        <p:style>
+          <a:lnRef idx="1">
+            <a:schemeClr val="accent1"/>
+          </a:lnRef>
+          <a:fillRef idx="3">
+            <a:schemeClr val="accent1"/>
+          </a:fillRef>
+          <a:effectRef idx="2">
+            <a:schemeClr val="accent1"/>
+          </a:effectRef>
+          <a:fontRef idx="minor">
+            <a:schemeClr val="lt1"/>
+          </a:fontRef>
+        </p:style>
+        <p:txBody>
+          <a:bodyPr rtlCol="0" anchor="ctr"/>
+          <a:lstStyle/>
+          <a:p>
+            <a:pPr algn="ctr"/>
+          </a:p>
+        </p:txBody>
+      </p:sp>
+      <p:sp>
+        <p:nvSpPr>
+          <p:cNvPr id="3" name="TextBox 2"/>
+          <p:cNvSpPr txBox="1"/>
+          <p:nvPr/>
+        </p:nvSpPr>
+        <p:spPr>
+          <a:xfrm>
+            <a:off x="822960" y="2148840"/>
+            <a:ext cx="10515600" cy="731520"/>
+          </a:xfrm>
+          <a:prstGeom prst="rect">
+            <a:avLst/>
+          </a:prstGeom>
+          <a:noFill/>
+        </p:spPr>
+        <p:txBody>
+          <a:bodyPr wrap="square">
+            <a:spAutoFit/>
+          </a:bodyPr>
+          <a:lstStyle/>
+          <a:p>
+            <a:pPr algn="l">
+              <a:lnSpc>
+                <a:spcPct val="100000"/>
+              </a:lnSpc>
+            </a:pPr>
+            <a:r>
+              <a:rPr sz="2000" b="1" i="0">
+                <a:solidFill>
+                  <a:srgbClr val="C08A2B"/>
+                </a:solidFill>
+                <a:latin typeface="Times New Roman"/>
+              </a:rPr>
+              <a:t>PART 2</a:t>
+            </a:r>
+          </a:p>
+        </p:txBody>
+      </p:sp>
+      <p:sp>
+        <p:nvSpPr>
+          <p:cNvPr id="4" name="TextBox 3"/>
+          <p:cNvSpPr txBox="1"/>
+          <p:nvPr/>
+        </p:nvSpPr>
+        <p:spPr>
+          <a:xfrm>
+            <a:off x="822960" y="2514600"/>
+            <a:ext cx="10515600" cy="731520"/>
+          </a:xfrm>
+          <a:prstGeom prst="rect">
+            <a:avLst/>
+          </a:prstGeom>
+          <a:noFill/>
+        </p:spPr>
+        <p:txBody>
+          <a:bodyPr wrap="square">
+            <a:spAutoFit/>
+          </a:bodyPr>
+          <a:lstStyle/>
+          <a:p>
+            <a:pPr algn="l">
+              <a:lnSpc>
+                <a:spcPct val="100000"/>
+              </a:lnSpc>
+            </a:pPr>
+            <a:r>
+              <a:rPr sz="3400" b="1" i="0">
+                <a:solidFill>
+                  <a:srgbClr val="FFFFFF"/>
+                </a:solidFill>
+                <a:latin typeface="Times New Roman"/>
+              </a:rPr>
+              <a:t>The International Legal Framework</a:t>
+            </a:r>
+          </a:p>
+        </p:txBody>
+      </p:sp>
+      <p:sp>
+        <p:nvSpPr>
+          <p:cNvPr id="5" name="TextBox 4"/>
+          <p:cNvSpPr txBox="1"/>
+          <p:nvPr/>
+        </p:nvSpPr>
+        <p:spPr>
+          <a:xfrm>
+            <a:off x="822960" y="3474720"/>
+            <a:ext cx="9601200" cy="731520"/>
+          </a:xfrm>
+          <a:prstGeom prst="rect">
+            <a:avLst/>
+          </a:prstGeom>
+          <a:noFill/>
+        </p:spPr>
+        <p:txBody>
+          <a:bodyPr wrap="square">
+            <a:spAutoFit/>
+          </a:bodyPr>
+          <a:lstStyle/>
+          <a:p>
+            <a:pPr algn="l">
+              <a:lnSpc>
+                <a:spcPct val="110000"/>
+              </a:lnSpc>
+            </a:pPr>
+            <a:r>
+              <a:rPr sz="1800" b="0" i="1">
+                <a:solidFill>
+                  <a:srgbClr val="F2F4F7"/>
+                </a:solidFill>
+                <a:latin typeface="Times New Roman"/>
+              </a:rPr>
+              <a:t>How international law addresses crime that crosses borders</a:t>
+            </a:r>
+          </a:p>
+        </p:txBody>
+      </p:sp>
+    </p:spTree>
+  </p:cSld>
+  <p:clrMapOvr>
+    <a:masterClrMapping/>
+  </p:clrMapOvr>
+</p:sld>
+</file>
+
+<file path=ppt/slides/slide8.xml><?xml version="1.0" encoding="utf-8"?>
 <p:sld xmlns:a="http://schemas.openxmlformats.org/drawingml/2006/main" xmlns:p="http://schemas.openxmlformats.org/presentationml/2006/main" xmlns:r="http://schemas.openxmlformats.org/officeDocument/2006/relationships">
   <p:cSld>
     <p:bg>
@@ -5712,8 +10549,8 @@
         </p:nvSpPr>
         <p:spPr>
           <a:xfrm>
-            <a:off x="548640" y="164592"/>
-            <a:ext cx="10058400" cy="365760"/>
+            <a:off x="548640" y="182880"/>
+            <a:ext cx="10515600" cy="731520"/>
           </a:xfrm>
           <a:prstGeom prst="rect">
             <a:avLst/>
@@ -5721,7 +10558,7 @@
           <a:noFill/>
         </p:spPr>
         <p:txBody>
-          <a:bodyPr wrap="square" anchor="t">
+          <a:bodyPr wrap="square">
             <a:spAutoFit/>
           </a:bodyPr>
           <a:lstStyle/>
@@ -5738,7 +10575,7 @@
                 </a:solidFill>
                 <a:latin typeface="Times New Roman"/>
               </a:rPr>
-              <a:t>CONCLUSION</a:t>
+              <a:t>PART 2  •  CONCEPTS</a:t>
             </a:r>
           </a:p>
         </p:txBody>
@@ -5751,8 +10588,8 @@
         </p:nvSpPr>
         <p:spPr>
           <a:xfrm>
-            <a:off x="548640" y="457200"/>
-            <a:ext cx="10972800" cy="640080"/>
+            <a:off x="548640" y="475488"/>
+            <a:ext cx="11064240" cy="731520"/>
           </a:xfrm>
           <a:prstGeom prst="rect">
             <a:avLst/>
@@ -5760,7 +10597,7 @@
           <a:noFill/>
         </p:spPr>
         <p:txBody>
-          <a:bodyPr wrap="square" anchor="t">
+          <a:bodyPr wrap="square">
             <a:spAutoFit/>
           </a:bodyPr>
           <a:lstStyle/>
@@ -5777,52 +10614,107 @@
                 </a:solidFill>
                 <a:latin typeface="Times New Roman"/>
               </a:rPr>
-              <a:t>Four Takeaways</a:t>
-            </a:r>
-          </a:p>
-        </p:txBody>
-      </p:sp>
-      <p:sp>
-        <p:nvSpPr>
-          <p:cNvPr id="6" name="Rectangle 5"/>
-          <p:cNvSpPr/>
-          <p:nvPr/>
-        </p:nvSpPr>
-        <p:spPr>
-          <a:xfrm>
-            <a:off x="640080" y="1508760"/>
-            <a:ext cx="777240" cy="960120"/>
-          </a:xfrm>
-          <a:prstGeom prst="rect">
-            <a:avLst/>
-          </a:prstGeom>
-          <a:solidFill>
-            <a:srgbClr val="C08A2B"/>
-          </a:solidFill>
-          <a:ln>
-            <a:noFill/>
-          </a:ln>
-          <a:effectLst/>
-        </p:spPr>
-        <p:style>
-          <a:lnRef idx="1">
-            <a:schemeClr val="accent1"/>
-          </a:lnRef>
-          <a:fillRef idx="3">
-            <a:schemeClr val="accent1"/>
-          </a:fillRef>
-          <a:effectRef idx="2">
-            <a:schemeClr val="accent1"/>
-          </a:effectRef>
-          <a:fontRef idx="minor">
-            <a:schemeClr val="lt1"/>
-          </a:fontRef>
-        </p:style>
-        <p:txBody>
-          <a:bodyPr rtlCol="0" anchor="ctr"/>
-          <a:lstStyle/>
-          <a:p>
-            <a:pPr algn="ctr"/>
+              <a:t>What Makes a Crime "Transnational"?</a:t>
+            </a:r>
+          </a:p>
+        </p:txBody>
+      </p:sp>
+      <p:sp>
+        <p:nvSpPr>
+          <p:cNvPr id="6" name="TextBox 5"/>
+          <p:cNvSpPr txBox="1"/>
+          <p:nvPr/>
+        </p:nvSpPr>
+        <p:spPr>
+          <a:xfrm>
+            <a:off x="640080" y="1554480"/>
+            <a:ext cx="10972800" cy="4572000"/>
+          </a:xfrm>
+          <a:prstGeom prst="rect">
+            <a:avLst/>
+          </a:prstGeom>
+          <a:noFill/>
+        </p:spPr>
+        <p:txBody>
+          <a:bodyPr wrap="square">
+            <a:spAutoFit/>
+          </a:bodyPr>
+          <a:lstStyle/>
+          <a:p>
+            <a:pPr>
+              <a:lnSpc>
+                <a:spcPct val="105000"/>
+              </a:lnSpc>
+              <a:spcAft>
+                <a:spcPts val="1800"/>
+              </a:spcAft>
+            </a:pPr>
+            <a:r>
+              <a:rPr sz="1900">
+                <a:solidFill>
+                  <a:srgbClr val="334455"/>
+                </a:solidFill>
+                <a:latin typeface="Times New Roman"/>
+              </a:rPr>
+              <a:t>•  Committed in more than one state — or in one state but planned, directed or with effects in another.</a:t>
+            </a:r>
+          </a:p>
+          <a:p>
+            <a:pPr>
+              <a:lnSpc>
+                <a:spcPct val="105000"/>
+              </a:lnSpc>
+              <a:spcAft>
+                <a:spcPts val="1800"/>
+              </a:spcAft>
+            </a:pPr>
+            <a:r>
+              <a:rPr sz="1900">
+                <a:solidFill>
+                  <a:srgbClr val="334455"/>
+                </a:solidFill>
+                <a:latin typeface="Times New Roman"/>
+              </a:rPr>
+              <a:t>•  Trafficking in persons is a paradigm case: it inherently moves people, money and evidence across borders.</a:t>
+            </a:r>
+          </a:p>
+          <a:p>
+            <a:pPr>
+              <a:lnSpc>
+                <a:spcPct val="105000"/>
+              </a:lnSpc>
+              <a:spcAft>
+                <a:spcPts val="1800"/>
+              </a:spcAft>
+            </a:pPr>
+            <a:r>
+              <a:rPr sz="1900">
+                <a:solidFill>
+                  <a:srgbClr val="334455"/>
+                </a:solidFill>
+                <a:latin typeface="Times New Roman"/>
+              </a:rPr>
+              <a:t>•  Prosecuting it therefore requires more than one country's police, courts and laws to act together.</a:t>
+            </a:r>
+          </a:p>
+          <a:p>
+            <a:pPr>
+              <a:lnSpc>
+                <a:spcPct val="105000"/>
+              </a:lnSpc>
+              <a:spcAft>
+                <a:spcPts val="1800"/>
+              </a:spcAft>
+            </a:pPr>
+            <a:r>
+              <a:rPr sz="1900">
+                <a:solidFill>
+                  <a:srgbClr val="334455"/>
+                </a:solidFill>
+                <a:latin typeface="Times New Roman"/>
+              </a:rPr>
+              <a:t>•  This is exactly where domestic systems, built for domestic crime, come under strain.</a:t>
+            </a:r>
           </a:p>
         </p:txBody>
       </p:sp>
@@ -5834,8 +10726,8 @@
         </p:nvSpPr>
         <p:spPr>
           <a:xfrm>
-            <a:off x="640080" y="1673351"/>
-            <a:ext cx="777240" cy="640080"/>
+            <a:off x="640080" y="5989320"/>
+            <a:ext cx="10972800" cy="731520"/>
           </a:xfrm>
           <a:prstGeom prst="rect">
             <a:avLst/>
@@ -5843,585 +10735,24 @@
           <a:noFill/>
         </p:spPr>
         <p:txBody>
-          <a:bodyPr wrap="square" anchor="t">
+          <a:bodyPr wrap="square">
             <a:spAutoFit/>
           </a:bodyPr>
           <a:lstStyle/>
           <a:p>
-            <a:pPr algn="ctr">
+            <a:pPr algn="l">
               <a:lnSpc>
                 <a:spcPct val="100000"/>
               </a:lnSpc>
             </a:pPr>
             <a:r>
-              <a:rPr sz="2600" b="1" i="0">
-                <a:solidFill>
-                  <a:srgbClr val="FFFFFF"/>
-                </a:solidFill>
-                <a:latin typeface="Times New Roman"/>
-              </a:rPr>
-              <a:t>01</a:t>
-            </a:r>
-          </a:p>
-        </p:txBody>
-      </p:sp>
-      <p:sp>
-        <p:nvSpPr>
-          <p:cNvPr id="8" name="TextBox 7"/>
-          <p:cNvSpPr txBox="1"/>
-          <p:nvPr/>
-        </p:nvSpPr>
-        <p:spPr>
-          <a:xfrm>
-            <a:off x="1600200" y="1554480"/>
-            <a:ext cx="9875520" cy="457200"/>
-          </a:xfrm>
-          <a:prstGeom prst="rect">
-            <a:avLst/>
-          </a:prstGeom>
-          <a:noFill/>
-        </p:spPr>
-        <p:txBody>
-          <a:bodyPr wrap="square" anchor="t">
-            <a:spAutoFit/>
-          </a:bodyPr>
-          <a:lstStyle/>
-          <a:p>
-            <a:pPr algn="l">
-              <a:lnSpc>
-                <a:spcPct val="100000"/>
-              </a:lnSpc>
-            </a:pPr>
-            <a:r>
-              <a:rPr sz="1900" b="1" i="0">
+              <a:rPr sz="1500" b="1" i="1">
                 <a:solidFill>
                   <a:srgbClr val="0F2A43"/>
                 </a:solidFill>
                 <a:latin typeface="Times New Roman"/>
               </a:rPr>
-              <a:t>Crime crosses borders — justice often doesn't.</a:t>
-            </a:r>
-          </a:p>
-        </p:txBody>
-      </p:sp>
-      <p:sp>
-        <p:nvSpPr>
-          <p:cNvPr id="9" name="TextBox 8"/>
-          <p:cNvSpPr txBox="1"/>
-          <p:nvPr/>
-        </p:nvSpPr>
-        <p:spPr>
-          <a:xfrm>
-            <a:off x="1600200" y="1984248"/>
-            <a:ext cx="9875520" cy="457200"/>
-          </a:xfrm>
-          <a:prstGeom prst="rect">
-            <a:avLst/>
-          </a:prstGeom>
-          <a:noFill/>
-        </p:spPr>
-        <p:txBody>
-          <a:bodyPr wrap="square" anchor="t">
-            <a:spAutoFit/>
-          </a:bodyPr>
-          <a:lstStyle/>
-          <a:p>
-            <a:pPr algn="l">
-              <a:lnSpc>
-                <a:spcPct val="100000"/>
-              </a:lnSpc>
-            </a:pPr>
-            <a:r>
-              <a:rPr sz="1500" b="0" i="1">
-                <a:solidFill>
-                  <a:srgbClr val="334455"/>
-                </a:solidFill>
-                <a:latin typeface="Times New Roman"/>
-              </a:rPr>
-              <a:t>Networks are global; enforcement is national.</a:t>
-            </a:r>
-          </a:p>
-        </p:txBody>
-      </p:sp>
-      <p:sp>
-        <p:nvSpPr>
-          <p:cNvPr id="10" name="Rectangle 9"/>
-          <p:cNvSpPr/>
-          <p:nvPr/>
-        </p:nvSpPr>
-        <p:spPr>
-          <a:xfrm>
-            <a:off x="640080" y="2651760"/>
-            <a:ext cx="777240" cy="960120"/>
-          </a:xfrm>
-          <a:prstGeom prst="rect">
-            <a:avLst/>
-          </a:prstGeom>
-          <a:solidFill>
-            <a:srgbClr val="C08A2B"/>
-          </a:solidFill>
-          <a:ln>
-            <a:noFill/>
-          </a:ln>
-          <a:effectLst/>
-        </p:spPr>
-        <p:style>
-          <a:lnRef idx="1">
-            <a:schemeClr val="accent1"/>
-          </a:lnRef>
-          <a:fillRef idx="3">
-            <a:schemeClr val="accent1"/>
-          </a:fillRef>
-          <a:effectRef idx="2">
-            <a:schemeClr val="accent1"/>
-          </a:effectRef>
-          <a:fontRef idx="minor">
-            <a:schemeClr val="lt1"/>
-          </a:fontRef>
-        </p:style>
-        <p:txBody>
-          <a:bodyPr rtlCol="0" anchor="ctr"/>
-          <a:lstStyle/>
-          <a:p>
-            <a:pPr algn="ctr"/>
-          </a:p>
-        </p:txBody>
-      </p:sp>
-      <p:sp>
-        <p:nvSpPr>
-          <p:cNvPr id="11" name="TextBox 10"/>
-          <p:cNvSpPr txBox="1"/>
-          <p:nvPr/>
-        </p:nvSpPr>
-        <p:spPr>
-          <a:xfrm>
-            <a:off x="640080" y="2816352"/>
-            <a:ext cx="777240" cy="640080"/>
-          </a:xfrm>
-          <a:prstGeom prst="rect">
-            <a:avLst/>
-          </a:prstGeom>
-          <a:noFill/>
-        </p:spPr>
-        <p:txBody>
-          <a:bodyPr wrap="square" anchor="t">
-            <a:spAutoFit/>
-          </a:bodyPr>
-          <a:lstStyle/>
-          <a:p>
-            <a:pPr algn="ctr">
-              <a:lnSpc>
-                <a:spcPct val="100000"/>
-              </a:lnSpc>
-            </a:pPr>
-            <a:r>
-              <a:rPr sz="2600" b="1" i="0">
-                <a:solidFill>
-                  <a:srgbClr val="FFFFFF"/>
-                </a:solidFill>
-                <a:latin typeface="Times New Roman"/>
-              </a:rPr>
-              <a:t>02</a:t>
-            </a:r>
-          </a:p>
-        </p:txBody>
-      </p:sp>
-      <p:sp>
-        <p:nvSpPr>
-          <p:cNvPr id="12" name="TextBox 11"/>
-          <p:cNvSpPr txBox="1"/>
-          <p:nvPr/>
-        </p:nvSpPr>
-        <p:spPr>
-          <a:xfrm>
-            <a:off x="1600200" y="2697479"/>
-            <a:ext cx="9875520" cy="457200"/>
-          </a:xfrm>
-          <a:prstGeom prst="rect">
-            <a:avLst/>
-          </a:prstGeom>
-          <a:noFill/>
-        </p:spPr>
-        <p:txBody>
-          <a:bodyPr wrap="square" anchor="t">
-            <a:spAutoFit/>
-          </a:bodyPr>
-          <a:lstStyle/>
-          <a:p>
-            <a:pPr algn="l">
-              <a:lnSpc>
-                <a:spcPct val="100000"/>
-              </a:lnSpc>
-            </a:pPr>
-            <a:r>
-              <a:rPr sz="1900" b="1" i="0">
-                <a:solidFill>
-                  <a:srgbClr val="0F2A43"/>
-                </a:solidFill>
-                <a:latin typeface="Times New Roman"/>
-              </a:rPr>
-              <a:t>The legal tools exist.</a:t>
-            </a:r>
-          </a:p>
-        </p:txBody>
-      </p:sp>
-      <p:sp>
-        <p:nvSpPr>
-          <p:cNvPr id="13" name="TextBox 12"/>
-          <p:cNvSpPr txBox="1"/>
-          <p:nvPr/>
-        </p:nvSpPr>
-        <p:spPr>
-          <a:xfrm>
-            <a:off x="1600200" y="3127248"/>
-            <a:ext cx="9875520" cy="457200"/>
-          </a:xfrm>
-          <a:prstGeom prst="rect">
-            <a:avLst/>
-          </a:prstGeom>
-          <a:noFill/>
-        </p:spPr>
-        <p:txBody>
-          <a:bodyPr wrap="square" anchor="t">
-            <a:spAutoFit/>
-          </a:bodyPr>
-          <a:lstStyle/>
-          <a:p>
-            <a:pPr algn="l">
-              <a:lnSpc>
-                <a:spcPct val="100000"/>
-              </a:lnSpc>
-            </a:pPr>
-            <a:r>
-              <a:rPr sz="1500" b="0" i="1">
-                <a:solidFill>
-                  <a:srgbClr val="334455"/>
-                </a:solidFill>
-                <a:latin typeface="Times New Roman"/>
-              </a:rPr>
-              <a:t>Palermo &amp; UNTOC provide the framework; coordination is the gap.</a:t>
-            </a:r>
-          </a:p>
-        </p:txBody>
-      </p:sp>
-      <p:sp>
-        <p:nvSpPr>
-          <p:cNvPr id="14" name="Rectangle 13"/>
-          <p:cNvSpPr/>
-          <p:nvPr/>
-        </p:nvSpPr>
-        <p:spPr>
-          <a:xfrm>
-            <a:off x="640080" y="3794760"/>
-            <a:ext cx="777240" cy="960120"/>
-          </a:xfrm>
-          <a:prstGeom prst="rect">
-            <a:avLst/>
-          </a:prstGeom>
-          <a:solidFill>
-            <a:srgbClr val="C08A2B"/>
-          </a:solidFill>
-          <a:ln>
-            <a:noFill/>
-          </a:ln>
-          <a:effectLst/>
-        </p:spPr>
-        <p:style>
-          <a:lnRef idx="1">
-            <a:schemeClr val="accent1"/>
-          </a:lnRef>
-          <a:fillRef idx="3">
-            <a:schemeClr val="accent1"/>
-          </a:fillRef>
-          <a:effectRef idx="2">
-            <a:schemeClr val="accent1"/>
-          </a:effectRef>
-          <a:fontRef idx="minor">
-            <a:schemeClr val="lt1"/>
-          </a:fontRef>
-        </p:style>
-        <p:txBody>
-          <a:bodyPr rtlCol="0" anchor="ctr"/>
-          <a:lstStyle/>
-          <a:p>
-            <a:pPr algn="ctr"/>
-          </a:p>
-        </p:txBody>
-      </p:sp>
-      <p:sp>
-        <p:nvSpPr>
-          <p:cNvPr id="15" name="TextBox 14"/>
-          <p:cNvSpPr txBox="1"/>
-          <p:nvPr/>
-        </p:nvSpPr>
-        <p:spPr>
-          <a:xfrm>
-            <a:off x="640080" y="3959352"/>
-            <a:ext cx="777240" cy="640080"/>
-          </a:xfrm>
-          <a:prstGeom prst="rect">
-            <a:avLst/>
-          </a:prstGeom>
-          <a:noFill/>
-        </p:spPr>
-        <p:txBody>
-          <a:bodyPr wrap="square" anchor="t">
-            <a:spAutoFit/>
-          </a:bodyPr>
-          <a:lstStyle/>
-          <a:p>
-            <a:pPr algn="ctr">
-              <a:lnSpc>
-                <a:spcPct val="100000"/>
-              </a:lnSpc>
-            </a:pPr>
-            <a:r>
-              <a:rPr sz="2600" b="1" i="0">
-                <a:solidFill>
-                  <a:srgbClr val="FFFFFF"/>
-                </a:solidFill>
-                <a:latin typeface="Times New Roman"/>
-              </a:rPr>
-              <a:t>03</a:t>
-            </a:r>
-          </a:p>
-        </p:txBody>
-      </p:sp>
-      <p:sp>
-        <p:nvSpPr>
-          <p:cNvPr id="16" name="TextBox 15"/>
-          <p:cNvSpPr txBox="1"/>
-          <p:nvPr/>
-        </p:nvSpPr>
-        <p:spPr>
-          <a:xfrm>
-            <a:off x="1600200" y="3840480"/>
-            <a:ext cx="9875520" cy="457200"/>
-          </a:xfrm>
-          <a:prstGeom prst="rect">
-            <a:avLst/>
-          </a:prstGeom>
-          <a:noFill/>
-        </p:spPr>
-        <p:txBody>
-          <a:bodyPr wrap="square" anchor="t">
-            <a:spAutoFit/>
-          </a:bodyPr>
-          <a:lstStyle/>
-          <a:p>
-            <a:pPr algn="l">
-              <a:lnSpc>
-                <a:spcPct val="100000"/>
-              </a:lnSpc>
-            </a:pPr>
-            <a:r>
-              <a:rPr sz="1900" b="1" i="0">
-                <a:solidFill>
-                  <a:srgbClr val="0F2A43"/>
-                </a:solidFill>
-                <a:latin typeface="Times New Roman"/>
-              </a:rPr>
-              <a:t>Wealth buys time, not immunity.</a:t>
-            </a:r>
-          </a:p>
-        </p:txBody>
-      </p:sp>
-      <p:sp>
-        <p:nvSpPr>
-          <p:cNvPr id="17" name="TextBox 16"/>
-          <p:cNvSpPr txBox="1"/>
-          <p:nvPr/>
-        </p:nvSpPr>
-        <p:spPr>
-          <a:xfrm>
-            <a:off x="1600200" y="4270248"/>
-            <a:ext cx="9875520" cy="457200"/>
-          </a:xfrm>
-          <a:prstGeom prst="rect">
-            <a:avLst/>
-          </a:prstGeom>
-          <a:noFill/>
-        </p:spPr>
-        <p:txBody>
-          <a:bodyPr wrap="square" anchor="t">
-            <a:spAutoFit/>
-          </a:bodyPr>
-          <a:lstStyle/>
-          <a:p>
-            <a:pPr algn="l">
-              <a:lnSpc>
-                <a:spcPct val="100000"/>
-              </a:lnSpc>
-            </a:pPr>
-            <a:r>
-              <a:rPr sz="1500" b="0" i="1">
-                <a:solidFill>
-                  <a:srgbClr val="334455"/>
-                </a:solidFill>
-                <a:latin typeface="Times New Roman"/>
-              </a:rPr>
-              <a:t>Mobility delayed — but did not prevent — accountability.</a:t>
-            </a:r>
-          </a:p>
-        </p:txBody>
-      </p:sp>
-      <p:sp>
-        <p:nvSpPr>
-          <p:cNvPr id="18" name="Rectangle 17"/>
-          <p:cNvSpPr/>
-          <p:nvPr/>
-        </p:nvSpPr>
-        <p:spPr>
-          <a:xfrm>
-            <a:off x="640080" y="4937760"/>
-            <a:ext cx="777240" cy="960120"/>
-          </a:xfrm>
-          <a:prstGeom prst="rect">
-            <a:avLst/>
-          </a:prstGeom>
-          <a:solidFill>
-            <a:srgbClr val="C08A2B"/>
-          </a:solidFill>
-          <a:ln>
-            <a:noFill/>
-          </a:ln>
-          <a:effectLst/>
-        </p:spPr>
-        <p:style>
-          <a:lnRef idx="1">
-            <a:schemeClr val="accent1"/>
-          </a:lnRef>
-          <a:fillRef idx="3">
-            <a:schemeClr val="accent1"/>
-          </a:fillRef>
-          <a:effectRef idx="2">
-            <a:schemeClr val="accent1"/>
-          </a:effectRef>
-          <a:fontRef idx="minor">
-            <a:schemeClr val="lt1"/>
-          </a:fontRef>
-        </p:style>
-        <p:txBody>
-          <a:bodyPr rtlCol="0" anchor="ctr"/>
-          <a:lstStyle/>
-          <a:p>
-            <a:pPr algn="ctr"/>
-          </a:p>
-        </p:txBody>
-      </p:sp>
-      <p:sp>
-        <p:nvSpPr>
-          <p:cNvPr id="19" name="TextBox 18"/>
-          <p:cNvSpPr txBox="1"/>
-          <p:nvPr/>
-        </p:nvSpPr>
-        <p:spPr>
-          <a:xfrm>
-            <a:off x="640080" y="5102352"/>
-            <a:ext cx="777240" cy="640080"/>
-          </a:xfrm>
-          <a:prstGeom prst="rect">
-            <a:avLst/>
-          </a:prstGeom>
-          <a:noFill/>
-        </p:spPr>
-        <p:txBody>
-          <a:bodyPr wrap="square" anchor="t">
-            <a:spAutoFit/>
-          </a:bodyPr>
-          <a:lstStyle/>
-          <a:p>
-            <a:pPr algn="ctr">
-              <a:lnSpc>
-                <a:spcPct val="100000"/>
-              </a:lnSpc>
-            </a:pPr>
-            <a:r>
-              <a:rPr sz="2600" b="1" i="0">
-                <a:solidFill>
-                  <a:srgbClr val="FFFFFF"/>
-                </a:solidFill>
-                <a:latin typeface="Times New Roman"/>
-              </a:rPr>
-              <a:t>04</a:t>
-            </a:r>
-          </a:p>
-        </p:txBody>
-      </p:sp>
-      <p:sp>
-        <p:nvSpPr>
-          <p:cNvPr id="20" name="TextBox 19"/>
-          <p:cNvSpPr txBox="1"/>
-          <p:nvPr/>
-        </p:nvSpPr>
-        <p:spPr>
-          <a:xfrm>
-            <a:off x="1600200" y="4983480"/>
-            <a:ext cx="9875520" cy="457200"/>
-          </a:xfrm>
-          <a:prstGeom prst="rect">
-            <a:avLst/>
-          </a:prstGeom>
-          <a:noFill/>
-        </p:spPr>
-        <p:txBody>
-          <a:bodyPr wrap="square" anchor="t">
-            <a:spAutoFit/>
-          </a:bodyPr>
-          <a:lstStyle/>
-          <a:p>
-            <a:pPr algn="l">
-              <a:lnSpc>
-                <a:spcPct val="100000"/>
-              </a:lnSpc>
-            </a:pPr>
-            <a:r>
-              <a:rPr sz="1900" b="1" i="0">
-                <a:solidFill>
-                  <a:srgbClr val="0F2A43"/>
-                </a:solidFill>
-                <a:latin typeface="Times New Roman"/>
-              </a:rPr>
-              <a:t>Transparency must protect victims.</a:t>
-            </a:r>
-          </a:p>
-        </p:txBody>
-      </p:sp>
-      <p:sp>
-        <p:nvSpPr>
-          <p:cNvPr id="21" name="TextBox 20"/>
-          <p:cNvSpPr txBox="1"/>
-          <p:nvPr/>
-        </p:nvSpPr>
-        <p:spPr>
-          <a:xfrm>
-            <a:off x="1600200" y="5413248"/>
-            <a:ext cx="9875520" cy="457200"/>
-          </a:xfrm>
-          <a:prstGeom prst="rect">
-            <a:avLst/>
-          </a:prstGeom>
-          <a:noFill/>
-        </p:spPr>
-        <p:txBody>
-          <a:bodyPr wrap="square" anchor="t">
-            <a:spAutoFit/>
-          </a:bodyPr>
-          <a:lstStyle/>
-          <a:p>
-            <a:pPr algn="l">
-              <a:lnSpc>
-                <a:spcPct val="100000"/>
-              </a:lnSpc>
-            </a:pPr>
-            <a:r>
-              <a:rPr sz="1500" b="0" i="1">
-                <a:solidFill>
-                  <a:srgbClr val="334455"/>
-                </a:solidFill>
-                <a:latin typeface="Times New Roman"/>
-              </a:rPr>
-              <a:t>Disclosure should expose enablers, not endanger survivors.</a:t>
+              <a:t>So the question is institutional, not just moral: can sovereign systems coordinate fast enough?</a:t>
             </a:r>
           </a:p>
         </p:txBody>
@@ -6434,13 +10765,13 @@
 </p:sld>
 </file>
 
-<file path=ppt/slides/slide8.xml><?xml version="1.0" encoding="utf-8"?>
+<file path=ppt/slides/slide9.xml><?xml version="1.0" encoding="utf-8"?>
 <p:sld xmlns:a="http://schemas.openxmlformats.org/drawingml/2006/main" xmlns:p="http://schemas.openxmlformats.org/presentationml/2006/main" xmlns:r="http://schemas.openxmlformats.org/officeDocument/2006/relationships">
   <p:cSld>
     <p:bg>
       <p:bgPr>
         <a:solidFill>
-          <a:srgbClr val="0F2A43"/>
+          <a:srgbClr val="FFFFFF"/>
         </a:solidFill>
         <a:effectLst/>
       </p:bgPr>
@@ -6460,7 +10791,51 @@
         </p:nvSpPr>
         <p:spPr>
           <a:xfrm>
-            <a:off x="0" y="1828800"/>
+            <a:off x="0" y="0"/>
+            <a:ext cx="12191695" cy="1143000"/>
+          </a:xfrm>
+          <a:prstGeom prst="rect">
+            <a:avLst/>
+          </a:prstGeom>
+          <a:solidFill>
+            <a:srgbClr val="0F2A43"/>
+          </a:solidFill>
+          <a:ln>
+            <a:noFill/>
+          </a:ln>
+          <a:effectLst/>
+        </p:spPr>
+        <p:style>
+          <a:lnRef idx="1">
+            <a:schemeClr val="accent1"/>
+          </a:lnRef>
+          <a:fillRef idx="3">
+            <a:schemeClr val="accent1"/>
+          </a:fillRef>
+          <a:effectRef idx="2">
+            <a:schemeClr val="accent1"/>
+          </a:effectRef>
+          <a:fontRef idx="minor">
+            <a:schemeClr val="lt1"/>
+          </a:fontRef>
+        </p:style>
+        <p:txBody>
+          <a:bodyPr rtlCol="0" anchor="ctr"/>
+          <a:lstStyle/>
+          <a:p>
+            <a:pPr algn="ctr"/>
+          </a:p>
+        </p:txBody>
+      </p:sp>
+      <p:sp>
+        <p:nvSpPr>
+          <p:cNvPr id="3" name="Rectangle 2"/>
+          <p:cNvSpPr/>
+          <p:nvPr/>
+        </p:nvSpPr>
+        <p:spPr>
+          <a:xfrm>
+            <a:off x="0" y="1143000"/>
             <a:ext cx="12191695" cy="54864"/>
           </a:xfrm>
           <a:prstGeom prst="rect">
@@ -6498,131 +10873,14 @@
       </p:sp>
       <p:sp>
         <p:nvSpPr>
-          <p:cNvPr id="3" name="TextBox 2"/>
-          <p:cNvSpPr txBox="1"/>
-          <p:nvPr/>
-        </p:nvSpPr>
-        <p:spPr>
-          <a:xfrm>
-            <a:off x="914400" y="822960"/>
-            <a:ext cx="10332720" cy="822960"/>
-          </a:xfrm>
-          <a:prstGeom prst="rect">
-            <a:avLst/>
-          </a:prstGeom>
-          <a:noFill/>
-        </p:spPr>
-        <p:txBody>
-          <a:bodyPr wrap="square" anchor="t">
-            <a:spAutoFit/>
-          </a:bodyPr>
-          <a:lstStyle/>
-          <a:p>
-            <a:pPr algn="ctr">
-              <a:lnSpc>
-                <a:spcPct val="100000"/>
-              </a:lnSpc>
-            </a:pPr>
-            <a:r>
-              <a:rPr sz="4000" b="1" i="0">
-                <a:solidFill>
-                  <a:srgbClr val="FFFFFF"/>
-                </a:solidFill>
-                <a:latin typeface="Times New Roman"/>
-              </a:rPr>
-              <a:t>Thank You</a:t>
-            </a:r>
-          </a:p>
-        </p:txBody>
-      </p:sp>
-      <p:sp>
-        <p:nvSpPr>
           <p:cNvPr id="4" name="TextBox 3"/>
           <p:cNvSpPr txBox="1"/>
           <p:nvPr/>
         </p:nvSpPr>
         <p:spPr>
           <a:xfrm>
-            <a:off x="914400" y="2011680"/>
-            <a:ext cx="10332720" cy="457200"/>
-          </a:xfrm>
-          <a:prstGeom prst="rect">
-            <a:avLst/>
-          </a:prstGeom>
-          <a:noFill/>
-        </p:spPr>
-        <p:txBody>
-          <a:bodyPr wrap="square" anchor="t">
-            <a:spAutoFit/>
-          </a:bodyPr>
-          <a:lstStyle/>
-          <a:p>
-            <a:pPr algn="ctr">
-              <a:lnSpc>
-                <a:spcPct val="100000"/>
-              </a:lnSpc>
-            </a:pPr>
-            <a:r>
-              <a:rPr sz="1800" b="0" i="1">
-                <a:solidFill>
-                  <a:srgbClr val="F2F4F7"/>
-                </a:solidFill>
-                <a:latin typeface="Times New Roman"/>
-              </a:rPr>
-              <a:t>Questions &amp; Discussion</a:t>
-            </a:r>
-          </a:p>
-        </p:txBody>
-      </p:sp>
-      <p:sp>
-        <p:nvSpPr>
-          <p:cNvPr id="5" name="TextBox 4"/>
-          <p:cNvSpPr txBox="1"/>
-          <p:nvPr/>
-        </p:nvSpPr>
-        <p:spPr>
-          <a:xfrm>
-            <a:off x="914400" y="3017520"/>
-            <a:ext cx="10332720" cy="365760"/>
-          </a:xfrm>
-          <a:prstGeom prst="rect">
-            <a:avLst/>
-          </a:prstGeom>
-          <a:noFill/>
-        </p:spPr>
-        <p:txBody>
-          <a:bodyPr wrap="square" anchor="t">
-            <a:spAutoFit/>
-          </a:bodyPr>
-          <a:lstStyle/>
-          <a:p>
-            <a:pPr algn="ctr">
-              <a:lnSpc>
-                <a:spcPct val="100000"/>
-              </a:lnSpc>
-            </a:pPr>
-            <a:r>
-              <a:rPr sz="1300" b="1" i="0">
-                <a:solidFill>
-                  <a:srgbClr val="C08A2B"/>
-                </a:solidFill>
-                <a:latin typeface="Times New Roman"/>
-              </a:rPr>
-              <a:t>SELECTED SOURCES &amp; INSTRUMENTS</a:t>
-            </a:r>
-          </a:p>
-        </p:txBody>
-      </p:sp>
-      <p:sp>
-        <p:nvSpPr>
-          <p:cNvPr id="6" name="TextBox 5"/>
-          <p:cNvSpPr txBox="1"/>
-          <p:nvPr/>
-        </p:nvSpPr>
-        <p:spPr>
-          <a:xfrm>
-            <a:off x="3017520" y="3474720"/>
-            <a:ext cx="6400800" cy="2377440"/>
+            <a:off x="548640" y="182880"/>
+            <a:ext cx="10515600" cy="731520"/>
           </a:xfrm>
           <a:prstGeom prst="rect">
             <a:avLst/>
@@ -6635,22 +10893,109 @@
           </a:bodyPr>
           <a:lstStyle/>
           <a:p>
+            <a:pPr algn="l">
+              <a:lnSpc>
+                <a:spcPct val="100000"/>
+              </a:lnSpc>
+            </a:pPr>
+            <a:r>
+              <a:rPr sz="1300" b="1" i="0">
+                <a:solidFill>
+                  <a:srgbClr val="C08A2B"/>
+                </a:solidFill>
+                <a:latin typeface="Times New Roman"/>
+              </a:rPr>
+              <a:t>PART 2  •  INSTRUMENTS</a:t>
+            </a:r>
+          </a:p>
+        </p:txBody>
+      </p:sp>
+      <p:sp>
+        <p:nvSpPr>
+          <p:cNvPr id="5" name="TextBox 4"/>
+          <p:cNvSpPr txBox="1"/>
+          <p:nvPr/>
+        </p:nvSpPr>
+        <p:spPr>
+          <a:xfrm>
+            <a:off x="548640" y="475488"/>
+            <a:ext cx="11064240" cy="731520"/>
+          </a:xfrm>
+          <a:prstGeom prst="rect">
+            <a:avLst/>
+          </a:prstGeom>
+          <a:noFill/>
+        </p:spPr>
+        <p:txBody>
+          <a:bodyPr wrap="square">
+            <a:spAutoFit/>
+          </a:bodyPr>
+          <a:lstStyle/>
+          <a:p>
+            <a:pPr algn="l">
+              <a:lnSpc>
+                <a:spcPct val="100000"/>
+              </a:lnSpc>
+            </a:pPr>
+            <a:r>
+              <a:rPr sz="2600" b="1" i="0">
+                <a:solidFill>
+                  <a:srgbClr val="FFFFFF"/>
+                </a:solidFill>
+                <a:latin typeface="Times New Roman"/>
+              </a:rPr>
+              <a:t>The Palermo Protocol (2000)</a:t>
+            </a:r>
+          </a:p>
+        </p:txBody>
+      </p:sp>
+      <p:sp>
+        <p:nvSpPr>
+          <p:cNvPr id="6" name="TextBox 5"/>
+          <p:cNvSpPr txBox="1"/>
+          <p:nvPr/>
+        </p:nvSpPr>
+        <p:spPr>
+          <a:xfrm>
+            <a:off x="640080" y="1554480"/>
+            <a:ext cx="10972800" cy="4572000"/>
+          </a:xfrm>
+          <a:prstGeom prst="rect">
+            <a:avLst/>
+          </a:prstGeom>
+          <a:noFill/>
+        </p:spPr>
+        <p:txBody>
+          <a:bodyPr wrap="square">
+            <a:spAutoFit/>
+          </a:bodyPr>
+          <a:lstStyle/>
+          <a:p>
             <a:pPr>
               <a:lnSpc>
                 <a:spcPct val="105000"/>
               </a:lnSpc>
               <a:spcAft>
-                <a:spcPts val="800"/>
+                <a:spcPts val="1600"/>
               </a:spcAft>
             </a:pPr>
             <a:r>
-              <a:rPr sz="1400">
-                <a:solidFill>
-                  <a:srgbClr val="F2F4F7"/>
-                </a:solidFill>
-                <a:latin typeface="Times New Roman"/>
-              </a:rPr>
-              <a:t>•  UN Protocol to Prevent, Suppress and Punish Trafficking in Persons (Palermo Protocol, 2000)</a:t>
+              <a:rPr sz="1900" b="1">
+                <a:solidFill>
+                  <a:srgbClr val="0F2A43"/>
+                </a:solidFill>
+                <a:latin typeface="Times New Roman"/>
+              </a:rPr>
+              <a:t>•  Full name: </a:t>
+            </a:r>
+            <a:r>
+              <a:rPr sz="1900">
+                <a:solidFill>
+                  <a:srgbClr val="334455"/>
+                </a:solidFill>
+                <a:latin typeface="Times New Roman"/>
+              </a:rPr>
+              <a:t>UN Protocol to Prevent, Suppress and Punish Trafficking in Persons.</a:t>
             </a:r>
           </a:p>
           <a:p>
@@ -6659,17 +11004,17 @@
                 <a:spcPct val="105000"/>
               </a:lnSpc>
               <a:spcAft>
-                <a:spcPts val="800"/>
+                <a:spcPts val="1600"/>
               </a:spcAft>
             </a:pPr>
             <a:r>
-              <a:rPr sz="1400">
-                <a:solidFill>
-                  <a:srgbClr val="F2F4F7"/>
-                </a:solidFill>
-                <a:latin typeface="Times New Roman"/>
-              </a:rPr>
-              <a:t>•  UN Convention against Transnational Organized Crime (UNTOC)</a:t>
+              <a:rPr sz="1900">
+                <a:solidFill>
+                  <a:srgbClr val="334455"/>
+                </a:solidFill>
+                <a:latin typeface="Times New Roman"/>
+              </a:rPr>
+              <a:t>•  First globally agreed definition of human trafficking.</a:t>
             </a:r>
           </a:p>
           <a:p>
@@ -6678,17 +11023,26 @@
                 <a:spcPct val="105000"/>
               </a:lnSpc>
               <a:spcAft>
-                <a:spcPts val="800"/>
+                <a:spcPts val="1600"/>
               </a:spcAft>
             </a:pPr>
             <a:r>
-              <a:rPr sz="1400">
-                <a:solidFill>
-                  <a:srgbClr val="F2F4F7"/>
-                </a:solidFill>
-                <a:latin typeface="Times New Roman"/>
-              </a:rPr>
-              <a:t>•  US Dept. of Justice filings: US v. Epstein (2019); US v. Maxwell (2021)</a:t>
+              <a:rPr sz="1900" b="1">
+                <a:solidFill>
+                  <a:srgbClr val="0F2A43"/>
+                </a:solidFill>
+                <a:latin typeface="Times New Roman"/>
+              </a:rPr>
+              <a:t>•  Three elements: </a:t>
+            </a:r>
+            <a:r>
+              <a:rPr sz="1900">
+                <a:solidFill>
+                  <a:srgbClr val="334455"/>
+                </a:solidFill>
+                <a:latin typeface="Times New Roman"/>
+              </a:rPr>
+              <a:t>the act, the means, and the purpose of exploitation.</a:t>
             </a:r>
           </a:p>
           <a:p>
@@ -6697,17 +11051,17 @@
                 <a:spcPct val="105000"/>
               </a:lnSpc>
               <a:spcAft>
-                <a:spcPts val="800"/>
+                <a:spcPts val="1600"/>
               </a:spcAft>
             </a:pPr>
             <a:r>
-              <a:rPr sz="1400">
-                <a:solidFill>
-                  <a:srgbClr val="F2F4F7"/>
-                </a:solidFill>
-                <a:latin typeface="Times New Roman"/>
-              </a:rPr>
-              <a:t>•  US State Department Trafficking in Persons (TIP) Reports</a:t>
+              <a:rPr sz="1900">
+                <a:solidFill>
+                  <a:srgbClr val="334455"/>
+                </a:solidFill>
+                <a:latin typeface="Times New Roman"/>
+              </a:rPr>
+              <a:t>•  For children, the "means" element is not required — any recruitment for exploitation qualifies.</a:t>
             </a:r>
           </a:p>
           <a:p>
@@ -6716,17 +11070,56 @@
                 <a:spcPct val="105000"/>
               </a:lnSpc>
               <a:spcAft>
-                <a:spcPts val="800"/>
+                <a:spcPts val="1600"/>
               </a:spcAft>
             </a:pPr>
             <a:r>
-              <a:rPr sz="1400">
-                <a:solidFill>
-                  <a:srgbClr val="F2F4F7"/>
-                </a:solidFill>
-                <a:latin typeface="Times New Roman"/>
-              </a:rPr>
-              <a:t>•  Contemporary news reporting on 2025 document disclosures</a:t>
+              <a:rPr sz="1900">
+                <a:solidFill>
+                  <a:srgbClr val="334455"/>
+                </a:solidFill>
+                <a:latin typeface="Times New Roman"/>
+              </a:rPr>
+              <a:t>•  Obliges states parties to criminalise trafficking in their domestic law.</a:t>
+            </a:r>
+          </a:p>
+        </p:txBody>
+      </p:sp>
+      <p:sp>
+        <p:nvSpPr>
+          <p:cNvPr id="7" name="TextBox 6"/>
+          <p:cNvSpPr txBox="1"/>
+          <p:nvPr/>
+        </p:nvSpPr>
+        <p:spPr>
+          <a:xfrm>
+            <a:off x="640080" y="5989320"/>
+            <a:ext cx="10972800" cy="731520"/>
+          </a:xfrm>
+          <a:prstGeom prst="rect">
+            <a:avLst/>
+          </a:prstGeom>
+          <a:noFill/>
+        </p:spPr>
+        <p:txBody>
+          <a:bodyPr wrap="square">
+            <a:spAutoFit/>
+          </a:bodyPr>
+          <a:lstStyle/>
+          <a:p>
+            <a:pPr algn="l">
+              <a:lnSpc>
+                <a:spcPct val="100000"/>
+              </a:lnSpc>
+            </a:pPr>
+            <a:r>
+              <a:rPr sz="1500" b="0" i="1">
+                <a:solidFill>
+                  <a:srgbClr val="0F2A43"/>
+                </a:solidFill>
+                <a:latin typeface="Times New Roman"/>
+              </a:rPr>
+              <a:t>It gives 190+ states a shared vocabulary — a precondition for cooperation.</a:t>
             </a:r>
           </a:p>
         </p:txBody>

--- a/Epstein_Transnational_Justice.pptx
+++ b/Epstein_Transnational_Justice.pptx
@@ -3123,8 +3123,8 @@
         </p:nvSpPr>
         <p:spPr>
           <a:xfrm>
-            <a:off x="0" y="2788920"/>
-            <a:ext cx="12191695" cy="54864"/>
+            <a:off x="0" y="0"/>
+            <a:ext cx="12191695" cy="146304"/>
           </a:xfrm>
           <a:prstGeom prst="rect">
             <a:avLst/>
@@ -3161,13 +3161,57 @@
       </p:sp>
       <p:sp>
         <p:nvSpPr>
-          <p:cNvPr id="3" name="TextBox 2"/>
+          <p:cNvPr id="3" name="Rectangle 2"/>
+          <p:cNvSpPr/>
+          <p:nvPr/>
+        </p:nvSpPr>
+        <p:spPr>
+          <a:xfrm>
+            <a:off x="0" y="6711696"/>
+            <a:ext cx="12191695" cy="146304"/>
+          </a:xfrm>
+          <a:prstGeom prst="rect">
+            <a:avLst/>
+          </a:prstGeom>
+          <a:solidFill>
+            <a:srgbClr val="C08A2B"/>
+          </a:solidFill>
+          <a:ln>
+            <a:noFill/>
+          </a:ln>
+          <a:effectLst/>
+        </p:spPr>
+        <p:style>
+          <a:lnRef idx="1">
+            <a:schemeClr val="accent1"/>
+          </a:lnRef>
+          <a:fillRef idx="3">
+            <a:schemeClr val="accent1"/>
+          </a:fillRef>
+          <a:effectRef idx="2">
+            <a:schemeClr val="accent1"/>
+          </a:effectRef>
+          <a:fontRef idx="minor">
+            <a:schemeClr val="lt1"/>
+          </a:fontRef>
+        </p:style>
+        <p:txBody>
+          <a:bodyPr rtlCol="0" anchor="ctr"/>
+          <a:lstStyle/>
+          <a:p>
+            <a:pPr algn="ctr"/>
+          </a:p>
+        </p:txBody>
+      </p:sp>
+      <p:sp>
+        <p:nvSpPr>
+          <p:cNvPr id="4" name="TextBox 3"/>
           <p:cNvSpPr txBox="1"/>
           <p:nvPr/>
         </p:nvSpPr>
         <p:spPr>
           <a:xfrm>
-            <a:off x="914400" y="1325880"/>
+            <a:off x="914400" y="2286000"/>
             <a:ext cx="10332720" cy="731520"/>
           </a:xfrm>
           <a:prstGeom prst="rect">
@@ -3200,13 +3244,13 @@
       </p:sp>
       <p:sp>
         <p:nvSpPr>
-          <p:cNvPr id="4" name="TextBox 3"/>
+          <p:cNvPr id="5" name="TextBox 4"/>
           <p:cNvSpPr txBox="1"/>
           <p:nvPr/>
         </p:nvSpPr>
         <p:spPr>
           <a:xfrm>
-            <a:off x="914400" y="1783080"/>
+            <a:off x="914400" y="2743200"/>
             <a:ext cx="10332720" cy="1005840"/>
           </a:xfrm>
           <a:prstGeom prst="rect">
@@ -3239,13 +3283,57 @@
       </p:sp>
       <p:sp>
         <p:nvSpPr>
-          <p:cNvPr id="5" name="TextBox 4"/>
+          <p:cNvPr id="6" name="Rectangle 5"/>
+          <p:cNvSpPr/>
+          <p:nvPr/>
+        </p:nvSpPr>
+        <p:spPr>
+          <a:xfrm>
+            <a:off x="4724247" y="3767328"/>
+            <a:ext cx="2743200" cy="54864"/>
+          </a:xfrm>
+          <a:prstGeom prst="rect">
+            <a:avLst/>
+          </a:prstGeom>
+          <a:solidFill>
+            <a:srgbClr val="C08A2B"/>
+          </a:solidFill>
+          <a:ln>
+            <a:noFill/>
+          </a:ln>
+          <a:effectLst/>
+        </p:spPr>
+        <p:style>
+          <a:lnRef idx="1">
+            <a:schemeClr val="accent1"/>
+          </a:lnRef>
+          <a:fillRef idx="3">
+            <a:schemeClr val="accent1"/>
+          </a:fillRef>
+          <a:effectRef idx="2">
+            <a:schemeClr val="accent1"/>
+          </a:effectRef>
+          <a:fontRef idx="minor">
+            <a:schemeClr val="lt1"/>
+          </a:fontRef>
+        </p:style>
+        <p:txBody>
+          <a:bodyPr rtlCol="0" anchor="ctr"/>
+          <a:lstStyle/>
+          <a:p>
+            <a:pPr algn="ctr"/>
+          </a:p>
+        </p:txBody>
+      </p:sp>
+      <p:sp>
+        <p:nvSpPr>
+          <p:cNvPr id="7" name="TextBox 6"/>
           <p:cNvSpPr txBox="1"/>
           <p:nvPr/>
         </p:nvSpPr>
         <p:spPr>
           <a:xfrm>
-            <a:off x="914400" y="3063240"/>
+            <a:off x="914400" y="4023360"/>
             <a:ext cx="10332720" cy="731520"/>
           </a:xfrm>
           <a:prstGeom prst="rect">
@@ -3278,13 +3366,13 @@
       </p:sp>
       <p:sp>
         <p:nvSpPr>
-          <p:cNvPr id="6" name="TextBox 5"/>
+          <p:cNvPr id="8" name="TextBox 7"/>
           <p:cNvSpPr txBox="1"/>
           <p:nvPr/>
         </p:nvSpPr>
         <p:spPr>
           <a:xfrm>
-            <a:off x="914400" y="5897880"/>
+            <a:off x="914400" y="5989320"/>
             <a:ext cx="10332720" cy="731520"/>
           </a:xfrm>
           <a:prstGeom prst="rect">
@@ -3306,7 +3394,7 @@
             <a:r>
               <a:rPr sz="1300" b="0" i="0">
                 <a:solidFill>
-                  <a:srgbClr val="6B7682"/>
+                  <a:srgbClr val="909CAA"/>
                 </a:solidFill>
                 <a:latin typeface="Times New Roman"/>
               </a:rPr>
@@ -3515,8 +3603,8 @@
         </p:nvSpPr>
         <p:spPr>
           <a:xfrm>
-            <a:off x="640080" y="1554480"/>
-            <a:ext cx="10972800" cy="4572000"/>
+            <a:off x="640080" y="1874519"/>
+            <a:ext cx="10881360" cy="4572000"/>
           </a:xfrm>
           <a:prstGeom prst="rect">
             <a:avLst/>
@@ -3534,7 +3622,7 @@
                 <a:spcPct val="105000"/>
               </a:lnSpc>
               <a:spcAft>
-                <a:spcPts val="1600"/>
+                <a:spcPts val="2800"/>
               </a:spcAft>
             </a:pPr>
             <a:r>
@@ -3562,7 +3650,7 @@
                 <a:spcPct val="105000"/>
               </a:lnSpc>
               <a:spcAft>
-                <a:spcPts val="1600"/>
+                <a:spcPts val="2800"/>
               </a:spcAft>
             </a:pPr>
             <a:r>
@@ -3581,7 +3669,7 @@
                 <a:spcPct val="105000"/>
               </a:lnSpc>
               <a:spcAft>
-                <a:spcPts val="1600"/>
+                <a:spcPts val="2800"/>
               </a:spcAft>
             </a:pPr>
             <a:r>
@@ -3600,7 +3688,7 @@
                 <a:spcPct val="105000"/>
               </a:lnSpc>
               <a:spcAft>
-                <a:spcPts val="1600"/>
+                <a:spcPts val="2800"/>
               </a:spcAft>
             </a:pPr>
             <a:r>
@@ -3619,7 +3707,7 @@
                 <a:spcPct val="105000"/>
               </a:lnSpc>
               <a:spcAft>
-                <a:spcPts val="1600"/>
+                <a:spcPts val="2800"/>
               </a:spcAft>
             </a:pPr>
             <a:r>
@@ -3636,14 +3724,102 @@
       </p:sp>
       <p:sp>
         <p:nvSpPr>
-          <p:cNvPr id="7" name="TextBox 6"/>
+          <p:cNvPr id="7" name="Rectangle 6"/>
+          <p:cNvSpPr/>
+          <p:nvPr/>
+        </p:nvSpPr>
+        <p:spPr>
+          <a:xfrm>
+            <a:off x="0" y="5779008"/>
+            <a:ext cx="12191695" cy="566928"/>
+          </a:xfrm>
+          <a:prstGeom prst="rect">
+            <a:avLst/>
+          </a:prstGeom>
+          <a:solidFill>
+            <a:srgbClr val="F2F4F7"/>
+          </a:solidFill>
+          <a:ln>
+            <a:noFill/>
+          </a:ln>
+          <a:effectLst/>
+        </p:spPr>
+        <p:style>
+          <a:lnRef idx="1">
+            <a:schemeClr val="accent1"/>
+          </a:lnRef>
+          <a:fillRef idx="3">
+            <a:schemeClr val="accent1"/>
+          </a:fillRef>
+          <a:effectRef idx="2">
+            <a:schemeClr val="accent1"/>
+          </a:effectRef>
+          <a:fontRef idx="minor">
+            <a:schemeClr val="lt1"/>
+          </a:fontRef>
+        </p:style>
+        <p:txBody>
+          <a:bodyPr rtlCol="0" anchor="ctr"/>
+          <a:lstStyle/>
+          <a:p>
+            <a:pPr algn="ctr"/>
+          </a:p>
+        </p:txBody>
+      </p:sp>
+      <p:sp>
+        <p:nvSpPr>
+          <p:cNvPr id="8" name="Rectangle 7"/>
+          <p:cNvSpPr/>
+          <p:nvPr/>
+        </p:nvSpPr>
+        <p:spPr>
+          <a:xfrm>
+            <a:off x="0" y="5779008"/>
+            <a:ext cx="128016" cy="566928"/>
+          </a:xfrm>
+          <a:prstGeom prst="rect">
+            <a:avLst/>
+          </a:prstGeom>
+          <a:solidFill>
+            <a:srgbClr val="C08A2B"/>
+          </a:solidFill>
+          <a:ln>
+            <a:noFill/>
+          </a:ln>
+          <a:effectLst/>
+        </p:spPr>
+        <p:style>
+          <a:lnRef idx="1">
+            <a:schemeClr val="accent1"/>
+          </a:lnRef>
+          <a:fillRef idx="3">
+            <a:schemeClr val="accent1"/>
+          </a:fillRef>
+          <a:effectRef idx="2">
+            <a:schemeClr val="accent1"/>
+          </a:effectRef>
+          <a:fontRef idx="minor">
+            <a:schemeClr val="lt1"/>
+          </a:fontRef>
+        </p:style>
+        <p:txBody>
+          <a:bodyPr rtlCol="0" anchor="ctr"/>
+          <a:lstStyle/>
+          <a:p>
+            <a:pPr algn="ctr"/>
+          </a:p>
+        </p:txBody>
+      </p:sp>
+      <p:sp>
+        <p:nvSpPr>
+          <p:cNvPr id="9" name="TextBox 8"/>
           <p:cNvSpPr txBox="1"/>
           <p:nvPr/>
         </p:nvSpPr>
         <p:spPr>
           <a:xfrm>
-            <a:off x="640080" y="5989320"/>
-            <a:ext cx="10972800" cy="731520"/>
+            <a:off x="566928" y="5916168"/>
+            <a:ext cx="11064240" cy="457200"/>
           </a:xfrm>
           <a:prstGeom prst="rect">
             <a:avLst/>
@@ -3669,6 +3845,89 @@
                 <a:latin typeface="Times New Roman"/>
               </a:rPr>
               <a:t>In short: the machinery for international cooperation already exists on paper.</a:t>
+            </a:r>
+          </a:p>
+        </p:txBody>
+      </p:sp>
+      <p:sp>
+        <p:nvSpPr>
+          <p:cNvPr id="10" name="Rectangle 9"/>
+          <p:cNvSpPr/>
+          <p:nvPr/>
+        </p:nvSpPr>
+        <p:spPr>
+          <a:xfrm>
+            <a:off x="548640" y="6583680"/>
+            <a:ext cx="411480" cy="32004"/>
+          </a:xfrm>
+          <a:prstGeom prst="rect">
+            <a:avLst/>
+          </a:prstGeom>
+          <a:solidFill>
+            <a:srgbClr val="C08A2B"/>
+          </a:solidFill>
+          <a:ln>
+            <a:noFill/>
+          </a:ln>
+          <a:effectLst/>
+        </p:spPr>
+        <p:style>
+          <a:lnRef idx="1">
+            <a:schemeClr val="accent1"/>
+          </a:lnRef>
+          <a:fillRef idx="3">
+            <a:schemeClr val="accent1"/>
+          </a:fillRef>
+          <a:effectRef idx="2">
+            <a:schemeClr val="accent1"/>
+          </a:effectRef>
+          <a:fontRef idx="minor">
+            <a:schemeClr val="lt1"/>
+          </a:fontRef>
+        </p:style>
+        <p:txBody>
+          <a:bodyPr rtlCol="0" anchor="ctr"/>
+          <a:lstStyle/>
+          <a:p>
+            <a:pPr algn="ctr"/>
+          </a:p>
+        </p:txBody>
+      </p:sp>
+      <p:sp>
+        <p:nvSpPr>
+          <p:cNvPr id="11" name="TextBox 10"/>
+          <p:cNvSpPr txBox="1"/>
+          <p:nvPr/>
+        </p:nvSpPr>
+        <p:spPr>
+          <a:xfrm>
+            <a:off x="10424160" y="6419088"/>
+            <a:ext cx="1216152" cy="274320"/>
+          </a:xfrm>
+          <a:prstGeom prst="rect">
+            <a:avLst/>
+          </a:prstGeom>
+          <a:noFill/>
+        </p:spPr>
+        <p:txBody>
+          <a:bodyPr wrap="square">
+            <a:spAutoFit/>
+          </a:bodyPr>
+          <a:lstStyle/>
+          <a:p>
+            <a:pPr algn="r">
+              <a:lnSpc>
+                <a:spcPct val="100000"/>
+              </a:lnSpc>
+            </a:pPr>
+            <a:r>
+              <a:rPr sz="1100" b="0" i="0">
+                <a:solidFill>
+                  <a:srgbClr val="6B7682"/>
+                </a:solidFill>
+                <a:latin typeface="Times New Roman"/>
+              </a:rPr>
+              <a:t>10 / 20</a:t>
             </a:r>
           </a:p>
         </p:txBody>
@@ -3873,8 +4132,8 @@
         </p:nvSpPr>
         <p:spPr>
           <a:xfrm>
-            <a:off x="640080" y="1554480"/>
-            <a:ext cx="10972800" cy="4572000"/>
+            <a:off x="640080" y="1874519"/>
+            <a:ext cx="10881360" cy="4572000"/>
           </a:xfrm>
           <a:prstGeom prst="rect">
             <a:avLst/>
@@ -3892,7 +4151,7 @@
                 <a:spcPct val="105000"/>
               </a:lnSpc>
               <a:spcAft>
-                <a:spcPts val="1500"/>
+                <a:spcPts val="2800"/>
               </a:spcAft>
             </a:pPr>
             <a:r>
@@ -3920,7 +4179,7 @@
                 <a:spcPct val="105000"/>
               </a:lnSpc>
               <a:spcAft>
-                <a:spcPts val="1500"/>
+                <a:spcPts val="2800"/>
               </a:spcAft>
             </a:pPr>
             <a:r>
@@ -3948,7 +4207,7 @@
                 <a:spcPct val="105000"/>
               </a:lnSpc>
               <a:spcAft>
-                <a:spcPts val="1500"/>
+                <a:spcPts val="2800"/>
               </a:spcAft>
             </a:pPr>
             <a:r>
@@ -3976,7 +4235,7 @@
                 <a:spcPct val="105000"/>
               </a:lnSpc>
               <a:spcAft>
-                <a:spcPts val="1500"/>
+                <a:spcPts val="2800"/>
               </a:spcAft>
             </a:pPr>
             <a:r>
@@ -4004,7 +4263,7 @@
                 <a:spcPct val="105000"/>
               </a:lnSpc>
               <a:spcAft>
-                <a:spcPts val="1500"/>
+                <a:spcPts val="2800"/>
               </a:spcAft>
             </a:pPr>
             <a:r>
@@ -4030,14 +4289,102 @@
       </p:sp>
       <p:sp>
         <p:nvSpPr>
-          <p:cNvPr id="7" name="TextBox 6"/>
+          <p:cNvPr id="7" name="Rectangle 6"/>
+          <p:cNvSpPr/>
+          <p:nvPr/>
+        </p:nvSpPr>
+        <p:spPr>
+          <a:xfrm>
+            <a:off x="0" y="5779008"/>
+            <a:ext cx="12191695" cy="566928"/>
+          </a:xfrm>
+          <a:prstGeom prst="rect">
+            <a:avLst/>
+          </a:prstGeom>
+          <a:solidFill>
+            <a:srgbClr val="F2F4F7"/>
+          </a:solidFill>
+          <a:ln>
+            <a:noFill/>
+          </a:ln>
+          <a:effectLst/>
+        </p:spPr>
+        <p:style>
+          <a:lnRef idx="1">
+            <a:schemeClr val="accent1"/>
+          </a:lnRef>
+          <a:fillRef idx="3">
+            <a:schemeClr val="accent1"/>
+          </a:fillRef>
+          <a:effectRef idx="2">
+            <a:schemeClr val="accent1"/>
+          </a:effectRef>
+          <a:fontRef idx="minor">
+            <a:schemeClr val="lt1"/>
+          </a:fontRef>
+        </p:style>
+        <p:txBody>
+          <a:bodyPr rtlCol="0" anchor="ctr"/>
+          <a:lstStyle/>
+          <a:p>
+            <a:pPr algn="ctr"/>
+          </a:p>
+        </p:txBody>
+      </p:sp>
+      <p:sp>
+        <p:nvSpPr>
+          <p:cNvPr id="8" name="Rectangle 7"/>
+          <p:cNvSpPr/>
+          <p:nvPr/>
+        </p:nvSpPr>
+        <p:spPr>
+          <a:xfrm>
+            <a:off x="0" y="5779008"/>
+            <a:ext cx="128016" cy="566928"/>
+          </a:xfrm>
+          <a:prstGeom prst="rect">
+            <a:avLst/>
+          </a:prstGeom>
+          <a:solidFill>
+            <a:srgbClr val="C08A2B"/>
+          </a:solidFill>
+          <a:ln>
+            <a:noFill/>
+          </a:ln>
+          <a:effectLst/>
+        </p:spPr>
+        <p:style>
+          <a:lnRef idx="1">
+            <a:schemeClr val="accent1"/>
+          </a:lnRef>
+          <a:fillRef idx="3">
+            <a:schemeClr val="accent1"/>
+          </a:fillRef>
+          <a:effectRef idx="2">
+            <a:schemeClr val="accent1"/>
+          </a:effectRef>
+          <a:fontRef idx="minor">
+            <a:schemeClr val="lt1"/>
+          </a:fontRef>
+        </p:style>
+        <p:txBody>
+          <a:bodyPr rtlCol="0" anchor="ctr"/>
+          <a:lstStyle/>
+          <a:p>
+            <a:pPr algn="ctr"/>
+          </a:p>
+        </p:txBody>
+      </p:sp>
+      <p:sp>
+        <p:nvSpPr>
+          <p:cNvPr id="9" name="TextBox 8"/>
           <p:cNvSpPr txBox="1"/>
           <p:nvPr/>
         </p:nvSpPr>
         <p:spPr>
           <a:xfrm>
-            <a:off x="640080" y="6126480"/>
-            <a:ext cx="10972800" cy="731520"/>
+            <a:off x="566928" y="5916168"/>
+            <a:ext cx="11064240" cy="457200"/>
           </a:xfrm>
           <a:prstGeom prst="rect">
             <a:avLst/>
@@ -4063,6 +4410,89 @@
                 <a:latin typeface="Times New Roman"/>
               </a:rPr>
               <a:t>The tools exist — but speed and political will decide whether they work.</a:t>
+            </a:r>
+          </a:p>
+        </p:txBody>
+      </p:sp>
+      <p:sp>
+        <p:nvSpPr>
+          <p:cNvPr id="10" name="Rectangle 9"/>
+          <p:cNvSpPr/>
+          <p:nvPr/>
+        </p:nvSpPr>
+        <p:spPr>
+          <a:xfrm>
+            <a:off x="548640" y="6583680"/>
+            <a:ext cx="411480" cy="32004"/>
+          </a:xfrm>
+          <a:prstGeom prst="rect">
+            <a:avLst/>
+          </a:prstGeom>
+          <a:solidFill>
+            <a:srgbClr val="C08A2B"/>
+          </a:solidFill>
+          <a:ln>
+            <a:noFill/>
+          </a:ln>
+          <a:effectLst/>
+        </p:spPr>
+        <p:style>
+          <a:lnRef idx="1">
+            <a:schemeClr val="accent1"/>
+          </a:lnRef>
+          <a:fillRef idx="3">
+            <a:schemeClr val="accent1"/>
+          </a:fillRef>
+          <a:effectRef idx="2">
+            <a:schemeClr val="accent1"/>
+          </a:effectRef>
+          <a:fontRef idx="minor">
+            <a:schemeClr val="lt1"/>
+          </a:fontRef>
+        </p:style>
+        <p:txBody>
+          <a:bodyPr rtlCol="0" anchor="ctr"/>
+          <a:lstStyle/>
+          <a:p>
+            <a:pPr algn="ctr"/>
+          </a:p>
+        </p:txBody>
+      </p:sp>
+      <p:sp>
+        <p:nvSpPr>
+          <p:cNvPr id="11" name="TextBox 10"/>
+          <p:cNvSpPr txBox="1"/>
+          <p:nvPr/>
+        </p:nvSpPr>
+        <p:spPr>
+          <a:xfrm>
+            <a:off x="10424160" y="6419088"/>
+            <a:ext cx="1216152" cy="274320"/>
+          </a:xfrm>
+          <a:prstGeom prst="rect">
+            <a:avLst/>
+          </a:prstGeom>
+          <a:noFill/>
+        </p:spPr>
+        <p:txBody>
+          <a:bodyPr wrap="square">
+            <a:spAutoFit/>
+          </a:bodyPr>
+          <a:lstStyle/>
+          <a:p>
+            <a:pPr algn="r">
+              <a:lnSpc>
+                <a:spcPct val="100000"/>
+              </a:lnSpc>
+            </a:pPr>
+            <a:r>
+              <a:rPr sz="1100" b="0" i="0">
+                <a:solidFill>
+                  <a:srgbClr val="6B7682"/>
+                </a:solidFill>
+                <a:latin typeface="Times New Roman"/>
+              </a:rPr>
+              <a:t>11 / 20</a:t>
             </a:r>
           </a:p>
         </p:txBody>
@@ -4267,8 +4697,8 @@
         </p:nvSpPr>
         <p:spPr>
           <a:xfrm>
-            <a:off x="640080" y="1554480"/>
-            <a:ext cx="10972800" cy="4572000"/>
+            <a:off x="640080" y="1920240"/>
+            <a:ext cx="10881360" cy="4572000"/>
           </a:xfrm>
           <a:prstGeom prst="rect">
             <a:avLst/>
@@ -4286,7 +4716,7 @@
                 <a:spcPct val="105000"/>
               </a:lnSpc>
               <a:spcAft>
-                <a:spcPts val="1700"/>
+                <a:spcPts val="3000"/>
               </a:spcAft>
             </a:pPr>
             <a:r>
@@ -4314,7 +4744,7 @@
                 <a:spcPct val="105000"/>
               </a:lnSpc>
               <a:spcAft>
-                <a:spcPts val="1700"/>
+                <a:spcPts val="3000"/>
               </a:spcAft>
             </a:pPr>
             <a:r>
@@ -4342,7 +4772,7 @@
                 <a:spcPct val="105000"/>
               </a:lnSpc>
               <a:spcAft>
-                <a:spcPts val="1700"/>
+                <a:spcPts val="3000"/>
               </a:spcAft>
             </a:pPr>
             <a:r>
@@ -4361,7 +4791,7 @@
                 <a:spcPct val="105000"/>
               </a:lnSpc>
               <a:spcAft>
-                <a:spcPts val="1700"/>
+                <a:spcPts val="3000"/>
               </a:spcAft>
             </a:pPr>
             <a:r>
@@ -4378,14 +4808,102 @@
       </p:sp>
       <p:sp>
         <p:nvSpPr>
-          <p:cNvPr id="7" name="TextBox 6"/>
+          <p:cNvPr id="7" name="Rectangle 6"/>
+          <p:cNvSpPr/>
+          <p:nvPr/>
+        </p:nvSpPr>
+        <p:spPr>
+          <a:xfrm>
+            <a:off x="0" y="5779008"/>
+            <a:ext cx="12191695" cy="566928"/>
+          </a:xfrm>
+          <a:prstGeom prst="rect">
+            <a:avLst/>
+          </a:prstGeom>
+          <a:solidFill>
+            <a:srgbClr val="F2F4F7"/>
+          </a:solidFill>
+          <a:ln>
+            <a:noFill/>
+          </a:ln>
+          <a:effectLst/>
+        </p:spPr>
+        <p:style>
+          <a:lnRef idx="1">
+            <a:schemeClr val="accent1"/>
+          </a:lnRef>
+          <a:fillRef idx="3">
+            <a:schemeClr val="accent1"/>
+          </a:fillRef>
+          <a:effectRef idx="2">
+            <a:schemeClr val="accent1"/>
+          </a:effectRef>
+          <a:fontRef idx="minor">
+            <a:schemeClr val="lt1"/>
+          </a:fontRef>
+        </p:style>
+        <p:txBody>
+          <a:bodyPr rtlCol="0" anchor="ctr"/>
+          <a:lstStyle/>
+          <a:p>
+            <a:pPr algn="ctr"/>
+          </a:p>
+        </p:txBody>
+      </p:sp>
+      <p:sp>
+        <p:nvSpPr>
+          <p:cNvPr id="8" name="Rectangle 7"/>
+          <p:cNvSpPr/>
+          <p:nvPr/>
+        </p:nvSpPr>
+        <p:spPr>
+          <a:xfrm>
+            <a:off x="0" y="5779008"/>
+            <a:ext cx="128016" cy="566928"/>
+          </a:xfrm>
+          <a:prstGeom prst="rect">
+            <a:avLst/>
+          </a:prstGeom>
+          <a:solidFill>
+            <a:srgbClr val="C08A2B"/>
+          </a:solidFill>
+          <a:ln>
+            <a:noFill/>
+          </a:ln>
+          <a:effectLst/>
+        </p:spPr>
+        <p:style>
+          <a:lnRef idx="1">
+            <a:schemeClr val="accent1"/>
+          </a:lnRef>
+          <a:fillRef idx="3">
+            <a:schemeClr val="accent1"/>
+          </a:fillRef>
+          <a:effectRef idx="2">
+            <a:schemeClr val="accent1"/>
+          </a:effectRef>
+          <a:fontRef idx="minor">
+            <a:schemeClr val="lt1"/>
+          </a:fontRef>
+        </p:style>
+        <p:txBody>
+          <a:bodyPr rtlCol="0" anchor="ctr"/>
+          <a:lstStyle/>
+          <a:p>
+            <a:pPr algn="ctr"/>
+          </a:p>
+        </p:txBody>
+      </p:sp>
+      <p:sp>
+        <p:nvSpPr>
+          <p:cNvPr id="9" name="TextBox 8"/>
           <p:cNvSpPr txBox="1"/>
           <p:nvPr/>
         </p:nvSpPr>
         <p:spPr>
           <a:xfrm>
-            <a:off x="640080" y="5989320"/>
-            <a:ext cx="10972800" cy="731520"/>
+            <a:off x="566928" y="5916168"/>
+            <a:ext cx="11064240" cy="457200"/>
           </a:xfrm>
           <a:prstGeom prst="rect">
             <a:avLst/>
@@ -4411,6 +4929,89 @@
                 <a:latin typeface="Times New Roman"/>
               </a:rPr>
               <a:t>Stick to what is adjudicated: charges, a conviction, a settled civil case — not speculation.</a:t>
+            </a:r>
+          </a:p>
+        </p:txBody>
+      </p:sp>
+      <p:sp>
+        <p:nvSpPr>
+          <p:cNvPr id="10" name="Rectangle 9"/>
+          <p:cNvSpPr/>
+          <p:nvPr/>
+        </p:nvSpPr>
+        <p:spPr>
+          <a:xfrm>
+            <a:off x="548640" y="6583680"/>
+            <a:ext cx="411480" cy="32004"/>
+          </a:xfrm>
+          <a:prstGeom prst="rect">
+            <a:avLst/>
+          </a:prstGeom>
+          <a:solidFill>
+            <a:srgbClr val="C08A2B"/>
+          </a:solidFill>
+          <a:ln>
+            <a:noFill/>
+          </a:ln>
+          <a:effectLst/>
+        </p:spPr>
+        <p:style>
+          <a:lnRef idx="1">
+            <a:schemeClr val="accent1"/>
+          </a:lnRef>
+          <a:fillRef idx="3">
+            <a:schemeClr val="accent1"/>
+          </a:fillRef>
+          <a:effectRef idx="2">
+            <a:schemeClr val="accent1"/>
+          </a:effectRef>
+          <a:fontRef idx="minor">
+            <a:schemeClr val="lt1"/>
+          </a:fontRef>
+        </p:style>
+        <p:txBody>
+          <a:bodyPr rtlCol="0" anchor="ctr"/>
+          <a:lstStyle/>
+          <a:p>
+            <a:pPr algn="ctr"/>
+          </a:p>
+        </p:txBody>
+      </p:sp>
+      <p:sp>
+        <p:nvSpPr>
+          <p:cNvPr id="11" name="TextBox 10"/>
+          <p:cNvSpPr txBox="1"/>
+          <p:nvPr/>
+        </p:nvSpPr>
+        <p:spPr>
+          <a:xfrm>
+            <a:off x="10424160" y="6419088"/>
+            <a:ext cx="1216152" cy="274320"/>
+          </a:xfrm>
+          <a:prstGeom prst="rect">
+            <a:avLst/>
+          </a:prstGeom>
+          <a:noFill/>
+        </p:spPr>
+        <p:txBody>
+          <a:bodyPr wrap="square">
+            <a:spAutoFit/>
+          </a:bodyPr>
+          <a:lstStyle/>
+          <a:p>
+            <a:pPr algn="r">
+              <a:lnSpc>
+                <a:spcPct val="100000"/>
+              </a:lnSpc>
+            </a:pPr>
+            <a:r>
+              <a:rPr sz="1100" b="0" i="0">
+                <a:solidFill>
+                  <a:srgbClr val="6B7682"/>
+                </a:solidFill>
+                <a:latin typeface="Times New Roman"/>
+              </a:rPr>
+              <a:t>12 / 20</a:t>
             </a:r>
           </a:p>
         </p:txBody>
@@ -4443,14 +5044,92 @@
       <p:grpSpPr/>
       <p:sp>
         <p:nvSpPr>
-          <p:cNvPr id="2" name="Rectangle 1"/>
+          <p:cNvPr id="2" name="TextBox 1"/>
+          <p:cNvSpPr txBox="1"/>
+          <p:nvPr/>
+        </p:nvSpPr>
+        <p:spPr>
+          <a:xfrm>
+            <a:off x="7040880" y="640080"/>
+            <a:ext cx="4937760" cy="5486400"/>
+          </a:xfrm>
+          <a:prstGeom prst="rect">
+            <a:avLst/>
+          </a:prstGeom>
+          <a:noFill/>
+        </p:spPr>
+        <p:txBody>
+          <a:bodyPr wrap="square">
+            <a:spAutoFit/>
+          </a:bodyPr>
+          <a:lstStyle/>
+          <a:p>
+            <a:pPr algn="ctr">
+              <a:lnSpc>
+                <a:spcPct val="100000"/>
+              </a:lnSpc>
+            </a:pPr>
+            <a:r>
+              <a:rPr sz="21000" b="1" i="0">
+                <a:solidFill>
+                  <a:srgbClr val="1C3A56"/>
+                </a:solidFill>
+                <a:latin typeface="Times New Roman"/>
+              </a:rPr>
+              <a:t>03</a:t>
+            </a:r>
+          </a:p>
+        </p:txBody>
+      </p:sp>
+      <p:sp>
+        <p:nvSpPr>
+          <p:cNvPr id="3" name="TextBox 2"/>
+          <p:cNvSpPr txBox="1"/>
+          <p:nvPr/>
+        </p:nvSpPr>
+        <p:spPr>
+          <a:xfrm>
+            <a:off x="822960" y="2331720"/>
+            <a:ext cx="7315200" cy="731520"/>
+          </a:xfrm>
+          <a:prstGeom prst="rect">
+            <a:avLst/>
+          </a:prstGeom>
+          <a:noFill/>
+        </p:spPr>
+        <p:txBody>
+          <a:bodyPr wrap="square">
+            <a:spAutoFit/>
+          </a:bodyPr>
+          <a:lstStyle/>
+          <a:p>
+            <a:pPr algn="l">
+              <a:lnSpc>
+                <a:spcPct val="100000"/>
+              </a:lnSpc>
+            </a:pPr>
+            <a:r>
+              <a:rPr sz="1300" b="1" i="0">
+                <a:solidFill>
+                  <a:srgbClr val="C08A2B"/>
+                </a:solidFill>
+                <a:latin typeface="Times New Roman"/>
+              </a:rPr>
+              <a:t>SECTION 3 OF 4</a:t>
+            </a:r>
+          </a:p>
+        </p:txBody>
+      </p:sp>
+      <p:sp>
+        <p:nvSpPr>
+          <p:cNvPr id="4" name="Rectangle 3"/>
           <p:cNvSpPr/>
           <p:nvPr/>
         </p:nvSpPr>
         <p:spPr>
           <a:xfrm>
-            <a:off x="822960" y="3246120"/>
-            <a:ext cx="2926080" cy="54864"/>
+            <a:off x="822960" y="2697480"/>
+            <a:ext cx="2743200" cy="54864"/>
           </a:xfrm>
           <a:prstGeom prst="rect">
             <a:avLst/>
@@ -4487,14 +5166,14 @@
       </p:sp>
       <p:sp>
         <p:nvSpPr>
-          <p:cNvPr id="3" name="TextBox 2"/>
+          <p:cNvPr id="5" name="TextBox 4"/>
           <p:cNvSpPr txBox="1"/>
           <p:nvPr/>
         </p:nvSpPr>
         <p:spPr>
           <a:xfrm>
-            <a:off x="822960" y="2148840"/>
-            <a:ext cx="10515600" cy="731520"/>
+            <a:off x="822960" y="2907792"/>
+            <a:ext cx="7498079" cy="1463040"/>
           </a:xfrm>
           <a:prstGeom prst="rect">
             <a:avLst/>
@@ -4513,27 +5192,43 @@
               </a:lnSpc>
             </a:pPr>
             <a:r>
-              <a:rPr sz="2000" b="1" i="0">
-                <a:solidFill>
-                  <a:srgbClr val="C08A2B"/>
-                </a:solidFill>
-                <a:latin typeface="Times New Roman"/>
-              </a:rPr>
-              <a:t>PART 3</a:t>
-            </a:r>
-          </a:p>
-        </p:txBody>
-      </p:sp>
-      <p:sp>
-        <p:nvSpPr>
-          <p:cNvPr id="4" name="TextBox 3"/>
+              <a:rPr sz="3300" b="1" i="0">
+                <a:solidFill>
+                  <a:srgbClr val="FFFFFF"/>
+                </a:solidFill>
+                <a:latin typeface="Times New Roman"/>
+              </a:rPr>
+              <a:t>Wealth, Mobility</a:t>
+            </a:r>
+          </a:p>
+          <a:p>
+            <a:pPr algn="l">
+              <a:lnSpc>
+                <a:spcPct val="100000"/>
+              </a:lnSpc>
+            </a:pPr>
+            <a:r>
+              <a:rPr sz="3300" b="1" i="0">
+                <a:solidFill>
+                  <a:srgbClr val="FFFFFF"/>
+                </a:solidFill>
+                <a:latin typeface="Times New Roman"/>
+              </a:rPr>
+              <a:t>&amp; Impunity</a:t>
+            </a:r>
+          </a:p>
+        </p:txBody>
+      </p:sp>
+      <p:sp>
+        <p:nvSpPr>
+          <p:cNvPr id="6" name="TextBox 5"/>
           <p:cNvSpPr txBox="1"/>
           <p:nvPr/>
         </p:nvSpPr>
         <p:spPr>
           <a:xfrm>
-            <a:off x="822960" y="2514600"/>
-            <a:ext cx="10515600" cy="731520"/>
+            <a:off x="822960" y="3977639"/>
+            <a:ext cx="7132320" cy="1097280"/>
           </a:xfrm>
           <a:prstGeom prst="rect">
             <a:avLst/>
@@ -4548,31 +5243,75 @@
           <a:p>
             <a:pPr algn="l">
               <a:lnSpc>
-                <a:spcPct val="100000"/>
-              </a:lnSpc>
-            </a:pPr>
-            <a:r>
-              <a:rPr sz="3400" b="1" i="0">
-                <a:solidFill>
-                  <a:srgbClr val="FFFFFF"/>
-                </a:solidFill>
-                <a:latin typeface="Times New Roman"/>
-              </a:rPr>
-              <a:t>Wealth, Mobility &amp; Impunity</a:t>
-            </a:r>
-          </a:p>
-        </p:txBody>
-      </p:sp>
-      <p:sp>
-        <p:nvSpPr>
-          <p:cNvPr id="5" name="TextBox 4"/>
+                <a:spcPct val="115000"/>
+              </a:lnSpc>
+            </a:pPr>
+            <a:r>
+              <a:rPr sz="1800" b="0" i="1">
+                <a:solidFill>
+                  <a:srgbClr val="F2F4F7"/>
+                </a:solidFill>
+                <a:latin typeface="Times New Roman"/>
+              </a:rPr>
+              <a:t>How resources can delay — though not always defeat — accountability</a:t>
+            </a:r>
+          </a:p>
+        </p:txBody>
+      </p:sp>
+      <p:sp>
+        <p:nvSpPr>
+          <p:cNvPr id="7" name="Rectangle 6"/>
+          <p:cNvSpPr/>
+          <p:nvPr/>
+        </p:nvSpPr>
+        <p:spPr>
+          <a:xfrm>
+            <a:off x="548640" y="6583680"/>
+            <a:ext cx="411480" cy="32004"/>
+          </a:xfrm>
+          <a:prstGeom prst="rect">
+            <a:avLst/>
+          </a:prstGeom>
+          <a:solidFill>
+            <a:srgbClr val="C08A2B"/>
+          </a:solidFill>
+          <a:ln>
+            <a:noFill/>
+          </a:ln>
+          <a:effectLst/>
+        </p:spPr>
+        <p:style>
+          <a:lnRef idx="1">
+            <a:schemeClr val="accent1"/>
+          </a:lnRef>
+          <a:fillRef idx="3">
+            <a:schemeClr val="accent1"/>
+          </a:fillRef>
+          <a:effectRef idx="2">
+            <a:schemeClr val="accent1"/>
+          </a:effectRef>
+          <a:fontRef idx="minor">
+            <a:schemeClr val="lt1"/>
+          </a:fontRef>
+        </p:style>
+        <p:txBody>
+          <a:bodyPr rtlCol="0" anchor="ctr"/>
+          <a:lstStyle/>
+          <a:p>
+            <a:pPr algn="ctr"/>
+          </a:p>
+        </p:txBody>
+      </p:sp>
+      <p:sp>
+        <p:nvSpPr>
+          <p:cNvPr id="8" name="TextBox 7"/>
           <p:cNvSpPr txBox="1"/>
           <p:nvPr/>
         </p:nvSpPr>
         <p:spPr>
           <a:xfrm>
-            <a:off x="822960" y="3474720"/>
-            <a:ext cx="9601200" cy="731520"/>
+            <a:off x="10424160" y="6419088"/>
+            <a:ext cx="1216152" cy="274320"/>
           </a:xfrm>
           <a:prstGeom prst="rect">
             <a:avLst/>
@@ -4585,19 +5324,19 @@
           </a:bodyPr>
           <a:lstStyle/>
           <a:p>
-            <a:pPr algn="l">
-              <a:lnSpc>
-                <a:spcPct val="110000"/>
-              </a:lnSpc>
-            </a:pPr>
-            <a:r>
-              <a:rPr sz="1800" b="0" i="1">
-                <a:solidFill>
-                  <a:srgbClr val="F2F4F7"/>
-                </a:solidFill>
-                <a:latin typeface="Times New Roman"/>
-              </a:rPr>
-              <a:t>How resources can delay — though not always defeat — accountability</a:t>
+            <a:pPr algn="r">
+              <a:lnSpc>
+                <a:spcPct val="100000"/>
+              </a:lnSpc>
+            </a:pPr>
+            <a:r>
+              <a:rPr sz="1100" b="0" i="0">
+                <a:solidFill>
+                  <a:srgbClr val="909CAA"/>
+                </a:solidFill>
+                <a:latin typeface="Times New Roman"/>
+              </a:rPr>
+              <a:t>13 / 20</a:t>
             </a:r>
           </a:p>
         </p:txBody>
@@ -4802,8 +5541,8 @@
         </p:nvSpPr>
         <p:spPr>
           <a:xfrm>
-            <a:off x="640080" y="1554480"/>
-            <a:ext cx="10972800" cy="4572000"/>
+            <a:off x="640080" y="1874519"/>
+            <a:ext cx="10881360" cy="4572000"/>
           </a:xfrm>
           <a:prstGeom prst="rect">
             <a:avLst/>
@@ -4821,7 +5560,7 @@
                 <a:spcPct val="105000"/>
               </a:lnSpc>
               <a:spcAft>
-                <a:spcPts val="1500"/>
+                <a:spcPts val="2800"/>
               </a:spcAft>
             </a:pPr>
             <a:r>
@@ -4840,7 +5579,7 @@
                 <a:spcPct val="105000"/>
               </a:lnSpc>
               <a:spcAft>
-                <a:spcPts val="1500"/>
+                <a:spcPts val="2800"/>
               </a:spcAft>
             </a:pPr>
             <a:r>
@@ -4859,7 +5598,7 @@
                 <a:spcPct val="105000"/>
               </a:lnSpc>
               <a:spcAft>
-                <a:spcPts val="1500"/>
+                <a:spcPts val="2800"/>
               </a:spcAft>
             </a:pPr>
             <a:r>
@@ -4878,7 +5617,7 @@
                 <a:spcPct val="105000"/>
               </a:lnSpc>
               <a:spcAft>
-                <a:spcPts val="1500"/>
+                <a:spcPts val="2800"/>
               </a:spcAft>
             </a:pPr>
             <a:r>
@@ -4897,7 +5636,7 @@
                 <a:spcPct val="105000"/>
               </a:lnSpc>
               <a:spcAft>
-                <a:spcPts val="1500"/>
+                <a:spcPts val="2800"/>
               </a:spcAft>
             </a:pPr>
             <a:r>
@@ -4914,14 +5653,102 @@
       </p:sp>
       <p:sp>
         <p:nvSpPr>
-          <p:cNvPr id="7" name="TextBox 6"/>
+          <p:cNvPr id="7" name="Rectangle 6"/>
+          <p:cNvSpPr/>
+          <p:nvPr/>
+        </p:nvSpPr>
+        <p:spPr>
+          <a:xfrm>
+            <a:off x="0" y="5779008"/>
+            <a:ext cx="12191695" cy="566928"/>
+          </a:xfrm>
+          <a:prstGeom prst="rect">
+            <a:avLst/>
+          </a:prstGeom>
+          <a:solidFill>
+            <a:srgbClr val="F2F4F7"/>
+          </a:solidFill>
+          <a:ln>
+            <a:noFill/>
+          </a:ln>
+          <a:effectLst/>
+        </p:spPr>
+        <p:style>
+          <a:lnRef idx="1">
+            <a:schemeClr val="accent1"/>
+          </a:lnRef>
+          <a:fillRef idx="3">
+            <a:schemeClr val="accent1"/>
+          </a:fillRef>
+          <a:effectRef idx="2">
+            <a:schemeClr val="accent1"/>
+          </a:effectRef>
+          <a:fontRef idx="minor">
+            <a:schemeClr val="lt1"/>
+          </a:fontRef>
+        </p:style>
+        <p:txBody>
+          <a:bodyPr rtlCol="0" anchor="ctr"/>
+          <a:lstStyle/>
+          <a:p>
+            <a:pPr algn="ctr"/>
+          </a:p>
+        </p:txBody>
+      </p:sp>
+      <p:sp>
+        <p:nvSpPr>
+          <p:cNvPr id="8" name="Rectangle 7"/>
+          <p:cNvSpPr/>
+          <p:nvPr/>
+        </p:nvSpPr>
+        <p:spPr>
+          <a:xfrm>
+            <a:off x="0" y="5779008"/>
+            <a:ext cx="128016" cy="566928"/>
+          </a:xfrm>
+          <a:prstGeom prst="rect">
+            <a:avLst/>
+          </a:prstGeom>
+          <a:solidFill>
+            <a:srgbClr val="C08A2B"/>
+          </a:solidFill>
+          <a:ln>
+            <a:noFill/>
+          </a:ln>
+          <a:effectLst/>
+        </p:spPr>
+        <p:style>
+          <a:lnRef idx="1">
+            <a:schemeClr val="accent1"/>
+          </a:lnRef>
+          <a:fillRef idx="3">
+            <a:schemeClr val="accent1"/>
+          </a:fillRef>
+          <a:effectRef idx="2">
+            <a:schemeClr val="accent1"/>
+          </a:effectRef>
+          <a:fontRef idx="minor">
+            <a:schemeClr val="lt1"/>
+          </a:fontRef>
+        </p:style>
+        <p:txBody>
+          <a:bodyPr rtlCol="0" anchor="ctr"/>
+          <a:lstStyle/>
+          <a:p>
+            <a:pPr algn="ctr"/>
+          </a:p>
+        </p:txBody>
+      </p:sp>
+      <p:sp>
+        <p:nvSpPr>
+          <p:cNvPr id="9" name="TextBox 8"/>
           <p:cNvSpPr txBox="1"/>
           <p:nvPr/>
         </p:nvSpPr>
         <p:spPr>
           <a:xfrm>
-            <a:off x="640080" y="6126480"/>
-            <a:ext cx="10972800" cy="731520"/>
+            <a:off x="566928" y="5916168"/>
+            <a:ext cx="11064240" cy="457200"/>
           </a:xfrm>
           <a:prstGeom prst="rect">
             <a:avLst/>
@@ -4947,6 +5774,89 @@
                 <a:latin typeface="Times New Roman"/>
               </a:rPr>
               <a:t>None of this is unique to one man — it is how illicit elite wealth tends to behave.</a:t>
+            </a:r>
+          </a:p>
+        </p:txBody>
+      </p:sp>
+      <p:sp>
+        <p:nvSpPr>
+          <p:cNvPr id="10" name="Rectangle 9"/>
+          <p:cNvSpPr/>
+          <p:nvPr/>
+        </p:nvSpPr>
+        <p:spPr>
+          <a:xfrm>
+            <a:off x="548640" y="6583680"/>
+            <a:ext cx="411480" cy="32004"/>
+          </a:xfrm>
+          <a:prstGeom prst="rect">
+            <a:avLst/>
+          </a:prstGeom>
+          <a:solidFill>
+            <a:srgbClr val="C08A2B"/>
+          </a:solidFill>
+          <a:ln>
+            <a:noFill/>
+          </a:ln>
+          <a:effectLst/>
+        </p:spPr>
+        <p:style>
+          <a:lnRef idx="1">
+            <a:schemeClr val="accent1"/>
+          </a:lnRef>
+          <a:fillRef idx="3">
+            <a:schemeClr val="accent1"/>
+          </a:fillRef>
+          <a:effectRef idx="2">
+            <a:schemeClr val="accent1"/>
+          </a:effectRef>
+          <a:fontRef idx="minor">
+            <a:schemeClr val="lt1"/>
+          </a:fontRef>
+        </p:style>
+        <p:txBody>
+          <a:bodyPr rtlCol="0" anchor="ctr"/>
+          <a:lstStyle/>
+          <a:p>
+            <a:pPr algn="ctr"/>
+          </a:p>
+        </p:txBody>
+      </p:sp>
+      <p:sp>
+        <p:nvSpPr>
+          <p:cNvPr id="11" name="TextBox 10"/>
+          <p:cNvSpPr txBox="1"/>
+          <p:nvPr/>
+        </p:nvSpPr>
+        <p:spPr>
+          <a:xfrm>
+            <a:off x="10424160" y="6419088"/>
+            <a:ext cx="1216152" cy="274320"/>
+          </a:xfrm>
+          <a:prstGeom prst="rect">
+            <a:avLst/>
+          </a:prstGeom>
+          <a:noFill/>
+        </p:spPr>
+        <p:txBody>
+          <a:bodyPr wrap="square">
+            <a:spAutoFit/>
+          </a:bodyPr>
+          <a:lstStyle/>
+          <a:p>
+            <a:pPr algn="r">
+              <a:lnSpc>
+                <a:spcPct val="100000"/>
+              </a:lnSpc>
+            </a:pPr>
+            <a:r>
+              <a:rPr sz="1100" b="0" i="0">
+                <a:solidFill>
+                  <a:srgbClr val="6B7682"/>
+                </a:solidFill>
+                <a:latin typeface="Times New Roman"/>
+              </a:rPr>
+              <a:t>14 / 20</a:t>
             </a:r>
           </a:p>
         </p:txBody>
@@ -5151,8 +6061,8 @@
         </p:nvSpPr>
         <p:spPr>
           <a:xfrm>
-            <a:off x="640080" y="1554480"/>
-            <a:ext cx="5349240" cy="4297680"/>
+            <a:off x="640080" y="1645920"/>
+            <a:ext cx="5349240" cy="3886200"/>
           </a:xfrm>
           <a:prstGeom prst="rect">
             <a:avLst/>
@@ -5189,13 +6099,57 @@
       </p:sp>
       <p:sp>
         <p:nvSpPr>
-          <p:cNvPr id="7" name="TextBox 6"/>
+          <p:cNvPr id="7" name="Rectangle 6"/>
+          <p:cNvSpPr/>
+          <p:nvPr/>
+        </p:nvSpPr>
+        <p:spPr>
+          <a:xfrm>
+            <a:off x="640080" y="1645920"/>
+            <a:ext cx="128016" cy="3886200"/>
+          </a:xfrm>
+          <a:prstGeom prst="rect">
+            <a:avLst/>
+          </a:prstGeom>
+          <a:solidFill>
+            <a:srgbClr val="C08A2B"/>
+          </a:solidFill>
+          <a:ln>
+            <a:noFill/>
+          </a:ln>
+          <a:effectLst/>
+        </p:spPr>
+        <p:style>
+          <a:lnRef idx="1">
+            <a:schemeClr val="accent1"/>
+          </a:lnRef>
+          <a:fillRef idx="3">
+            <a:schemeClr val="accent1"/>
+          </a:fillRef>
+          <a:effectRef idx="2">
+            <a:schemeClr val="accent1"/>
+          </a:effectRef>
+          <a:fontRef idx="minor">
+            <a:schemeClr val="lt1"/>
+          </a:fontRef>
+        </p:style>
+        <p:txBody>
+          <a:bodyPr rtlCol="0" anchor="ctr"/>
+          <a:lstStyle/>
+          <a:p>
+            <a:pPr algn="ctr"/>
+          </a:p>
+        </p:txBody>
+      </p:sp>
+      <p:sp>
+        <p:nvSpPr>
+          <p:cNvPr id="8" name="TextBox 7"/>
           <p:cNvSpPr txBox="1"/>
           <p:nvPr/>
         </p:nvSpPr>
         <p:spPr>
           <a:xfrm>
-            <a:off x="914400" y="1783080"/>
+            <a:off x="960120" y="1874519"/>
             <a:ext cx="4846320" cy="731520"/>
           </a:xfrm>
           <a:prstGeom prst="rect">
@@ -5228,14 +6182,14 @@
       </p:sp>
       <p:sp>
         <p:nvSpPr>
-          <p:cNvPr id="8" name="TextBox 7"/>
+          <p:cNvPr id="9" name="TextBox 8"/>
           <p:cNvSpPr txBox="1"/>
           <p:nvPr/>
         </p:nvSpPr>
         <p:spPr>
           <a:xfrm>
-            <a:off x="914400" y="2286000"/>
-            <a:ext cx="4846320" cy="4572000"/>
+            <a:off x="960120" y="2377440"/>
+            <a:ext cx="4754880" cy="4572000"/>
           </a:xfrm>
           <a:prstGeom prst="rect">
             <a:avLst/>
@@ -5253,7 +6207,7 @@
                 <a:spcPct val="105000"/>
               </a:lnSpc>
               <a:spcAft>
-                <a:spcPts val="1200"/>
+                <a:spcPts val="1600"/>
               </a:spcAft>
             </a:pPr>
             <a:r>
@@ -5272,7 +6226,7 @@
                 <a:spcPct val="105000"/>
               </a:lnSpc>
               <a:spcAft>
-                <a:spcPts val="1200"/>
+                <a:spcPts val="1600"/>
               </a:spcAft>
             </a:pPr>
             <a:r>
@@ -5291,7 +6245,7 @@
                 <a:spcPct val="105000"/>
               </a:lnSpc>
               <a:spcAft>
-                <a:spcPts val="1200"/>
+                <a:spcPts val="1600"/>
               </a:spcAft>
             </a:pPr>
             <a:r>
@@ -5310,7 +6264,7 @@
                 <a:spcPct val="105000"/>
               </a:lnSpc>
               <a:spcAft>
-                <a:spcPts val="1200"/>
+                <a:spcPts val="1600"/>
               </a:spcAft>
             </a:pPr>
             <a:r>
@@ -5327,14 +6281,14 @@
       </p:sp>
       <p:sp>
         <p:nvSpPr>
-          <p:cNvPr id="9" name="Rectangle 8"/>
+          <p:cNvPr id="10" name="Rectangle 9"/>
           <p:cNvSpPr/>
           <p:nvPr/>
         </p:nvSpPr>
         <p:spPr>
           <a:xfrm>
-            <a:off x="6217920" y="1554480"/>
-            <a:ext cx="5349240" cy="4297680"/>
+            <a:off x="6217920" y="1645920"/>
+            <a:ext cx="5349240" cy="3886200"/>
           </a:xfrm>
           <a:prstGeom prst="rect">
             <a:avLst/>
@@ -5371,13 +6325,57 @@
       </p:sp>
       <p:sp>
         <p:nvSpPr>
-          <p:cNvPr id="10" name="TextBox 9"/>
+          <p:cNvPr id="11" name="Rectangle 10"/>
+          <p:cNvSpPr/>
+          <p:nvPr/>
+        </p:nvSpPr>
+        <p:spPr>
+          <a:xfrm>
+            <a:off x="6217920" y="1645920"/>
+            <a:ext cx="128016" cy="3886200"/>
+          </a:xfrm>
+          <a:prstGeom prst="rect">
+            <a:avLst/>
+          </a:prstGeom>
+          <a:solidFill>
+            <a:srgbClr val="C08A2B"/>
+          </a:solidFill>
+          <a:ln>
+            <a:noFill/>
+          </a:ln>
+          <a:effectLst/>
+        </p:spPr>
+        <p:style>
+          <a:lnRef idx="1">
+            <a:schemeClr val="accent1"/>
+          </a:lnRef>
+          <a:fillRef idx="3">
+            <a:schemeClr val="accent1"/>
+          </a:fillRef>
+          <a:effectRef idx="2">
+            <a:schemeClr val="accent1"/>
+          </a:effectRef>
+          <a:fontRef idx="minor">
+            <a:schemeClr val="lt1"/>
+          </a:fontRef>
+        </p:style>
+        <p:txBody>
+          <a:bodyPr rtlCol="0" anchor="ctr"/>
+          <a:lstStyle/>
+          <a:p>
+            <a:pPr algn="ctr"/>
+          </a:p>
+        </p:txBody>
+      </p:sp>
+      <p:sp>
+        <p:nvSpPr>
+          <p:cNvPr id="12" name="TextBox 11"/>
           <p:cNvSpPr txBox="1"/>
           <p:nvPr/>
         </p:nvSpPr>
         <p:spPr>
           <a:xfrm>
-            <a:off x="6492240" y="1783080"/>
+            <a:off x="6537960" y="1874519"/>
             <a:ext cx="4846320" cy="731520"/>
           </a:xfrm>
           <a:prstGeom prst="rect">
@@ -5410,14 +6408,14 @@
       </p:sp>
       <p:sp>
         <p:nvSpPr>
-          <p:cNvPr id="11" name="TextBox 10"/>
+          <p:cNvPr id="13" name="TextBox 12"/>
           <p:cNvSpPr txBox="1"/>
           <p:nvPr/>
         </p:nvSpPr>
         <p:spPr>
           <a:xfrm>
-            <a:off x="6492240" y="2286000"/>
-            <a:ext cx="4846320" cy="4572000"/>
+            <a:off x="6537960" y="2377440"/>
+            <a:ext cx="4754880" cy="4572000"/>
           </a:xfrm>
           <a:prstGeom prst="rect">
             <a:avLst/>
@@ -5435,7 +6433,7 @@
                 <a:spcPct val="105000"/>
               </a:lnSpc>
               <a:spcAft>
-                <a:spcPts val="1200"/>
+                <a:spcPts val="1600"/>
               </a:spcAft>
             </a:pPr>
             <a:r>
@@ -5454,7 +6452,7 @@
                 <a:spcPct val="105000"/>
               </a:lnSpc>
               <a:spcAft>
-                <a:spcPts val="1200"/>
+                <a:spcPts val="1600"/>
               </a:spcAft>
             </a:pPr>
             <a:r>
@@ -5473,7 +6471,7 @@
                 <a:spcPct val="105000"/>
               </a:lnSpc>
               <a:spcAft>
-                <a:spcPts val="1200"/>
+                <a:spcPts val="1600"/>
               </a:spcAft>
             </a:pPr>
             <a:r>
@@ -5492,7 +6490,7 @@
                 <a:spcPct val="105000"/>
               </a:lnSpc>
               <a:spcAft>
-                <a:spcPts val="1200"/>
+                <a:spcPts val="1600"/>
               </a:spcAft>
             </a:pPr>
             <a:r>
@@ -5509,14 +6507,102 @@
       </p:sp>
       <p:sp>
         <p:nvSpPr>
-          <p:cNvPr id="12" name="TextBox 11"/>
+          <p:cNvPr id="14" name="Rectangle 13"/>
+          <p:cNvSpPr/>
+          <p:nvPr/>
+        </p:nvSpPr>
+        <p:spPr>
+          <a:xfrm>
+            <a:off x="0" y="5779008"/>
+            <a:ext cx="12191695" cy="566928"/>
+          </a:xfrm>
+          <a:prstGeom prst="rect">
+            <a:avLst/>
+          </a:prstGeom>
+          <a:solidFill>
+            <a:srgbClr val="F2F4F7"/>
+          </a:solidFill>
+          <a:ln>
+            <a:noFill/>
+          </a:ln>
+          <a:effectLst/>
+        </p:spPr>
+        <p:style>
+          <a:lnRef idx="1">
+            <a:schemeClr val="accent1"/>
+          </a:lnRef>
+          <a:fillRef idx="3">
+            <a:schemeClr val="accent1"/>
+          </a:fillRef>
+          <a:effectRef idx="2">
+            <a:schemeClr val="accent1"/>
+          </a:effectRef>
+          <a:fontRef idx="minor">
+            <a:schemeClr val="lt1"/>
+          </a:fontRef>
+        </p:style>
+        <p:txBody>
+          <a:bodyPr rtlCol="0" anchor="ctr"/>
+          <a:lstStyle/>
+          <a:p>
+            <a:pPr algn="ctr"/>
+          </a:p>
+        </p:txBody>
+      </p:sp>
+      <p:sp>
+        <p:nvSpPr>
+          <p:cNvPr id="15" name="Rectangle 14"/>
+          <p:cNvSpPr/>
+          <p:nvPr/>
+        </p:nvSpPr>
+        <p:spPr>
+          <a:xfrm>
+            <a:off x="0" y="5779008"/>
+            <a:ext cx="128016" cy="566928"/>
+          </a:xfrm>
+          <a:prstGeom prst="rect">
+            <a:avLst/>
+          </a:prstGeom>
+          <a:solidFill>
+            <a:srgbClr val="C08A2B"/>
+          </a:solidFill>
+          <a:ln>
+            <a:noFill/>
+          </a:ln>
+          <a:effectLst/>
+        </p:spPr>
+        <p:style>
+          <a:lnRef idx="1">
+            <a:schemeClr val="accent1"/>
+          </a:lnRef>
+          <a:fillRef idx="3">
+            <a:schemeClr val="accent1"/>
+          </a:fillRef>
+          <a:effectRef idx="2">
+            <a:schemeClr val="accent1"/>
+          </a:effectRef>
+          <a:fontRef idx="minor">
+            <a:schemeClr val="lt1"/>
+          </a:fontRef>
+        </p:style>
+        <p:txBody>
+          <a:bodyPr rtlCol="0" anchor="ctr"/>
+          <a:lstStyle/>
+          <a:p>
+            <a:pPr algn="ctr"/>
+          </a:p>
+        </p:txBody>
+      </p:sp>
+      <p:sp>
+        <p:nvSpPr>
+          <p:cNvPr id="16" name="TextBox 15"/>
           <p:cNvSpPr txBox="1"/>
           <p:nvPr/>
         </p:nvSpPr>
         <p:spPr>
           <a:xfrm>
-            <a:off x="640080" y="6035040"/>
-            <a:ext cx="10972800" cy="731520"/>
+            <a:off x="566928" y="5916168"/>
+            <a:ext cx="11064240" cy="457200"/>
           </a:xfrm>
           <a:prstGeom prst="rect">
             <a:avLst/>
@@ -5542,6 +6628,89 @@
                 <a:latin typeface="Times New Roman"/>
               </a:rPr>
               <a:t>The same conduct, two very different responses — a decade apart.</a:t>
+            </a:r>
+          </a:p>
+        </p:txBody>
+      </p:sp>
+      <p:sp>
+        <p:nvSpPr>
+          <p:cNvPr id="17" name="Rectangle 16"/>
+          <p:cNvSpPr/>
+          <p:nvPr/>
+        </p:nvSpPr>
+        <p:spPr>
+          <a:xfrm>
+            <a:off x="548640" y="6583680"/>
+            <a:ext cx="411480" cy="32004"/>
+          </a:xfrm>
+          <a:prstGeom prst="rect">
+            <a:avLst/>
+          </a:prstGeom>
+          <a:solidFill>
+            <a:srgbClr val="C08A2B"/>
+          </a:solidFill>
+          <a:ln>
+            <a:noFill/>
+          </a:ln>
+          <a:effectLst/>
+        </p:spPr>
+        <p:style>
+          <a:lnRef idx="1">
+            <a:schemeClr val="accent1"/>
+          </a:lnRef>
+          <a:fillRef idx="3">
+            <a:schemeClr val="accent1"/>
+          </a:fillRef>
+          <a:effectRef idx="2">
+            <a:schemeClr val="accent1"/>
+          </a:effectRef>
+          <a:fontRef idx="minor">
+            <a:schemeClr val="lt1"/>
+          </a:fontRef>
+        </p:style>
+        <p:txBody>
+          <a:bodyPr rtlCol="0" anchor="ctr"/>
+          <a:lstStyle/>
+          <a:p>
+            <a:pPr algn="ctr"/>
+          </a:p>
+        </p:txBody>
+      </p:sp>
+      <p:sp>
+        <p:nvSpPr>
+          <p:cNvPr id="18" name="TextBox 17"/>
+          <p:cNvSpPr txBox="1"/>
+          <p:nvPr/>
+        </p:nvSpPr>
+        <p:spPr>
+          <a:xfrm>
+            <a:off x="10424160" y="6419088"/>
+            <a:ext cx="1216152" cy="274320"/>
+          </a:xfrm>
+          <a:prstGeom prst="rect">
+            <a:avLst/>
+          </a:prstGeom>
+          <a:noFill/>
+        </p:spPr>
+        <p:txBody>
+          <a:bodyPr wrap="square">
+            <a:spAutoFit/>
+          </a:bodyPr>
+          <a:lstStyle/>
+          <a:p>
+            <a:pPr algn="r">
+              <a:lnSpc>
+                <a:spcPct val="100000"/>
+              </a:lnSpc>
+            </a:pPr>
+            <a:r>
+              <a:rPr sz="1100" b="0" i="0">
+                <a:solidFill>
+                  <a:srgbClr val="6B7682"/>
+                </a:solidFill>
+                <a:latin typeface="Times New Roman"/>
+              </a:rPr>
+              <a:t>15 / 20</a:t>
             </a:r>
           </a:p>
         </p:txBody>
@@ -5746,8 +6915,8 @@
         </p:nvSpPr>
         <p:spPr>
           <a:xfrm>
-            <a:off x="640080" y="1554480"/>
-            <a:ext cx="10972800" cy="4572000"/>
+            <a:off x="640080" y="1920240"/>
+            <a:ext cx="10881360" cy="4572000"/>
           </a:xfrm>
           <a:prstGeom prst="rect">
             <a:avLst/>
@@ -5765,7 +6934,7 @@
                 <a:spcPct val="105000"/>
               </a:lnSpc>
               <a:spcAft>
-                <a:spcPts val="1600"/>
+                <a:spcPts val="3000"/>
               </a:spcAft>
             </a:pPr>
             <a:r>
@@ -5793,7 +6962,7 @@
                 <a:spcPct val="105000"/>
               </a:lnSpc>
               <a:spcAft>
-                <a:spcPts val="1600"/>
+                <a:spcPts val="3000"/>
               </a:spcAft>
             </a:pPr>
             <a:r>
@@ -5821,7 +6990,7 @@
                 <a:spcPct val="105000"/>
               </a:lnSpc>
               <a:spcAft>
-                <a:spcPts val="1600"/>
+                <a:spcPts val="3000"/>
               </a:spcAft>
             </a:pPr>
             <a:r>
@@ -5849,7 +7018,7 @@
                 <a:spcPct val="105000"/>
               </a:lnSpc>
               <a:spcAft>
-                <a:spcPts val="1600"/>
+                <a:spcPts val="3000"/>
               </a:spcAft>
             </a:pPr>
             <a:r>
@@ -5875,14 +7044,102 @@
       </p:sp>
       <p:sp>
         <p:nvSpPr>
-          <p:cNvPr id="7" name="TextBox 6"/>
+          <p:cNvPr id="7" name="Rectangle 6"/>
+          <p:cNvSpPr/>
+          <p:nvPr/>
+        </p:nvSpPr>
+        <p:spPr>
+          <a:xfrm>
+            <a:off x="0" y="5779008"/>
+            <a:ext cx="12191695" cy="566928"/>
+          </a:xfrm>
+          <a:prstGeom prst="rect">
+            <a:avLst/>
+          </a:prstGeom>
+          <a:solidFill>
+            <a:srgbClr val="F2F4F7"/>
+          </a:solidFill>
+          <a:ln>
+            <a:noFill/>
+          </a:ln>
+          <a:effectLst/>
+        </p:spPr>
+        <p:style>
+          <a:lnRef idx="1">
+            <a:schemeClr val="accent1"/>
+          </a:lnRef>
+          <a:fillRef idx="3">
+            <a:schemeClr val="accent1"/>
+          </a:fillRef>
+          <a:effectRef idx="2">
+            <a:schemeClr val="accent1"/>
+          </a:effectRef>
+          <a:fontRef idx="minor">
+            <a:schemeClr val="lt1"/>
+          </a:fontRef>
+        </p:style>
+        <p:txBody>
+          <a:bodyPr rtlCol="0" anchor="ctr"/>
+          <a:lstStyle/>
+          <a:p>
+            <a:pPr algn="ctr"/>
+          </a:p>
+        </p:txBody>
+      </p:sp>
+      <p:sp>
+        <p:nvSpPr>
+          <p:cNvPr id="8" name="Rectangle 7"/>
+          <p:cNvSpPr/>
+          <p:nvPr/>
+        </p:nvSpPr>
+        <p:spPr>
+          <a:xfrm>
+            <a:off x="0" y="5779008"/>
+            <a:ext cx="128016" cy="566928"/>
+          </a:xfrm>
+          <a:prstGeom prst="rect">
+            <a:avLst/>
+          </a:prstGeom>
+          <a:solidFill>
+            <a:srgbClr val="C08A2B"/>
+          </a:solidFill>
+          <a:ln>
+            <a:noFill/>
+          </a:ln>
+          <a:effectLst/>
+        </p:spPr>
+        <p:style>
+          <a:lnRef idx="1">
+            <a:schemeClr val="accent1"/>
+          </a:lnRef>
+          <a:fillRef idx="3">
+            <a:schemeClr val="accent1"/>
+          </a:fillRef>
+          <a:effectRef idx="2">
+            <a:schemeClr val="accent1"/>
+          </a:effectRef>
+          <a:fontRef idx="minor">
+            <a:schemeClr val="lt1"/>
+          </a:fontRef>
+        </p:style>
+        <p:txBody>
+          <a:bodyPr rtlCol="0" anchor="ctr"/>
+          <a:lstStyle/>
+          <a:p>
+            <a:pPr algn="ctr"/>
+          </a:p>
+        </p:txBody>
+      </p:sp>
+      <p:sp>
+        <p:nvSpPr>
+          <p:cNvPr id="9" name="TextBox 8"/>
           <p:cNvSpPr txBox="1"/>
           <p:nvPr/>
         </p:nvSpPr>
         <p:spPr>
           <a:xfrm>
-            <a:off x="640080" y="5989320"/>
-            <a:ext cx="10972800" cy="731520"/>
+            <a:off x="566928" y="5916168"/>
+            <a:ext cx="11064240" cy="457200"/>
           </a:xfrm>
           <a:prstGeom prst="rect">
             <a:avLst/>
@@ -5901,13 +7158,96 @@
               </a:lnSpc>
             </a:pPr>
             <a:r>
-              <a:rPr sz="1500" b="1" i="1">
+              <a:rPr sz="1500" b="0" i="1">
                 <a:solidFill>
                   <a:srgbClr val="0F2A43"/>
                 </a:solidFill>
                 <a:latin typeface="Times New Roman"/>
               </a:rPr>
               <a:t>Central question: would the UK, France or Japan have acted faster — or slower?</a:t>
+            </a:r>
+          </a:p>
+        </p:txBody>
+      </p:sp>
+      <p:sp>
+        <p:nvSpPr>
+          <p:cNvPr id="10" name="Rectangle 9"/>
+          <p:cNvSpPr/>
+          <p:nvPr/>
+        </p:nvSpPr>
+        <p:spPr>
+          <a:xfrm>
+            <a:off x="548640" y="6583680"/>
+            <a:ext cx="411480" cy="32004"/>
+          </a:xfrm>
+          <a:prstGeom prst="rect">
+            <a:avLst/>
+          </a:prstGeom>
+          <a:solidFill>
+            <a:srgbClr val="C08A2B"/>
+          </a:solidFill>
+          <a:ln>
+            <a:noFill/>
+          </a:ln>
+          <a:effectLst/>
+        </p:spPr>
+        <p:style>
+          <a:lnRef idx="1">
+            <a:schemeClr val="accent1"/>
+          </a:lnRef>
+          <a:fillRef idx="3">
+            <a:schemeClr val="accent1"/>
+          </a:fillRef>
+          <a:effectRef idx="2">
+            <a:schemeClr val="accent1"/>
+          </a:effectRef>
+          <a:fontRef idx="minor">
+            <a:schemeClr val="lt1"/>
+          </a:fontRef>
+        </p:style>
+        <p:txBody>
+          <a:bodyPr rtlCol="0" anchor="ctr"/>
+          <a:lstStyle/>
+          <a:p>
+            <a:pPr algn="ctr"/>
+          </a:p>
+        </p:txBody>
+      </p:sp>
+      <p:sp>
+        <p:nvSpPr>
+          <p:cNvPr id="11" name="TextBox 10"/>
+          <p:cNvSpPr txBox="1"/>
+          <p:nvPr/>
+        </p:nvSpPr>
+        <p:spPr>
+          <a:xfrm>
+            <a:off x="10424160" y="6419088"/>
+            <a:ext cx="1216152" cy="274320"/>
+          </a:xfrm>
+          <a:prstGeom prst="rect">
+            <a:avLst/>
+          </a:prstGeom>
+          <a:noFill/>
+        </p:spPr>
+        <p:txBody>
+          <a:bodyPr wrap="square">
+            <a:spAutoFit/>
+          </a:bodyPr>
+          <a:lstStyle/>
+          <a:p>
+            <a:pPr algn="r">
+              <a:lnSpc>
+                <a:spcPct val="100000"/>
+              </a:lnSpc>
+            </a:pPr>
+            <a:r>
+              <a:rPr sz="1100" b="0" i="0">
+                <a:solidFill>
+                  <a:srgbClr val="6B7682"/>
+                </a:solidFill>
+                <a:latin typeface="Times New Roman"/>
+              </a:rPr>
+              <a:t>16 / 20</a:t>
             </a:r>
           </a:p>
         </p:txBody>
@@ -5940,14 +7280,92 @@
       <p:grpSpPr/>
       <p:sp>
         <p:nvSpPr>
-          <p:cNvPr id="2" name="Rectangle 1"/>
+          <p:cNvPr id="2" name="TextBox 1"/>
+          <p:cNvSpPr txBox="1"/>
+          <p:nvPr/>
+        </p:nvSpPr>
+        <p:spPr>
+          <a:xfrm>
+            <a:off x="7040880" y="640080"/>
+            <a:ext cx="4937760" cy="5486400"/>
+          </a:xfrm>
+          <a:prstGeom prst="rect">
+            <a:avLst/>
+          </a:prstGeom>
+          <a:noFill/>
+        </p:spPr>
+        <p:txBody>
+          <a:bodyPr wrap="square">
+            <a:spAutoFit/>
+          </a:bodyPr>
+          <a:lstStyle/>
+          <a:p>
+            <a:pPr algn="ctr">
+              <a:lnSpc>
+                <a:spcPct val="100000"/>
+              </a:lnSpc>
+            </a:pPr>
+            <a:r>
+              <a:rPr sz="21000" b="1" i="0">
+                <a:solidFill>
+                  <a:srgbClr val="1C3A56"/>
+                </a:solidFill>
+                <a:latin typeface="Times New Roman"/>
+              </a:rPr>
+              <a:t>04</a:t>
+            </a:r>
+          </a:p>
+        </p:txBody>
+      </p:sp>
+      <p:sp>
+        <p:nvSpPr>
+          <p:cNvPr id="3" name="TextBox 2"/>
+          <p:cNvSpPr txBox="1"/>
+          <p:nvPr/>
+        </p:nvSpPr>
+        <p:spPr>
+          <a:xfrm>
+            <a:off x="822960" y="2331720"/>
+            <a:ext cx="7315200" cy="731520"/>
+          </a:xfrm>
+          <a:prstGeom prst="rect">
+            <a:avLst/>
+          </a:prstGeom>
+          <a:noFill/>
+        </p:spPr>
+        <p:txBody>
+          <a:bodyPr wrap="square">
+            <a:spAutoFit/>
+          </a:bodyPr>
+          <a:lstStyle/>
+          <a:p>
+            <a:pPr algn="l">
+              <a:lnSpc>
+                <a:spcPct val="100000"/>
+              </a:lnSpc>
+            </a:pPr>
+            <a:r>
+              <a:rPr sz="1300" b="1" i="0">
+                <a:solidFill>
+                  <a:srgbClr val="C08A2B"/>
+                </a:solidFill>
+                <a:latin typeface="Times New Roman"/>
+              </a:rPr>
+              <a:t>SECTION 4 OF 4</a:t>
+            </a:r>
+          </a:p>
+        </p:txBody>
+      </p:sp>
+      <p:sp>
+        <p:nvSpPr>
+          <p:cNvPr id="4" name="Rectangle 3"/>
           <p:cNvSpPr/>
           <p:nvPr/>
         </p:nvSpPr>
         <p:spPr>
           <a:xfrm>
-            <a:off x="822960" y="3246120"/>
-            <a:ext cx="2926080" cy="54864"/>
+            <a:off x="822960" y="2697480"/>
+            <a:ext cx="2743200" cy="54864"/>
           </a:xfrm>
           <a:prstGeom prst="rect">
             <a:avLst/>
@@ -5984,14 +7402,14 @@
       </p:sp>
       <p:sp>
         <p:nvSpPr>
-          <p:cNvPr id="3" name="TextBox 2"/>
+          <p:cNvPr id="5" name="TextBox 4"/>
           <p:cNvSpPr txBox="1"/>
           <p:nvPr/>
         </p:nvSpPr>
         <p:spPr>
           <a:xfrm>
-            <a:off x="822960" y="2148840"/>
-            <a:ext cx="10515600" cy="731520"/>
+            <a:off x="822960" y="2907792"/>
+            <a:ext cx="7498079" cy="1463040"/>
           </a:xfrm>
           <a:prstGeom prst="rect">
             <a:avLst/>
@@ -6010,27 +7428,43 @@
               </a:lnSpc>
             </a:pPr>
             <a:r>
-              <a:rPr sz="2000" b="1" i="0">
-                <a:solidFill>
-                  <a:srgbClr val="C08A2B"/>
-                </a:solidFill>
-                <a:latin typeface="Times New Roman"/>
-              </a:rPr>
-              <a:t>PART 4</a:t>
-            </a:r>
-          </a:p>
-        </p:txBody>
-      </p:sp>
-      <p:sp>
-        <p:nvSpPr>
-          <p:cNvPr id="4" name="TextBox 3"/>
+              <a:rPr sz="3300" b="1" i="0">
+                <a:solidFill>
+                  <a:srgbClr val="FFFFFF"/>
+                </a:solidFill>
+                <a:latin typeface="Times New Roman"/>
+              </a:rPr>
+              <a:t>Accountability,</a:t>
+            </a:r>
+          </a:p>
+          <a:p>
+            <a:pPr algn="l">
+              <a:lnSpc>
+                <a:spcPct val="100000"/>
+              </a:lnSpc>
+            </a:pPr>
+            <a:r>
+              <a:rPr sz="3300" b="1" i="0">
+                <a:solidFill>
+                  <a:srgbClr val="FFFFFF"/>
+                </a:solidFill>
+                <a:latin typeface="Times New Roman"/>
+              </a:rPr>
+              <a:t>Transparency &amp; Lessons</a:t>
+            </a:r>
+          </a:p>
+        </p:txBody>
+      </p:sp>
+      <p:sp>
+        <p:nvSpPr>
+          <p:cNvPr id="6" name="TextBox 5"/>
           <p:cNvSpPr txBox="1"/>
           <p:nvPr/>
         </p:nvSpPr>
         <p:spPr>
           <a:xfrm>
-            <a:off x="822960" y="2514600"/>
-            <a:ext cx="10515600" cy="731520"/>
+            <a:off x="822960" y="3977639"/>
+            <a:ext cx="7132320" cy="1097280"/>
           </a:xfrm>
           <a:prstGeom prst="rect">
             <a:avLst/>
@@ -6045,31 +7479,75 @@
           <a:p>
             <a:pPr algn="l">
               <a:lnSpc>
-                <a:spcPct val="100000"/>
-              </a:lnSpc>
-            </a:pPr>
-            <a:r>
-              <a:rPr sz="3400" b="1" i="0">
-                <a:solidFill>
-                  <a:srgbClr val="FFFFFF"/>
-                </a:solidFill>
-                <a:latin typeface="Times New Roman"/>
-              </a:rPr>
-              <a:t>Accountability, Transparency &amp; Lessons</a:t>
-            </a:r>
-          </a:p>
-        </p:txBody>
-      </p:sp>
-      <p:sp>
-        <p:nvSpPr>
-          <p:cNvPr id="5" name="TextBox 4"/>
+                <a:spcPct val="115000"/>
+              </a:lnSpc>
+            </a:pPr>
+            <a:r>
+              <a:rPr sz="1800" b="0" i="1">
+                <a:solidFill>
+                  <a:srgbClr val="F2F4F7"/>
+                </a:solidFill>
+                <a:latin typeface="Times New Roman"/>
+              </a:rPr>
+              <a:t>Designing cross-border justice that actually protects victims</a:t>
+            </a:r>
+          </a:p>
+        </p:txBody>
+      </p:sp>
+      <p:sp>
+        <p:nvSpPr>
+          <p:cNvPr id="7" name="Rectangle 6"/>
+          <p:cNvSpPr/>
+          <p:nvPr/>
+        </p:nvSpPr>
+        <p:spPr>
+          <a:xfrm>
+            <a:off x="548640" y="6583680"/>
+            <a:ext cx="411480" cy="32004"/>
+          </a:xfrm>
+          <a:prstGeom prst="rect">
+            <a:avLst/>
+          </a:prstGeom>
+          <a:solidFill>
+            <a:srgbClr val="C08A2B"/>
+          </a:solidFill>
+          <a:ln>
+            <a:noFill/>
+          </a:ln>
+          <a:effectLst/>
+        </p:spPr>
+        <p:style>
+          <a:lnRef idx="1">
+            <a:schemeClr val="accent1"/>
+          </a:lnRef>
+          <a:fillRef idx="3">
+            <a:schemeClr val="accent1"/>
+          </a:fillRef>
+          <a:effectRef idx="2">
+            <a:schemeClr val="accent1"/>
+          </a:effectRef>
+          <a:fontRef idx="minor">
+            <a:schemeClr val="lt1"/>
+          </a:fontRef>
+        </p:style>
+        <p:txBody>
+          <a:bodyPr rtlCol="0" anchor="ctr"/>
+          <a:lstStyle/>
+          <a:p>
+            <a:pPr algn="ctr"/>
+          </a:p>
+        </p:txBody>
+      </p:sp>
+      <p:sp>
+        <p:nvSpPr>
+          <p:cNvPr id="8" name="TextBox 7"/>
           <p:cNvSpPr txBox="1"/>
           <p:nvPr/>
         </p:nvSpPr>
         <p:spPr>
           <a:xfrm>
-            <a:off x="822960" y="3474720"/>
-            <a:ext cx="9601200" cy="731520"/>
+            <a:off x="10424160" y="6419088"/>
+            <a:ext cx="1216152" cy="274320"/>
           </a:xfrm>
           <a:prstGeom prst="rect">
             <a:avLst/>
@@ -6082,19 +7560,19 @@
           </a:bodyPr>
           <a:lstStyle/>
           <a:p>
-            <a:pPr algn="l">
-              <a:lnSpc>
-                <a:spcPct val="110000"/>
-              </a:lnSpc>
-            </a:pPr>
-            <a:r>
-              <a:rPr sz="1800" b="0" i="1">
-                <a:solidFill>
-                  <a:srgbClr val="F2F4F7"/>
-                </a:solidFill>
-                <a:latin typeface="Times New Roman"/>
-              </a:rPr>
-              <a:t>Designing cross-border justice that actually protects victims</a:t>
+            <a:pPr algn="r">
+              <a:lnSpc>
+                <a:spcPct val="100000"/>
+              </a:lnSpc>
+            </a:pPr>
+            <a:r>
+              <a:rPr sz="1100" b="0" i="0">
+                <a:solidFill>
+                  <a:srgbClr val="909CAA"/>
+                </a:solidFill>
+                <a:latin typeface="Times New Roman"/>
+              </a:rPr>
+              <a:t>17 / 20</a:t>
             </a:r>
           </a:p>
         </p:txBody>
@@ -6299,8 +7777,8 @@
         </p:nvSpPr>
         <p:spPr>
           <a:xfrm>
-            <a:off x="640080" y="1554480"/>
-            <a:ext cx="10972800" cy="4572000"/>
+            <a:off x="640080" y="1920240"/>
+            <a:ext cx="10881360" cy="4572000"/>
           </a:xfrm>
           <a:prstGeom prst="rect">
             <a:avLst/>
@@ -6318,7 +7796,7 @@
                 <a:spcPct val="105000"/>
               </a:lnSpc>
               <a:spcAft>
-                <a:spcPts val="1700"/>
+                <a:spcPts val="3000"/>
               </a:spcAft>
             </a:pPr>
             <a:r>
@@ -6337,7 +7815,7 @@
                 <a:spcPct val="105000"/>
               </a:lnSpc>
               <a:spcAft>
-                <a:spcPts val="1700"/>
+                <a:spcPts val="3000"/>
               </a:spcAft>
             </a:pPr>
             <a:r>
@@ -6356,7 +7834,7 @@
                 <a:spcPct val="105000"/>
               </a:lnSpc>
               <a:spcAft>
-                <a:spcPts val="1700"/>
+                <a:spcPts val="3000"/>
               </a:spcAft>
             </a:pPr>
             <a:r>
@@ -6384,7 +7862,7 @@
                 <a:spcPct val="105000"/>
               </a:lnSpc>
               <a:spcAft>
-                <a:spcPts val="1700"/>
+                <a:spcPts val="3000"/>
               </a:spcAft>
             </a:pPr>
             <a:r>
@@ -6401,14 +7879,102 @@
       </p:sp>
       <p:sp>
         <p:nvSpPr>
-          <p:cNvPr id="7" name="TextBox 6"/>
+          <p:cNvPr id="7" name="Rectangle 6"/>
+          <p:cNvSpPr/>
+          <p:nvPr/>
+        </p:nvSpPr>
+        <p:spPr>
+          <a:xfrm>
+            <a:off x="0" y="5779008"/>
+            <a:ext cx="12191695" cy="566928"/>
+          </a:xfrm>
+          <a:prstGeom prst="rect">
+            <a:avLst/>
+          </a:prstGeom>
+          <a:solidFill>
+            <a:srgbClr val="F2F4F7"/>
+          </a:solidFill>
+          <a:ln>
+            <a:noFill/>
+          </a:ln>
+          <a:effectLst/>
+        </p:spPr>
+        <p:style>
+          <a:lnRef idx="1">
+            <a:schemeClr val="accent1"/>
+          </a:lnRef>
+          <a:fillRef idx="3">
+            <a:schemeClr val="accent1"/>
+          </a:fillRef>
+          <a:effectRef idx="2">
+            <a:schemeClr val="accent1"/>
+          </a:effectRef>
+          <a:fontRef idx="minor">
+            <a:schemeClr val="lt1"/>
+          </a:fontRef>
+        </p:style>
+        <p:txBody>
+          <a:bodyPr rtlCol="0" anchor="ctr"/>
+          <a:lstStyle/>
+          <a:p>
+            <a:pPr algn="ctr"/>
+          </a:p>
+        </p:txBody>
+      </p:sp>
+      <p:sp>
+        <p:nvSpPr>
+          <p:cNvPr id="8" name="Rectangle 7"/>
+          <p:cNvSpPr/>
+          <p:nvPr/>
+        </p:nvSpPr>
+        <p:spPr>
+          <a:xfrm>
+            <a:off x="0" y="5779008"/>
+            <a:ext cx="128016" cy="566928"/>
+          </a:xfrm>
+          <a:prstGeom prst="rect">
+            <a:avLst/>
+          </a:prstGeom>
+          <a:solidFill>
+            <a:srgbClr val="C08A2B"/>
+          </a:solidFill>
+          <a:ln>
+            <a:noFill/>
+          </a:ln>
+          <a:effectLst/>
+        </p:spPr>
+        <p:style>
+          <a:lnRef idx="1">
+            <a:schemeClr val="accent1"/>
+          </a:lnRef>
+          <a:fillRef idx="3">
+            <a:schemeClr val="accent1"/>
+          </a:fillRef>
+          <a:effectRef idx="2">
+            <a:schemeClr val="accent1"/>
+          </a:effectRef>
+          <a:fontRef idx="minor">
+            <a:schemeClr val="lt1"/>
+          </a:fontRef>
+        </p:style>
+        <p:txBody>
+          <a:bodyPr rtlCol="0" anchor="ctr"/>
+          <a:lstStyle/>
+          <a:p>
+            <a:pPr algn="ctr"/>
+          </a:p>
+        </p:txBody>
+      </p:sp>
+      <p:sp>
+        <p:nvSpPr>
+          <p:cNvPr id="9" name="TextBox 8"/>
           <p:cNvSpPr txBox="1"/>
           <p:nvPr/>
         </p:nvSpPr>
         <p:spPr>
           <a:xfrm>
-            <a:off x="640080" y="5989320"/>
-            <a:ext cx="10972800" cy="731520"/>
+            <a:off x="566928" y="5916168"/>
+            <a:ext cx="11064240" cy="457200"/>
           </a:xfrm>
           <a:prstGeom prst="rect">
             <a:avLst/>
@@ -6434,6 +8000,89 @@
                 <a:latin typeface="Times New Roman"/>
               </a:rPr>
               <a:t>Transparency is not automatically just — its design determines who it protects.</a:t>
+            </a:r>
+          </a:p>
+        </p:txBody>
+      </p:sp>
+      <p:sp>
+        <p:nvSpPr>
+          <p:cNvPr id="10" name="Rectangle 9"/>
+          <p:cNvSpPr/>
+          <p:nvPr/>
+        </p:nvSpPr>
+        <p:spPr>
+          <a:xfrm>
+            <a:off x="548640" y="6583680"/>
+            <a:ext cx="411480" cy="32004"/>
+          </a:xfrm>
+          <a:prstGeom prst="rect">
+            <a:avLst/>
+          </a:prstGeom>
+          <a:solidFill>
+            <a:srgbClr val="C08A2B"/>
+          </a:solidFill>
+          <a:ln>
+            <a:noFill/>
+          </a:ln>
+          <a:effectLst/>
+        </p:spPr>
+        <p:style>
+          <a:lnRef idx="1">
+            <a:schemeClr val="accent1"/>
+          </a:lnRef>
+          <a:fillRef idx="3">
+            <a:schemeClr val="accent1"/>
+          </a:fillRef>
+          <a:effectRef idx="2">
+            <a:schemeClr val="accent1"/>
+          </a:effectRef>
+          <a:fontRef idx="minor">
+            <a:schemeClr val="lt1"/>
+          </a:fontRef>
+        </p:style>
+        <p:txBody>
+          <a:bodyPr rtlCol="0" anchor="ctr"/>
+          <a:lstStyle/>
+          <a:p>
+            <a:pPr algn="ctr"/>
+          </a:p>
+        </p:txBody>
+      </p:sp>
+      <p:sp>
+        <p:nvSpPr>
+          <p:cNvPr id="11" name="TextBox 10"/>
+          <p:cNvSpPr txBox="1"/>
+          <p:nvPr/>
+        </p:nvSpPr>
+        <p:spPr>
+          <a:xfrm>
+            <a:off x="10424160" y="6419088"/>
+            <a:ext cx="1216152" cy="274320"/>
+          </a:xfrm>
+          <a:prstGeom prst="rect">
+            <a:avLst/>
+          </a:prstGeom>
+          <a:noFill/>
+        </p:spPr>
+        <p:txBody>
+          <a:bodyPr wrap="square">
+            <a:spAutoFit/>
+          </a:bodyPr>
+          <a:lstStyle/>
+          <a:p>
+            <a:pPr algn="r">
+              <a:lnSpc>
+                <a:spcPct val="100000"/>
+              </a:lnSpc>
+            </a:pPr>
+            <a:r>
+              <a:rPr sz="1100" b="0" i="0">
+                <a:solidFill>
+                  <a:srgbClr val="6B7682"/>
+                </a:solidFill>
+                <a:latin typeface="Times New Roman"/>
+              </a:rPr>
+              <a:t>18 / 20</a:t>
             </a:r>
           </a:p>
         </p:txBody>
@@ -6638,7 +8287,7 @@
         </p:nvSpPr>
         <p:spPr>
           <a:xfrm>
-            <a:off x="640080" y="1463040"/>
+            <a:off x="640080" y="1783080"/>
             <a:ext cx="6766560" cy="4572000"/>
           </a:xfrm>
           <a:prstGeom prst="rect">
@@ -6657,7 +8306,7 @@
                 <a:spcPct val="105000"/>
               </a:lnSpc>
               <a:spcAft>
-                <a:spcPts val="1500"/>
+                <a:spcPts val="2600"/>
               </a:spcAft>
             </a:pPr>
             <a:r>
@@ -6676,7 +8325,7 @@
                 <a:spcPct val="105000"/>
               </a:lnSpc>
               <a:spcAft>
-                <a:spcPts val="1500"/>
+                <a:spcPts val="2600"/>
               </a:spcAft>
             </a:pPr>
             <a:r>
@@ -6695,7 +8344,7 @@
                 <a:spcPct val="105000"/>
               </a:lnSpc>
               <a:spcAft>
-                <a:spcPts val="1500"/>
+                <a:spcPts val="2600"/>
               </a:spcAft>
             </a:pPr>
             <a:r>
@@ -6714,7 +8363,7 @@
                 <a:spcPct val="105000"/>
               </a:lnSpc>
               <a:spcAft>
-                <a:spcPts val="1500"/>
+                <a:spcPts val="2600"/>
               </a:spcAft>
             </a:pPr>
             <a:r>
@@ -6737,8 +8386,8 @@
         </p:nvSpPr>
         <p:spPr>
           <a:xfrm>
-            <a:off x="7680960" y="1554480"/>
-            <a:ext cx="3931920" cy="4480560"/>
+            <a:off x="7726679" y="1600200"/>
+            <a:ext cx="3913632" cy="3977639"/>
           </a:xfrm>
           <a:prstGeom prst="rect">
             <a:avLst/>
@@ -6775,13 +8424,57 @@
       </p:sp>
       <p:sp>
         <p:nvSpPr>
-          <p:cNvPr id="8" name="TextBox 7"/>
+          <p:cNvPr id="8" name="Rectangle 7"/>
+          <p:cNvSpPr/>
+          <p:nvPr/>
+        </p:nvSpPr>
+        <p:spPr>
+          <a:xfrm>
+            <a:off x="7726679" y="1600200"/>
+            <a:ext cx="128016" cy="3977639"/>
+          </a:xfrm>
+          <a:prstGeom prst="rect">
+            <a:avLst/>
+          </a:prstGeom>
+          <a:solidFill>
+            <a:srgbClr val="C08A2B"/>
+          </a:solidFill>
+          <a:ln>
+            <a:noFill/>
+          </a:ln>
+          <a:effectLst/>
+        </p:spPr>
+        <p:style>
+          <a:lnRef idx="1">
+            <a:schemeClr val="accent1"/>
+          </a:lnRef>
+          <a:fillRef idx="3">
+            <a:schemeClr val="accent1"/>
+          </a:fillRef>
+          <a:effectRef idx="2">
+            <a:schemeClr val="accent1"/>
+          </a:effectRef>
+          <a:fontRef idx="minor">
+            <a:schemeClr val="lt1"/>
+          </a:fontRef>
+        </p:style>
+        <p:txBody>
+          <a:bodyPr rtlCol="0" anchor="ctr"/>
+          <a:lstStyle/>
+          <a:p>
+            <a:pPr algn="ctr"/>
+          </a:p>
+        </p:txBody>
+      </p:sp>
+      <p:sp>
+        <p:nvSpPr>
+          <p:cNvPr id="9" name="TextBox 8"/>
           <p:cNvSpPr txBox="1"/>
           <p:nvPr/>
         </p:nvSpPr>
         <p:spPr>
           <a:xfrm>
-            <a:off x="7955279" y="1783080"/>
+            <a:off x="8001000" y="1828800"/>
             <a:ext cx="3474720" cy="731520"/>
           </a:xfrm>
           <a:prstGeom prst="rect">
@@ -6814,13 +8507,13 @@
       </p:sp>
       <p:sp>
         <p:nvSpPr>
-          <p:cNvPr id="9" name="TextBox 8"/>
+          <p:cNvPr id="10" name="TextBox 9"/>
           <p:cNvSpPr txBox="1"/>
           <p:nvPr/>
         </p:nvSpPr>
         <p:spPr>
           <a:xfrm>
-            <a:off x="7955279" y="2286000"/>
+            <a:off x="8001000" y="2331720"/>
             <a:ext cx="3474720" cy="3657600"/>
           </a:xfrm>
           <a:prstGeom prst="rect">
@@ -6836,7 +8529,7 @@
           <a:p>
             <a:pPr algn="l">
               <a:lnSpc>
-                <a:spcPct val="120000"/>
+                <a:spcPct val="122000"/>
               </a:lnSpc>
             </a:pPr>
             <a:r>
@@ -6847,6 +8540,216 @@
                 <a:latin typeface="Times New Roman"/>
               </a:rPr>
               <a:t>Japan has an anti-trafficking action framework and is assessed annually in the US State Department's TIP Report — a useful benchmark for how a non-Western system measures up on cross-border cooperation.</a:t>
+            </a:r>
+          </a:p>
+        </p:txBody>
+      </p:sp>
+      <p:sp>
+        <p:nvSpPr>
+          <p:cNvPr id="11" name="Rectangle 10"/>
+          <p:cNvSpPr/>
+          <p:nvPr/>
+        </p:nvSpPr>
+        <p:spPr>
+          <a:xfrm>
+            <a:off x="0" y="5779008"/>
+            <a:ext cx="12191695" cy="566928"/>
+          </a:xfrm>
+          <a:prstGeom prst="rect">
+            <a:avLst/>
+          </a:prstGeom>
+          <a:solidFill>
+            <a:srgbClr val="F2F4F7"/>
+          </a:solidFill>
+          <a:ln>
+            <a:noFill/>
+          </a:ln>
+          <a:effectLst/>
+        </p:spPr>
+        <p:style>
+          <a:lnRef idx="1">
+            <a:schemeClr val="accent1"/>
+          </a:lnRef>
+          <a:fillRef idx="3">
+            <a:schemeClr val="accent1"/>
+          </a:fillRef>
+          <a:effectRef idx="2">
+            <a:schemeClr val="accent1"/>
+          </a:effectRef>
+          <a:fontRef idx="minor">
+            <a:schemeClr val="lt1"/>
+          </a:fontRef>
+        </p:style>
+        <p:txBody>
+          <a:bodyPr rtlCol="0" anchor="ctr"/>
+          <a:lstStyle/>
+          <a:p>
+            <a:pPr algn="ctr"/>
+          </a:p>
+        </p:txBody>
+      </p:sp>
+      <p:sp>
+        <p:nvSpPr>
+          <p:cNvPr id="12" name="Rectangle 11"/>
+          <p:cNvSpPr/>
+          <p:nvPr/>
+        </p:nvSpPr>
+        <p:spPr>
+          <a:xfrm>
+            <a:off x="0" y="5779008"/>
+            <a:ext cx="128016" cy="566928"/>
+          </a:xfrm>
+          <a:prstGeom prst="rect">
+            <a:avLst/>
+          </a:prstGeom>
+          <a:solidFill>
+            <a:srgbClr val="C08A2B"/>
+          </a:solidFill>
+          <a:ln>
+            <a:noFill/>
+          </a:ln>
+          <a:effectLst/>
+        </p:spPr>
+        <p:style>
+          <a:lnRef idx="1">
+            <a:schemeClr val="accent1"/>
+          </a:lnRef>
+          <a:fillRef idx="3">
+            <a:schemeClr val="accent1"/>
+          </a:fillRef>
+          <a:effectRef idx="2">
+            <a:schemeClr val="accent1"/>
+          </a:effectRef>
+          <a:fontRef idx="minor">
+            <a:schemeClr val="lt1"/>
+          </a:fontRef>
+        </p:style>
+        <p:txBody>
+          <a:bodyPr rtlCol="0" anchor="ctr"/>
+          <a:lstStyle/>
+          <a:p>
+            <a:pPr algn="ctr"/>
+          </a:p>
+        </p:txBody>
+      </p:sp>
+      <p:sp>
+        <p:nvSpPr>
+          <p:cNvPr id="13" name="TextBox 12"/>
+          <p:cNvSpPr txBox="1"/>
+          <p:nvPr/>
+        </p:nvSpPr>
+        <p:spPr>
+          <a:xfrm>
+            <a:off x="566928" y="5916168"/>
+            <a:ext cx="11064240" cy="457200"/>
+          </a:xfrm>
+          <a:prstGeom prst="rect">
+            <a:avLst/>
+          </a:prstGeom>
+          <a:noFill/>
+        </p:spPr>
+        <p:txBody>
+          <a:bodyPr wrap="square">
+            <a:spAutoFit/>
+          </a:bodyPr>
+          <a:lstStyle/>
+          <a:p>
+            <a:pPr algn="l">
+              <a:lnSpc>
+                <a:spcPct val="100000"/>
+              </a:lnSpc>
+            </a:pPr>
+            <a:r>
+              <a:rPr sz="1500" b="0" i="1">
+                <a:solidFill>
+                  <a:srgbClr val="0F2A43"/>
+                </a:solidFill>
+                <a:latin typeface="Times New Roman"/>
+              </a:rPr>
+              <a:t>Better justice across borders is mostly an engineering problem, not a gap in principle.</a:t>
+            </a:r>
+          </a:p>
+        </p:txBody>
+      </p:sp>
+      <p:sp>
+        <p:nvSpPr>
+          <p:cNvPr id="14" name="Rectangle 13"/>
+          <p:cNvSpPr/>
+          <p:nvPr/>
+        </p:nvSpPr>
+        <p:spPr>
+          <a:xfrm>
+            <a:off x="548640" y="6583680"/>
+            <a:ext cx="411480" cy="32004"/>
+          </a:xfrm>
+          <a:prstGeom prst="rect">
+            <a:avLst/>
+          </a:prstGeom>
+          <a:solidFill>
+            <a:srgbClr val="C08A2B"/>
+          </a:solidFill>
+          <a:ln>
+            <a:noFill/>
+          </a:ln>
+          <a:effectLst/>
+        </p:spPr>
+        <p:style>
+          <a:lnRef idx="1">
+            <a:schemeClr val="accent1"/>
+          </a:lnRef>
+          <a:fillRef idx="3">
+            <a:schemeClr val="accent1"/>
+          </a:fillRef>
+          <a:effectRef idx="2">
+            <a:schemeClr val="accent1"/>
+          </a:effectRef>
+          <a:fontRef idx="minor">
+            <a:schemeClr val="lt1"/>
+          </a:fontRef>
+        </p:style>
+        <p:txBody>
+          <a:bodyPr rtlCol="0" anchor="ctr"/>
+          <a:lstStyle/>
+          <a:p>
+            <a:pPr algn="ctr"/>
+          </a:p>
+        </p:txBody>
+      </p:sp>
+      <p:sp>
+        <p:nvSpPr>
+          <p:cNvPr id="15" name="TextBox 14"/>
+          <p:cNvSpPr txBox="1"/>
+          <p:nvPr/>
+        </p:nvSpPr>
+        <p:spPr>
+          <a:xfrm>
+            <a:off x="10424160" y="6419088"/>
+            <a:ext cx="1216152" cy="274320"/>
+          </a:xfrm>
+          <a:prstGeom prst="rect">
+            <a:avLst/>
+          </a:prstGeom>
+          <a:noFill/>
+        </p:spPr>
+        <p:txBody>
+          <a:bodyPr wrap="square">
+            <a:spAutoFit/>
+          </a:bodyPr>
+          <a:lstStyle/>
+          <a:p>
+            <a:pPr algn="r">
+              <a:lnSpc>
+                <a:spcPct val="100000"/>
+              </a:lnSpc>
+            </a:pPr>
+            <a:r>
+              <a:rPr sz="1100" b="0" i="0">
+                <a:solidFill>
+                  <a:srgbClr val="6B7682"/>
+                </a:solidFill>
+                <a:latin typeface="Times New Roman"/>
+              </a:rPr>
+              <a:t>19 / 20</a:t>
             </a:r>
           </a:p>
         </p:txBody>
@@ -7051,8 +8954,8 @@
         </p:nvSpPr>
         <p:spPr>
           <a:xfrm>
-            <a:off x="548640" y="1463040"/>
-            <a:ext cx="11064240" cy="1143000"/>
+            <a:off x="548640" y="1508760"/>
+            <a:ext cx="11091672" cy="1097280"/>
           </a:xfrm>
           <a:prstGeom prst="rect">
             <a:avLst/>
@@ -7089,14 +8992,58 @@
       </p:sp>
       <p:sp>
         <p:nvSpPr>
-          <p:cNvPr id="7" name="TextBox 6"/>
+          <p:cNvPr id="7" name="Rectangle 6"/>
+          <p:cNvSpPr/>
+          <p:nvPr/>
+        </p:nvSpPr>
+        <p:spPr>
+          <a:xfrm>
+            <a:off x="548640" y="1508760"/>
+            <a:ext cx="128016" cy="1097280"/>
+          </a:xfrm>
+          <a:prstGeom prst="rect">
+            <a:avLst/>
+          </a:prstGeom>
+          <a:solidFill>
+            <a:srgbClr val="C08A2B"/>
+          </a:solidFill>
+          <a:ln>
+            <a:noFill/>
+          </a:ln>
+          <a:effectLst/>
+        </p:spPr>
+        <p:style>
+          <a:lnRef idx="1">
+            <a:schemeClr val="accent1"/>
+          </a:lnRef>
+          <a:fillRef idx="3">
+            <a:schemeClr val="accent1"/>
+          </a:fillRef>
+          <a:effectRef idx="2">
+            <a:schemeClr val="accent1"/>
+          </a:effectRef>
+          <a:fontRef idx="minor">
+            <a:schemeClr val="lt1"/>
+          </a:fontRef>
+        </p:style>
+        <p:txBody>
+          <a:bodyPr rtlCol="0" anchor="ctr"/>
+          <a:lstStyle/>
+          <a:p>
+            <a:pPr algn="ctr"/>
+          </a:p>
+        </p:txBody>
+      </p:sp>
+      <p:sp>
+        <p:nvSpPr>
+          <p:cNvPr id="8" name="TextBox 7"/>
           <p:cNvSpPr txBox="1"/>
           <p:nvPr/>
         </p:nvSpPr>
         <p:spPr>
           <a:xfrm>
-            <a:off x="822960" y="1664208"/>
-            <a:ext cx="10515600" cy="914400"/>
+            <a:off x="777240" y="1691640"/>
+            <a:ext cx="10607040" cy="914400"/>
           </a:xfrm>
           <a:prstGeom prst="rect">
             <a:avLst/>
@@ -7128,14 +9075,14 @@
       </p:sp>
       <p:sp>
         <p:nvSpPr>
-          <p:cNvPr id="8" name="TextBox 7"/>
+          <p:cNvPr id="9" name="TextBox 8"/>
           <p:cNvSpPr txBox="1"/>
           <p:nvPr/>
         </p:nvSpPr>
         <p:spPr>
           <a:xfrm>
-            <a:off x="640080" y="2971800"/>
-            <a:ext cx="10972800" cy="4572000"/>
+            <a:off x="731520" y="3063240"/>
+            <a:ext cx="10789920" cy="4572000"/>
           </a:xfrm>
           <a:prstGeom prst="rect">
             <a:avLst/>
@@ -7153,7 +9100,7 @@
                 <a:spcPct val="105000"/>
               </a:lnSpc>
               <a:spcAft>
-                <a:spcPts val="1500"/>
+                <a:spcPts val="2000"/>
               </a:spcAft>
             </a:pPr>
             <a:r>
@@ -7172,7 +9119,7 @@
                 <a:spcPct val="105000"/>
               </a:lnSpc>
               <a:spcAft>
-                <a:spcPts val="1500"/>
+                <a:spcPts val="2000"/>
               </a:spcAft>
             </a:pPr>
             <a:r>
@@ -7191,7 +9138,7 @@
                 <a:spcPct val="105000"/>
               </a:lnSpc>
               <a:spcAft>
-                <a:spcPts val="1500"/>
+                <a:spcPts val="2000"/>
               </a:spcAft>
             </a:pPr>
             <a:r>
@@ -7210,7 +9157,7 @@
                 <a:spcPct val="105000"/>
               </a:lnSpc>
               <a:spcAft>
-                <a:spcPts val="1500"/>
+                <a:spcPts val="2000"/>
               </a:spcAft>
             </a:pPr>
             <a:r>
@@ -7227,14 +9174,102 @@
       </p:sp>
       <p:sp>
         <p:nvSpPr>
-          <p:cNvPr id="9" name="TextBox 8"/>
+          <p:cNvPr id="10" name="Rectangle 9"/>
+          <p:cNvSpPr/>
+          <p:nvPr/>
+        </p:nvSpPr>
+        <p:spPr>
+          <a:xfrm>
+            <a:off x="0" y="5779008"/>
+            <a:ext cx="12191695" cy="566928"/>
+          </a:xfrm>
+          <a:prstGeom prst="rect">
+            <a:avLst/>
+          </a:prstGeom>
+          <a:solidFill>
+            <a:srgbClr val="F2F4F7"/>
+          </a:solidFill>
+          <a:ln>
+            <a:noFill/>
+          </a:ln>
+          <a:effectLst/>
+        </p:spPr>
+        <p:style>
+          <a:lnRef idx="1">
+            <a:schemeClr val="accent1"/>
+          </a:lnRef>
+          <a:fillRef idx="3">
+            <a:schemeClr val="accent1"/>
+          </a:fillRef>
+          <a:effectRef idx="2">
+            <a:schemeClr val="accent1"/>
+          </a:effectRef>
+          <a:fontRef idx="minor">
+            <a:schemeClr val="lt1"/>
+          </a:fontRef>
+        </p:style>
+        <p:txBody>
+          <a:bodyPr rtlCol="0" anchor="ctr"/>
+          <a:lstStyle/>
+          <a:p>
+            <a:pPr algn="ctr"/>
+          </a:p>
+        </p:txBody>
+      </p:sp>
+      <p:sp>
+        <p:nvSpPr>
+          <p:cNvPr id="11" name="Rectangle 10"/>
+          <p:cNvSpPr/>
+          <p:nvPr/>
+        </p:nvSpPr>
+        <p:spPr>
+          <a:xfrm>
+            <a:off x="0" y="5779008"/>
+            <a:ext cx="128016" cy="566928"/>
+          </a:xfrm>
+          <a:prstGeom prst="rect">
+            <a:avLst/>
+          </a:prstGeom>
+          <a:solidFill>
+            <a:srgbClr val="C08A2B"/>
+          </a:solidFill>
+          <a:ln>
+            <a:noFill/>
+          </a:ln>
+          <a:effectLst/>
+        </p:spPr>
+        <p:style>
+          <a:lnRef idx="1">
+            <a:schemeClr val="accent1"/>
+          </a:lnRef>
+          <a:fillRef idx="3">
+            <a:schemeClr val="accent1"/>
+          </a:fillRef>
+          <a:effectRef idx="2">
+            <a:schemeClr val="accent1"/>
+          </a:effectRef>
+          <a:fontRef idx="minor">
+            <a:schemeClr val="lt1"/>
+          </a:fontRef>
+        </p:style>
+        <p:txBody>
+          <a:bodyPr rtlCol="0" anchor="ctr"/>
+          <a:lstStyle/>
+          <a:p>
+            <a:pPr algn="ctr"/>
+          </a:p>
+        </p:txBody>
+      </p:sp>
+      <p:sp>
+        <p:nvSpPr>
+          <p:cNvPr id="12" name="TextBox 11"/>
           <p:cNvSpPr txBox="1"/>
           <p:nvPr/>
         </p:nvSpPr>
         <p:spPr>
           <a:xfrm>
-            <a:off x="640080" y="6172200"/>
-            <a:ext cx="10972800" cy="731520"/>
+            <a:off x="566928" y="5916168"/>
+            <a:ext cx="11064240" cy="457200"/>
           </a:xfrm>
           <a:prstGeom prst="rect">
             <a:avLst/>
@@ -7253,13 +9288,96 @@
               </a:lnSpc>
             </a:pPr>
             <a:r>
-              <a:rPr sz="1300" b="0" i="1">
+              <a:rPr sz="1500" b="0" i="1">
+                <a:solidFill>
+                  <a:srgbClr val="0F2A43"/>
+                </a:solidFill>
+                <a:latin typeface="Times New Roman"/>
+              </a:rPr>
+              <a:t>This presentation centres victims and legal systems — not sensational detail.</a:t>
+            </a:r>
+          </a:p>
+        </p:txBody>
+      </p:sp>
+      <p:sp>
+        <p:nvSpPr>
+          <p:cNvPr id="13" name="Rectangle 12"/>
+          <p:cNvSpPr/>
+          <p:nvPr/>
+        </p:nvSpPr>
+        <p:spPr>
+          <a:xfrm>
+            <a:off x="548640" y="6583680"/>
+            <a:ext cx="411480" cy="32004"/>
+          </a:xfrm>
+          <a:prstGeom prst="rect">
+            <a:avLst/>
+          </a:prstGeom>
+          <a:solidFill>
+            <a:srgbClr val="C08A2B"/>
+          </a:solidFill>
+          <a:ln>
+            <a:noFill/>
+          </a:ln>
+          <a:effectLst/>
+        </p:spPr>
+        <p:style>
+          <a:lnRef idx="1">
+            <a:schemeClr val="accent1"/>
+          </a:lnRef>
+          <a:fillRef idx="3">
+            <a:schemeClr val="accent1"/>
+          </a:fillRef>
+          <a:effectRef idx="2">
+            <a:schemeClr val="accent1"/>
+          </a:effectRef>
+          <a:fontRef idx="minor">
+            <a:schemeClr val="lt1"/>
+          </a:fontRef>
+        </p:style>
+        <p:txBody>
+          <a:bodyPr rtlCol="0" anchor="ctr"/>
+          <a:lstStyle/>
+          <a:p>
+            <a:pPr algn="ctr"/>
+          </a:p>
+        </p:txBody>
+      </p:sp>
+      <p:sp>
+        <p:nvSpPr>
+          <p:cNvPr id="14" name="TextBox 13"/>
+          <p:cNvSpPr txBox="1"/>
+          <p:nvPr/>
+        </p:nvSpPr>
+        <p:spPr>
+          <a:xfrm>
+            <a:off x="10424160" y="6419088"/>
+            <a:ext cx="1216152" cy="274320"/>
+          </a:xfrm>
+          <a:prstGeom prst="rect">
+            <a:avLst/>
+          </a:prstGeom>
+          <a:noFill/>
+        </p:spPr>
+        <p:txBody>
+          <a:bodyPr wrap="square">
+            <a:spAutoFit/>
+          </a:bodyPr>
+          <a:lstStyle/>
+          <a:p>
+            <a:pPr algn="r">
+              <a:lnSpc>
+                <a:spcPct val="100000"/>
+              </a:lnSpc>
+            </a:pPr>
+            <a:r>
+              <a:rPr sz="1100" b="0" i="0">
                 <a:solidFill>
                   <a:srgbClr val="6B7682"/>
                 </a:solidFill>
                 <a:latin typeface="Times New Roman"/>
               </a:rPr>
-              <a:t>Note: This presentation centres victims and legal systems — not sensational detail.</a:t>
+              <a:t>02 / 20</a:t>
             </a:r>
           </a:p>
         </p:txBody>
@@ -7464,8 +9582,8 @@
         </p:nvSpPr>
         <p:spPr>
           <a:xfrm>
-            <a:off x="640080" y="1417320"/>
-            <a:ext cx="731520" cy="868680"/>
+            <a:off x="640080" y="1463040"/>
+            <a:ext cx="731520" cy="822960"/>
           </a:xfrm>
           <a:prstGeom prst="rect">
             <a:avLst/>
@@ -7508,7 +9626,7 @@
         </p:nvSpPr>
         <p:spPr>
           <a:xfrm>
-            <a:off x="640080" y="1600200"/>
+            <a:off x="640080" y="1627632"/>
             <a:ext cx="731520" cy="731520"/>
           </a:xfrm>
           <a:prstGeom prst="rect">
@@ -7547,7 +9665,7 @@
         </p:nvSpPr>
         <p:spPr>
           <a:xfrm>
-            <a:off x="1508760" y="1453896"/>
+            <a:off x="1508760" y="1517904"/>
             <a:ext cx="9966960" cy="731520"/>
           </a:xfrm>
           <a:prstGeom prst="rect">
@@ -7586,7 +9704,7 @@
         </p:nvSpPr>
         <p:spPr>
           <a:xfrm>
-            <a:off x="1508760" y="1837944"/>
+            <a:off x="1508760" y="1883664"/>
             <a:ext cx="9966960" cy="731520"/>
           </a:xfrm>
           <a:prstGeom prst="rect">
@@ -7625,8 +9743,8 @@
         </p:nvSpPr>
         <p:spPr>
           <a:xfrm>
-            <a:off x="640080" y="2404872"/>
-            <a:ext cx="731520" cy="868680"/>
+            <a:off x="640080" y="2395728"/>
+            <a:ext cx="731520" cy="822960"/>
           </a:xfrm>
           <a:prstGeom prst="rect">
             <a:avLst/>
@@ -7669,7 +9787,7 @@
         </p:nvSpPr>
         <p:spPr>
           <a:xfrm>
-            <a:off x="640080" y="2587752"/>
+            <a:off x="640080" y="2560320"/>
             <a:ext cx="731520" cy="731520"/>
           </a:xfrm>
           <a:prstGeom prst="rect">
@@ -7708,7 +9826,7 @@
         </p:nvSpPr>
         <p:spPr>
           <a:xfrm>
-            <a:off x="1508760" y="2441448"/>
+            <a:off x="1508760" y="2450592"/>
             <a:ext cx="9966960" cy="731520"/>
           </a:xfrm>
           <a:prstGeom prst="rect">
@@ -7747,7 +9865,7 @@
         </p:nvSpPr>
         <p:spPr>
           <a:xfrm>
-            <a:off x="1508760" y="2825496"/>
+            <a:off x="1508760" y="2816352"/>
             <a:ext cx="9966960" cy="731520"/>
           </a:xfrm>
           <a:prstGeom prst="rect">
@@ -7786,8 +9904,8 @@
         </p:nvSpPr>
         <p:spPr>
           <a:xfrm>
-            <a:off x="640080" y="3392424"/>
-            <a:ext cx="731520" cy="868680"/>
+            <a:off x="640080" y="3328416"/>
+            <a:ext cx="731520" cy="822960"/>
           </a:xfrm>
           <a:prstGeom prst="rect">
             <a:avLst/>
@@ -7830,7 +9948,7 @@
         </p:nvSpPr>
         <p:spPr>
           <a:xfrm>
-            <a:off x="640080" y="3575304"/>
+            <a:off x="640080" y="3493008"/>
             <a:ext cx="731520" cy="731520"/>
           </a:xfrm>
           <a:prstGeom prst="rect">
@@ -7869,7 +9987,7 @@
         </p:nvSpPr>
         <p:spPr>
           <a:xfrm>
-            <a:off x="1508760" y="3429000"/>
+            <a:off x="1508760" y="3383280"/>
             <a:ext cx="9966960" cy="731520"/>
           </a:xfrm>
           <a:prstGeom prst="rect">
@@ -7908,7 +10026,7 @@
         </p:nvSpPr>
         <p:spPr>
           <a:xfrm>
-            <a:off x="1508760" y="3813048"/>
+            <a:off x="1508760" y="3749040"/>
             <a:ext cx="9966960" cy="731520"/>
           </a:xfrm>
           <a:prstGeom prst="rect">
@@ -7947,8 +10065,8 @@
         </p:nvSpPr>
         <p:spPr>
           <a:xfrm>
-            <a:off x="640080" y="4379976"/>
-            <a:ext cx="731520" cy="868680"/>
+            <a:off x="640080" y="4261104"/>
+            <a:ext cx="731520" cy="822960"/>
           </a:xfrm>
           <a:prstGeom prst="rect">
             <a:avLst/>
@@ -7991,7 +10109,7 @@
         </p:nvSpPr>
         <p:spPr>
           <a:xfrm>
-            <a:off x="640080" y="4562856"/>
+            <a:off x="640080" y="4425696"/>
             <a:ext cx="731520" cy="731520"/>
           </a:xfrm>
           <a:prstGeom prst="rect">
@@ -8030,7 +10148,7 @@
         </p:nvSpPr>
         <p:spPr>
           <a:xfrm>
-            <a:off x="1508760" y="4416552"/>
+            <a:off x="1508760" y="4315968"/>
             <a:ext cx="9966960" cy="731520"/>
           </a:xfrm>
           <a:prstGeom prst="rect">
@@ -8069,7 +10187,7 @@
         </p:nvSpPr>
         <p:spPr>
           <a:xfrm>
-            <a:off x="1508760" y="4800600"/>
+            <a:off x="1508760" y="4681728"/>
             <a:ext cx="9966960" cy="731520"/>
           </a:xfrm>
           <a:prstGeom prst="rect">
@@ -8108,8 +10226,8 @@
         </p:nvSpPr>
         <p:spPr>
           <a:xfrm>
-            <a:off x="548640" y="5532120"/>
-            <a:ext cx="11064240" cy="1051560"/>
+            <a:off x="548640" y="5440680"/>
+            <a:ext cx="11091672" cy="868680"/>
           </a:xfrm>
           <a:prstGeom prst="rect">
             <a:avLst/>
@@ -8146,13 +10264,57 @@
       </p:sp>
       <p:sp>
         <p:nvSpPr>
-          <p:cNvPr id="23" name="TextBox 22"/>
+          <p:cNvPr id="23" name="Rectangle 22"/>
+          <p:cNvSpPr/>
+          <p:nvPr/>
+        </p:nvSpPr>
+        <p:spPr>
+          <a:xfrm>
+            <a:off x="548640" y="5440680"/>
+            <a:ext cx="128016" cy="868680"/>
+          </a:xfrm>
+          <a:prstGeom prst="rect">
+            <a:avLst/>
+          </a:prstGeom>
+          <a:solidFill>
+            <a:srgbClr val="C08A2B"/>
+          </a:solidFill>
+          <a:ln>
+            <a:noFill/>
+          </a:ln>
+          <a:effectLst/>
+        </p:spPr>
+        <p:style>
+          <a:lnRef idx="1">
+            <a:schemeClr val="accent1"/>
+          </a:lnRef>
+          <a:fillRef idx="3">
+            <a:schemeClr val="accent1"/>
+          </a:fillRef>
+          <a:effectRef idx="2">
+            <a:schemeClr val="accent1"/>
+          </a:effectRef>
+          <a:fontRef idx="minor">
+            <a:schemeClr val="lt1"/>
+          </a:fontRef>
+        </p:style>
+        <p:txBody>
+          <a:bodyPr rtlCol="0" anchor="ctr"/>
+          <a:lstStyle/>
+          <a:p>
+            <a:pPr algn="ctr"/>
+          </a:p>
+        </p:txBody>
+      </p:sp>
+      <p:sp>
+        <p:nvSpPr>
+          <p:cNvPr id="24" name="TextBox 23"/>
           <p:cNvSpPr txBox="1"/>
           <p:nvPr/>
         </p:nvSpPr>
         <p:spPr>
           <a:xfrm>
-            <a:off x="777240" y="5650992"/>
+            <a:off x="777240" y="5559552"/>
             <a:ext cx="10607040" cy="731520"/>
           </a:xfrm>
           <a:prstGeom prst="rect">
@@ -8185,14 +10347,14 @@
       </p:sp>
       <p:sp>
         <p:nvSpPr>
-          <p:cNvPr id="24" name="TextBox 23"/>
+          <p:cNvPr id="25" name="TextBox 24"/>
           <p:cNvSpPr txBox="1"/>
           <p:nvPr/>
         </p:nvSpPr>
         <p:spPr>
           <a:xfrm>
-            <a:off x="777240" y="5943600"/>
-            <a:ext cx="10607040" cy="640080"/>
+            <a:off x="777240" y="5852160"/>
+            <a:ext cx="10698480" cy="502920"/>
           </a:xfrm>
           <a:prstGeom prst="rect">
             <a:avLst/>
@@ -8218,6 +10380,89 @@
                 <a:latin typeface="Times New Roman"/>
               </a:rPr>
               <a:t>Palermo Protocol (2000) · UN Convention against Transnational Organized Crime · US DOJ filings (US v. Epstein 2019; US v. Maxwell 2021) · US State Dept. Trafficking in Persons Reports · contemporary reporting on 2025 disclosures.</a:t>
+            </a:r>
+          </a:p>
+        </p:txBody>
+      </p:sp>
+      <p:sp>
+        <p:nvSpPr>
+          <p:cNvPr id="26" name="Rectangle 25"/>
+          <p:cNvSpPr/>
+          <p:nvPr/>
+        </p:nvSpPr>
+        <p:spPr>
+          <a:xfrm>
+            <a:off x="548640" y="6583680"/>
+            <a:ext cx="411480" cy="32004"/>
+          </a:xfrm>
+          <a:prstGeom prst="rect">
+            <a:avLst/>
+          </a:prstGeom>
+          <a:solidFill>
+            <a:srgbClr val="C08A2B"/>
+          </a:solidFill>
+          <a:ln>
+            <a:noFill/>
+          </a:ln>
+          <a:effectLst/>
+        </p:spPr>
+        <p:style>
+          <a:lnRef idx="1">
+            <a:schemeClr val="accent1"/>
+          </a:lnRef>
+          <a:fillRef idx="3">
+            <a:schemeClr val="accent1"/>
+          </a:fillRef>
+          <a:effectRef idx="2">
+            <a:schemeClr val="accent1"/>
+          </a:effectRef>
+          <a:fontRef idx="minor">
+            <a:schemeClr val="lt1"/>
+          </a:fontRef>
+        </p:style>
+        <p:txBody>
+          <a:bodyPr rtlCol="0" anchor="ctr"/>
+          <a:lstStyle/>
+          <a:p>
+            <a:pPr algn="ctr"/>
+          </a:p>
+        </p:txBody>
+      </p:sp>
+      <p:sp>
+        <p:nvSpPr>
+          <p:cNvPr id="27" name="TextBox 26"/>
+          <p:cNvSpPr txBox="1"/>
+          <p:nvPr/>
+        </p:nvSpPr>
+        <p:spPr>
+          <a:xfrm>
+            <a:off x="10424160" y="6419088"/>
+            <a:ext cx="1216152" cy="274320"/>
+          </a:xfrm>
+          <a:prstGeom prst="rect">
+            <a:avLst/>
+          </a:prstGeom>
+          <a:noFill/>
+        </p:spPr>
+        <p:txBody>
+          <a:bodyPr wrap="square">
+            <a:spAutoFit/>
+          </a:bodyPr>
+          <a:lstStyle/>
+          <a:p>
+            <a:pPr algn="r">
+              <a:lnSpc>
+                <a:spcPct val="100000"/>
+              </a:lnSpc>
+            </a:pPr>
+            <a:r>
+              <a:rPr sz="1100" b="0" i="0">
+                <a:solidFill>
+                  <a:srgbClr val="6B7682"/>
+                </a:solidFill>
+                <a:latin typeface="Times New Roman"/>
+              </a:rPr>
+              <a:t>20 / 20</a:t>
             </a:r>
           </a:p>
         </p:txBody>
@@ -8250,14 +10495,92 @@
       <p:grpSpPr/>
       <p:sp>
         <p:nvSpPr>
-          <p:cNvPr id="2" name="Rectangle 1"/>
+          <p:cNvPr id="2" name="TextBox 1"/>
+          <p:cNvSpPr txBox="1"/>
+          <p:nvPr/>
+        </p:nvSpPr>
+        <p:spPr>
+          <a:xfrm>
+            <a:off x="7040880" y="640080"/>
+            <a:ext cx="4937760" cy="5486400"/>
+          </a:xfrm>
+          <a:prstGeom prst="rect">
+            <a:avLst/>
+          </a:prstGeom>
+          <a:noFill/>
+        </p:spPr>
+        <p:txBody>
+          <a:bodyPr wrap="square">
+            <a:spAutoFit/>
+          </a:bodyPr>
+          <a:lstStyle/>
+          <a:p>
+            <a:pPr algn="ctr">
+              <a:lnSpc>
+                <a:spcPct val="100000"/>
+              </a:lnSpc>
+            </a:pPr>
+            <a:r>
+              <a:rPr sz="21000" b="1" i="0">
+                <a:solidFill>
+                  <a:srgbClr val="1C3A56"/>
+                </a:solidFill>
+                <a:latin typeface="Times New Roman"/>
+              </a:rPr>
+              <a:t>01</a:t>
+            </a:r>
+          </a:p>
+        </p:txBody>
+      </p:sp>
+      <p:sp>
+        <p:nvSpPr>
+          <p:cNvPr id="3" name="TextBox 2"/>
+          <p:cNvSpPr txBox="1"/>
+          <p:nvPr/>
+        </p:nvSpPr>
+        <p:spPr>
+          <a:xfrm>
+            <a:off x="822960" y="2331720"/>
+            <a:ext cx="7315200" cy="731520"/>
+          </a:xfrm>
+          <a:prstGeom prst="rect">
+            <a:avLst/>
+          </a:prstGeom>
+          <a:noFill/>
+        </p:spPr>
+        <p:txBody>
+          <a:bodyPr wrap="square">
+            <a:spAutoFit/>
+          </a:bodyPr>
+          <a:lstStyle/>
+          <a:p>
+            <a:pPr algn="l">
+              <a:lnSpc>
+                <a:spcPct val="100000"/>
+              </a:lnSpc>
+            </a:pPr>
+            <a:r>
+              <a:rPr sz="1300" b="1" i="0">
+                <a:solidFill>
+                  <a:srgbClr val="C08A2B"/>
+                </a:solidFill>
+                <a:latin typeface="Times New Roman"/>
+              </a:rPr>
+              <a:t>SECTION 1 OF 4</a:t>
+            </a:r>
+          </a:p>
+        </p:txBody>
+      </p:sp>
+      <p:sp>
+        <p:nvSpPr>
+          <p:cNvPr id="4" name="Rectangle 3"/>
           <p:cNvSpPr/>
           <p:nvPr/>
         </p:nvSpPr>
         <p:spPr>
           <a:xfrm>
-            <a:off x="822960" y="3246120"/>
-            <a:ext cx="2926080" cy="54864"/>
+            <a:off x="822960" y="2697480"/>
+            <a:ext cx="2743200" cy="54864"/>
           </a:xfrm>
           <a:prstGeom prst="rect">
             <a:avLst/>
@@ -8294,14 +10617,14 @@
       </p:sp>
       <p:sp>
         <p:nvSpPr>
-          <p:cNvPr id="3" name="TextBox 2"/>
+          <p:cNvPr id="5" name="TextBox 4"/>
           <p:cNvSpPr txBox="1"/>
           <p:nvPr/>
         </p:nvSpPr>
         <p:spPr>
           <a:xfrm>
-            <a:off x="822960" y="2148840"/>
-            <a:ext cx="10515600" cy="731520"/>
+            <a:off x="822960" y="2907792"/>
+            <a:ext cx="7498079" cy="1463040"/>
           </a:xfrm>
           <a:prstGeom prst="rect">
             <a:avLst/>
@@ -8320,27 +10643,43 @@
               </a:lnSpc>
             </a:pPr>
             <a:r>
-              <a:rPr sz="2000" b="1" i="0">
-                <a:solidFill>
-                  <a:srgbClr val="C08A2B"/>
-                </a:solidFill>
-                <a:latin typeface="Times New Roman"/>
-              </a:rPr>
-              <a:t>PART 1</a:t>
-            </a:r>
-          </a:p>
-        </p:txBody>
-      </p:sp>
-      <p:sp>
-        <p:nvSpPr>
-          <p:cNvPr id="4" name="TextBox 3"/>
+              <a:rPr sz="3300" b="1" i="0">
+                <a:solidFill>
+                  <a:srgbClr val="FFFFFF"/>
+                </a:solidFill>
+                <a:latin typeface="Times New Roman"/>
+              </a:rPr>
+              <a:t>Framing &amp; the</a:t>
+            </a:r>
+          </a:p>
+          <a:p>
+            <a:pPr algn="l">
+              <a:lnSpc>
+                <a:spcPct val="100000"/>
+              </a:lnSpc>
+            </a:pPr>
+            <a:r>
+              <a:rPr sz="3300" b="1" i="0">
+                <a:solidFill>
+                  <a:srgbClr val="FFFFFF"/>
+                </a:solidFill>
+                <a:latin typeface="Times New Roman"/>
+              </a:rPr>
+              <a:t>International Scope</a:t>
+            </a:r>
+          </a:p>
+        </p:txBody>
+      </p:sp>
+      <p:sp>
+        <p:nvSpPr>
+          <p:cNvPr id="6" name="TextBox 5"/>
           <p:cNvSpPr txBox="1"/>
           <p:nvPr/>
         </p:nvSpPr>
         <p:spPr>
           <a:xfrm>
-            <a:off x="822960" y="2514600"/>
-            <a:ext cx="10515600" cy="731520"/>
+            <a:off x="822960" y="3977639"/>
+            <a:ext cx="7132320" cy="1097280"/>
           </a:xfrm>
           <a:prstGeom prst="rect">
             <a:avLst/>
@@ -8355,31 +10694,75 @@
           <a:p>
             <a:pPr algn="l">
               <a:lnSpc>
-                <a:spcPct val="100000"/>
-              </a:lnSpc>
-            </a:pPr>
-            <a:r>
-              <a:rPr sz="3400" b="1" i="0">
-                <a:solidFill>
-                  <a:srgbClr val="FFFFFF"/>
-                </a:solidFill>
-                <a:latin typeface="Times New Roman"/>
-              </a:rPr>
-              <a:t>Framing &amp; the International Scope</a:t>
-            </a:r>
-          </a:p>
-        </p:txBody>
-      </p:sp>
-      <p:sp>
-        <p:nvSpPr>
-          <p:cNvPr id="5" name="TextBox 4"/>
+                <a:spcPct val="115000"/>
+              </a:lnSpc>
+            </a:pPr>
+            <a:r>
+              <a:rPr sz="1800" b="0" i="1">
+                <a:solidFill>
+                  <a:srgbClr val="F2F4F7"/>
+                </a:solidFill>
+                <a:latin typeface="Times New Roman"/>
+              </a:rPr>
+              <a:t>Who Epstein was — and why this case crosses borders</a:t>
+            </a:r>
+          </a:p>
+        </p:txBody>
+      </p:sp>
+      <p:sp>
+        <p:nvSpPr>
+          <p:cNvPr id="7" name="Rectangle 6"/>
+          <p:cNvSpPr/>
+          <p:nvPr/>
+        </p:nvSpPr>
+        <p:spPr>
+          <a:xfrm>
+            <a:off x="548640" y="6583680"/>
+            <a:ext cx="411480" cy="32004"/>
+          </a:xfrm>
+          <a:prstGeom prst="rect">
+            <a:avLst/>
+          </a:prstGeom>
+          <a:solidFill>
+            <a:srgbClr val="C08A2B"/>
+          </a:solidFill>
+          <a:ln>
+            <a:noFill/>
+          </a:ln>
+          <a:effectLst/>
+        </p:spPr>
+        <p:style>
+          <a:lnRef idx="1">
+            <a:schemeClr val="accent1"/>
+          </a:lnRef>
+          <a:fillRef idx="3">
+            <a:schemeClr val="accent1"/>
+          </a:fillRef>
+          <a:effectRef idx="2">
+            <a:schemeClr val="accent1"/>
+          </a:effectRef>
+          <a:fontRef idx="minor">
+            <a:schemeClr val="lt1"/>
+          </a:fontRef>
+        </p:style>
+        <p:txBody>
+          <a:bodyPr rtlCol="0" anchor="ctr"/>
+          <a:lstStyle/>
+          <a:p>
+            <a:pPr algn="ctr"/>
+          </a:p>
+        </p:txBody>
+      </p:sp>
+      <p:sp>
+        <p:nvSpPr>
+          <p:cNvPr id="8" name="TextBox 7"/>
           <p:cNvSpPr txBox="1"/>
           <p:nvPr/>
         </p:nvSpPr>
         <p:spPr>
           <a:xfrm>
-            <a:off x="822960" y="3474720"/>
-            <a:ext cx="9601200" cy="731520"/>
+            <a:off x="10424160" y="6419088"/>
+            <a:ext cx="1216152" cy="274320"/>
           </a:xfrm>
           <a:prstGeom prst="rect">
             <a:avLst/>
@@ -8392,19 +10775,19 @@
           </a:bodyPr>
           <a:lstStyle/>
           <a:p>
-            <a:pPr algn="l">
-              <a:lnSpc>
-                <a:spcPct val="110000"/>
-              </a:lnSpc>
-            </a:pPr>
-            <a:r>
-              <a:rPr sz="1800" b="0" i="1">
-                <a:solidFill>
-                  <a:srgbClr val="F2F4F7"/>
-                </a:solidFill>
-                <a:latin typeface="Times New Roman"/>
-              </a:rPr>
-              <a:t>Who Epstein was — and why this case crosses borders</a:t>
+            <a:pPr algn="r">
+              <a:lnSpc>
+                <a:spcPct val="100000"/>
+              </a:lnSpc>
+            </a:pPr>
+            <a:r>
+              <a:rPr sz="1100" b="0" i="0">
+                <a:solidFill>
+                  <a:srgbClr val="909CAA"/>
+                </a:solidFill>
+                <a:latin typeface="Times New Roman"/>
+              </a:rPr>
+              <a:t>03 / 20</a:t>
             </a:r>
           </a:p>
         </p:txBody>
@@ -8609,7 +10992,7 @@
         </p:nvSpPr>
         <p:spPr>
           <a:xfrm>
-            <a:off x="640080" y="1463040"/>
+            <a:off x="640080" y="1783080"/>
             <a:ext cx="6766560" cy="4572000"/>
           </a:xfrm>
           <a:prstGeom prst="rect">
@@ -8628,7 +11011,7 @@
                 <a:spcPct val="105000"/>
               </a:lnSpc>
               <a:spcAft>
-                <a:spcPts val="1600"/>
+                <a:spcPts val="2600"/>
               </a:spcAft>
             </a:pPr>
             <a:r>
@@ -8647,7 +11030,7 @@
                 <a:spcPct val="105000"/>
               </a:lnSpc>
               <a:spcAft>
-                <a:spcPts val="1600"/>
+                <a:spcPts val="2600"/>
               </a:spcAft>
             </a:pPr>
             <a:r>
@@ -8675,7 +11058,7 @@
                 <a:spcPct val="105000"/>
               </a:lnSpc>
               <a:spcAft>
-                <a:spcPts val="1600"/>
+                <a:spcPts val="2600"/>
               </a:spcAft>
             </a:pPr>
             <a:r>
@@ -8703,7 +11086,7 @@
                 <a:spcPct val="105000"/>
               </a:lnSpc>
               <a:spcAft>
-                <a:spcPts val="1600"/>
+                <a:spcPts val="2600"/>
               </a:spcAft>
             </a:pPr>
             <a:r>
@@ -8731,7 +11114,7 @@
                 <a:spcPct val="105000"/>
               </a:lnSpc>
               <a:spcAft>
-                <a:spcPts val="1600"/>
+                <a:spcPts val="2600"/>
               </a:spcAft>
             </a:pPr>
             <a:r>
@@ -8754,8 +11137,8 @@
         </p:nvSpPr>
         <p:spPr>
           <a:xfrm>
-            <a:off x="7680960" y="1554480"/>
-            <a:ext cx="3931920" cy="4480560"/>
+            <a:off x="7726679" y="1600200"/>
+            <a:ext cx="3913632" cy="3977639"/>
           </a:xfrm>
           <a:prstGeom prst="rect">
             <a:avLst/>
@@ -8792,13 +11175,57 @@
       </p:sp>
       <p:sp>
         <p:nvSpPr>
-          <p:cNvPr id="8" name="TextBox 7"/>
+          <p:cNvPr id="8" name="Rectangle 7"/>
+          <p:cNvSpPr/>
+          <p:nvPr/>
+        </p:nvSpPr>
+        <p:spPr>
+          <a:xfrm>
+            <a:off x="7726679" y="1600200"/>
+            <a:ext cx="128016" cy="3977639"/>
+          </a:xfrm>
+          <a:prstGeom prst="rect">
+            <a:avLst/>
+          </a:prstGeom>
+          <a:solidFill>
+            <a:srgbClr val="C08A2B"/>
+          </a:solidFill>
+          <a:ln>
+            <a:noFill/>
+          </a:ln>
+          <a:effectLst/>
+        </p:spPr>
+        <p:style>
+          <a:lnRef idx="1">
+            <a:schemeClr val="accent1"/>
+          </a:lnRef>
+          <a:fillRef idx="3">
+            <a:schemeClr val="accent1"/>
+          </a:fillRef>
+          <a:effectRef idx="2">
+            <a:schemeClr val="accent1"/>
+          </a:effectRef>
+          <a:fontRef idx="minor">
+            <a:schemeClr val="lt1"/>
+          </a:fontRef>
+        </p:style>
+        <p:txBody>
+          <a:bodyPr rtlCol="0" anchor="ctr"/>
+          <a:lstStyle/>
+          <a:p>
+            <a:pPr algn="ctr"/>
+          </a:p>
+        </p:txBody>
+      </p:sp>
+      <p:sp>
+        <p:nvSpPr>
+          <p:cNvPr id="9" name="TextBox 8"/>
           <p:cNvSpPr txBox="1"/>
           <p:nvPr/>
         </p:nvSpPr>
         <p:spPr>
           <a:xfrm>
-            <a:off x="7955279" y="1783080"/>
+            <a:off x="8001000" y="1828800"/>
             <a:ext cx="3474720" cy="731520"/>
           </a:xfrm>
           <a:prstGeom prst="rect">
@@ -8831,14 +11258,14 @@
       </p:sp>
       <p:sp>
         <p:nvSpPr>
-          <p:cNvPr id="9" name="TextBox 8"/>
+          <p:cNvPr id="10" name="TextBox 9"/>
           <p:cNvSpPr txBox="1"/>
           <p:nvPr/>
         </p:nvSpPr>
         <p:spPr>
           <a:xfrm>
-            <a:off x="7955279" y="2286000"/>
-            <a:ext cx="3474720" cy="3474720"/>
+            <a:off x="8001000" y="2331720"/>
+            <a:ext cx="3474720" cy="3017520"/>
           </a:xfrm>
           <a:prstGeom prst="rect">
             <a:avLst/>
@@ -8853,7 +11280,7 @@
           <a:p>
             <a:pPr algn="l">
               <a:lnSpc>
-                <a:spcPct val="118000"/>
+                <a:spcPct val="120000"/>
               </a:lnSpc>
             </a:pPr>
             <a:r>
@@ -8864,6 +11291,216 @@
                 <a:latin typeface="Times New Roman"/>
               </a:rPr>
               <a:t>His death meant accountability had to be pursued through others — and across borders. The case became a test of how legal systems cooperate.</a:t>
+            </a:r>
+          </a:p>
+        </p:txBody>
+      </p:sp>
+      <p:sp>
+        <p:nvSpPr>
+          <p:cNvPr id="11" name="Rectangle 10"/>
+          <p:cNvSpPr/>
+          <p:nvPr/>
+        </p:nvSpPr>
+        <p:spPr>
+          <a:xfrm>
+            <a:off x="0" y="5779008"/>
+            <a:ext cx="12191695" cy="566928"/>
+          </a:xfrm>
+          <a:prstGeom prst="rect">
+            <a:avLst/>
+          </a:prstGeom>
+          <a:solidFill>
+            <a:srgbClr val="F2F4F7"/>
+          </a:solidFill>
+          <a:ln>
+            <a:noFill/>
+          </a:ln>
+          <a:effectLst/>
+        </p:spPr>
+        <p:style>
+          <a:lnRef idx="1">
+            <a:schemeClr val="accent1"/>
+          </a:lnRef>
+          <a:fillRef idx="3">
+            <a:schemeClr val="accent1"/>
+          </a:fillRef>
+          <a:effectRef idx="2">
+            <a:schemeClr val="accent1"/>
+          </a:effectRef>
+          <a:fontRef idx="minor">
+            <a:schemeClr val="lt1"/>
+          </a:fontRef>
+        </p:style>
+        <p:txBody>
+          <a:bodyPr rtlCol="0" anchor="ctr"/>
+          <a:lstStyle/>
+          <a:p>
+            <a:pPr algn="ctr"/>
+          </a:p>
+        </p:txBody>
+      </p:sp>
+      <p:sp>
+        <p:nvSpPr>
+          <p:cNvPr id="12" name="Rectangle 11"/>
+          <p:cNvSpPr/>
+          <p:nvPr/>
+        </p:nvSpPr>
+        <p:spPr>
+          <a:xfrm>
+            <a:off x="0" y="5779008"/>
+            <a:ext cx="128016" cy="566928"/>
+          </a:xfrm>
+          <a:prstGeom prst="rect">
+            <a:avLst/>
+          </a:prstGeom>
+          <a:solidFill>
+            <a:srgbClr val="C08A2B"/>
+          </a:solidFill>
+          <a:ln>
+            <a:noFill/>
+          </a:ln>
+          <a:effectLst/>
+        </p:spPr>
+        <p:style>
+          <a:lnRef idx="1">
+            <a:schemeClr val="accent1"/>
+          </a:lnRef>
+          <a:fillRef idx="3">
+            <a:schemeClr val="accent1"/>
+          </a:fillRef>
+          <a:effectRef idx="2">
+            <a:schemeClr val="accent1"/>
+          </a:effectRef>
+          <a:fontRef idx="minor">
+            <a:schemeClr val="lt1"/>
+          </a:fontRef>
+        </p:style>
+        <p:txBody>
+          <a:bodyPr rtlCol="0" anchor="ctr"/>
+          <a:lstStyle/>
+          <a:p>
+            <a:pPr algn="ctr"/>
+          </a:p>
+        </p:txBody>
+      </p:sp>
+      <p:sp>
+        <p:nvSpPr>
+          <p:cNvPr id="13" name="TextBox 12"/>
+          <p:cNvSpPr txBox="1"/>
+          <p:nvPr/>
+        </p:nvSpPr>
+        <p:spPr>
+          <a:xfrm>
+            <a:off x="566928" y="5916168"/>
+            <a:ext cx="11064240" cy="457200"/>
+          </a:xfrm>
+          <a:prstGeom prst="rect">
+            <a:avLst/>
+          </a:prstGeom>
+          <a:noFill/>
+        </p:spPr>
+        <p:txBody>
+          <a:bodyPr wrap="square">
+            <a:spAutoFit/>
+          </a:bodyPr>
+          <a:lstStyle/>
+          <a:p>
+            <a:pPr algn="l">
+              <a:lnSpc>
+                <a:spcPct val="100000"/>
+              </a:lnSpc>
+            </a:pPr>
+            <a:r>
+              <a:rPr sz="1500" b="0" i="1">
+                <a:solidFill>
+                  <a:srgbClr val="0F2A43"/>
+                </a:solidFill>
+                <a:latin typeface="Times New Roman"/>
+              </a:rPr>
+              <a:t>The crime was global; the criminal case ended at one nation's border.</a:t>
+            </a:r>
+          </a:p>
+        </p:txBody>
+      </p:sp>
+      <p:sp>
+        <p:nvSpPr>
+          <p:cNvPr id="14" name="Rectangle 13"/>
+          <p:cNvSpPr/>
+          <p:nvPr/>
+        </p:nvSpPr>
+        <p:spPr>
+          <a:xfrm>
+            <a:off x="548640" y="6583680"/>
+            <a:ext cx="411480" cy="32004"/>
+          </a:xfrm>
+          <a:prstGeom prst="rect">
+            <a:avLst/>
+          </a:prstGeom>
+          <a:solidFill>
+            <a:srgbClr val="C08A2B"/>
+          </a:solidFill>
+          <a:ln>
+            <a:noFill/>
+          </a:ln>
+          <a:effectLst/>
+        </p:spPr>
+        <p:style>
+          <a:lnRef idx="1">
+            <a:schemeClr val="accent1"/>
+          </a:lnRef>
+          <a:fillRef idx="3">
+            <a:schemeClr val="accent1"/>
+          </a:fillRef>
+          <a:effectRef idx="2">
+            <a:schemeClr val="accent1"/>
+          </a:effectRef>
+          <a:fontRef idx="minor">
+            <a:schemeClr val="lt1"/>
+          </a:fontRef>
+        </p:style>
+        <p:txBody>
+          <a:bodyPr rtlCol="0" anchor="ctr"/>
+          <a:lstStyle/>
+          <a:p>
+            <a:pPr algn="ctr"/>
+          </a:p>
+        </p:txBody>
+      </p:sp>
+      <p:sp>
+        <p:nvSpPr>
+          <p:cNvPr id="15" name="TextBox 14"/>
+          <p:cNvSpPr txBox="1"/>
+          <p:nvPr/>
+        </p:nvSpPr>
+        <p:spPr>
+          <a:xfrm>
+            <a:off x="10424160" y="6419088"/>
+            <a:ext cx="1216152" cy="274320"/>
+          </a:xfrm>
+          <a:prstGeom prst="rect">
+            <a:avLst/>
+          </a:prstGeom>
+          <a:noFill/>
+        </p:spPr>
+        <p:txBody>
+          <a:bodyPr wrap="square">
+            <a:spAutoFit/>
+          </a:bodyPr>
+          <a:lstStyle/>
+          <a:p>
+            <a:pPr algn="r">
+              <a:lnSpc>
+                <a:spcPct val="100000"/>
+              </a:lnSpc>
+            </a:pPr>
+            <a:r>
+              <a:rPr sz="1100" b="0" i="0">
+                <a:solidFill>
+                  <a:srgbClr val="6B7682"/>
+                </a:solidFill>
+                <a:latin typeface="Times New Roman"/>
+              </a:rPr>
+              <a:t>04 / 20</a:t>
             </a:r>
           </a:p>
         </p:txBody>
@@ -9068,7 +11705,51 @@
         </p:nvSpPr>
         <p:spPr>
           <a:xfrm>
-            <a:off x="640080" y="2011680"/>
+            <a:off x="1943100" y="2706624"/>
+            <a:ext cx="8311896" cy="45720"/>
+          </a:xfrm>
+          <a:prstGeom prst="rect">
+            <a:avLst/>
+          </a:prstGeom>
+          <a:solidFill>
+            <a:srgbClr val="C08A2B"/>
+          </a:solidFill>
+          <a:ln>
+            <a:noFill/>
+          </a:ln>
+          <a:effectLst/>
+        </p:spPr>
+        <p:style>
+          <a:lnRef idx="1">
+            <a:schemeClr val="accent1"/>
+          </a:lnRef>
+          <a:fillRef idx="3">
+            <a:schemeClr val="accent1"/>
+          </a:fillRef>
+          <a:effectRef idx="2">
+            <a:schemeClr val="accent1"/>
+          </a:effectRef>
+          <a:fontRef idx="minor">
+            <a:schemeClr val="lt1"/>
+          </a:fontRef>
+        </p:style>
+        <p:txBody>
+          <a:bodyPr rtlCol="0" anchor="ctr"/>
+          <a:lstStyle/>
+          <a:p>
+            <a:pPr algn="ctr"/>
+          </a:p>
+        </p:txBody>
+      </p:sp>
+      <p:sp>
+        <p:nvSpPr>
+          <p:cNvPr id="7" name="Rectangle 6"/>
+          <p:cNvSpPr/>
+          <p:nvPr/>
+        </p:nvSpPr>
+        <p:spPr>
+          <a:xfrm>
+            <a:off x="640080" y="2331720"/>
             <a:ext cx="2606040" cy="777240"/>
           </a:xfrm>
           <a:prstGeom prst="rect">
@@ -9106,13 +11787,13 @@
       </p:sp>
       <p:sp>
         <p:nvSpPr>
-          <p:cNvPr id="7" name="TextBox 6"/>
+          <p:cNvPr id="8" name="TextBox 7"/>
           <p:cNvSpPr txBox="1"/>
           <p:nvPr/>
         </p:nvSpPr>
         <p:spPr>
           <a:xfrm>
-            <a:off x="640080" y="2157984"/>
+            <a:off x="640080" y="2487168"/>
             <a:ext cx="2606040" cy="731520"/>
           </a:xfrm>
           <a:prstGeom prst="rect">
@@ -9145,14 +11826,14 @@
       </p:sp>
       <p:sp>
         <p:nvSpPr>
-          <p:cNvPr id="8" name="Rectangle 7"/>
+          <p:cNvPr id="9" name="Rectangle 8"/>
           <p:cNvSpPr/>
           <p:nvPr/>
         </p:nvSpPr>
         <p:spPr>
           <a:xfrm>
-            <a:off x="1915668" y="2788920"/>
-            <a:ext cx="54864" cy="320040"/>
+            <a:off x="1915668" y="3108960"/>
+            <a:ext cx="54864" cy="301752"/>
           </a:xfrm>
           <a:prstGeom prst="rect">
             <a:avLst/>
@@ -9189,14 +11870,14 @@
       </p:sp>
       <p:sp>
         <p:nvSpPr>
-          <p:cNvPr id="9" name="TextBox 8"/>
+          <p:cNvPr id="10" name="TextBox 9"/>
           <p:cNvSpPr txBox="1"/>
           <p:nvPr/>
         </p:nvSpPr>
         <p:spPr>
           <a:xfrm>
-            <a:off x="640080" y="3246120"/>
-            <a:ext cx="2606040" cy="2011680"/>
+            <a:off x="640080" y="3538728"/>
+            <a:ext cx="2606040" cy="1828800"/>
           </a:xfrm>
           <a:prstGeom prst="rect">
             <a:avLst/>
@@ -9228,13 +11909,13 @@
       </p:sp>
       <p:sp>
         <p:nvSpPr>
-          <p:cNvPr id="10" name="Rectangle 9"/>
+          <p:cNvPr id="11" name="Rectangle 10"/>
           <p:cNvSpPr/>
           <p:nvPr/>
         </p:nvSpPr>
         <p:spPr>
           <a:xfrm>
-            <a:off x="3410712" y="2011680"/>
+            <a:off x="3410712" y="2331720"/>
             <a:ext cx="2606040" cy="777240"/>
           </a:xfrm>
           <a:prstGeom prst="rect">
@@ -9272,13 +11953,13 @@
       </p:sp>
       <p:sp>
         <p:nvSpPr>
-          <p:cNvPr id="11" name="TextBox 10"/>
+          <p:cNvPr id="12" name="TextBox 11"/>
           <p:cNvSpPr txBox="1"/>
           <p:nvPr/>
         </p:nvSpPr>
         <p:spPr>
           <a:xfrm>
-            <a:off x="3410712" y="2157984"/>
+            <a:off x="3410712" y="2487168"/>
             <a:ext cx="2606040" cy="731520"/>
           </a:xfrm>
           <a:prstGeom prst="rect">
@@ -9311,14 +11992,14 @@
       </p:sp>
       <p:sp>
         <p:nvSpPr>
-          <p:cNvPr id="12" name="Rectangle 11"/>
+          <p:cNvPr id="13" name="Rectangle 12"/>
           <p:cNvSpPr/>
           <p:nvPr/>
         </p:nvSpPr>
         <p:spPr>
           <a:xfrm>
-            <a:off x="4686300" y="2788920"/>
-            <a:ext cx="54864" cy="320040"/>
+            <a:off x="4686300" y="3108960"/>
+            <a:ext cx="54864" cy="301752"/>
           </a:xfrm>
           <a:prstGeom prst="rect">
             <a:avLst/>
@@ -9355,14 +12036,14 @@
       </p:sp>
       <p:sp>
         <p:nvSpPr>
-          <p:cNvPr id="13" name="TextBox 12"/>
+          <p:cNvPr id="14" name="TextBox 13"/>
           <p:cNvSpPr txBox="1"/>
           <p:nvPr/>
         </p:nvSpPr>
         <p:spPr>
           <a:xfrm>
-            <a:off x="3410712" y="3246120"/>
-            <a:ext cx="2606040" cy="2011680"/>
+            <a:off x="3410712" y="3538728"/>
+            <a:ext cx="2606040" cy="1828800"/>
           </a:xfrm>
           <a:prstGeom prst="rect">
             <a:avLst/>
@@ -9394,13 +12075,13 @@
       </p:sp>
       <p:sp>
         <p:nvSpPr>
-          <p:cNvPr id="14" name="Rectangle 13"/>
+          <p:cNvPr id="15" name="Rectangle 14"/>
           <p:cNvSpPr/>
           <p:nvPr/>
         </p:nvSpPr>
         <p:spPr>
           <a:xfrm>
-            <a:off x="6181344" y="2011680"/>
+            <a:off x="6181344" y="2331720"/>
             <a:ext cx="2606040" cy="777240"/>
           </a:xfrm>
           <a:prstGeom prst="rect">
@@ -9438,13 +12119,13 @@
       </p:sp>
       <p:sp>
         <p:nvSpPr>
-          <p:cNvPr id="15" name="TextBox 14"/>
+          <p:cNvPr id="16" name="TextBox 15"/>
           <p:cNvSpPr txBox="1"/>
           <p:nvPr/>
         </p:nvSpPr>
         <p:spPr>
           <a:xfrm>
-            <a:off x="6181344" y="2157984"/>
+            <a:off x="6181344" y="2487168"/>
             <a:ext cx="2606040" cy="731520"/>
           </a:xfrm>
           <a:prstGeom prst="rect">
@@ -9477,14 +12158,14 @@
       </p:sp>
       <p:sp>
         <p:nvSpPr>
-          <p:cNvPr id="16" name="Rectangle 15"/>
+          <p:cNvPr id="17" name="Rectangle 16"/>
           <p:cNvSpPr/>
           <p:nvPr/>
         </p:nvSpPr>
         <p:spPr>
           <a:xfrm>
-            <a:off x="7456932" y="2788920"/>
-            <a:ext cx="54864" cy="320040"/>
+            <a:off x="7456932" y="3108960"/>
+            <a:ext cx="54864" cy="301752"/>
           </a:xfrm>
           <a:prstGeom prst="rect">
             <a:avLst/>
@@ -9521,14 +12202,14 @@
       </p:sp>
       <p:sp>
         <p:nvSpPr>
-          <p:cNvPr id="17" name="TextBox 16"/>
+          <p:cNvPr id="18" name="TextBox 17"/>
           <p:cNvSpPr txBox="1"/>
           <p:nvPr/>
         </p:nvSpPr>
         <p:spPr>
           <a:xfrm>
-            <a:off x="6181344" y="3246120"/>
-            <a:ext cx="2606040" cy="2011680"/>
+            <a:off x="6181344" y="3538728"/>
+            <a:ext cx="2606040" cy="1828800"/>
           </a:xfrm>
           <a:prstGeom prst="rect">
             <a:avLst/>
@@ -9560,13 +12241,13 @@
       </p:sp>
       <p:sp>
         <p:nvSpPr>
-          <p:cNvPr id="18" name="Rectangle 17"/>
+          <p:cNvPr id="19" name="Rectangle 18"/>
           <p:cNvSpPr/>
           <p:nvPr/>
         </p:nvSpPr>
         <p:spPr>
           <a:xfrm>
-            <a:off x="8951976" y="2011680"/>
+            <a:off x="8951976" y="2331720"/>
             <a:ext cx="2606040" cy="777240"/>
           </a:xfrm>
           <a:prstGeom prst="rect">
@@ -9604,13 +12285,13 @@
       </p:sp>
       <p:sp>
         <p:nvSpPr>
-          <p:cNvPr id="19" name="TextBox 18"/>
+          <p:cNvPr id="20" name="TextBox 19"/>
           <p:cNvSpPr txBox="1"/>
           <p:nvPr/>
         </p:nvSpPr>
         <p:spPr>
           <a:xfrm>
-            <a:off x="8951976" y="2157984"/>
+            <a:off x="8951976" y="2487168"/>
             <a:ext cx="2606040" cy="731520"/>
           </a:xfrm>
           <a:prstGeom prst="rect">
@@ -9643,14 +12324,14 @@
       </p:sp>
       <p:sp>
         <p:nvSpPr>
-          <p:cNvPr id="20" name="Rectangle 19"/>
+          <p:cNvPr id="21" name="Rectangle 20"/>
           <p:cNvSpPr/>
           <p:nvPr/>
         </p:nvSpPr>
         <p:spPr>
           <a:xfrm>
-            <a:off x="10227564" y="2788920"/>
-            <a:ext cx="54864" cy="320040"/>
+            <a:off x="10227564" y="3108960"/>
+            <a:ext cx="54864" cy="301752"/>
           </a:xfrm>
           <a:prstGeom prst="rect">
             <a:avLst/>
@@ -9687,14 +12368,14 @@
       </p:sp>
       <p:sp>
         <p:nvSpPr>
-          <p:cNvPr id="21" name="TextBox 20"/>
+          <p:cNvPr id="22" name="TextBox 21"/>
           <p:cNvSpPr txBox="1"/>
           <p:nvPr/>
         </p:nvSpPr>
         <p:spPr>
           <a:xfrm>
-            <a:off x="8951976" y="3246120"/>
-            <a:ext cx="2606040" cy="2011680"/>
+            <a:off x="8951976" y="3538728"/>
+            <a:ext cx="2606040" cy="1828800"/>
           </a:xfrm>
           <a:prstGeom prst="rect">
             <a:avLst/>
@@ -9726,14 +12407,102 @@
       </p:sp>
       <p:sp>
         <p:nvSpPr>
-          <p:cNvPr id="22" name="TextBox 21"/>
+          <p:cNvPr id="23" name="Rectangle 22"/>
+          <p:cNvSpPr/>
+          <p:nvPr/>
+        </p:nvSpPr>
+        <p:spPr>
+          <a:xfrm>
+            <a:off x="0" y="5779008"/>
+            <a:ext cx="12191695" cy="566928"/>
+          </a:xfrm>
+          <a:prstGeom prst="rect">
+            <a:avLst/>
+          </a:prstGeom>
+          <a:solidFill>
+            <a:srgbClr val="F2F4F7"/>
+          </a:solidFill>
+          <a:ln>
+            <a:noFill/>
+          </a:ln>
+          <a:effectLst/>
+        </p:spPr>
+        <p:style>
+          <a:lnRef idx="1">
+            <a:schemeClr val="accent1"/>
+          </a:lnRef>
+          <a:fillRef idx="3">
+            <a:schemeClr val="accent1"/>
+          </a:fillRef>
+          <a:effectRef idx="2">
+            <a:schemeClr val="accent1"/>
+          </a:effectRef>
+          <a:fontRef idx="minor">
+            <a:schemeClr val="lt1"/>
+          </a:fontRef>
+        </p:style>
+        <p:txBody>
+          <a:bodyPr rtlCol="0" anchor="ctr"/>
+          <a:lstStyle/>
+          <a:p>
+            <a:pPr algn="ctr"/>
+          </a:p>
+        </p:txBody>
+      </p:sp>
+      <p:sp>
+        <p:nvSpPr>
+          <p:cNvPr id="24" name="Rectangle 23"/>
+          <p:cNvSpPr/>
+          <p:nvPr/>
+        </p:nvSpPr>
+        <p:spPr>
+          <a:xfrm>
+            <a:off x="0" y="5779008"/>
+            <a:ext cx="128016" cy="566928"/>
+          </a:xfrm>
+          <a:prstGeom prst="rect">
+            <a:avLst/>
+          </a:prstGeom>
+          <a:solidFill>
+            <a:srgbClr val="C08A2B"/>
+          </a:solidFill>
+          <a:ln>
+            <a:noFill/>
+          </a:ln>
+          <a:effectLst/>
+        </p:spPr>
+        <p:style>
+          <a:lnRef idx="1">
+            <a:schemeClr val="accent1"/>
+          </a:lnRef>
+          <a:fillRef idx="3">
+            <a:schemeClr val="accent1"/>
+          </a:fillRef>
+          <a:effectRef idx="2">
+            <a:schemeClr val="accent1"/>
+          </a:effectRef>
+          <a:fontRef idx="minor">
+            <a:schemeClr val="lt1"/>
+          </a:fontRef>
+        </p:style>
+        <p:txBody>
+          <a:bodyPr rtlCol="0" anchor="ctr"/>
+          <a:lstStyle/>
+          <a:p>
+            <a:pPr algn="ctr"/>
+          </a:p>
+        </p:txBody>
+      </p:sp>
+      <p:sp>
+        <p:nvSpPr>
+          <p:cNvPr id="25" name="TextBox 24"/>
           <p:cNvSpPr txBox="1"/>
           <p:nvPr/>
         </p:nvSpPr>
         <p:spPr>
           <a:xfrm>
-            <a:off x="640080" y="5394960"/>
-            <a:ext cx="10972800" cy="914400"/>
+            <a:off x="566928" y="5916168"/>
+            <a:ext cx="11064240" cy="457200"/>
           </a:xfrm>
           <a:prstGeom prst="rect">
             <a:avLst/>
@@ -9748,7 +12517,7 @@
           <a:p>
             <a:pPr algn="l">
               <a:lnSpc>
-                <a:spcPct val="115000"/>
+                <a:spcPct val="100000"/>
               </a:lnSpc>
             </a:pPr>
             <a:r>
@@ -9758,7 +12527,90 @@
                 </a:solidFill>
                 <a:latin typeface="Times New Roman"/>
               </a:rPr>
-              <a:t>Across two decades the case moved from a local plea bargain to a global question about justice, wealth, and cross-border accountability.</a:t>
+              <a:t>From a local plea bargain to a global question about justice, wealth and cross-border accountability.</a:t>
+            </a:r>
+          </a:p>
+        </p:txBody>
+      </p:sp>
+      <p:sp>
+        <p:nvSpPr>
+          <p:cNvPr id="26" name="Rectangle 25"/>
+          <p:cNvSpPr/>
+          <p:nvPr/>
+        </p:nvSpPr>
+        <p:spPr>
+          <a:xfrm>
+            <a:off x="548640" y="6583680"/>
+            <a:ext cx="411480" cy="32004"/>
+          </a:xfrm>
+          <a:prstGeom prst="rect">
+            <a:avLst/>
+          </a:prstGeom>
+          <a:solidFill>
+            <a:srgbClr val="C08A2B"/>
+          </a:solidFill>
+          <a:ln>
+            <a:noFill/>
+          </a:ln>
+          <a:effectLst/>
+        </p:spPr>
+        <p:style>
+          <a:lnRef idx="1">
+            <a:schemeClr val="accent1"/>
+          </a:lnRef>
+          <a:fillRef idx="3">
+            <a:schemeClr val="accent1"/>
+          </a:fillRef>
+          <a:effectRef idx="2">
+            <a:schemeClr val="accent1"/>
+          </a:effectRef>
+          <a:fontRef idx="minor">
+            <a:schemeClr val="lt1"/>
+          </a:fontRef>
+        </p:style>
+        <p:txBody>
+          <a:bodyPr rtlCol="0" anchor="ctr"/>
+          <a:lstStyle/>
+          <a:p>
+            <a:pPr algn="ctr"/>
+          </a:p>
+        </p:txBody>
+      </p:sp>
+      <p:sp>
+        <p:nvSpPr>
+          <p:cNvPr id="27" name="TextBox 26"/>
+          <p:cNvSpPr txBox="1"/>
+          <p:nvPr/>
+        </p:nvSpPr>
+        <p:spPr>
+          <a:xfrm>
+            <a:off x="10424160" y="6419088"/>
+            <a:ext cx="1216152" cy="274320"/>
+          </a:xfrm>
+          <a:prstGeom prst="rect">
+            <a:avLst/>
+          </a:prstGeom>
+          <a:noFill/>
+        </p:spPr>
+        <p:txBody>
+          <a:bodyPr wrap="square">
+            <a:spAutoFit/>
+          </a:bodyPr>
+          <a:lstStyle/>
+          <a:p>
+            <a:pPr algn="r">
+              <a:lnSpc>
+                <a:spcPct val="100000"/>
+              </a:lnSpc>
+            </a:pPr>
+            <a:r>
+              <a:rPr sz="1100" b="0" i="0">
+                <a:solidFill>
+                  <a:srgbClr val="6B7682"/>
+                </a:solidFill>
+                <a:latin typeface="Times New Roman"/>
+              </a:rPr>
+              <a:t>05 / 20</a:t>
             </a:r>
           </a:p>
         </p:txBody>
@@ -9963,7 +12815,7 @@
         </p:nvSpPr>
         <p:spPr>
           <a:xfrm>
-            <a:off x="640080" y="1463040"/>
+            <a:off x="640080" y="1783080"/>
             <a:ext cx="6766560" cy="4572000"/>
           </a:xfrm>
           <a:prstGeom prst="rect">
@@ -9982,7 +12834,7 @@
                 <a:spcPct val="105000"/>
               </a:lnSpc>
               <a:spcAft>
-                <a:spcPts val="1500"/>
+                <a:spcPts val="2600"/>
               </a:spcAft>
             </a:pPr>
             <a:r>
@@ -10010,7 +12862,7 @@
                 <a:spcPct val="105000"/>
               </a:lnSpc>
               <a:spcAft>
-                <a:spcPts val="1500"/>
+                <a:spcPts val="2600"/>
               </a:spcAft>
             </a:pPr>
             <a:r>
@@ -10038,7 +12890,7 @@
                 <a:spcPct val="105000"/>
               </a:lnSpc>
               <a:spcAft>
-                <a:spcPts val="1500"/>
+                <a:spcPts val="2600"/>
               </a:spcAft>
             </a:pPr>
             <a:r>
@@ -10066,7 +12918,7 @@
                 <a:spcPct val="105000"/>
               </a:lnSpc>
               <a:spcAft>
-                <a:spcPts val="1500"/>
+                <a:spcPts val="2600"/>
               </a:spcAft>
             </a:pPr>
             <a:r>
@@ -10094,7 +12946,7 @@
                 <a:spcPct val="105000"/>
               </a:lnSpc>
               <a:spcAft>
-                <a:spcPts val="1500"/>
+                <a:spcPts val="2600"/>
               </a:spcAft>
             </a:pPr>
             <a:r>
@@ -10126,8 +12978,8 @@
         </p:nvSpPr>
         <p:spPr>
           <a:xfrm>
-            <a:off x="7680960" y="1554480"/>
-            <a:ext cx="3931920" cy="4480560"/>
+            <a:off x="7726679" y="1600200"/>
+            <a:ext cx="3913632" cy="3977639"/>
           </a:xfrm>
           <a:prstGeom prst="rect">
             <a:avLst/>
@@ -10164,13 +13016,57 @@
       </p:sp>
       <p:sp>
         <p:nvSpPr>
-          <p:cNvPr id="8" name="TextBox 7"/>
+          <p:cNvPr id="8" name="Rectangle 7"/>
+          <p:cNvSpPr/>
+          <p:nvPr/>
+        </p:nvSpPr>
+        <p:spPr>
+          <a:xfrm>
+            <a:off x="7726679" y="1600200"/>
+            <a:ext cx="128016" cy="3977639"/>
+          </a:xfrm>
+          <a:prstGeom prst="rect">
+            <a:avLst/>
+          </a:prstGeom>
+          <a:solidFill>
+            <a:srgbClr val="C08A2B"/>
+          </a:solidFill>
+          <a:ln>
+            <a:noFill/>
+          </a:ln>
+          <a:effectLst/>
+        </p:spPr>
+        <p:style>
+          <a:lnRef idx="1">
+            <a:schemeClr val="accent1"/>
+          </a:lnRef>
+          <a:fillRef idx="3">
+            <a:schemeClr val="accent1"/>
+          </a:fillRef>
+          <a:effectRef idx="2">
+            <a:schemeClr val="accent1"/>
+          </a:effectRef>
+          <a:fontRef idx="minor">
+            <a:schemeClr val="lt1"/>
+          </a:fontRef>
+        </p:style>
+        <p:txBody>
+          <a:bodyPr rtlCol="0" anchor="ctr"/>
+          <a:lstStyle/>
+          <a:p>
+            <a:pPr algn="ctr"/>
+          </a:p>
+        </p:txBody>
+      </p:sp>
+      <p:sp>
+        <p:nvSpPr>
+          <p:cNvPr id="9" name="TextBox 8"/>
           <p:cNvSpPr txBox="1"/>
           <p:nvPr/>
         </p:nvSpPr>
         <p:spPr>
           <a:xfrm>
-            <a:off x="7955279" y="1783080"/>
+            <a:off x="8001000" y="1828800"/>
             <a:ext cx="3474720" cy="731520"/>
           </a:xfrm>
           <a:prstGeom prst="rect">
@@ -10203,14 +13099,14 @@
       </p:sp>
       <p:sp>
         <p:nvSpPr>
-          <p:cNvPr id="9" name="TextBox 8"/>
+          <p:cNvPr id="10" name="TextBox 9"/>
           <p:cNvSpPr txBox="1"/>
           <p:nvPr/>
         </p:nvSpPr>
         <p:spPr>
           <a:xfrm>
-            <a:off x="7955279" y="2286000"/>
-            <a:ext cx="3474720" cy="3291840"/>
+            <a:off x="8001000" y="2331720"/>
+            <a:ext cx="3474720" cy="3017520"/>
           </a:xfrm>
           <a:prstGeom prst="rect">
             <a:avLst/>
@@ -10225,7 +13121,7 @@
           <a:p>
             <a:pPr algn="l">
               <a:lnSpc>
-                <a:spcPct val="118000"/>
+                <a:spcPct val="120000"/>
               </a:lnSpc>
             </a:pPr>
             <a:r>
@@ -10236,6 +13132,216 @@
                 <a:latin typeface="Times New Roman"/>
               </a:rPr>
               <a:t>The network was global, but criminal enforcement is national. That gap is the heart of our presentation.</a:t>
+            </a:r>
+          </a:p>
+        </p:txBody>
+      </p:sp>
+      <p:sp>
+        <p:nvSpPr>
+          <p:cNvPr id="11" name="Rectangle 10"/>
+          <p:cNvSpPr/>
+          <p:nvPr/>
+        </p:nvSpPr>
+        <p:spPr>
+          <a:xfrm>
+            <a:off x="0" y="5779008"/>
+            <a:ext cx="12191695" cy="566928"/>
+          </a:xfrm>
+          <a:prstGeom prst="rect">
+            <a:avLst/>
+          </a:prstGeom>
+          <a:solidFill>
+            <a:srgbClr val="F2F4F7"/>
+          </a:solidFill>
+          <a:ln>
+            <a:noFill/>
+          </a:ln>
+          <a:effectLst/>
+        </p:spPr>
+        <p:style>
+          <a:lnRef idx="1">
+            <a:schemeClr val="accent1"/>
+          </a:lnRef>
+          <a:fillRef idx="3">
+            <a:schemeClr val="accent1"/>
+          </a:fillRef>
+          <a:effectRef idx="2">
+            <a:schemeClr val="accent1"/>
+          </a:effectRef>
+          <a:fontRef idx="minor">
+            <a:schemeClr val="lt1"/>
+          </a:fontRef>
+        </p:style>
+        <p:txBody>
+          <a:bodyPr rtlCol="0" anchor="ctr"/>
+          <a:lstStyle/>
+          <a:p>
+            <a:pPr algn="ctr"/>
+          </a:p>
+        </p:txBody>
+      </p:sp>
+      <p:sp>
+        <p:nvSpPr>
+          <p:cNvPr id="12" name="Rectangle 11"/>
+          <p:cNvSpPr/>
+          <p:nvPr/>
+        </p:nvSpPr>
+        <p:spPr>
+          <a:xfrm>
+            <a:off x="0" y="5779008"/>
+            <a:ext cx="128016" cy="566928"/>
+          </a:xfrm>
+          <a:prstGeom prst="rect">
+            <a:avLst/>
+          </a:prstGeom>
+          <a:solidFill>
+            <a:srgbClr val="C08A2B"/>
+          </a:solidFill>
+          <a:ln>
+            <a:noFill/>
+          </a:ln>
+          <a:effectLst/>
+        </p:spPr>
+        <p:style>
+          <a:lnRef idx="1">
+            <a:schemeClr val="accent1"/>
+          </a:lnRef>
+          <a:fillRef idx="3">
+            <a:schemeClr val="accent1"/>
+          </a:fillRef>
+          <a:effectRef idx="2">
+            <a:schemeClr val="accent1"/>
+          </a:effectRef>
+          <a:fontRef idx="minor">
+            <a:schemeClr val="lt1"/>
+          </a:fontRef>
+        </p:style>
+        <p:txBody>
+          <a:bodyPr rtlCol="0" anchor="ctr"/>
+          <a:lstStyle/>
+          <a:p>
+            <a:pPr algn="ctr"/>
+          </a:p>
+        </p:txBody>
+      </p:sp>
+      <p:sp>
+        <p:nvSpPr>
+          <p:cNvPr id="13" name="TextBox 12"/>
+          <p:cNvSpPr txBox="1"/>
+          <p:nvPr/>
+        </p:nvSpPr>
+        <p:spPr>
+          <a:xfrm>
+            <a:off x="566928" y="5916168"/>
+            <a:ext cx="11064240" cy="457200"/>
+          </a:xfrm>
+          <a:prstGeom prst="rect">
+            <a:avLst/>
+          </a:prstGeom>
+          <a:noFill/>
+        </p:spPr>
+        <p:txBody>
+          <a:bodyPr wrap="square">
+            <a:spAutoFit/>
+          </a:bodyPr>
+          <a:lstStyle/>
+          <a:p>
+            <a:pPr algn="l">
+              <a:lnSpc>
+                <a:spcPct val="100000"/>
+              </a:lnSpc>
+            </a:pPr>
+            <a:r>
+              <a:rPr sz="1500" b="0" i="1">
+                <a:solidFill>
+                  <a:srgbClr val="0F2A43"/>
+                </a:solidFill>
+                <a:latin typeface="Times New Roman"/>
+              </a:rPr>
+              <a:t>A global network meets national enforcement — and falls through the gaps.</a:t>
+            </a:r>
+          </a:p>
+        </p:txBody>
+      </p:sp>
+      <p:sp>
+        <p:nvSpPr>
+          <p:cNvPr id="14" name="Rectangle 13"/>
+          <p:cNvSpPr/>
+          <p:nvPr/>
+        </p:nvSpPr>
+        <p:spPr>
+          <a:xfrm>
+            <a:off x="548640" y="6583680"/>
+            <a:ext cx="411480" cy="32004"/>
+          </a:xfrm>
+          <a:prstGeom prst="rect">
+            <a:avLst/>
+          </a:prstGeom>
+          <a:solidFill>
+            <a:srgbClr val="C08A2B"/>
+          </a:solidFill>
+          <a:ln>
+            <a:noFill/>
+          </a:ln>
+          <a:effectLst/>
+        </p:spPr>
+        <p:style>
+          <a:lnRef idx="1">
+            <a:schemeClr val="accent1"/>
+          </a:lnRef>
+          <a:fillRef idx="3">
+            <a:schemeClr val="accent1"/>
+          </a:fillRef>
+          <a:effectRef idx="2">
+            <a:schemeClr val="accent1"/>
+          </a:effectRef>
+          <a:fontRef idx="minor">
+            <a:schemeClr val="lt1"/>
+          </a:fontRef>
+        </p:style>
+        <p:txBody>
+          <a:bodyPr rtlCol="0" anchor="ctr"/>
+          <a:lstStyle/>
+          <a:p>
+            <a:pPr algn="ctr"/>
+          </a:p>
+        </p:txBody>
+      </p:sp>
+      <p:sp>
+        <p:nvSpPr>
+          <p:cNvPr id="15" name="TextBox 14"/>
+          <p:cNvSpPr txBox="1"/>
+          <p:nvPr/>
+        </p:nvSpPr>
+        <p:spPr>
+          <a:xfrm>
+            <a:off x="10424160" y="6419088"/>
+            <a:ext cx="1216152" cy="274320"/>
+          </a:xfrm>
+          <a:prstGeom prst="rect">
+            <a:avLst/>
+          </a:prstGeom>
+          <a:noFill/>
+        </p:spPr>
+        <p:txBody>
+          <a:bodyPr wrap="square">
+            <a:spAutoFit/>
+          </a:bodyPr>
+          <a:lstStyle/>
+          <a:p>
+            <a:pPr algn="r">
+              <a:lnSpc>
+                <a:spcPct val="100000"/>
+              </a:lnSpc>
+            </a:pPr>
+            <a:r>
+              <a:rPr sz="1100" b="0" i="0">
+                <a:solidFill>
+                  <a:srgbClr val="6B7682"/>
+                </a:solidFill>
+                <a:latin typeface="Times New Roman"/>
+              </a:rPr>
+              <a:t>06 / 20</a:t>
             </a:r>
           </a:p>
         </p:txBody>
@@ -10268,14 +13374,92 @@
       <p:grpSpPr/>
       <p:sp>
         <p:nvSpPr>
-          <p:cNvPr id="2" name="Rectangle 1"/>
+          <p:cNvPr id="2" name="TextBox 1"/>
+          <p:cNvSpPr txBox="1"/>
+          <p:nvPr/>
+        </p:nvSpPr>
+        <p:spPr>
+          <a:xfrm>
+            <a:off x="7040880" y="640080"/>
+            <a:ext cx="4937760" cy="5486400"/>
+          </a:xfrm>
+          <a:prstGeom prst="rect">
+            <a:avLst/>
+          </a:prstGeom>
+          <a:noFill/>
+        </p:spPr>
+        <p:txBody>
+          <a:bodyPr wrap="square">
+            <a:spAutoFit/>
+          </a:bodyPr>
+          <a:lstStyle/>
+          <a:p>
+            <a:pPr algn="ctr">
+              <a:lnSpc>
+                <a:spcPct val="100000"/>
+              </a:lnSpc>
+            </a:pPr>
+            <a:r>
+              <a:rPr sz="21000" b="1" i="0">
+                <a:solidFill>
+                  <a:srgbClr val="1C3A56"/>
+                </a:solidFill>
+                <a:latin typeface="Times New Roman"/>
+              </a:rPr>
+              <a:t>02</a:t>
+            </a:r>
+          </a:p>
+        </p:txBody>
+      </p:sp>
+      <p:sp>
+        <p:nvSpPr>
+          <p:cNvPr id="3" name="TextBox 2"/>
+          <p:cNvSpPr txBox="1"/>
+          <p:nvPr/>
+        </p:nvSpPr>
+        <p:spPr>
+          <a:xfrm>
+            <a:off x="822960" y="2331720"/>
+            <a:ext cx="7315200" cy="731520"/>
+          </a:xfrm>
+          <a:prstGeom prst="rect">
+            <a:avLst/>
+          </a:prstGeom>
+          <a:noFill/>
+        </p:spPr>
+        <p:txBody>
+          <a:bodyPr wrap="square">
+            <a:spAutoFit/>
+          </a:bodyPr>
+          <a:lstStyle/>
+          <a:p>
+            <a:pPr algn="l">
+              <a:lnSpc>
+                <a:spcPct val="100000"/>
+              </a:lnSpc>
+            </a:pPr>
+            <a:r>
+              <a:rPr sz="1300" b="1" i="0">
+                <a:solidFill>
+                  <a:srgbClr val="C08A2B"/>
+                </a:solidFill>
+                <a:latin typeface="Times New Roman"/>
+              </a:rPr>
+              <a:t>SECTION 2 OF 4</a:t>
+            </a:r>
+          </a:p>
+        </p:txBody>
+      </p:sp>
+      <p:sp>
+        <p:nvSpPr>
+          <p:cNvPr id="4" name="Rectangle 3"/>
           <p:cNvSpPr/>
           <p:nvPr/>
         </p:nvSpPr>
         <p:spPr>
           <a:xfrm>
-            <a:off x="822960" y="3246120"/>
-            <a:ext cx="2926080" cy="54864"/>
+            <a:off x="822960" y="2697480"/>
+            <a:ext cx="2743200" cy="54864"/>
           </a:xfrm>
           <a:prstGeom prst="rect">
             <a:avLst/>
@@ -10312,14 +13496,14 @@
       </p:sp>
       <p:sp>
         <p:nvSpPr>
-          <p:cNvPr id="3" name="TextBox 2"/>
+          <p:cNvPr id="5" name="TextBox 4"/>
           <p:cNvSpPr txBox="1"/>
           <p:nvPr/>
         </p:nvSpPr>
         <p:spPr>
           <a:xfrm>
-            <a:off x="822960" y="2148840"/>
-            <a:ext cx="10515600" cy="731520"/>
+            <a:off x="822960" y="2907792"/>
+            <a:ext cx="7498079" cy="1463040"/>
           </a:xfrm>
           <a:prstGeom prst="rect">
             <a:avLst/>
@@ -10338,27 +13522,43 @@
               </a:lnSpc>
             </a:pPr>
             <a:r>
-              <a:rPr sz="2000" b="1" i="0">
-                <a:solidFill>
-                  <a:srgbClr val="C08A2B"/>
-                </a:solidFill>
-                <a:latin typeface="Times New Roman"/>
-              </a:rPr>
-              <a:t>PART 2</a:t>
-            </a:r>
-          </a:p>
-        </p:txBody>
-      </p:sp>
-      <p:sp>
-        <p:nvSpPr>
-          <p:cNvPr id="4" name="TextBox 3"/>
+              <a:rPr sz="3300" b="1" i="0">
+                <a:solidFill>
+                  <a:srgbClr val="FFFFFF"/>
+                </a:solidFill>
+                <a:latin typeface="Times New Roman"/>
+              </a:rPr>
+              <a:t>The International</a:t>
+            </a:r>
+          </a:p>
+          <a:p>
+            <a:pPr algn="l">
+              <a:lnSpc>
+                <a:spcPct val="100000"/>
+              </a:lnSpc>
+            </a:pPr>
+            <a:r>
+              <a:rPr sz="3300" b="1" i="0">
+                <a:solidFill>
+                  <a:srgbClr val="FFFFFF"/>
+                </a:solidFill>
+                <a:latin typeface="Times New Roman"/>
+              </a:rPr>
+              <a:t>Legal Framework</a:t>
+            </a:r>
+          </a:p>
+        </p:txBody>
+      </p:sp>
+      <p:sp>
+        <p:nvSpPr>
+          <p:cNvPr id="6" name="TextBox 5"/>
           <p:cNvSpPr txBox="1"/>
           <p:nvPr/>
         </p:nvSpPr>
         <p:spPr>
           <a:xfrm>
-            <a:off x="822960" y="2514600"/>
-            <a:ext cx="10515600" cy="731520"/>
+            <a:off x="822960" y="3977639"/>
+            <a:ext cx="7132320" cy="1097280"/>
           </a:xfrm>
           <a:prstGeom prst="rect">
             <a:avLst/>
@@ -10373,31 +13573,75 @@
           <a:p>
             <a:pPr algn="l">
               <a:lnSpc>
-                <a:spcPct val="100000"/>
-              </a:lnSpc>
-            </a:pPr>
-            <a:r>
-              <a:rPr sz="3400" b="1" i="0">
-                <a:solidFill>
-                  <a:srgbClr val="FFFFFF"/>
-                </a:solidFill>
-                <a:latin typeface="Times New Roman"/>
-              </a:rPr>
-              <a:t>The International Legal Framework</a:t>
-            </a:r>
-          </a:p>
-        </p:txBody>
-      </p:sp>
-      <p:sp>
-        <p:nvSpPr>
-          <p:cNvPr id="5" name="TextBox 4"/>
+                <a:spcPct val="115000"/>
+              </a:lnSpc>
+            </a:pPr>
+            <a:r>
+              <a:rPr sz="1800" b="0" i="1">
+                <a:solidFill>
+                  <a:srgbClr val="F2F4F7"/>
+                </a:solidFill>
+                <a:latin typeface="Times New Roman"/>
+              </a:rPr>
+              <a:t>How international law addresses crime that crosses borders</a:t>
+            </a:r>
+          </a:p>
+        </p:txBody>
+      </p:sp>
+      <p:sp>
+        <p:nvSpPr>
+          <p:cNvPr id="7" name="Rectangle 6"/>
+          <p:cNvSpPr/>
+          <p:nvPr/>
+        </p:nvSpPr>
+        <p:spPr>
+          <a:xfrm>
+            <a:off x="548640" y="6583680"/>
+            <a:ext cx="411480" cy="32004"/>
+          </a:xfrm>
+          <a:prstGeom prst="rect">
+            <a:avLst/>
+          </a:prstGeom>
+          <a:solidFill>
+            <a:srgbClr val="C08A2B"/>
+          </a:solidFill>
+          <a:ln>
+            <a:noFill/>
+          </a:ln>
+          <a:effectLst/>
+        </p:spPr>
+        <p:style>
+          <a:lnRef idx="1">
+            <a:schemeClr val="accent1"/>
+          </a:lnRef>
+          <a:fillRef idx="3">
+            <a:schemeClr val="accent1"/>
+          </a:fillRef>
+          <a:effectRef idx="2">
+            <a:schemeClr val="accent1"/>
+          </a:effectRef>
+          <a:fontRef idx="minor">
+            <a:schemeClr val="lt1"/>
+          </a:fontRef>
+        </p:style>
+        <p:txBody>
+          <a:bodyPr rtlCol="0" anchor="ctr"/>
+          <a:lstStyle/>
+          <a:p>
+            <a:pPr algn="ctr"/>
+          </a:p>
+        </p:txBody>
+      </p:sp>
+      <p:sp>
+        <p:nvSpPr>
+          <p:cNvPr id="8" name="TextBox 7"/>
           <p:cNvSpPr txBox="1"/>
           <p:nvPr/>
         </p:nvSpPr>
         <p:spPr>
           <a:xfrm>
-            <a:off x="822960" y="3474720"/>
-            <a:ext cx="9601200" cy="731520"/>
+            <a:off x="10424160" y="6419088"/>
+            <a:ext cx="1216152" cy="274320"/>
           </a:xfrm>
           <a:prstGeom prst="rect">
             <a:avLst/>
@@ -10410,19 +13654,19 @@
           </a:bodyPr>
           <a:lstStyle/>
           <a:p>
-            <a:pPr algn="l">
-              <a:lnSpc>
-                <a:spcPct val="110000"/>
-              </a:lnSpc>
-            </a:pPr>
-            <a:r>
-              <a:rPr sz="1800" b="0" i="1">
-                <a:solidFill>
-                  <a:srgbClr val="F2F4F7"/>
-                </a:solidFill>
-                <a:latin typeface="Times New Roman"/>
-              </a:rPr>
-              <a:t>How international law addresses crime that crosses borders</a:t>
+            <a:pPr algn="r">
+              <a:lnSpc>
+                <a:spcPct val="100000"/>
+              </a:lnSpc>
+            </a:pPr>
+            <a:r>
+              <a:rPr sz="1100" b="0" i="0">
+                <a:solidFill>
+                  <a:srgbClr val="909CAA"/>
+                </a:solidFill>
+                <a:latin typeface="Times New Roman"/>
+              </a:rPr>
+              <a:t>07 / 20</a:t>
             </a:r>
           </a:p>
         </p:txBody>
@@ -10627,8 +13871,8 @@
         </p:nvSpPr>
         <p:spPr>
           <a:xfrm>
-            <a:off x="640080" y="1554480"/>
-            <a:ext cx="10972800" cy="4572000"/>
+            <a:off x="640080" y="1920240"/>
+            <a:ext cx="10881360" cy="4572000"/>
           </a:xfrm>
           <a:prstGeom prst="rect">
             <a:avLst/>
@@ -10646,7 +13890,7 @@
                 <a:spcPct val="105000"/>
               </a:lnSpc>
               <a:spcAft>
-                <a:spcPts val="1800"/>
+                <a:spcPts val="3000"/>
               </a:spcAft>
             </a:pPr>
             <a:r>
@@ -10665,7 +13909,7 @@
                 <a:spcPct val="105000"/>
               </a:lnSpc>
               <a:spcAft>
-                <a:spcPts val="1800"/>
+                <a:spcPts val="3000"/>
               </a:spcAft>
             </a:pPr>
             <a:r>
@@ -10684,7 +13928,7 @@
                 <a:spcPct val="105000"/>
               </a:lnSpc>
               <a:spcAft>
-                <a:spcPts val="1800"/>
+                <a:spcPts val="3000"/>
               </a:spcAft>
             </a:pPr>
             <a:r>
@@ -10703,7 +13947,7 @@
                 <a:spcPct val="105000"/>
               </a:lnSpc>
               <a:spcAft>
-                <a:spcPts val="1800"/>
+                <a:spcPts val="3000"/>
               </a:spcAft>
             </a:pPr>
             <a:r>
@@ -10720,14 +13964,102 @@
       </p:sp>
       <p:sp>
         <p:nvSpPr>
-          <p:cNvPr id="7" name="TextBox 6"/>
+          <p:cNvPr id="7" name="Rectangle 6"/>
+          <p:cNvSpPr/>
+          <p:nvPr/>
+        </p:nvSpPr>
+        <p:spPr>
+          <a:xfrm>
+            <a:off x="0" y="5779008"/>
+            <a:ext cx="12191695" cy="566928"/>
+          </a:xfrm>
+          <a:prstGeom prst="rect">
+            <a:avLst/>
+          </a:prstGeom>
+          <a:solidFill>
+            <a:srgbClr val="F2F4F7"/>
+          </a:solidFill>
+          <a:ln>
+            <a:noFill/>
+          </a:ln>
+          <a:effectLst/>
+        </p:spPr>
+        <p:style>
+          <a:lnRef idx="1">
+            <a:schemeClr val="accent1"/>
+          </a:lnRef>
+          <a:fillRef idx="3">
+            <a:schemeClr val="accent1"/>
+          </a:fillRef>
+          <a:effectRef idx="2">
+            <a:schemeClr val="accent1"/>
+          </a:effectRef>
+          <a:fontRef idx="minor">
+            <a:schemeClr val="lt1"/>
+          </a:fontRef>
+        </p:style>
+        <p:txBody>
+          <a:bodyPr rtlCol="0" anchor="ctr"/>
+          <a:lstStyle/>
+          <a:p>
+            <a:pPr algn="ctr"/>
+          </a:p>
+        </p:txBody>
+      </p:sp>
+      <p:sp>
+        <p:nvSpPr>
+          <p:cNvPr id="8" name="Rectangle 7"/>
+          <p:cNvSpPr/>
+          <p:nvPr/>
+        </p:nvSpPr>
+        <p:spPr>
+          <a:xfrm>
+            <a:off x="0" y="5779008"/>
+            <a:ext cx="128016" cy="566928"/>
+          </a:xfrm>
+          <a:prstGeom prst="rect">
+            <a:avLst/>
+          </a:prstGeom>
+          <a:solidFill>
+            <a:srgbClr val="C08A2B"/>
+          </a:solidFill>
+          <a:ln>
+            <a:noFill/>
+          </a:ln>
+          <a:effectLst/>
+        </p:spPr>
+        <p:style>
+          <a:lnRef idx="1">
+            <a:schemeClr val="accent1"/>
+          </a:lnRef>
+          <a:fillRef idx="3">
+            <a:schemeClr val="accent1"/>
+          </a:fillRef>
+          <a:effectRef idx="2">
+            <a:schemeClr val="accent1"/>
+          </a:effectRef>
+          <a:fontRef idx="minor">
+            <a:schemeClr val="lt1"/>
+          </a:fontRef>
+        </p:style>
+        <p:txBody>
+          <a:bodyPr rtlCol="0" anchor="ctr"/>
+          <a:lstStyle/>
+          <a:p>
+            <a:pPr algn="ctr"/>
+          </a:p>
+        </p:txBody>
+      </p:sp>
+      <p:sp>
+        <p:nvSpPr>
+          <p:cNvPr id="9" name="TextBox 8"/>
           <p:cNvSpPr txBox="1"/>
           <p:nvPr/>
         </p:nvSpPr>
         <p:spPr>
           <a:xfrm>
-            <a:off x="640080" y="5989320"/>
-            <a:ext cx="10972800" cy="731520"/>
+            <a:off x="566928" y="5916168"/>
+            <a:ext cx="11064240" cy="457200"/>
           </a:xfrm>
           <a:prstGeom prst="rect">
             <a:avLst/>
@@ -10746,13 +14078,96 @@
               </a:lnSpc>
             </a:pPr>
             <a:r>
-              <a:rPr sz="1500" b="1" i="1">
+              <a:rPr sz="1500" b="0" i="1">
                 <a:solidFill>
                   <a:srgbClr val="0F2A43"/>
                 </a:solidFill>
                 <a:latin typeface="Times New Roman"/>
               </a:rPr>
-              <a:t>So the question is institutional, not just moral: can sovereign systems coordinate fast enough?</a:t>
+              <a:t>The question is institutional, not just moral: can sovereign systems coordinate fast enough?</a:t>
+            </a:r>
+          </a:p>
+        </p:txBody>
+      </p:sp>
+      <p:sp>
+        <p:nvSpPr>
+          <p:cNvPr id="10" name="Rectangle 9"/>
+          <p:cNvSpPr/>
+          <p:nvPr/>
+        </p:nvSpPr>
+        <p:spPr>
+          <a:xfrm>
+            <a:off x="548640" y="6583680"/>
+            <a:ext cx="411480" cy="32004"/>
+          </a:xfrm>
+          <a:prstGeom prst="rect">
+            <a:avLst/>
+          </a:prstGeom>
+          <a:solidFill>
+            <a:srgbClr val="C08A2B"/>
+          </a:solidFill>
+          <a:ln>
+            <a:noFill/>
+          </a:ln>
+          <a:effectLst/>
+        </p:spPr>
+        <p:style>
+          <a:lnRef idx="1">
+            <a:schemeClr val="accent1"/>
+          </a:lnRef>
+          <a:fillRef idx="3">
+            <a:schemeClr val="accent1"/>
+          </a:fillRef>
+          <a:effectRef idx="2">
+            <a:schemeClr val="accent1"/>
+          </a:effectRef>
+          <a:fontRef idx="minor">
+            <a:schemeClr val="lt1"/>
+          </a:fontRef>
+        </p:style>
+        <p:txBody>
+          <a:bodyPr rtlCol="0" anchor="ctr"/>
+          <a:lstStyle/>
+          <a:p>
+            <a:pPr algn="ctr"/>
+          </a:p>
+        </p:txBody>
+      </p:sp>
+      <p:sp>
+        <p:nvSpPr>
+          <p:cNvPr id="11" name="TextBox 10"/>
+          <p:cNvSpPr txBox="1"/>
+          <p:nvPr/>
+        </p:nvSpPr>
+        <p:spPr>
+          <a:xfrm>
+            <a:off x="10424160" y="6419088"/>
+            <a:ext cx="1216152" cy="274320"/>
+          </a:xfrm>
+          <a:prstGeom prst="rect">
+            <a:avLst/>
+          </a:prstGeom>
+          <a:noFill/>
+        </p:spPr>
+        <p:txBody>
+          <a:bodyPr wrap="square">
+            <a:spAutoFit/>
+          </a:bodyPr>
+          <a:lstStyle/>
+          <a:p>
+            <a:pPr algn="r">
+              <a:lnSpc>
+                <a:spcPct val="100000"/>
+              </a:lnSpc>
+            </a:pPr>
+            <a:r>
+              <a:rPr sz="1100" b="0" i="0">
+                <a:solidFill>
+                  <a:srgbClr val="6B7682"/>
+                </a:solidFill>
+                <a:latin typeface="Times New Roman"/>
+              </a:rPr>
+              <a:t>08 / 20</a:t>
             </a:r>
           </a:p>
         </p:txBody>
@@ -10957,8 +14372,8 @@
         </p:nvSpPr>
         <p:spPr>
           <a:xfrm>
-            <a:off x="640080" y="1554480"/>
-            <a:ext cx="10972800" cy="4572000"/>
+            <a:off x="640080" y="1874519"/>
+            <a:ext cx="10881360" cy="4572000"/>
           </a:xfrm>
           <a:prstGeom prst="rect">
             <a:avLst/>
@@ -10976,7 +14391,7 @@
                 <a:spcPct val="105000"/>
               </a:lnSpc>
               <a:spcAft>
-                <a:spcPts val="1600"/>
+                <a:spcPts val="2800"/>
               </a:spcAft>
             </a:pPr>
             <a:r>
@@ -11004,7 +14419,7 @@
                 <a:spcPct val="105000"/>
               </a:lnSpc>
               <a:spcAft>
-                <a:spcPts val="1600"/>
+                <a:spcPts val="2800"/>
               </a:spcAft>
             </a:pPr>
             <a:r>
@@ -11023,7 +14438,7 @@
                 <a:spcPct val="105000"/>
               </a:lnSpc>
               <a:spcAft>
-                <a:spcPts val="1600"/>
+                <a:spcPts val="2800"/>
               </a:spcAft>
             </a:pPr>
             <a:r>
@@ -11051,7 +14466,7 @@
                 <a:spcPct val="105000"/>
               </a:lnSpc>
               <a:spcAft>
-                <a:spcPts val="1600"/>
+                <a:spcPts val="2800"/>
               </a:spcAft>
             </a:pPr>
             <a:r>
@@ -11070,7 +14485,7 @@
                 <a:spcPct val="105000"/>
               </a:lnSpc>
               <a:spcAft>
-                <a:spcPts val="1600"/>
+                <a:spcPts val="2800"/>
               </a:spcAft>
             </a:pPr>
             <a:r>
@@ -11087,14 +14502,102 @@
       </p:sp>
       <p:sp>
         <p:nvSpPr>
-          <p:cNvPr id="7" name="TextBox 6"/>
+          <p:cNvPr id="7" name="Rectangle 6"/>
+          <p:cNvSpPr/>
+          <p:nvPr/>
+        </p:nvSpPr>
+        <p:spPr>
+          <a:xfrm>
+            <a:off x="0" y="5779008"/>
+            <a:ext cx="12191695" cy="566928"/>
+          </a:xfrm>
+          <a:prstGeom prst="rect">
+            <a:avLst/>
+          </a:prstGeom>
+          <a:solidFill>
+            <a:srgbClr val="F2F4F7"/>
+          </a:solidFill>
+          <a:ln>
+            <a:noFill/>
+          </a:ln>
+          <a:effectLst/>
+        </p:spPr>
+        <p:style>
+          <a:lnRef idx="1">
+            <a:schemeClr val="accent1"/>
+          </a:lnRef>
+          <a:fillRef idx="3">
+            <a:schemeClr val="accent1"/>
+          </a:fillRef>
+          <a:effectRef idx="2">
+            <a:schemeClr val="accent1"/>
+          </a:effectRef>
+          <a:fontRef idx="minor">
+            <a:schemeClr val="lt1"/>
+          </a:fontRef>
+        </p:style>
+        <p:txBody>
+          <a:bodyPr rtlCol="0" anchor="ctr"/>
+          <a:lstStyle/>
+          <a:p>
+            <a:pPr algn="ctr"/>
+          </a:p>
+        </p:txBody>
+      </p:sp>
+      <p:sp>
+        <p:nvSpPr>
+          <p:cNvPr id="8" name="Rectangle 7"/>
+          <p:cNvSpPr/>
+          <p:nvPr/>
+        </p:nvSpPr>
+        <p:spPr>
+          <a:xfrm>
+            <a:off x="0" y="5779008"/>
+            <a:ext cx="128016" cy="566928"/>
+          </a:xfrm>
+          <a:prstGeom prst="rect">
+            <a:avLst/>
+          </a:prstGeom>
+          <a:solidFill>
+            <a:srgbClr val="C08A2B"/>
+          </a:solidFill>
+          <a:ln>
+            <a:noFill/>
+          </a:ln>
+          <a:effectLst/>
+        </p:spPr>
+        <p:style>
+          <a:lnRef idx="1">
+            <a:schemeClr val="accent1"/>
+          </a:lnRef>
+          <a:fillRef idx="3">
+            <a:schemeClr val="accent1"/>
+          </a:fillRef>
+          <a:effectRef idx="2">
+            <a:schemeClr val="accent1"/>
+          </a:effectRef>
+          <a:fontRef idx="minor">
+            <a:schemeClr val="lt1"/>
+          </a:fontRef>
+        </p:style>
+        <p:txBody>
+          <a:bodyPr rtlCol="0" anchor="ctr"/>
+          <a:lstStyle/>
+          <a:p>
+            <a:pPr algn="ctr"/>
+          </a:p>
+        </p:txBody>
+      </p:sp>
+      <p:sp>
+        <p:nvSpPr>
+          <p:cNvPr id="9" name="TextBox 8"/>
           <p:cNvSpPr txBox="1"/>
           <p:nvPr/>
         </p:nvSpPr>
         <p:spPr>
           <a:xfrm>
-            <a:off x="640080" y="5989320"/>
-            <a:ext cx="10972800" cy="731520"/>
+            <a:off x="566928" y="5916168"/>
+            <a:ext cx="11064240" cy="457200"/>
           </a:xfrm>
           <a:prstGeom prst="rect">
             <a:avLst/>
@@ -11120,6 +14623,89 @@
                 <a:latin typeface="Times New Roman"/>
               </a:rPr>
               <a:t>It gives 190+ states a shared vocabulary — a precondition for cooperation.</a:t>
+            </a:r>
+          </a:p>
+        </p:txBody>
+      </p:sp>
+      <p:sp>
+        <p:nvSpPr>
+          <p:cNvPr id="10" name="Rectangle 9"/>
+          <p:cNvSpPr/>
+          <p:nvPr/>
+        </p:nvSpPr>
+        <p:spPr>
+          <a:xfrm>
+            <a:off x="548640" y="6583680"/>
+            <a:ext cx="411480" cy="32004"/>
+          </a:xfrm>
+          <a:prstGeom prst="rect">
+            <a:avLst/>
+          </a:prstGeom>
+          <a:solidFill>
+            <a:srgbClr val="C08A2B"/>
+          </a:solidFill>
+          <a:ln>
+            <a:noFill/>
+          </a:ln>
+          <a:effectLst/>
+        </p:spPr>
+        <p:style>
+          <a:lnRef idx="1">
+            <a:schemeClr val="accent1"/>
+          </a:lnRef>
+          <a:fillRef idx="3">
+            <a:schemeClr val="accent1"/>
+          </a:fillRef>
+          <a:effectRef idx="2">
+            <a:schemeClr val="accent1"/>
+          </a:effectRef>
+          <a:fontRef idx="minor">
+            <a:schemeClr val="lt1"/>
+          </a:fontRef>
+        </p:style>
+        <p:txBody>
+          <a:bodyPr rtlCol="0" anchor="ctr"/>
+          <a:lstStyle/>
+          <a:p>
+            <a:pPr algn="ctr"/>
+          </a:p>
+        </p:txBody>
+      </p:sp>
+      <p:sp>
+        <p:nvSpPr>
+          <p:cNvPr id="11" name="TextBox 10"/>
+          <p:cNvSpPr txBox="1"/>
+          <p:nvPr/>
+        </p:nvSpPr>
+        <p:spPr>
+          <a:xfrm>
+            <a:off x="10424160" y="6419088"/>
+            <a:ext cx="1216152" cy="274320"/>
+          </a:xfrm>
+          <a:prstGeom prst="rect">
+            <a:avLst/>
+          </a:prstGeom>
+          <a:noFill/>
+        </p:spPr>
+        <p:txBody>
+          <a:bodyPr wrap="square">
+            <a:spAutoFit/>
+          </a:bodyPr>
+          <a:lstStyle/>
+          <a:p>
+            <a:pPr algn="r">
+              <a:lnSpc>
+                <a:spcPct val="100000"/>
+              </a:lnSpc>
+            </a:pPr>
+            <a:r>
+              <a:rPr sz="1100" b="0" i="0">
+                <a:solidFill>
+                  <a:srgbClr val="6B7682"/>
+                </a:solidFill>
+                <a:latin typeface="Times New Roman"/>
+              </a:rPr>
+              <a:t>09 / 20</a:t>
             </a:r>
           </a:p>
         </p:txBody>

--- a/Epstein_Transnational_Justice.pptx
+++ b/Epstein_Transnational_Justice.pptx
@@ -3231,7 +3231,7 @@
               </a:lnSpc>
             </a:pPr>
             <a:r>
-              <a:rPr sz="1600" b="1" i="0">
+              <a:rPr sz="1760" b="1" i="0">
                 <a:solidFill>
                   <a:srgbClr val="C08A2B"/>
                 </a:solidFill>
@@ -3270,7 +3270,7 @@
               </a:lnSpc>
             </a:pPr>
             <a:r>
-              <a:rPr sz="4000" b="1" i="0">
+              <a:rPr sz="4400" b="1" i="0">
                 <a:solidFill>
                   <a:srgbClr val="FFFFFF"/>
                 </a:solidFill>
@@ -3353,7 +3353,7 @@
               </a:lnSpc>
             </a:pPr>
             <a:r>
-              <a:rPr sz="1800" b="0" i="1">
+              <a:rPr sz="1980" b="0" i="1">
                 <a:solidFill>
                   <a:srgbClr val="F2F4F7"/>
                 </a:solidFill>
@@ -3392,7 +3392,7 @@
               </a:lnSpc>
             </a:pPr>
             <a:r>
-              <a:rPr sz="1300" b="0" i="0">
+              <a:rPr sz="1430" b="0" i="0">
                 <a:solidFill>
                   <a:srgbClr val="909CAA"/>
                 </a:solidFill>
@@ -3545,7 +3545,7 @@
               </a:lnSpc>
             </a:pPr>
             <a:r>
-              <a:rPr sz="1300" b="1" i="0">
+              <a:rPr sz="1430" b="1" i="0">
                 <a:solidFill>
                   <a:srgbClr val="C08A2B"/>
                 </a:solidFill>
@@ -3584,7 +3584,7 @@
               </a:lnSpc>
             </a:pPr>
             <a:r>
-              <a:rPr sz="2600" b="1" i="0">
+              <a:rPr sz="2860" b="1" i="0">
                 <a:solidFill>
                   <a:srgbClr val="FFFFFF"/>
                 </a:solidFill>
@@ -3626,7 +3626,7 @@
               </a:spcAft>
             </a:pPr>
             <a:r>
-              <a:rPr sz="1900" b="1">
+              <a:rPr sz="2090" b="1">
                 <a:solidFill>
                   <a:srgbClr val="0F2A43"/>
                 </a:solidFill>
@@ -3635,7 +3635,7 @@
               <a:t>•  Parent treaty: </a:t>
             </a:r>
             <a:r>
-              <a:rPr sz="1900">
+              <a:rPr sz="2090">
                 <a:solidFill>
                   <a:srgbClr val="334455"/>
                 </a:solidFill>
@@ -3654,7 +3654,7 @@
               </a:spcAft>
             </a:pPr>
             <a:r>
-              <a:rPr sz="1900">
+              <a:rPr sz="2090">
                 <a:solidFill>
                   <a:srgbClr val="334455"/>
                 </a:solidFill>
@@ -3673,7 +3673,7 @@
               </a:spcAft>
             </a:pPr>
             <a:r>
-              <a:rPr sz="1900">
+              <a:rPr sz="2090">
                 <a:solidFill>
                   <a:srgbClr val="334455"/>
                 </a:solidFill>
@@ -3692,7 +3692,7 @@
               </a:spcAft>
             </a:pPr>
             <a:r>
-              <a:rPr sz="1900">
+              <a:rPr sz="2090">
                 <a:solidFill>
                   <a:srgbClr val="334455"/>
                 </a:solidFill>
@@ -3711,7 +3711,7 @@
               </a:spcAft>
             </a:pPr>
             <a:r>
-              <a:rPr sz="1900">
+              <a:rPr sz="2090">
                 <a:solidFill>
                   <a:srgbClr val="334455"/>
                 </a:solidFill>
@@ -3838,7 +3838,7 @@
               </a:lnSpc>
             </a:pPr>
             <a:r>
-              <a:rPr sz="1500" b="0" i="1">
+              <a:rPr sz="1650" b="0" i="1">
                 <a:solidFill>
                   <a:srgbClr val="0F2A43"/>
                 </a:solidFill>
@@ -3921,7 +3921,7 @@
               </a:lnSpc>
             </a:pPr>
             <a:r>
-              <a:rPr sz="1100" b="0" i="0">
+              <a:rPr sz="1210" b="0" i="0">
                 <a:solidFill>
                   <a:srgbClr val="6B7682"/>
                 </a:solidFill>
@@ -4074,7 +4074,7 @@
               </a:lnSpc>
             </a:pPr>
             <a:r>
-              <a:rPr sz="1300" b="1" i="0">
+              <a:rPr sz="1430" b="1" i="0">
                 <a:solidFill>
                   <a:srgbClr val="C08A2B"/>
                 </a:solidFill>
@@ -4113,7 +4113,7 @@
               </a:lnSpc>
             </a:pPr>
             <a:r>
-              <a:rPr sz="2600" b="1" i="0">
+              <a:rPr sz="2860" b="1" i="0">
                 <a:solidFill>
                   <a:srgbClr val="FFFFFF"/>
                 </a:solidFill>
@@ -4155,7 +4155,7 @@
               </a:spcAft>
             </a:pPr>
             <a:r>
-              <a:rPr sz="1900" b="1">
+              <a:rPr sz="2090" b="1">
                 <a:solidFill>
                   <a:srgbClr val="0F2A43"/>
                 </a:solidFill>
@@ -4164,7 +4164,7 @@
               <a:t>•  Jurisdiction: </a:t>
             </a:r>
             <a:r>
-              <a:rPr sz="1900">
+              <a:rPr sz="2090">
                 <a:solidFill>
                   <a:srgbClr val="334455"/>
                 </a:solidFill>
@@ -4183,7 +4183,7 @@
               </a:spcAft>
             </a:pPr>
             <a:r>
-              <a:rPr sz="1900" b="1">
+              <a:rPr sz="2090" b="1">
                 <a:solidFill>
                   <a:srgbClr val="0F2A43"/>
                 </a:solidFill>
@@ -4192,7 +4192,7 @@
               <a:t>•  Concurrent claims: </a:t>
             </a:r>
             <a:r>
-              <a:rPr sz="1900">
+              <a:rPr sz="2090">
                 <a:solidFill>
                   <a:srgbClr val="334455"/>
                 </a:solidFill>
@@ -4211,7 +4211,7 @@
               </a:spcAft>
             </a:pPr>
             <a:r>
-              <a:rPr sz="1900" b="1">
+              <a:rPr sz="2090" b="1">
                 <a:solidFill>
                   <a:srgbClr val="0F2A43"/>
                 </a:solidFill>
@@ -4220,7 +4220,7 @@
               <a:t>•  Extradition: </a:t>
             </a:r>
             <a:r>
-              <a:rPr sz="1900">
+              <a:rPr sz="2090">
                 <a:solidFill>
                   <a:srgbClr val="334455"/>
                 </a:solidFill>
@@ -4239,7 +4239,7 @@
               </a:spcAft>
             </a:pPr>
             <a:r>
-              <a:rPr sz="1900" b="1">
+              <a:rPr sz="2090" b="1">
                 <a:solidFill>
                   <a:srgbClr val="0F2A43"/>
                 </a:solidFill>
@@ -4248,7 +4248,7 @@
               <a:t>•  MLATs: </a:t>
             </a:r>
             <a:r>
-              <a:rPr sz="1900">
+              <a:rPr sz="2090">
                 <a:solidFill>
                   <a:srgbClr val="334455"/>
                 </a:solidFill>
@@ -4267,7 +4267,7 @@
               </a:spcAft>
             </a:pPr>
             <a:r>
-              <a:rPr sz="1900" b="1">
+              <a:rPr sz="2090" b="1">
                 <a:solidFill>
                   <a:srgbClr val="0F2A43"/>
                 </a:solidFill>
@@ -4276,7 +4276,7 @@
               <a:t>•  The friction: </a:t>
             </a:r>
             <a:r>
-              <a:rPr sz="1900">
+              <a:rPr sz="2090">
                 <a:solidFill>
                   <a:srgbClr val="334455"/>
                 </a:solidFill>
@@ -4403,7 +4403,7 @@
               </a:lnSpc>
             </a:pPr>
             <a:r>
-              <a:rPr sz="1500" b="0" i="1">
+              <a:rPr sz="1650" b="0" i="1">
                 <a:solidFill>
                   <a:srgbClr val="0F2A43"/>
                 </a:solidFill>
@@ -4486,7 +4486,7 @@
               </a:lnSpc>
             </a:pPr>
             <a:r>
-              <a:rPr sz="1100" b="0" i="0">
+              <a:rPr sz="1210" b="0" i="0">
                 <a:solidFill>
                   <a:srgbClr val="6B7682"/>
                 </a:solidFill>
@@ -4639,7 +4639,7 @@
               </a:lnSpc>
             </a:pPr>
             <a:r>
-              <a:rPr sz="1300" b="1" i="0">
+              <a:rPr sz="1430" b="1" i="0">
                 <a:solidFill>
                   <a:srgbClr val="C08A2B"/>
                 </a:solidFill>
@@ -4678,7 +4678,7 @@
               </a:lnSpc>
             </a:pPr>
             <a:r>
-              <a:rPr sz="2600" b="1" i="0">
+              <a:rPr sz="2860" b="1" i="0">
                 <a:solidFill>
                   <a:srgbClr val="FFFFFF"/>
                 </a:solidFill>
@@ -4720,7 +4720,7 @@
               </a:spcAft>
             </a:pPr>
             <a:r>
-              <a:rPr sz="1900" b="1">
+              <a:rPr sz="2090" b="1">
                 <a:solidFill>
                   <a:srgbClr val="0F2A43"/>
                 </a:solidFill>
@@ -4729,7 +4729,7 @@
               <a:t>•  Ghislaine Maxwell (UK): </a:t>
             </a:r>
             <a:r>
-              <a:rPr sz="1900">
+              <a:rPr sz="2090">
                 <a:solidFill>
                   <a:srgbClr val="334455"/>
                 </a:solidFill>
@@ -4748,7 +4748,7 @@
               </a:spcAft>
             </a:pPr>
             <a:r>
-              <a:rPr sz="1900" b="1">
+              <a:rPr sz="2090" b="1">
                 <a:solidFill>
                   <a:srgbClr val="0F2A43"/>
                 </a:solidFill>
@@ -4757,7 +4757,7 @@
               <a:t>•  Prince Andrew: </a:t>
             </a:r>
             <a:r>
-              <a:rPr sz="1900">
+              <a:rPr sz="2090">
                 <a:solidFill>
                   <a:srgbClr val="334455"/>
                 </a:solidFill>
@@ -4776,7 +4776,7 @@
               </a:spcAft>
             </a:pPr>
             <a:r>
-              <a:rPr sz="1900">
+              <a:rPr sz="2090">
                 <a:solidFill>
                   <a:srgbClr val="334455"/>
                 </a:solidFill>
@@ -4795,7 +4795,7 @@
               </a:spcAft>
             </a:pPr>
             <a:r>
-              <a:rPr sz="1900">
+              <a:rPr sz="2090">
                 <a:solidFill>
                   <a:srgbClr val="334455"/>
                 </a:solidFill>
@@ -4922,7 +4922,7 @@
               </a:lnSpc>
             </a:pPr>
             <a:r>
-              <a:rPr sz="1500" b="0" i="1">
+              <a:rPr sz="1650" b="0" i="1">
                 <a:solidFill>
                   <a:srgbClr val="0F2A43"/>
                 </a:solidFill>
@@ -5005,7 +5005,7 @@
               </a:lnSpc>
             </a:pPr>
             <a:r>
-              <a:rPr sz="1100" b="0" i="0">
+              <a:rPr sz="1210" b="0" i="0">
                 <a:solidFill>
                   <a:srgbClr val="6B7682"/>
                 </a:solidFill>
@@ -5070,7 +5070,7 @@
               </a:lnSpc>
             </a:pPr>
             <a:r>
-              <a:rPr sz="21000" b="1" i="0">
+              <a:rPr sz="23100" b="1" i="0">
                 <a:solidFill>
                   <a:srgbClr val="1C3A56"/>
                 </a:solidFill>
@@ -5109,7 +5109,7 @@
               </a:lnSpc>
             </a:pPr>
             <a:r>
-              <a:rPr sz="1300" b="1" i="0">
+              <a:rPr sz="1430" b="1" i="0">
                 <a:solidFill>
                   <a:srgbClr val="C08A2B"/>
                 </a:solidFill>
@@ -5192,7 +5192,7 @@
               </a:lnSpc>
             </a:pPr>
             <a:r>
-              <a:rPr sz="3300" b="1" i="0">
+              <a:rPr sz="3630" b="1" i="0">
                 <a:solidFill>
                   <a:srgbClr val="FFFFFF"/>
                 </a:solidFill>
@@ -5208,7 +5208,7 @@
               </a:lnSpc>
             </a:pPr>
             <a:r>
-              <a:rPr sz="3300" b="1" i="0">
+              <a:rPr sz="3630" b="1" i="0">
                 <a:solidFill>
                   <a:srgbClr val="FFFFFF"/>
                 </a:solidFill>
@@ -5247,7 +5247,7 @@
               </a:lnSpc>
             </a:pPr>
             <a:r>
-              <a:rPr sz="1800" b="0" i="1">
+              <a:rPr sz="1980" b="0" i="1">
                 <a:solidFill>
                   <a:srgbClr val="F2F4F7"/>
                 </a:solidFill>
@@ -5330,7 +5330,7 @@
               </a:lnSpc>
             </a:pPr>
             <a:r>
-              <a:rPr sz="1100" b="0" i="0">
+              <a:rPr sz="1210" b="0" i="0">
                 <a:solidFill>
                   <a:srgbClr val="909CAA"/>
                 </a:solidFill>
@@ -5483,7 +5483,7 @@
               </a:lnSpc>
             </a:pPr>
             <a:r>
-              <a:rPr sz="1300" b="1" i="0">
+              <a:rPr sz="1430" b="1" i="0">
                 <a:solidFill>
                   <a:srgbClr val="C08A2B"/>
                 </a:solidFill>
@@ -5522,7 +5522,7 @@
               </a:lnSpc>
             </a:pPr>
             <a:r>
-              <a:rPr sz="2600" b="1" i="0">
+              <a:rPr sz="2860" b="1" i="0">
                 <a:solidFill>
                   <a:srgbClr val="FFFFFF"/>
                 </a:solidFill>
@@ -5564,7 +5564,7 @@
               </a:spcAft>
             </a:pPr>
             <a:r>
-              <a:rPr sz="1900">
+              <a:rPr sz="2090">
                 <a:solidFill>
                   <a:srgbClr val="334455"/>
                 </a:solidFill>
@@ -5583,7 +5583,7 @@
               </a:spcAft>
             </a:pPr>
             <a:r>
-              <a:rPr sz="1900">
+              <a:rPr sz="2090">
                 <a:solidFill>
                   <a:srgbClr val="334455"/>
                 </a:solidFill>
@@ -5602,7 +5602,7 @@
               </a:spcAft>
             </a:pPr>
             <a:r>
-              <a:rPr sz="1900">
+              <a:rPr sz="2090">
                 <a:solidFill>
                   <a:srgbClr val="334455"/>
                 </a:solidFill>
@@ -5621,7 +5621,7 @@
               </a:spcAft>
             </a:pPr>
             <a:r>
-              <a:rPr sz="1900">
+              <a:rPr sz="2090">
                 <a:solidFill>
                   <a:srgbClr val="334455"/>
                 </a:solidFill>
@@ -5640,7 +5640,7 @@
               </a:spcAft>
             </a:pPr>
             <a:r>
-              <a:rPr sz="1900">
+              <a:rPr sz="2090">
                 <a:solidFill>
                   <a:srgbClr val="334455"/>
                 </a:solidFill>
@@ -5767,7 +5767,7 @@
               </a:lnSpc>
             </a:pPr>
             <a:r>
-              <a:rPr sz="1500" b="0" i="1">
+              <a:rPr sz="1650" b="0" i="1">
                 <a:solidFill>
                   <a:srgbClr val="0F2A43"/>
                 </a:solidFill>
@@ -5850,7 +5850,7 @@
               </a:lnSpc>
             </a:pPr>
             <a:r>
-              <a:rPr sz="1100" b="0" i="0">
+              <a:rPr sz="1210" b="0" i="0">
                 <a:solidFill>
                   <a:srgbClr val="6B7682"/>
                 </a:solidFill>
@@ -6003,7 +6003,7 @@
               </a:lnSpc>
             </a:pPr>
             <a:r>
-              <a:rPr sz="1300" b="1" i="0">
+              <a:rPr sz="1430" b="1" i="0">
                 <a:solidFill>
                   <a:srgbClr val="C08A2B"/>
                 </a:solidFill>
@@ -6042,7 +6042,7 @@
               </a:lnSpc>
             </a:pPr>
             <a:r>
-              <a:rPr sz="2600" b="1" i="0">
+              <a:rPr sz="2860" b="1" i="0">
                 <a:solidFill>
                   <a:srgbClr val="FFFFFF"/>
                 </a:solidFill>
@@ -6169,7 +6169,7 @@
               </a:lnSpc>
             </a:pPr>
             <a:r>
-              <a:rPr sz="1600" b="1" i="0">
+              <a:rPr sz="1760" b="1" i="0">
                 <a:solidFill>
                   <a:srgbClr val="C08A2B"/>
                 </a:solidFill>
@@ -6211,7 +6211,7 @@
               </a:spcAft>
             </a:pPr>
             <a:r>
-              <a:rPr sz="1500">
+              <a:rPr sz="1650">
                 <a:solidFill>
                   <a:srgbClr val="334455"/>
                 </a:solidFill>
@@ -6230,7 +6230,7 @@
               </a:spcAft>
             </a:pPr>
             <a:r>
-              <a:rPr sz="1500">
+              <a:rPr sz="1650">
                 <a:solidFill>
                   <a:srgbClr val="334455"/>
                 </a:solidFill>
@@ -6249,7 +6249,7 @@
               </a:spcAft>
             </a:pPr>
             <a:r>
-              <a:rPr sz="1500">
+              <a:rPr sz="1650">
                 <a:solidFill>
                   <a:srgbClr val="334455"/>
                 </a:solidFill>
@@ -6268,7 +6268,7 @@
               </a:spcAft>
             </a:pPr>
             <a:r>
-              <a:rPr sz="1500">
+              <a:rPr sz="1650">
                 <a:solidFill>
                   <a:srgbClr val="334455"/>
                 </a:solidFill>
@@ -6395,7 +6395,7 @@
               </a:lnSpc>
             </a:pPr>
             <a:r>
-              <a:rPr sz="1600" b="1" i="0">
+              <a:rPr sz="1760" b="1" i="0">
                 <a:solidFill>
                   <a:srgbClr val="C08A2B"/>
                 </a:solidFill>
@@ -6437,7 +6437,7 @@
               </a:spcAft>
             </a:pPr>
             <a:r>
-              <a:rPr sz="1500">
+              <a:rPr sz="1650">
                 <a:solidFill>
                   <a:srgbClr val="F2F4F7"/>
                 </a:solidFill>
@@ -6456,7 +6456,7 @@
               </a:spcAft>
             </a:pPr>
             <a:r>
-              <a:rPr sz="1500">
+              <a:rPr sz="1650">
                 <a:solidFill>
                   <a:srgbClr val="F2F4F7"/>
                 </a:solidFill>
@@ -6475,7 +6475,7 @@
               </a:spcAft>
             </a:pPr>
             <a:r>
-              <a:rPr sz="1500">
+              <a:rPr sz="1650">
                 <a:solidFill>
                   <a:srgbClr val="F2F4F7"/>
                 </a:solidFill>
@@ -6494,7 +6494,7 @@
               </a:spcAft>
             </a:pPr>
             <a:r>
-              <a:rPr sz="1500">
+              <a:rPr sz="1650">
                 <a:solidFill>
                   <a:srgbClr val="F2F4F7"/>
                 </a:solidFill>
@@ -6621,7 +6621,7 @@
               </a:lnSpc>
             </a:pPr>
             <a:r>
-              <a:rPr sz="1500" b="0" i="1">
+              <a:rPr sz="1650" b="0" i="1">
                 <a:solidFill>
                   <a:srgbClr val="0F2A43"/>
                 </a:solidFill>
@@ -6704,7 +6704,7 @@
               </a:lnSpc>
             </a:pPr>
             <a:r>
-              <a:rPr sz="1100" b="0" i="0">
+              <a:rPr sz="1210" b="0" i="0">
                 <a:solidFill>
                   <a:srgbClr val="6B7682"/>
                 </a:solidFill>
@@ -6857,7 +6857,7 @@
               </a:lnSpc>
             </a:pPr>
             <a:r>
-              <a:rPr sz="1300" b="1" i="0">
+              <a:rPr sz="1430" b="1" i="0">
                 <a:solidFill>
                   <a:srgbClr val="C08A2B"/>
                 </a:solidFill>
@@ -6896,7 +6896,7 @@
               </a:lnSpc>
             </a:pPr>
             <a:r>
-              <a:rPr sz="2600" b="1" i="0">
+              <a:rPr sz="2860" b="1" i="0">
                 <a:solidFill>
                   <a:srgbClr val="FFFFFF"/>
                 </a:solidFill>
@@ -6938,7 +6938,7 @@
               </a:spcAft>
             </a:pPr>
             <a:r>
-              <a:rPr sz="1900" b="1">
+              <a:rPr sz="2090" b="1">
                 <a:solidFill>
                   <a:srgbClr val="0F2A43"/>
                 </a:solidFill>
@@ -6947,7 +6947,7 @@
               <a:t>•  Adversarial vs inquisitorial: </a:t>
             </a:r>
             <a:r>
-              <a:rPr sz="1900">
+              <a:rPr sz="2090">
                 <a:solidFill>
                   <a:srgbClr val="334455"/>
                 </a:solidFill>
@@ -6966,7 +6966,7 @@
               </a:spcAft>
             </a:pPr>
             <a:r>
-              <a:rPr sz="1900" b="1">
+              <a:rPr sz="2090" b="1">
                 <a:solidFill>
                   <a:srgbClr val="0F2A43"/>
                 </a:solidFill>
@@ -6975,7 +6975,7 @@
               <a:t>•  Victim participation: </a:t>
             </a:r>
             <a:r>
-              <a:rPr sz="1900">
+              <a:rPr sz="2090">
                 <a:solidFill>
                   <a:srgbClr val="334455"/>
                 </a:solidFill>
@@ -6994,7 +6994,7 @@
               </a:spcAft>
             </a:pPr>
             <a:r>
-              <a:rPr sz="1900" b="1">
+              <a:rPr sz="2090" b="1">
                 <a:solidFill>
                   <a:srgbClr val="0F2A43"/>
                 </a:solidFill>
@@ -7003,7 +7003,7 @@
               <a:t>•  Limitation periods: </a:t>
             </a:r>
             <a:r>
-              <a:rPr sz="1900">
+              <a:rPr sz="2090">
                 <a:solidFill>
                   <a:srgbClr val="334455"/>
                 </a:solidFill>
@@ -7022,7 +7022,7 @@
               </a:spcAft>
             </a:pPr>
             <a:r>
-              <a:rPr sz="1900" b="1">
+              <a:rPr sz="2090" b="1">
                 <a:solidFill>
                   <a:srgbClr val="0F2A43"/>
                 </a:solidFill>
@@ -7031,7 +7031,7 @@
               <a:t>•  Plea bargaining: </a:t>
             </a:r>
             <a:r>
-              <a:rPr sz="1900">
+              <a:rPr sz="2090">
                 <a:solidFill>
                   <a:srgbClr val="334455"/>
                 </a:solidFill>
@@ -7158,7 +7158,7 @@
               </a:lnSpc>
             </a:pPr>
             <a:r>
-              <a:rPr sz="1500" b="0" i="1">
+              <a:rPr sz="1650" b="0" i="1">
                 <a:solidFill>
                   <a:srgbClr val="0F2A43"/>
                 </a:solidFill>
@@ -7241,7 +7241,7 @@
               </a:lnSpc>
             </a:pPr>
             <a:r>
-              <a:rPr sz="1100" b="0" i="0">
+              <a:rPr sz="1210" b="0" i="0">
                 <a:solidFill>
                   <a:srgbClr val="6B7682"/>
                 </a:solidFill>
@@ -7306,7 +7306,7 @@
               </a:lnSpc>
             </a:pPr>
             <a:r>
-              <a:rPr sz="21000" b="1" i="0">
+              <a:rPr sz="23100" b="1" i="0">
                 <a:solidFill>
                   <a:srgbClr val="1C3A56"/>
                 </a:solidFill>
@@ -7345,7 +7345,7 @@
               </a:lnSpc>
             </a:pPr>
             <a:r>
-              <a:rPr sz="1300" b="1" i="0">
+              <a:rPr sz="1430" b="1" i="0">
                 <a:solidFill>
                   <a:srgbClr val="C08A2B"/>
                 </a:solidFill>
@@ -7428,7 +7428,7 @@
               </a:lnSpc>
             </a:pPr>
             <a:r>
-              <a:rPr sz="3300" b="1" i="0">
+              <a:rPr sz="3630" b="1" i="0">
                 <a:solidFill>
                   <a:srgbClr val="FFFFFF"/>
                 </a:solidFill>
@@ -7444,7 +7444,7 @@
               </a:lnSpc>
             </a:pPr>
             <a:r>
-              <a:rPr sz="3300" b="1" i="0">
+              <a:rPr sz="3630" b="1" i="0">
                 <a:solidFill>
                   <a:srgbClr val="FFFFFF"/>
                 </a:solidFill>
@@ -7483,7 +7483,7 @@
               </a:lnSpc>
             </a:pPr>
             <a:r>
-              <a:rPr sz="1800" b="0" i="1">
+              <a:rPr sz="1980" b="0" i="1">
                 <a:solidFill>
                   <a:srgbClr val="F2F4F7"/>
                 </a:solidFill>
@@ -7566,7 +7566,7 @@
               </a:lnSpc>
             </a:pPr>
             <a:r>
-              <a:rPr sz="1100" b="0" i="0">
+              <a:rPr sz="1210" b="0" i="0">
                 <a:solidFill>
                   <a:srgbClr val="909CAA"/>
                 </a:solidFill>
@@ -7719,7 +7719,7 @@
               </a:lnSpc>
             </a:pPr>
             <a:r>
-              <a:rPr sz="1300" b="1" i="0">
+              <a:rPr sz="1430" b="1" i="0">
                 <a:solidFill>
                   <a:srgbClr val="C08A2B"/>
                 </a:solidFill>
@@ -7758,7 +7758,7 @@
               </a:lnSpc>
             </a:pPr>
             <a:r>
-              <a:rPr sz="2600" b="1" i="0">
+              <a:rPr sz="2860" b="1" i="0">
                 <a:solidFill>
                   <a:srgbClr val="FFFFFF"/>
                 </a:solidFill>
@@ -7800,7 +7800,7 @@
               </a:spcAft>
             </a:pPr>
             <a:r>
-              <a:rPr sz="1900">
+              <a:rPr sz="2090">
                 <a:solidFill>
                   <a:srgbClr val="334455"/>
                 </a:solidFill>
@@ -7819,7 +7819,7 @@
               </a:spcAft>
             </a:pPr>
             <a:r>
-              <a:rPr sz="1900">
+              <a:rPr sz="2090">
                 <a:solidFill>
                   <a:srgbClr val="334455"/>
                 </a:solidFill>
@@ -7838,7 +7838,7 @@
               </a:spcAft>
             </a:pPr>
             <a:r>
-              <a:rPr sz="1900" b="1">
+              <a:rPr sz="2090" b="1">
                 <a:solidFill>
                   <a:srgbClr val="0F2A43"/>
                 </a:solidFill>
@@ -7847,7 +7847,7 @@
               <a:t>•  Survivors' concern: </a:t>
             </a:r>
             <a:r>
-              <a:rPr sz="1900">
+              <a:rPr sz="2090">
                 <a:solidFill>
                   <a:srgbClr val="334455"/>
                 </a:solidFill>
@@ -7866,7 +7866,7 @@
               </a:spcAft>
             </a:pPr>
             <a:r>
-              <a:rPr sz="1900">
+              <a:rPr sz="2090">
                 <a:solidFill>
                   <a:srgbClr val="334455"/>
                 </a:solidFill>
@@ -7993,7 +7993,7 @@
               </a:lnSpc>
             </a:pPr>
             <a:r>
-              <a:rPr sz="1500" b="0" i="1">
+              <a:rPr sz="1650" b="0" i="1">
                 <a:solidFill>
                   <a:srgbClr val="0F2A43"/>
                 </a:solidFill>
@@ -8076,7 +8076,7 @@
               </a:lnSpc>
             </a:pPr>
             <a:r>
-              <a:rPr sz="1100" b="0" i="0">
+              <a:rPr sz="1210" b="0" i="0">
                 <a:solidFill>
                   <a:srgbClr val="6B7682"/>
                 </a:solidFill>
@@ -8229,7 +8229,7 @@
               </a:lnSpc>
             </a:pPr>
             <a:r>
-              <a:rPr sz="1300" b="1" i="0">
+              <a:rPr sz="1430" b="1" i="0">
                 <a:solidFill>
                   <a:srgbClr val="C08A2B"/>
                 </a:solidFill>
@@ -8268,7 +8268,7 @@
               </a:lnSpc>
             </a:pPr>
             <a:r>
-              <a:rPr sz="2600" b="1" i="0">
+              <a:rPr sz="2860" b="1" i="0">
                 <a:solidFill>
                   <a:srgbClr val="FFFFFF"/>
                 </a:solidFill>
@@ -8310,7 +8310,7 @@
               </a:spcAft>
             </a:pPr>
             <a:r>
-              <a:rPr sz="1800">
+              <a:rPr sz="1980">
                 <a:solidFill>
                   <a:srgbClr val="334455"/>
                 </a:solidFill>
@@ -8329,7 +8329,7 @@
               </a:spcAft>
             </a:pPr>
             <a:r>
-              <a:rPr sz="1800">
+              <a:rPr sz="1980">
                 <a:solidFill>
                   <a:srgbClr val="334455"/>
                 </a:solidFill>
@@ -8348,7 +8348,7 @@
               </a:spcAft>
             </a:pPr>
             <a:r>
-              <a:rPr sz="1800">
+              <a:rPr sz="1980">
                 <a:solidFill>
                   <a:srgbClr val="334455"/>
                 </a:solidFill>
@@ -8367,7 +8367,7 @@
               </a:spcAft>
             </a:pPr>
             <a:r>
-              <a:rPr sz="1800">
+              <a:rPr sz="1980">
                 <a:solidFill>
                   <a:srgbClr val="334455"/>
                 </a:solidFill>
@@ -8494,7 +8494,7 @@
               </a:lnSpc>
             </a:pPr>
             <a:r>
-              <a:rPr sz="1400" b="1" i="0">
+              <a:rPr sz="1540" b="1" i="0">
                 <a:solidFill>
                   <a:srgbClr val="C08A2B"/>
                 </a:solidFill>
@@ -8533,7 +8533,7 @@
               </a:lnSpc>
             </a:pPr>
             <a:r>
-              <a:rPr sz="1500" b="0" i="1">
+              <a:rPr sz="1650" b="0" i="1">
                 <a:solidFill>
                   <a:srgbClr val="334455"/>
                 </a:solidFill>
@@ -8660,7 +8660,7 @@
               </a:lnSpc>
             </a:pPr>
             <a:r>
-              <a:rPr sz="1500" b="0" i="1">
+              <a:rPr sz="1650" b="0" i="1">
                 <a:solidFill>
                   <a:srgbClr val="0F2A43"/>
                 </a:solidFill>
@@ -8743,7 +8743,7 @@
               </a:lnSpc>
             </a:pPr>
             <a:r>
-              <a:rPr sz="1100" b="0" i="0">
+              <a:rPr sz="1210" b="0" i="0">
                 <a:solidFill>
                   <a:srgbClr val="6B7682"/>
                 </a:solidFill>
@@ -8896,7 +8896,7 @@
               </a:lnSpc>
             </a:pPr>
             <a:r>
-              <a:rPr sz="1300" b="1" i="0">
+              <a:rPr sz="1430" b="1" i="0">
                 <a:solidFill>
                   <a:srgbClr val="C08A2B"/>
                 </a:solidFill>
@@ -8935,7 +8935,7 @@
               </a:lnSpc>
             </a:pPr>
             <a:r>
-              <a:rPr sz="2600" b="1" i="0">
+              <a:rPr sz="2860" b="1" i="0">
                 <a:solidFill>
                   <a:srgbClr val="FFFFFF"/>
                 </a:solidFill>
@@ -9062,7 +9062,7 @@
               </a:lnSpc>
             </a:pPr>
             <a:r>
-              <a:rPr sz="1900" b="1" i="1">
+              <a:rPr sz="2090" b="1" i="1">
                 <a:solidFill>
                   <a:srgbClr val="0F2A43"/>
                 </a:solidFill>
@@ -9104,7 +9104,7 @@
               </a:spcAft>
             </a:pPr>
             <a:r>
-              <a:rPr sz="1900">
+              <a:rPr sz="2090">
                 <a:solidFill>
                   <a:srgbClr val="334455"/>
                 </a:solidFill>
@@ -9123,7 +9123,7 @@
               </a:spcAft>
             </a:pPr>
             <a:r>
-              <a:rPr sz="1900">
+              <a:rPr sz="2090">
                 <a:solidFill>
                   <a:srgbClr val="334455"/>
                 </a:solidFill>
@@ -9142,7 +9142,7 @@
               </a:spcAft>
             </a:pPr>
             <a:r>
-              <a:rPr sz="1900">
+              <a:rPr sz="2090">
                 <a:solidFill>
                   <a:srgbClr val="334455"/>
                 </a:solidFill>
@@ -9161,7 +9161,7 @@
               </a:spcAft>
             </a:pPr>
             <a:r>
-              <a:rPr sz="1900">
+              <a:rPr sz="2090">
                 <a:solidFill>
                   <a:srgbClr val="334455"/>
                 </a:solidFill>
@@ -9288,7 +9288,7 @@
               </a:lnSpc>
             </a:pPr>
             <a:r>
-              <a:rPr sz="1500" b="0" i="1">
+              <a:rPr sz="1650" b="0" i="1">
                 <a:solidFill>
                   <a:srgbClr val="0F2A43"/>
                 </a:solidFill>
@@ -9371,7 +9371,7 @@
               </a:lnSpc>
             </a:pPr>
             <a:r>
-              <a:rPr sz="1100" b="0" i="0">
+              <a:rPr sz="1210" b="0" i="0">
                 <a:solidFill>
                   <a:srgbClr val="6B7682"/>
                 </a:solidFill>
@@ -9524,7 +9524,7 @@
               </a:lnSpc>
             </a:pPr>
             <a:r>
-              <a:rPr sz="1300" b="1" i="0">
+              <a:rPr sz="1430" b="1" i="0">
                 <a:solidFill>
                   <a:srgbClr val="C08A2B"/>
                 </a:solidFill>
@@ -9563,7 +9563,7 @@
               </a:lnSpc>
             </a:pPr>
             <a:r>
-              <a:rPr sz="2600" b="1" i="0">
+              <a:rPr sz="2860" b="1" i="0">
                 <a:solidFill>
                   <a:srgbClr val="FFFFFF"/>
                 </a:solidFill>
@@ -9646,7 +9646,7 @@
               </a:lnSpc>
             </a:pPr>
             <a:r>
-              <a:rPr sz="2400" b="1" i="0">
+              <a:rPr sz="2640" b="1" i="0">
                 <a:solidFill>
                   <a:srgbClr val="FFFFFF"/>
                 </a:solidFill>
@@ -9685,7 +9685,7 @@
               </a:lnSpc>
             </a:pPr>
             <a:r>
-              <a:rPr sz="1800" b="1" i="0">
+              <a:rPr sz="1980" b="1" i="0">
                 <a:solidFill>
                   <a:srgbClr val="0F2A43"/>
                 </a:solidFill>
@@ -9724,7 +9724,7 @@
               </a:lnSpc>
             </a:pPr>
             <a:r>
-              <a:rPr sz="1400" b="0" i="1">
+              <a:rPr sz="1540" b="0" i="1">
                 <a:solidFill>
                   <a:srgbClr val="334455"/>
                 </a:solidFill>
@@ -9807,7 +9807,7 @@
               </a:lnSpc>
             </a:pPr>
             <a:r>
-              <a:rPr sz="2400" b="1" i="0">
+              <a:rPr sz="2640" b="1" i="0">
                 <a:solidFill>
                   <a:srgbClr val="FFFFFF"/>
                 </a:solidFill>
@@ -9846,7 +9846,7 @@
               </a:lnSpc>
             </a:pPr>
             <a:r>
-              <a:rPr sz="1800" b="1" i="0">
+              <a:rPr sz="1980" b="1" i="0">
                 <a:solidFill>
                   <a:srgbClr val="0F2A43"/>
                 </a:solidFill>
@@ -9885,7 +9885,7 @@
               </a:lnSpc>
             </a:pPr>
             <a:r>
-              <a:rPr sz="1400" b="0" i="1">
+              <a:rPr sz="1540" b="0" i="1">
                 <a:solidFill>
                   <a:srgbClr val="334455"/>
                 </a:solidFill>
@@ -9968,7 +9968,7 @@
               </a:lnSpc>
             </a:pPr>
             <a:r>
-              <a:rPr sz="2400" b="1" i="0">
+              <a:rPr sz="2640" b="1" i="0">
                 <a:solidFill>
                   <a:srgbClr val="FFFFFF"/>
                 </a:solidFill>
@@ -10007,7 +10007,7 @@
               </a:lnSpc>
             </a:pPr>
             <a:r>
-              <a:rPr sz="1800" b="1" i="0">
+              <a:rPr sz="1980" b="1" i="0">
                 <a:solidFill>
                   <a:srgbClr val="0F2A43"/>
                 </a:solidFill>
@@ -10046,7 +10046,7 @@
               </a:lnSpc>
             </a:pPr>
             <a:r>
-              <a:rPr sz="1400" b="0" i="1">
+              <a:rPr sz="1540" b="0" i="1">
                 <a:solidFill>
                   <a:srgbClr val="334455"/>
                 </a:solidFill>
@@ -10129,7 +10129,7 @@
               </a:lnSpc>
             </a:pPr>
             <a:r>
-              <a:rPr sz="2400" b="1" i="0">
+              <a:rPr sz="2640" b="1" i="0">
                 <a:solidFill>
                   <a:srgbClr val="FFFFFF"/>
                 </a:solidFill>
@@ -10168,7 +10168,7 @@
               </a:lnSpc>
             </a:pPr>
             <a:r>
-              <a:rPr sz="1800" b="1" i="0">
+              <a:rPr sz="1980" b="1" i="0">
                 <a:solidFill>
                   <a:srgbClr val="0F2A43"/>
                 </a:solidFill>
@@ -10207,7 +10207,7 @@
               </a:lnSpc>
             </a:pPr>
             <a:r>
-              <a:rPr sz="1400" b="0" i="1">
+              <a:rPr sz="1540" b="0" i="1">
                 <a:solidFill>
                   <a:srgbClr val="334455"/>
                 </a:solidFill>
@@ -10334,7 +10334,7 @@
               </a:lnSpc>
             </a:pPr>
             <a:r>
-              <a:rPr sz="1100" b="1" i="0">
+              <a:rPr sz="1210" b="1" i="0">
                 <a:solidFill>
                   <a:srgbClr val="C08A2B"/>
                 </a:solidFill>
@@ -10373,7 +10373,7 @@
               </a:lnSpc>
             </a:pPr>
             <a:r>
-              <a:rPr sz="1100" b="0" i="0">
+              <a:rPr sz="1210" b="0" i="0">
                 <a:solidFill>
                   <a:srgbClr val="334455"/>
                 </a:solidFill>
@@ -10456,7 +10456,7 @@
               </a:lnSpc>
             </a:pPr>
             <a:r>
-              <a:rPr sz="1100" b="0" i="0">
+              <a:rPr sz="1210" b="0" i="0">
                 <a:solidFill>
                   <a:srgbClr val="6B7682"/>
                 </a:solidFill>
@@ -10521,7 +10521,7 @@
               </a:lnSpc>
             </a:pPr>
             <a:r>
-              <a:rPr sz="21000" b="1" i="0">
+              <a:rPr sz="23100" b="1" i="0">
                 <a:solidFill>
                   <a:srgbClr val="1C3A56"/>
                 </a:solidFill>
@@ -10560,7 +10560,7 @@
               </a:lnSpc>
             </a:pPr>
             <a:r>
-              <a:rPr sz="1300" b="1" i="0">
+              <a:rPr sz="1430" b="1" i="0">
                 <a:solidFill>
                   <a:srgbClr val="C08A2B"/>
                 </a:solidFill>
@@ -10643,7 +10643,7 @@
               </a:lnSpc>
             </a:pPr>
             <a:r>
-              <a:rPr sz="3300" b="1" i="0">
+              <a:rPr sz="3630" b="1" i="0">
                 <a:solidFill>
                   <a:srgbClr val="FFFFFF"/>
                 </a:solidFill>
@@ -10659,7 +10659,7 @@
               </a:lnSpc>
             </a:pPr>
             <a:r>
-              <a:rPr sz="3300" b="1" i="0">
+              <a:rPr sz="3630" b="1" i="0">
                 <a:solidFill>
                   <a:srgbClr val="FFFFFF"/>
                 </a:solidFill>
@@ -10698,7 +10698,7 @@
               </a:lnSpc>
             </a:pPr>
             <a:r>
-              <a:rPr sz="1800" b="0" i="1">
+              <a:rPr sz="1980" b="0" i="1">
                 <a:solidFill>
                   <a:srgbClr val="F2F4F7"/>
                 </a:solidFill>
@@ -10781,7 +10781,7 @@
               </a:lnSpc>
             </a:pPr>
             <a:r>
-              <a:rPr sz="1100" b="0" i="0">
+              <a:rPr sz="1210" b="0" i="0">
                 <a:solidFill>
                   <a:srgbClr val="909CAA"/>
                 </a:solidFill>
@@ -10934,7 +10934,7 @@
               </a:lnSpc>
             </a:pPr>
             <a:r>
-              <a:rPr sz="1300" b="1" i="0">
+              <a:rPr sz="1430" b="1" i="0">
                 <a:solidFill>
                   <a:srgbClr val="C08A2B"/>
                 </a:solidFill>
@@ -10973,7 +10973,7 @@
               </a:lnSpc>
             </a:pPr>
             <a:r>
-              <a:rPr sz="2600" b="1" i="0">
+              <a:rPr sz="2860" b="1" i="0">
                 <a:solidFill>
                   <a:srgbClr val="FFFFFF"/>
                 </a:solidFill>
@@ -11015,7 +11015,7 @@
               </a:spcAft>
             </a:pPr>
             <a:r>
-              <a:rPr sz="1800">
+              <a:rPr sz="1980">
                 <a:solidFill>
                   <a:srgbClr val="334455"/>
                 </a:solidFill>
@@ -11034,7 +11034,7 @@
               </a:spcAft>
             </a:pPr>
             <a:r>
-              <a:rPr sz="1800" b="1">
+              <a:rPr sz="1980" b="1">
                 <a:solidFill>
                   <a:srgbClr val="0F2A43"/>
                 </a:solidFill>
@@ -11043,7 +11043,7 @@
               <a:t>•  2005–06: </a:t>
             </a:r>
             <a:r>
-              <a:rPr sz="1800">
+              <a:rPr sz="1980">
                 <a:solidFill>
                   <a:srgbClr val="334455"/>
                 </a:solidFill>
@@ -11062,7 +11062,7 @@
               </a:spcAft>
             </a:pPr>
             <a:r>
-              <a:rPr sz="1800" b="1">
+              <a:rPr sz="1980" b="1">
                 <a:solidFill>
                   <a:srgbClr val="0F2A43"/>
                 </a:solidFill>
@@ -11071,7 +11071,7 @@
               <a:t>•  2008: </a:t>
             </a:r>
             <a:r>
-              <a:rPr sz="1800">
+              <a:rPr sz="1980">
                 <a:solidFill>
                   <a:srgbClr val="334455"/>
                 </a:solidFill>
@@ -11090,7 +11090,7 @@
               </a:spcAft>
             </a:pPr>
             <a:r>
-              <a:rPr sz="1800" b="1">
+              <a:rPr sz="1980" b="1">
                 <a:solidFill>
                   <a:srgbClr val="0F2A43"/>
                 </a:solidFill>
@@ -11099,7 +11099,7 @@
               <a:t>•  2019: </a:t>
             </a:r>
             <a:r>
-              <a:rPr sz="1800">
+              <a:rPr sz="1980">
                 <a:solidFill>
                   <a:srgbClr val="334455"/>
                 </a:solidFill>
@@ -11118,7 +11118,7 @@
               </a:spcAft>
             </a:pPr>
             <a:r>
-              <a:rPr sz="1800">
+              <a:rPr sz="1980">
                 <a:solidFill>
                   <a:srgbClr val="334455"/>
                 </a:solidFill>
@@ -11245,7 +11245,7 @@
               </a:lnSpc>
             </a:pPr>
             <a:r>
-              <a:rPr sz="1400" b="1" i="0">
+              <a:rPr sz="1540" b="1" i="0">
                 <a:solidFill>
                   <a:srgbClr val="C08A2B"/>
                 </a:solidFill>
@@ -11284,7 +11284,7 @@
               </a:lnSpc>
             </a:pPr>
             <a:r>
-              <a:rPr sz="1600" b="0" i="1">
+              <a:rPr sz="1760" b="0" i="1">
                 <a:solidFill>
                   <a:srgbClr val="334455"/>
                 </a:solidFill>
@@ -11411,7 +11411,7 @@
               </a:lnSpc>
             </a:pPr>
             <a:r>
-              <a:rPr sz="1500" b="0" i="1">
+              <a:rPr sz="1650" b="0" i="1">
                 <a:solidFill>
                   <a:srgbClr val="0F2A43"/>
                 </a:solidFill>
@@ -11494,7 +11494,7 @@
               </a:lnSpc>
             </a:pPr>
             <a:r>
-              <a:rPr sz="1100" b="0" i="0">
+              <a:rPr sz="1210" b="0" i="0">
                 <a:solidFill>
                   <a:srgbClr val="6B7682"/>
                 </a:solidFill>
@@ -11647,7 +11647,7 @@
               </a:lnSpc>
             </a:pPr>
             <a:r>
-              <a:rPr sz="1300" b="1" i="0">
+              <a:rPr sz="1430" b="1" i="0">
                 <a:solidFill>
                   <a:srgbClr val="C08A2B"/>
                 </a:solidFill>
@@ -11686,7 +11686,7 @@
               </a:lnSpc>
             </a:pPr>
             <a:r>
-              <a:rPr sz="2600" b="1" i="0">
+              <a:rPr sz="2860" b="1" i="0">
                 <a:solidFill>
                   <a:srgbClr val="FFFFFF"/>
                 </a:solidFill>
@@ -11813,7 +11813,7 @@
               </a:lnSpc>
             </a:pPr>
             <a:r>
-              <a:rPr sz="2800" b="1" i="0">
+              <a:rPr sz="3080" b="1" i="0">
                 <a:solidFill>
                   <a:srgbClr val="FFFFFF"/>
                 </a:solidFill>
@@ -11896,7 +11896,7 @@
               </a:lnSpc>
             </a:pPr>
             <a:r>
-              <a:rPr sz="1400" b="0" i="0">
+              <a:rPr sz="1540" b="0" i="0">
                 <a:solidFill>
                   <a:srgbClr val="334455"/>
                 </a:solidFill>
@@ -11979,7 +11979,7 @@
               </a:lnSpc>
             </a:pPr>
             <a:r>
-              <a:rPr sz="2800" b="1" i="0">
+              <a:rPr sz="3080" b="1" i="0">
                 <a:solidFill>
                   <a:srgbClr val="FFFFFF"/>
                 </a:solidFill>
@@ -12062,7 +12062,7 @@
               </a:lnSpc>
             </a:pPr>
             <a:r>
-              <a:rPr sz="1400" b="0" i="0">
+              <a:rPr sz="1540" b="0" i="0">
                 <a:solidFill>
                   <a:srgbClr val="334455"/>
                 </a:solidFill>
@@ -12145,7 +12145,7 @@
               </a:lnSpc>
             </a:pPr>
             <a:r>
-              <a:rPr sz="2800" b="1" i="0">
+              <a:rPr sz="3080" b="1" i="0">
                 <a:solidFill>
                   <a:srgbClr val="FFFFFF"/>
                 </a:solidFill>
@@ -12228,7 +12228,7 @@
               </a:lnSpc>
             </a:pPr>
             <a:r>
-              <a:rPr sz="1400" b="0" i="0">
+              <a:rPr sz="1540" b="0" i="0">
                 <a:solidFill>
                   <a:srgbClr val="334455"/>
                 </a:solidFill>
@@ -12311,7 +12311,7 @@
               </a:lnSpc>
             </a:pPr>
             <a:r>
-              <a:rPr sz="2800" b="1" i="0">
+              <a:rPr sz="3080" b="1" i="0">
                 <a:solidFill>
                   <a:srgbClr val="FFFFFF"/>
                 </a:solidFill>
@@ -12394,7 +12394,7 @@
               </a:lnSpc>
             </a:pPr>
             <a:r>
-              <a:rPr sz="1400" b="0" i="0">
+              <a:rPr sz="1540" b="0" i="0">
                 <a:solidFill>
                   <a:srgbClr val="334455"/>
                 </a:solidFill>
@@ -12521,7 +12521,7 @@
               </a:lnSpc>
             </a:pPr>
             <a:r>
-              <a:rPr sz="1500" b="0" i="1">
+              <a:rPr sz="1650" b="0" i="1">
                 <a:solidFill>
                   <a:srgbClr val="0F2A43"/>
                 </a:solidFill>
@@ -12604,7 +12604,7 @@
               </a:lnSpc>
             </a:pPr>
             <a:r>
-              <a:rPr sz="1100" b="0" i="0">
+              <a:rPr sz="1210" b="0" i="0">
                 <a:solidFill>
                   <a:srgbClr val="6B7682"/>
                 </a:solidFill>
@@ -12757,7 +12757,7 @@
               </a:lnSpc>
             </a:pPr>
             <a:r>
-              <a:rPr sz="1300" b="1" i="0">
+              <a:rPr sz="1430" b="1" i="0">
                 <a:solidFill>
                   <a:srgbClr val="C08A2B"/>
                 </a:solidFill>
@@ -12796,7 +12796,7 @@
               </a:lnSpc>
             </a:pPr>
             <a:r>
-              <a:rPr sz="2600" b="1" i="0">
+              <a:rPr sz="2860" b="1" i="0">
                 <a:solidFill>
                   <a:srgbClr val="FFFFFF"/>
                 </a:solidFill>
@@ -12838,7 +12838,7 @@
               </a:spcAft>
             </a:pPr>
             <a:r>
-              <a:rPr sz="1800" b="1">
+              <a:rPr sz="1980" b="1">
                 <a:solidFill>
                   <a:srgbClr val="0F2A43"/>
                 </a:solidFill>
@@ -12847,7 +12847,7 @@
               <a:t>•  Recruitment: </a:t>
             </a:r>
             <a:r>
-              <a:rPr sz="1800">
+              <a:rPr sz="1980">
                 <a:solidFill>
                   <a:srgbClr val="334455"/>
                 </a:solidFill>
@@ -12866,7 +12866,7 @@
               </a:spcAft>
             </a:pPr>
             <a:r>
-              <a:rPr sz="1800" b="1">
+              <a:rPr sz="1980" b="1">
                 <a:solidFill>
                   <a:srgbClr val="0F2A43"/>
                 </a:solidFill>
@@ -12875,7 +12875,7 @@
               <a:t>•  Finance: </a:t>
             </a:r>
             <a:r>
-              <a:rPr sz="1800">
+              <a:rPr sz="1980">
                 <a:solidFill>
                   <a:srgbClr val="334455"/>
                 </a:solidFill>
@@ -12894,7 +12894,7 @@
               </a:spcAft>
             </a:pPr>
             <a:r>
-              <a:rPr sz="1800" b="1">
+              <a:rPr sz="1980" b="1">
                 <a:solidFill>
                   <a:srgbClr val="0F2A43"/>
                 </a:solidFill>
@@ -12903,7 +12903,7 @@
               <a:t>•  Property: </a:t>
             </a:r>
             <a:r>
-              <a:rPr sz="1800">
+              <a:rPr sz="1980">
                 <a:solidFill>
                   <a:srgbClr val="334455"/>
                 </a:solidFill>
@@ -12922,7 +12922,7 @@
               </a:spcAft>
             </a:pPr>
             <a:r>
-              <a:rPr sz="1800" b="1">
+              <a:rPr sz="1980" b="1">
                 <a:solidFill>
                   <a:srgbClr val="0F2A43"/>
                 </a:solidFill>
@@ -12931,7 +12931,7 @@
               <a:t>•  Identity: </a:t>
             </a:r>
             <a:r>
-              <a:rPr sz="1800">
+              <a:rPr sz="1980">
                 <a:solidFill>
                   <a:srgbClr val="334455"/>
                 </a:solidFill>
@@ -12950,7 +12950,7 @@
               </a:spcAft>
             </a:pPr>
             <a:r>
-              <a:rPr sz="1800" b="1">
+              <a:rPr sz="1980" b="1">
                 <a:solidFill>
                   <a:srgbClr val="0F2A43"/>
                 </a:solidFill>
@@ -12959,7 +12959,7 @@
               <a:t>•  Network: </a:t>
             </a:r>
             <a:r>
-              <a:rPr sz="1800">
+              <a:rPr sz="1980">
                 <a:solidFill>
                   <a:srgbClr val="334455"/>
                 </a:solidFill>
@@ -13086,7 +13086,7 @@
               </a:lnSpc>
             </a:pPr>
             <a:r>
-              <a:rPr sz="1400" b="1" i="0">
+              <a:rPr sz="1540" b="1" i="0">
                 <a:solidFill>
                   <a:srgbClr val="C08A2B"/>
                 </a:solidFill>
@@ -13125,7 +13125,7 @@
               </a:lnSpc>
             </a:pPr>
             <a:r>
-              <a:rPr sz="1600" b="0" i="1">
+              <a:rPr sz="1760" b="0" i="1">
                 <a:solidFill>
                   <a:srgbClr val="334455"/>
                 </a:solidFill>
@@ -13252,7 +13252,7 @@
               </a:lnSpc>
             </a:pPr>
             <a:r>
-              <a:rPr sz="1500" b="0" i="1">
+              <a:rPr sz="1650" b="0" i="1">
                 <a:solidFill>
                   <a:srgbClr val="0F2A43"/>
                 </a:solidFill>
@@ -13335,7 +13335,7 @@
               </a:lnSpc>
             </a:pPr>
             <a:r>
-              <a:rPr sz="1100" b="0" i="0">
+              <a:rPr sz="1210" b="0" i="0">
                 <a:solidFill>
                   <a:srgbClr val="6B7682"/>
                 </a:solidFill>
@@ -13400,7 +13400,7 @@
               </a:lnSpc>
             </a:pPr>
             <a:r>
-              <a:rPr sz="21000" b="1" i="0">
+              <a:rPr sz="23100" b="1" i="0">
                 <a:solidFill>
                   <a:srgbClr val="1C3A56"/>
                 </a:solidFill>
@@ -13439,7 +13439,7 @@
               </a:lnSpc>
             </a:pPr>
             <a:r>
-              <a:rPr sz="1300" b="1" i="0">
+              <a:rPr sz="1430" b="1" i="0">
                 <a:solidFill>
                   <a:srgbClr val="C08A2B"/>
                 </a:solidFill>
@@ -13522,7 +13522,7 @@
               </a:lnSpc>
             </a:pPr>
             <a:r>
-              <a:rPr sz="3300" b="1" i="0">
+              <a:rPr sz="3630" b="1" i="0">
                 <a:solidFill>
                   <a:srgbClr val="FFFFFF"/>
                 </a:solidFill>
@@ -13538,7 +13538,7 @@
               </a:lnSpc>
             </a:pPr>
             <a:r>
-              <a:rPr sz="3300" b="1" i="0">
+              <a:rPr sz="3630" b="1" i="0">
                 <a:solidFill>
                   <a:srgbClr val="FFFFFF"/>
                 </a:solidFill>
@@ -13577,7 +13577,7 @@
               </a:lnSpc>
             </a:pPr>
             <a:r>
-              <a:rPr sz="1800" b="0" i="1">
+              <a:rPr sz="1980" b="0" i="1">
                 <a:solidFill>
                   <a:srgbClr val="F2F4F7"/>
                 </a:solidFill>
@@ -13660,7 +13660,7 @@
               </a:lnSpc>
             </a:pPr>
             <a:r>
-              <a:rPr sz="1100" b="0" i="0">
+              <a:rPr sz="1210" b="0" i="0">
                 <a:solidFill>
                   <a:srgbClr val="909CAA"/>
                 </a:solidFill>
@@ -13813,7 +13813,7 @@
               </a:lnSpc>
             </a:pPr>
             <a:r>
-              <a:rPr sz="1300" b="1" i="0">
+              <a:rPr sz="1430" b="1" i="0">
                 <a:solidFill>
                   <a:srgbClr val="C08A2B"/>
                 </a:solidFill>
@@ -13852,7 +13852,7 @@
               </a:lnSpc>
             </a:pPr>
             <a:r>
-              <a:rPr sz="2600" b="1" i="0">
+              <a:rPr sz="2860" b="1" i="0">
                 <a:solidFill>
                   <a:srgbClr val="FFFFFF"/>
                 </a:solidFill>
@@ -13894,7 +13894,7 @@
               </a:spcAft>
             </a:pPr>
             <a:r>
-              <a:rPr sz="1900">
+              <a:rPr sz="2090">
                 <a:solidFill>
                   <a:srgbClr val="334455"/>
                 </a:solidFill>
@@ -13913,7 +13913,7 @@
               </a:spcAft>
             </a:pPr>
             <a:r>
-              <a:rPr sz="1900">
+              <a:rPr sz="2090">
                 <a:solidFill>
                   <a:srgbClr val="334455"/>
                 </a:solidFill>
@@ -13932,7 +13932,7 @@
               </a:spcAft>
             </a:pPr>
             <a:r>
-              <a:rPr sz="1900">
+              <a:rPr sz="2090">
                 <a:solidFill>
                   <a:srgbClr val="334455"/>
                 </a:solidFill>
@@ -13951,7 +13951,7 @@
               </a:spcAft>
             </a:pPr>
             <a:r>
-              <a:rPr sz="1900">
+              <a:rPr sz="2090">
                 <a:solidFill>
                   <a:srgbClr val="334455"/>
                 </a:solidFill>
@@ -14078,7 +14078,7 @@
               </a:lnSpc>
             </a:pPr>
             <a:r>
-              <a:rPr sz="1500" b="0" i="1">
+              <a:rPr sz="1650" b="0" i="1">
                 <a:solidFill>
                   <a:srgbClr val="0F2A43"/>
                 </a:solidFill>
@@ -14161,7 +14161,7 @@
               </a:lnSpc>
             </a:pPr>
             <a:r>
-              <a:rPr sz="1100" b="0" i="0">
+              <a:rPr sz="1210" b="0" i="0">
                 <a:solidFill>
                   <a:srgbClr val="6B7682"/>
                 </a:solidFill>
@@ -14314,7 +14314,7 @@
               </a:lnSpc>
             </a:pPr>
             <a:r>
-              <a:rPr sz="1300" b="1" i="0">
+              <a:rPr sz="1430" b="1" i="0">
                 <a:solidFill>
                   <a:srgbClr val="C08A2B"/>
                 </a:solidFill>
@@ -14353,7 +14353,7 @@
               </a:lnSpc>
             </a:pPr>
             <a:r>
-              <a:rPr sz="2600" b="1" i="0">
+              <a:rPr sz="2860" b="1" i="0">
                 <a:solidFill>
                   <a:srgbClr val="FFFFFF"/>
                 </a:solidFill>
@@ -14395,7 +14395,7 @@
               </a:spcAft>
             </a:pPr>
             <a:r>
-              <a:rPr sz="1900" b="1">
+              <a:rPr sz="2090" b="1">
                 <a:solidFill>
                   <a:srgbClr val="0F2A43"/>
                 </a:solidFill>
@@ -14404,7 +14404,7 @@
               <a:t>•  Full name: </a:t>
             </a:r>
             <a:r>
-              <a:rPr sz="1900">
+              <a:rPr sz="2090">
                 <a:solidFill>
                   <a:srgbClr val="334455"/>
                 </a:solidFill>
@@ -14423,7 +14423,7 @@
               </a:spcAft>
             </a:pPr>
             <a:r>
-              <a:rPr sz="1900">
+              <a:rPr sz="2090">
                 <a:solidFill>
                   <a:srgbClr val="334455"/>
                 </a:solidFill>
@@ -14442,7 +14442,7 @@
               </a:spcAft>
             </a:pPr>
             <a:r>
-              <a:rPr sz="1900" b="1">
+              <a:rPr sz="2090" b="1">
                 <a:solidFill>
                   <a:srgbClr val="0F2A43"/>
                 </a:solidFill>
@@ -14451,7 +14451,7 @@
               <a:t>•  Three elements: </a:t>
             </a:r>
             <a:r>
-              <a:rPr sz="1900">
+              <a:rPr sz="2090">
                 <a:solidFill>
                   <a:srgbClr val="334455"/>
                 </a:solidFill>
@@ -14470,7 +14470,7 @@
               </a:spcAft>
             </a:pPr>
             <a:r>
-              <a:rPr sz="1900">
+              <a:rPr sz="2090">
                 <a:solidFill>
                   <a:srgbClr val="334455"/>
                 </a:solidFill>
@@ -14489,7 +14489,7 @@
               </a:spcAft>
             </a:pPr>
             <a:r>
-              <a:rPr sz="1900">
+              <a:rPr sz="2090">
                 <a:solidFill>
                   <a:srgbClr val="334455"/>
                 </a:solidFill>
@@ -14616,7 +14616,7 @@
               </a:lnSpc>
             </a:pPr>
             <a:r>
-              <a:rPr sz="1500" b="0" i="1">
+              <a:rPr sz="1650" b="0" i="1">
                 <a:solidFill>
                   <a:srgbClr val="0F2A43"/>
                 </a:solidFill>
@@ -14699,7 +14699,7 @@
               </a:lnSpc>
             </a:pPr>
             <a:r>
-              <a:rPr sz="1100" b="0" i="0">
+              <a:rPr sz="1210" b="0" i="0">
                 <a:solidFill>
                   <a:srgbClr val="6B7682"/>
                 </a:solidFill>

--- a/Epstein_Transnational_Justice.pptx
+++ b/Epstein_Transnational_Justice.pptx
@@ -3231,7 +3231,7 @@
               </a:lnSpc>
             </a:pPr>
             <a:r>
-              <a:rPr sz="1760" b="1" i="0">
+              <a:rPr sz="1888" b="1" i="0">
                 <a:solidFill>
                   <a:srgbClr val="C08A2B"/>
                 </a:solidFill>
@@ -3270,7 +3270,7 @@
               </a:lnSpc>
             </a:pPr>
             <a:r>
-              <a:rPr sz="4400" b="1" i="0">
+              <a:rPr sz="4720" b="1" i="0">
                 <a:solidFill>
                   <a:srgbClr val="FFFFFF"/>
                 </a:solidFill>
@@ -3353,7 +3353,7 @@
               </a:lnSpc>
             </a:pPr>
             <a:r>
-              <a:rPr sz="1980" b="0" i="1">
+              <a:rPr sz="2124" b="0" i="1">
                 <a:solidFill>
                   <a:srgbClr val="F2F4F7"/>
                 </a:solidFill>
@@ -3392,7 +3392,7 @@
               </a:lnSpc>
             </a:pPr>
             <a:r>
-              <a:rPr sz="1430" b="0" i="0">
+              <a:rPr sz="1534" b="0" i="0">
                 <a:solidFill>
                   <a:srgbClr val="909CAA"/>
                 </a:solidFill>
@@ -3545,7 +3545,7 @@
               </a:lnSpc>
             </a:pPr>
             <a:r>
-              <a:rPr sz="1430" b="1" i="0">
+              <a:rPr sz="1534" b="1" i="0">
                 <a:solidFill>
                   <a:srgbClr val="C08A2B"/>
                 </a:solidFill>
@@ -3584,7 +3584,7 @@
               </a:lnSpc>
             </a:pPr>
             <a:r>
-              <a:rPr sz="2860" b="1" i="0">
+              <a:rPr sz="3068" b="1" i="0">
                 <a:solidFill>
                   <a:srgbClr val="FFFFFF"/>
                 </a:solidFill>
@@ -3626,7 +3626,7 @@
               </a:spcAft>
             </a:pPr>
             <a:r>
-              <a:rPr sz="2090" b="1">
+              <a:rPr sz="2242" b="1">
                 <a:solidFill>
                   <a:srgbClr val="0F2A43"/>
                 </a:solidFill>
@@ -3635,7 +3635,7 @@
               <a:t>•  Parent treaty: </a:t>
             </a:r>
             <a:r>
-              <a:rPr sz="2090">
+              <a:rPr sz="2242">
                 <a:solidFill>
                   <a:srgbClr val="334455"/>
                 </a:solidFill>
@@ -3654,7 +3654,7 @@
               </a:spcAft>
             </a:pPr>
             <a:r>
-              <a:rPr sz="2090">
+              <a:rPr sz="2242">
                 <a:solidFill>
                   <a:srgbClr val="334455"/>
                 </a:solidFill>
@@ -3673,7 +3673,7 @@
               </a:spcAft>
             </a:pPr>
             <a:r>
-              <a:rPr sz="2090">
+              <a:rPr sz="2242">
                 <a:solidFill>
                   <a:srgbClr val="334455"/>
                 </a:solidFill>
@@ -3692,7 +3692,7 @@
               </a:spcAft>
             </a:pPr>
             <a:r>
-              <a:rPr sz="2090">
+              <a:rPr sz="2242">
                 <a:solidFill>
                   <a:srgbClr val="334455"/>
                 </a:solidFill>
@@ -3711,7 +3711,7 @@
               </a:spcAft>
             </a:pPr>
             <a:r>
-              <a:rPr sz="2090">
+              <a:rPr sz="2242">
                 <a:solidFill>
                   <a:srgbClr val="334455"/>
                 </a:solidFill>
@@ -3838,7 +3838,7 @@
               </a:lnSpc>
             </a:pPr>
             <a:r>
-              <a:rPr sz="1650" b="0" i="1">
+              <a:rPr sz="1770" b="0" i="1">
                 <a:solidFill>
                   <a:srgbClr val="0F2A43"/>
                 </a:solidFill>
@@ -3921,7 +3921,7 @@
               </a:lnSpc>
             </a:pPr>
             <a:r>
-              <a:rPr sz="1210" b="0" i="0">
+              <a:rPr sz="1297" b="0" i="0">
                 <a:solidFill>
                   <a:srgbClr val="6B7682"/>
                 </a:solidFill>
@@ -4074,7 +4074,7 @@
               </a:lnSpc>
             </a:pPr>
             <a:r>
-              <a:rPr sz="1430" b="1" i="0">
+              <a:rPr sz="1534" b="1" i="0">
                 <a:solidFill>
                   <a:srgbClr val="C08A2B"/>
                 </a:solidFill>
@@ -4113,7 +4113,7 @@
               </a:lnSpc>
             </a:pPr>
             <a:r>
-              <a:rPr sz="2860" b="1" i="0">
+              <a:rPr sz="3068" b="1" i="0">
                 <a:solidFill>
                   <a:srgbClr val="FFFFFF"/>
                 </a:solidFill>
@@ -4155,7 +4155,7 @@
               </a:spcAft>
             </a:pPr>
             <a:r>
-              <a:rPr sz="2090" b="1">
+              <a:rPr sz="2242" b="1">
                 <a:solidFill>
                   <a:srgbClr val="0F2A43"/>
                 </a:solidFill>
@@ -4164,7 +4164,7 @@
               <a:t>•  Jurisdiction: </a:t>
             </a:r>
             <a:r>
-              <a:rPr sz="2090">
+              <a:rPr sz="2242">
                 <a:solidFill>
                   <a:srgbClr val="334455"/>
                 </a:solidFill>
@@ -4183,7 +4183,7 @@
               </a:spcAft>
             </a:pPr>
             <a:r>
-              <a:rPr sz="2090" b="1">
+              <a:rPr sz="2242" b="1">
                 <a:solidFill>
                   <a:srgbClr val="0F2A43"/>
                 </a:solidFill>
@@ -4192,7 +4192,7 @@
               <a:t>•  Concurrent claims: </a:t>
             </a:r>
             <a:r>
-              <a:rPr sz="2090">
+              <a:rPr sz="2242">
                 <a:solidFill>
                   <a:srgbClr val="334455"/>
                 </a:solidFill>
@@ -4211,7 +4211,7 @@
               </a:spcAft>
             </a:pPr>
             <a:r>
-              <a:rPr sz="2090" b="1">
+              <a:rPr sz="2242" b="1">
                 <a:solidFill>
                   <a:srgbClr val="0F2A43"/>
                 </a:solidFill>
@@ -4220,7 +4220,7 @@
               <a:t>•  Extradition: </a:t>
             </a:r>
             <a:r>
-              <a:rPr sz="2090">
+              <a:rPr sz="2242">
                 <a:solidFill>
                   <a:srgbClr val="334455"/>
                 </a:solidFill>
@@ -4239,7 +4239,7 @@
               </a:spcAft>
             </a:pPr>
             <a:r>
-              <a:rPr sz="2090" b="1">
+              <a:rPr sz="2242" b="1">
                 <a:solidFill>
                   <a:srgbClr val="0F2A43"/>
                 </a:solidFill>
@@ -4248,7 +4248,7 @@
               <a:t>•  MLATs: </a:t>
             </a:r>
             <a:r>
-              <a:rPr sz="2090">
+              <a:rPr sz="2242">
                 <a:solidFill>
                   <a:srgbClr val="334455"/>
                 </a:solidFill>
@@ -4267,7 +4267,7 @@
               </a:spcAft>
             </a:pPr>
             <a:r>
-              <a:rPr sz="2090" b="1">
+              <a:rPr sz="2242" b="1">
                 <a:solidFill>
                   <a:srgbClr val="0F2A43"/>
                 </a:solidFill>
@@ -4276,7 +4276,7 @@
               <a:t>•  The friction: </a:t>
             </a:r>
             <a:r>
-              <a:rPr sz="2090">
+              <a:rPr sz="2242">
                 <a:solidFill>
                   <a:srgbClr val="334455"/>
                 </a:solidFill>
@@ -4403,7 +4403,7 @@
               </a:lnSpc>
             </a:pPr>
             <a:r>
-              <a:rPr sz="1650" b="0" i="1">
+              <a:rPr sz="1770" b="0" i="1">
                 <a:solidFill>
                   <a:srgbClr val="0F2A43"/>
                 </a:solidFill>
@@ -4486,7 +4486,7 @@
               </a:lnSpc>
             </a:pPr>
             <a:r>
-              <a:rPr sz="1210" b="0" i="0">
+              <a:rPr sz="1297" b="0" i="0">
                 <a:solidFill>
                   <a:srgbClr val="6B7682"/>
                 </a:solidFill>
@@ -4639,7 +4639,7 @@
               </a:lnSpc>
             </a:pPr>
             <a:r>
-              <a:rPr sz="1430" b="1" i="0">
+              <a:rPr sz="1534" b="1" i="0">
                 <a:solidFill>
                   <a:srgbClr val="C08A2B"/>
                 </a:solidFill>
@@ -4678,7 +4678,7 @@
               </a:lnSpc>
             </a:pPr>
             <a:r>
-              <a:rPr sz="2860" b="1" i="0">
+              <a:rPr sz="3068" b="1" i="0">
                 <a:solidFill>
                   <a:srgbClr val="FFFFFF"/>
                 </a:solidFill>
@@ -4720,7 +4720,7 @@
               </a:spcAft>
             </a:pPr>
             <a:r>
-              <a:rPr sz="2090" b="1">
+              <a:rPr sz="2242" b="1">
                 <a:solidFill>
                   <a:srgbClr val="0F2A43"/>
                 </a:solidFill>
@@ -4729,7 +4729,7 @@
               <a:t>•  Ghislaine Maxwell (UK): </a:t>
             </a:r>
             <a:r>
-              <a:rPr sz="2090">
+              <a:rPr sz="2242">
                 <a:solidFill>
                   <a:srgbClr val="334455"/>
                 </a:solidFill>
@@ -4748,7 +4748,7 @@
               </a:spcAft>
             </a:pPr>
             <a:r>
-              <a:rPr sz="2090" b="1">
+              <a:rPr sz="2242" b="1">
                 <a:solidFill>
                   <a:srgbClr val="0F2A43"/>
                 </a:solidFill>
@@ -4757,7 +4757,7 @@
               <a:t>•  Prince Andrew: </a:t>
             </a:r>
             <a:r>
-              <a:rPr sz="2090">
+              <a:rPr sz="2242">
                 <a:solidFill>
                   <a:srgbClr val="334455"/>
                 </a:solidFill>
@@ -4776,7 +4776,7 @@
               </a:spcAft>
             </a:pPr>
             <a:r>
-              <a:rPr sz="2090">
+              <a:rPr sz="2242">
                 <a:solidFill>
                   <a:srgbClr val="334455"/>
                 </a:solidFill>
@@ -4795,7 +4795,7 @@
               </a:spcAft>
             </a:pPr>
             <a:r>
-              <a:rPr sz="2090">
+              <a:rPr sz="2242">
                 <a:solidFill>
                   <a:srgbClr val="334455"/>
                 </a:solidFill>
@@ -4922,7 +4922,7 @@
               </a:lnSpc>
             </a:pPr>
             <a:r>
-              <a:rPr sz="1650" b="0" i="1">
+              <a:rPr sz="1770" b="0" i="1">
                 <a:solidFill>
                   <a:srgbClr val="0F2A43"/>
                 </a:solidFill>
@@ -5005,7 +5005,7 @@
               </a:lnSpc>
             </a:pPr>
             <a:r>
-              <a:rPr sz="1210" b="0" i="0">
+              <a:rPr sz="1297" b="0" i="0">
                 <a:solidFill>
                   <a:srgbClr val="6B7682"/>
                 </a:solidFill>
@@ -5070,7 +5070,7 @@
               </a:lnSpc>
             </a:pPr>
             <a:r>
-              <a:rPr sz="23100" b="1" i="0">
+              <a:rPr sz="24780" b="1" i="0">
                 <a:solidFill>
                   <a:srgbClr val="1C3A56"/>
                 </a:solidFill>
@@ -5109,7 +5109,7 @@
               </a:lnSpc>
             </a:pPr>
             <a:r>
-              <a:rPr sz="1430" b="1" i="0">
+              <a:rPr sz="1534" b="1" i="0">
                 <a:solidFill>
                   <a:srgbClr val="C08A2B"/>
                 </a:solidFill>
@@ -5192,7 +5192,7 @@
               </a:lnSpc>
             </a:pPr>
             <a:r>
-              <a:rPr sz="3630" b="1" i="0">
+              <a:rPr sz="3894" b="1" i="0">
                 <a:solidFill>
                   <a:srgbClr val="FFFFFF"/>
                 </a:solidFill>
@@ -5208,7 +5208,7 @@
               </a:lnSpc>
             </a:pPr>
             <a:r>
-              <a:rPr sz="3630" b="1" i="0">
+              <a:rPr sz="3894" b="1" i="0">
                 <a:solidFill>
                   <a:srgbClr val="FFFFFF"/>
                 </a:solidFill>
@@ -5247,7 +5247,7 @@
               </a:lnSpc>
             </a:pPr>
             <a:r>
-              <a:rPr sz="1980" b="0" i="1">
+              <a:rPr sz="2124" b="0" i="1">
                 <a:solidFill>
                   <a:srgbClr val="F2F4F7"/>
                 </a:solidFill>
@@ -5330,7 +5330,7 @@
               </a:lnSpc>
             </a:pPr>
             <a:r>
-              <a:rPr sz="1210" b="0" i="0">
+              <a:rPr sz="1297" b="0" i="0">
                 <a:solidFill>
                   <a:srgbClr val="909CAA"/>
                 </a:solidFill>
@@ -5483,7 +5483,7 @@
               </a:lnSpc>
             </a:pPr>
             <a:r>
-              <a:rPr sz="1430" b="1" i="0">
+              <a:rPr sz="1534" b="1" i="0">
                 <a:solidFill>
                   <a:srgbClr val="C08A2B"/>
                 </a:solidFill>
@@ -5522,7 +5522,7 @@
               </a:lnSpc>
             </a:pPr>
             <a:r>
-              <a:rPr sz="2860" b="1" i="0">
+              <a:rPr sz="3068" b="1" i="0">
                 <a:solidFill>
                   <a:srgbClr val="FFFFFF"/>
                 </a:solidFill>
@@ -5564,7 +5564,7 @@
               </a:spcAft>
             </a:pPr>
             <a:r>
-              <a:rPr sz="2090">
+              <a:rPr sz="2242">
                 <a:solidFill>
                   <a:srgbClr val="334455"/>
                 </a:solidFill>
@@ -5583,7 +5583,7 @@
               </a:spcAft>
             </a:pPr>
             <a:r>
-              <a:rPr sz="2090">
+              <a:rPr sz="2242">
                 <a:solidFill>
                   <a:srgbClr val="334455"/>
                 </a:solidFill>
@@ -5602,7 +5602,7 @@
               </a:spcAft>
             </a:pPr>
             <a:r>
-              <a:rPr sz="2090">
+              <a:rPr sz="2242">
                 <a:solidFill>
                   <a:srgbClr val="334455"/>
                 </a:solidFill>
@@ -5621,7 +5621,7 @@
               </a:spcAft>
             </a:pPr>
             <a:r>
-              <a:rPr sz="2090">
+              <a:rPr sz="2242">
                 <a:solidFill>
                   <a:srgbClr val="334455"/>
                 </a:solidFill>
@@ -5640,7 +5640,7 @@
               </a:spcAft>
             </a:pPr>
             <a:r>
-              <a:rPr sz="2090">
+              <a:rPr sz="2242">
                 <a:solidFill>
                   <a:srgbClr val="334455"/>
                 </a:solidFill>
@@ -5767,7 +5767,7 @@
               </a:lnSpc>
             </a:pPr>
             <a:r>
-              <a:rPr sz="1650" b="0" i="1">
+              <a:rPr sz="1770" b="0" i="1">
                 <a:solidFill>
                   <a:srgbClr val="0F2A43"/>
                 </a:solidFill>
@@ -5850,7 +5850,7 @@
               </a:lnSpc>
             </a:pPr>
             <a:r>
-              <a:rPr sz="1210" b="0" i="0">
+              <a:rPr sz="1297" b="0" i="0">
                 <a:solidFill>
                   <a:srgbClr val="6B7682"/>
                 </a:solidFill>
@@ -6003,7 +6003,7 @@
               </a:lnSpc>
             </a:pPr>
             <a:r>
-              <a:rPr sz="1430" b="1" i="0">
+              <a:rPr sz="1534" b="1" i="0">
                 <a:solidFill>
                   <a:srgbClr val="C08A2B"/>
                 </a:solidFill>
@@ -6042,7 +6042,7 @@
               </a:lnSpc>
             </a:pPr>
             <a:r>
-              <a:rPr sz="2860" b="1" i="0">
+              <a:rPr sz="3068" b="1" i="0">
                 <a:solidFill>
                   <a:srgbClr val="FFFFFF"/>
                 </a:solidFill>
@@ -6169,7 +6169,7 @@
               </a:lnSpc>
             </a:pPr>
             <a:r>
-              <a:rPr sz="1760" b="1" i="0">
+              <a:rPr sz="1888" b="1" i="0">
                 <a:solidFill>
                   <a:srgbClr val="C08A2B"/>
                 </a:solidFill>
@@ -6211,7 +6211,7 @@
               </a:spcAft>
             </a:pPr>
             <a:r>
-              <a:rPr sz="1650">
+              <a:rPr sz="1770">
                 <a:solidFill>
                   <a:srgbClr val="334455"/>
                 </a:solidFill>
@@ -6230,7 +6230,7 @@
               </a:spcAft>
             </a:pPr>
             <a:r>
-              <a:rPr sz="1650">
+              <a:rPr sz="1770">
                 <a:solidFill>
                   <a:srgbClr val="334455"/>
                 </a:solidFill>
@@ -6249,7 +6249,7 @@
               </a:spcAft>
             </a:pPr>
             <a:r>
-              <a:rPr sz="1650">
+              <a:rPr sz="1770">
                 <a:solidFill>
                   <a:srgbClr val="334455"/>
                 </a:solidFill>
@@ -6268,7 +6268,7 @@
               </a:spcAft>
             </a:pPr>
             <a:r>
-              <a:rPr sz="1650">
+              <a:rPr sz="1770">
                 <a:solidFill>
                   <a:srgbClr val="334455"/>
                 </a:solidFill>
@@ -6395,7 +6395,7 @@
               </a:lnSpc>
             </a:pPr>
             <a:r>
-              <a:rPr sz="1760" b="1" i="0">
+              <a:rPr sz="1888" b="1" i="0">
                 <a:solidFill>
                   <a:srgbClr val="C08A2B"/>
                 </a:solidFill>
@@ -6437,7 +6437,7 @@
               </a:spcAft>
             </a:pPr>
             <a:r>
-              <a:rPr sz="1650">
+              <a:rPr sz="1770">
                 <a:solidFill>
                   <a:srgbClr val="F2F4F7"/>
                 </a:solidFill>
@@ -6456,7 +6456,7 @@
               </a:spcAft>
             </a:pPr>
             <a:r>
-              <a:rPr sz="1650">
+              <a:rPr sz="1770">
                 <a:solidFill>
                   <a:srgbClr val="F2F4F7"/>
                 </a:solidFill>
@@ -6475,7 +6475,7 @@
               </a:spcAft>
             </a:pPr>
             <a:r>
-              <a:rPr sz="1650">
+              <a:rPr sz="1770">
                 <a:solidFill>
                   <a:srgbClr val="F2F4F7"/>
                 </a:solidFill>
@@ -6494,7 +6494,7 @@
               </a:spcAft>
             </a:pPr>
             <a:r>
-              <a:rPr sz="1650">
+              <a:rPr sz="1770">
                 <a:solidFill>
                   <a:srgbClr val="F2F4F7"/>
                 </a:solidFill>
@@ -6621,7 +6621,7 @@
               </a:lnSpc>
             </a:pPr>
             <a:r>
-              <a:rPr sz="1650" b="0" i="1">
+              <a:rPr sz="1770" b="0" i="1">
                 <a:solidFill>
                   <a:srgbClr val="0F2A43"/>
                 </a:solidFill>
@@ -6704,7 +6704,7 @@
               </a:lnSpc>
             </a:pPr>
             <a:r>
-              <a:rPr sz="1210" b="0" i="0">
+              <a:rPr sz="1297" b="0" i="0">
                 <a:solidFill>
                   <a:srgbClr val="6B7682"/>
                 </a:solidFill>
@@ -6857,7 +6857,7 @@
               </a:lnSpc>
             </a:pPr>
             <a:r>
-              <a:rPr sz="1430" b="1" i="0">
+              <a:rPr sz="1534" b="1" i="0">
                 <a:solidFill>
                   <a:srgbClr val="C08A2B"/>
                 </a:solidFill>
@@ -6896,7 +6896,7 @@
               </a:lnSpc>
             </a:pPr>
             <a:r>
-              <a:rPr sz="2860" b="1" i="0">
+              <a:rPr sz="3068" b="1" i="0">
                 <a:solidFill>
                   <a:srgbClr val="FFFFFF"/>
                 </a:solidFill>
@@ -6938,7 +6938,7 @@
               </a:spcAft>
             </a:pPr>
             <a:r>
-              <a:rPr sz="2090" b="1">
+              <a:rPr sz="2242" b="1">
                 <a:solidFill>
                   <a:srgbClr val="0F2A43"/>
                 </a:solidFill>
@@ -6947,7 +6947,7 @@
               <a:t>•  Adversarial vs inquisitorial: </a:t>
             </a:r>
             <a:r>
-              <a:rPr sz="2090">
+              <a:rPr sz="2242">
                 <a:solidFill>
                   <a:srgbClr val="334455"/>
                 </a:solidFill>
@@ -6966,7 +6966,7 @@
               </a:spcAft>
             </a:pPr>
             <a:r>
-              <a:rPr sz="2090" b="1">
+              <a:rPr sz="2242" b="1">
                 <a:solidFill>
                   <a:srgbClr val="0F2A43"/>
                 </a:solidFill>
@@ -6975,7 +6975,7 @@
               <a:t>•  Victim participation: </a:t>
             </a:r>
             <a:r>
-              <a:rPr sz="2090">
+              <a:rPr sz="2242">
                 <a:solidFill>
                   <a:srgbClr val="334455"/>
                 </a:solidFill>
@@ -6994,7 +6994,7 @@
               </a:spcAft>
             </a:pPr>
             <a:r>
-              <a:rPr sz="2090" b="1">
+              <a:rPr sz="2242" b="1">
                 <a:solidFill>
                   <a:srgbClr val="0F2A43"/>
                 </a:solidFill>
@@ -7003,7 +7003,7 @@
               <a:t>•  Limitation periods: </a:t>
             </a:r>
             <a:r>
-              <a:rPr sz="2090">
+              <a:rPr sz="2242">
                 <a:solidFill>
                   <a:srgbClr val="334455"/>
                 </a:solidFill>
@@ -7022,7 +7022,7 @@
               </a:spcAft>
             </a:pPr>
             <a:r>
-              <a:rPr sz="2090" b="1">
+              <a:rPr sz="2242" b="1">
                 <a:solidFill>
                   <a:srgbClr val="0F2A43"/>
                 </a:solidFill>
@@ -7031,7 +7031,7 @@
               <a:t>•  Plea bargaining: </a:t>
             </a:r>
             <a:r>
-              <a:rPr sz="2090">
+              <a:rPr sz="2242">
                 <a:solidFill>
                   <a:srgbClr val="334455"/>
                 </a:solidFill>
@@ -7158,7 +7158,7 @@
               </a:lnSpc>
             </a:pPr>
             <a:r>
-              <a:rPr sz="1650" b="0" i="1">
+              <a:rPr sz="1770" b="0" i="1">
                 <a:solidFill>
                   <a:srgbClr val="0F2A43"/>
                 </a:solidFill>
@@ -7241,7 +7241,7 @@
               </a:lnSpc>
             </a:pPr>
             <a:r>
-              <a:rPr sz="1210" b="0" i="0">
+              <a:rPr sz="1297" b="0" i="0">
                 <a:solidFill>
                   <a:srgbClr val="6B7682"/>
                 </a:solidFill>
@@ -7306,7 +7306,7 @@
               </a:lnSpc>
             </a:pPr>
             <a:r>
-              <a:rPr sz="23100" b="1" i="0">
+              <a:rPr sz="24780" b="1" i="0">
                 <a:solidFill>
                   <a:srgbClr val="1C3A56"/>
                 </a:solidFill>
@@ -7345,7 +7345,7 @@
               </a:lnSpc>
             </a:pPr>
             <a:r>
-              <a:rPr sz="1430" b="1" i="0">
+              <a:rPr sz="1534" b="1" i="0">
                 <a:solidFill>
                   <a:srgbClr val="C08A2B"/>
                 </a:solidFill>
@@ -7428,7 +7428,7 @@
               </a:lnSpc>
             </a:pPr>
             <a:r>
-              <a:rPr sz="3630" b="1" i="0">
+              <a:rPr sz="3894" b="1" i="0">
                 <a:solidFill>
                   <a:srgbClr val="FFFFFF"/>
                 </a:solidFill>
@@ -7444,7 +7444,7 @@
               </a:lnSpc>
             </a:pPr>
             <a:r>
-              <a:rPr sz="3630" b="1" i="0">
+              <a:rPr sz="3894" b="1" i="0">
                 <a:solidFill>
                   <a:srgbClr val="FFFFFF"/>
                 </a:solidFill>
@@ -7483,7 +7483,7 @@
               </a:lnSpc>
             </a:pPr>
             <a:r>
-              <a:rPr sz="1980" b="0" i="1">
+              <a:rPr sz="2124" b="0" i="1">
                 <a:solidFill>
                   <a:srgbClr val="F2F4F7"/>
                 </a:solidFill>
@@ -7566,7 +7566,7 @@
               </a:lnSpc>
             </a:pPr>
             <a:r>
-              <a:rPr sz="1210" b="0" i="0">
+              <a:rPr sz="1297" b="0" i="0">
                 <a:solidFill>
                   <a:srgbClr val="909CAA"/>
                 </a:solidFill>
@@ -7719,7 +7719,7 @@
               </a:lnSpc>
             </a:pPr>
             <a:r>
-              <a:rPr sz="1430" b="1" i="0">
+              <a:rPr sz="1534" b="1" i="0">
                 <a:solidFill>
                   <a:srgbClr val="C08A2B"/>
                 </a:solidFill>
@@ -7758,7 +7758,7 @@
               </a:lnSpc>
             </a:pPr>
             <a:r>
-              <a:rPr sz="2860" b="1" i="0">
+              <a:rPr sz="3068" b="1" i="0">
                 <a:solidFill>
                   <a:srgbClr val="FFFFFF"/>
                 </a:solidFill>
@@ -7800,7 +7800,7 @@
               </a:spcAft>
             </a:pPr>
             <a:r>
-              <a:rPr sz="2090">
+              <a:rPr sz="2242">
                 <a:solidFill>
                   <a:srgbClr val="334455"/>
                 </a:solidFill>
@@ -7819,7 +7819,7 @@
               </a:spcAft>
             </a:pPr>
             <a:r>
-              <a:rPr sz="2090">
+              <a:rPr sz="2242">
                 <a:solidFill>
                   <a:srgbClr val="334455"/>
                 </a:solidFill>
@@ -7838,7 +7838,7 @@
               </a:spcAft>
             </a:pPr>
             <a:r>
-              <a:rPr sz="2090" b="1">
+              <a:rPr sz="2242" b="1">
                 <a:solidFill>
                   <a:srgbClr val="0F2A43"/>
                 </a:solidFill>
@@ -7847,7 +7847,7 @@
               <a:t>•  Survivors' concern: </a:t>
             </a:r>
             <a:r>
-              <a:rPr sz="2090">
+              <a:rPr sz="2242">
                 <a:solidFill>
                   <a:srgbClr val="334455"/>
                 </a:solidFill>
@@ -7866,7 +7866,7 @@
               </a:spcAft>
             </a:pPr>
             <a:r>
-              <a:rPr sz="2090">
+              <a:rPr sz="2242">
                 <a:solidFill>
                   <a:srgbClr val="334455"/>
                 </a:solidFill>
@@ -7993,7 +7993,7 @@
               </a:lnSpc>
             </a:pPr>
             <a:r>
-              <a:rPr sz="1650" b="0" i="1">
+              <a:rPr sz="1770" b="0" i="1">
                 <a:solidFill>
                   <a:srgbClr val="0F2A43"/>
                 </a:solidFill>
@@ -8076,7 +8076,7 @@
               </a:lnSpc>
             </a:pPr>
             <a:r>
-              <a:rPr sz="1210" b="0" i="0">
+              <a:rPr sz="1297" b="0" i="0">
                 <a:solidFill>
                   <a:srgbClr val="6B7682"/>
                 </a:solidFill>
@@ -8229,7 +8229,7 @@
               </a:lnSpc>
             </a:pPr>
             <a:r>
-              <a:rPr sz="1430" b="1" i="0">
+              <a:rPr sz="1534" b="1" i="0">
                 <a:solidFill>
                   <a:srgbClr val="C08A2B"/>
                 </a:solidFill>
@@ -8268,7 +8268,7 @@
               </a:lnSpc>
             </a:pPr>
             <a:r>
-              <a:rPr sz="2860" b="1" i="0">
+              <a:rPr sz="3068" b="1" i="0">
                 <a:solidFill>
                   <a:srgbClr val="FFFFFF"/>
                 </a:solidFill>
@@ -8310,7 +8310,7 @@
               </a:spcAft>
             </a:pPr>
             <a:r>
-              <a:rPr sz="1980">
+              <a:rPr sz="2124">
                 <a:solidFill>
                   <a:srgbClr val="334455"/>
                 </a:solidFill>
@@ -8329,7 +8329,7 @@
               </a:spcAft>
             </a:pPr>
             <a:r>
-              <a:rPr sz="1980">
+              <a:rPr sz="2124">
                 <a:solidFill>
                   <a:srgbClr val="334455"/>
                 </a:solidFill>
@@ -8348,7 +8348,7 @@
               </a:spcAft>
             </a:pPr>
             <a:r>
-              <a:rPr sz="1980">
+              <a:rPr sz="2124">
                 <a:solidFill>
                   <a:srgbClr val="334455"/>
                 </a:solidFill>
@@ -8367,7 +8367,7 @@
               </a:spcAft>
             </a:pPr>
             <a:r>
-              <a:rPr sz="1980">
+              <a:rPr sz="2124">
                 <a:solidFill>
                   <a:srgbClr val="334455"/>
                 </a:solidFill>
@@ -8494,7 +8494,7 @@
               </a:lnSpc>
             </a:pPr>
             <a:r>
-              <a:rPr sz="1540" b="1" i="0">
+              <a:rPr sz="1652" b="1" i="0">
                 <a:solidFill>
                   <a:srgbClr val="C08A2B"/>
                 </a:solidFill>
@@ -8533,7 +8533,7 @@
               </a:lnSpc>
             </a:pPr>
             <a:r>
-              <a:rPr sz="1650" b="0" i="1">
+              <a:rPr sz="1770" b="0" i="1">
                 <a:solidFill>
                   <a:srgbClr val="334455"/>
                 </a:solidFill>
@@ -8660,7 +8660,7 @@
               </a:lnSpc>
             </a:pPr>
             <a:r>
-              <a:rPr sz="1650" b="0" i="1">
+              <a:rPr sz="1770" b="0" i="1">
                 <a:solidFill>
                   <a:srgbClr val="0F2A43"/>
                 </a:solidFill>
@@ -8743,7 +8743,7 @@
               </a:lnSpc>
             </a:pPr>
             <a:r>
-              <a:rPr sz="1210" b="0" i="0">
+              <a:rPr sz="1297" b="0" i="0">
                 <a:solidFill>
                   <a:srgbClr val="6B7682"/>
                 </a:solidFill>
@@ -8896,7 +8896,7 @@
               </a:lnSpc>
             </a:pPr>
             <a:r>
-              <a:rPr sz="1430" b="1" i="0">
+              <a:rPr sz="1534" b="1" i="0">
                 <a:solidFill>
                   <a:srgbClr val="C08A2B"/>
                 </a:solidFill>
@@ -8935,7 +8935,7 @@
               </a:lnSpc>
             </a:pPr>
             <a:r>
-              <a:rPr sz="2860" b="1" i="0">
+              <a:rPr sz="3068" b="1" i="0">
                 <a:solidFill>
                   <a:srgbClr val="FFFFFF"/>
                 </a:solidFill>
@@ -9062,7 +9062,7 @@
               </a:lnSpc>
             </a:pPr>
             <a:r>
-              <a:rPr sz="2090" b="1" i="1">
+              <a:rPr sz="2242" b="1" i="1">
                 <a:solidFill>
                   <a:srgbClr val="0F2A43"/>
                 </a:solidFill>
@@ -9104,7 +9104,7 @@
               </a:spcAft>
             </a:pPr>
             <a:r>
-              <a:rPr sz="2090">
+              <a:rPr sz="2242">
                 <a:solidFill>
                   <a:srgbClr val="334455"/>
                 </a:solidFill>
@@ -9123,7 +9123,7 @@
               </a:spcAft>
             </a:pPr>
             <a:r>
-              <a:rPr sz="2090">
+              <a:rPr sz="2242">
                 <a:solidFill>
                   <a:srgbClr val="334455"/>
                 </a:solidFill>
@@ -9142,7 +9142,7 @@
               </a:spcAft>
             </a:pPr>
             <a:r>
-              <a:rPr sz="2090">
+              <a:rPr sz="2242">
                 <a:solidFill>
                   <a:srgbClr val="334455"/>
                 </a:solidFill>
@@ -9161,7 +9161,7 @@
               </a:spcAft>
             </a:pPr>
             <a:r>
-              <a:rPr sz="2090">
+              <a:rPr sz="2242">
                 <a:solidFill>
                   <a:srgbClr val="334455"/>
                 </a:solidFill>
@@ -9288,7 +9288,7 @@
               </a:lnSpc>
             </a:pPr>
             <a:r>
-              <a:rPr sz="1650" b="0" i="1">
+              <a:rPr sz="1770" b="0" i="1">
                 <a:solidFill>
                   <a:srgbClr val="0F2A43"/>
                 </a:solidFill>
@@ -9371,7 +9371,7 @@
               </a:lnSpc>
             </a:pPr>
             <a:r>
-              <a:rPr sz="1210" b="0" i="0">
+              <a:rPr sz="1297" b="0" i="0">
                 <a:solidFill>
                   <a:srgbClr val="6B7682"/>
                 </a:solidFill>
@@ -9524,7 +9524,7 @@
               </a:lnSpc>
             </a:pPr>
             <a:r>
-              <a:rPr sz="1430" b="1" i="0">
+              <a:rPr sz="1534" b="1" i="0">
                 <a:solidFill>
                   <a:srgbClr val="C08A2B"/>
                 </a:solidFill>
@@ -9563,7 +9563,7 @@
               </a:lnSpc>
             </a:pPr>
             <a:r>
-              <a:rPr sz="2860" b="1" i="0">
+              <a:rPr sz="3068" b="1" i="0">
                 <a:solidFill>
                   <a:srgbClr val="FFFFFF"/>
                 </a:solidFill>
@@ -9646,7 +9646,7 @@
               </a:lnSpc>
             </a:pPr>
             <a:r>
-              <a:rPr sz="2640" b="1" i="0">
+              <a:rPr sz="2832" b="1" i="0">
                 <a:solidFill>
                   <a:srgbClr val="FFFFFF"/>
                 </a:solidFill>
@@ -9685,7 +9685,7 @@
               </a:lnSpc>
             </a:pPr>
             <a:r>
-              <a:rPr sz="1980" b="1" i="0">
+              <a:rPr sz="2124" b="1" i="0">
                 <a:solidFill>
                   <a:srgbClr val="0F2A43"/>
                 </a:solidFill>
@@ -9724,7 +9724,7 @@
               </a:lnSpc>
             </a:pPr>
             <a:r>
-              <a:rPr sz="1540" b="0" i="1">
+              <a:rPr sz="1652" b="0" i="1">
                 <a:solidFill>
                   <a:srgbClr val="334455"/>
                 </a:solidFill>
@@ -9807,7 +9807,7 @@
               </a:lnSpc>
             </a:pPr>
             <a:r>
-              <a:rPr sz="2640" b="1" i="0">
+              <a:rPr sz="2832" b="1" i="0">
                 <a:solidFill>
                   <a:srgbClr val="FFFFFF"/>
                 </a:solidFill>
@@ -9846,7 +9846,7 @@
               </a:lnSpc>
             </a:pPr>
             <a:r>
-              <a:rPr sz="1980" b="1" i="0">
+              <a:rPr sz="2124" b="1" i="0">
                 <a:solidFill>
                   <a:srgbClr val="0F2A43"/>
                 </a:solidFill>
@@ -9885,7 +9885,7 @@
               </a:lnSpc>
             </a:pPr>
             <a:r>
-              <a:rPr sz="1540" b="0" i="1">
+              <a:rPr sz="1652" b="0" i="1">
                 <a:solidFill>
                   <a:srgbClr val="334455"/>
                 </a:solidFill>
@@ -9968,7 +9968,7 @@
               </a:lnSpc>
             </a:pPr>
             <a:r>
-              <a:rPr sz="2640" b="1" i="0">
+              <a:rPr sz="2832" b="1" i="0">
                 <a:solidFill>
                   <a:srgbClr val="FFFFFF"/>
                 </a:solidFill>
@@ -10007,7 +10007,7 @@
               </a:lnSpc>
             </a:pPr>
             <a:r>
-              <a:rPr sz="1980" b="1" i="0">
+              <a:rPr sz="2124" b="1" i="0">
                 <a:solidFill>
                   <a:srgbClr val="0F2A43"/>
                 </a:solidFill>
@@ -10046,7 +10046,7 @@
               </a:lnSpc>
             </a:pPr>
             <a:r>
-              <a:rPr sz="1540" b="0" i="1">
+              <a:rPr sz="1652" b="0" i="1">
                 <a:solidFill>
                   <a:srgbClr val="334455"/>
                 </a:solidFill>
@@ -10129,7 +10129,7 @@
               </a:lnSpc>
             </a:pPr>
             <a:r>
-              <a:rPr sz="2640" b="1" i="0">
+              <a:rPr sz="2832" b="1" i="0">
                 <a:solidFill>
                   <a:srgbClr val="FFFFFF"/>
                 </a:solidFill>
@@ -10168,7 +10168,7 @@
               </a:lnSpc>
             </a:pPr>
             <a:r>
-              <a:rPr sz="1980" b="1" i="0">
+              <a:rPr sz="2124" b="1" i="0">
                 <a:solidFill>
                   <a:srgbClr val="0F2A43"/>
                 </a:solidFill>
@@ -10207,7 +10207,7 @@
               </a:lnSpc>
             </a:pPr>
             <a:r>
-              <a:rPr sz="1540" b="0" i="1">
+              <a:rPr sz="1652" b="0" i="1">
                 <a:solidFill>
                   <a:srgbClr val="334455"/>
                 </a:solidFill>
@@ -10334,7 +10334,7 @@
               </a:lnSpc>
             </a:pPr>
             <a:r>
-              <a:rPr sz="1210" b="1" i="0">
+              <a:rPr sz="1297" b="1" i="0">
                 <a:solidFill>
                   <a:srgbClr val="C08A2B"/>
                 </a:solidFill>
@@ -10373,7 +10373,7 @@
               </a:lnSpc>
             </a:pPr>
             <a:r>
-              <a:rPr sz="1210" b="0" i="0">
+              <a:rPr sz="1297" b="0" i="0">
                 <a:solidFill>
                   <a:srgbClr val="334455"/>
                 </a:solidFill>
@@ -10456,7 +10456,7 @@
               </a:lnSpc>
             </a:pPr>
             <a:r>
-              <a:rPr sz="1210" b="0" i="0">
+              <a:rPr sz="1297" b="0" i="0">
                 <a:solidFill>
                   <a:srgbClr val="6B7682"/>
                 </a:solidFill>
@@ -10521,7 +10521,7 @@
               </a:lnSpc>
             </a:pPr>
             <a:r>
-              <a:rPr sz="23100" b="1" i="0">
+              <a:rPr sz="24780" b="1" i="0">
                 <a:solidFill>
                   <a:srgbClr val="1C3A56"/>
                 </a:solidFill>
@@ -10560,7 +10560,7 @@
               </a:lnSpc>
             </a:pPr>
             <a:r>
-              <a:rPr sz="1430" b="1" i="0">
+              <a:rPr sz="1534" b="1" i="0">
                 <a:solidFill>
                   <a:srgbClr val="C08A2B"/>
                 </a:solidFill>
@@ -10643,7 +10643,7 @@
               </a:lnSpc>
             </a:pPr>
             <a:r>
-              <a:rPr sz="3630" b="1" i="0">
+              <a:rPr sz="3894" b="1" i="0">
                 <a:solidFill>
                   <a:srgbClr val="FFFFFF"/>
                 </a:solidFill>
@@ -10659,7 +10659,7 @@
               </a:lnSpc>
             </a:pPr>
             <a:r>
-              <a:rPr sz="3630" b="1" i="0">
+              <a:rPr sz="3894" b="1" i="0">
                 <a:solidFill>
                   <a:srgbClr val="FFFFFF"/>
                 </a:solidFill>
@@ -10698,7 +10698,7 @@
               </a:lnSpc>
             </a:pPr>
             <a:r>
-              <a:rPr sz="1980" b="0" i="1">
+              <a:rPr sz="2124" b="0" i="1">
                 <a:solidFill>
                   <a:srgbClr val="F2F4F7"/>
                 </a:solidFill>
@@ -10781,7 +10781,7 @@
               </a:lnSpc>
             </a:pPr>
             <a:r>
-              <a:rPr sz="1210" b="0" i="0">
+              <a:rPr sz="1297" b="0" i="0">
                 <a:solidFill>
                   <a:srgbClr val="909CAA"/>
                 </a:solidFill>
@@ -10934,7 +10934,7 @@
               </a:lnSpc>
             </a:pPr>
             <a:r>
-              <a:rPr sz="1430" b="1" i="0">
+              <a:rPr sz="1534" b="1" i="0">
                 <a:solidFill>
                   <a:srgbClr val="C08A2B"/>
                 </a:solidFill>
@@ -10973,7 +10973,7 @@
               </a:lnSpc>
             </a:pPr>
             <a:r>
-              <a:rPr sz="2860" b="1" i="0">
+              <a:rPr sz="3068" b="1" i="0">
                 <a:solidFill>
                   <a:srgbClr val="FFFFFF"/>
                 </a:solidFill>
@@ -11015,7 +11015,7 @@
               </a:spcAft>
             </a:pPr>
             <a:r>
-              <a:rPr sz="1980">
+              <a:rPr sz="2124">
                 <a:solidFill>
                   <a:srgbClr val="334455"/>
                 </a:solidFill>
@@ -11034,7 +11034,7 @@
               </a:spcAft>
             </a:pPr>
             <a:r>
-              <a:rPr sz="1980" b="1">
+              <a:rPr sz="2124" b="1">
                 <a:solidFill>
                   <a:srgbClr val="0F2A43"/>
                 </a:solidFill>
@@ -11043,7 +11043,7 @@
               <a:t>•  2005–06: </a:t>
             </a:r>
             <a:r>
-              <a:rPr sz="1980">
+              <a:rPr sz="2124">
                 <a:solidFill>
                   <a:srgbClr val="334455"/>
                 </a:solidFill>
@@ -11062,7 +11062,7 @@
               </a:spcAft>
             </a:pPr>
             <a:r>
-              <a:rPr sz="1980" b="1">
+              <a:rPr sz="2124" b="1">
                 <a:solidFill>
                   <a:srgbClr val="0F2A43"/>
                 </a:solidFill>
@@ -11071,7 +11071,7 @@
               <a:t>•  2008: </a:t>
             </a:r>
             <a:r>
-              <a:rPr sz="1980">
+              <a:rPr sz="2124">
                 <a:solidFill>
                   <a:srgbClr val="334455"/>
                 </a:solidFill>
@@ -11090,7 +11090,7 @@
               </a:spcAft>
             </a:pPr>
             <a:r>
-              <a:rPr sz="1980" b="1">
+              <a:rPr sz="2124" b="1">
                 <a:solidFill>
                   <a:srgbClr val="0F2A43"/>
                 </a:solidFill>
@@ -11099,7 +11099,7 @@
               <a:t>•  2019: </a:t>
             </a:r>
             <a:r>
-              <a:rPr sz="1980">
+              <a:rPr sz="2124">
                 <a:solidFill>
                   <a:srgbClr val="334455"/>
                 </a:solidFill>
@@ -11118,7 +11118,7 @@
               </a:spcAft>
             </a:pPr>
             <a:r>
-              <a:rPr sz="1980">
+              <a:rPr sz="2124">
                 <a:solidFill>
                   <a:srgbClr val="334455"/>
                 </a:solidFill>
@@ -11245,7 +11245,7 @@
               </a:lnSpc>
             </a:pPr>
             <a:r>
-              <a:rPr sz="1540" b="1" i="0">
+              <a:rPr sz="1652" b="1" i="0">
                 <a:solidFill>
                   <a:srgbClr val="C08A2B"/>
                 </a:solidFill>
@@ -11284,7 +11284,7 @@
               </a:lnSpc>
             </a:pPr>
             <a:r>
-              <a:rPr sz="1760" b="0" i="1">
+              <a:rPr sz="1888" b="0" i="1">
                 <a:solidFill>
                   <a:srgbClr val="334455"/>
                 </a:solidFill>
@@ -11411,7 +11411,7 @@
               </a:lnSpc>
             </a:pPr>
             <a:r>
-              <a:rPr sz="1650" b="0" i="1">
+              <a:rPr sz="1770" b="0" i="1">
                 <a:solidFill>
                   <a:srgbClr val="0F2A43"/>
                 </a:solidFill>
@@ -11494,7 +11494,7 @@
               </a:lnSpc>
             </a:pPr>
             <a:r>
-              <a:rPr sz="1210" b="0" i="0">
+              <a:rPr sz="1297" b="0" i="0">
                 <a:solidFill>
                   <a:srgbClr val="6B7682"/>
                 </a:solidFill>
@@ -11647,7 +11647,7 @@
               </a:lnSpc>
             </a:pPr>
             <a:r>
-              <a:rPr sz="1430" b="1" i="0">
+              <a:rPr sz="1534" b="1" i="0">
                 <a:solidFill>
                   <a:srgbClr val="C08A2B"/>
                 </a:solidFill>
@@ -11686,7 +11686,7 @@
               </a:lnSpc>
             </a:pPr>
             <a:r>
-              <a:rPr sz="2860" b="1" i="0">
+              <a:rPr sz="3068" b="1" i="0">
                 <a:solidFill>
                   <a:srgbClr val="FFFFFF"/>
                 </a:solidFill>
@@ -11813,7 +11813,7 @@
               </a:lnSpc>
             </a:pPr>
             <a:r>
-              <a:rPr sz="3080" b="1" i="0">
+              <a:rPr sz="3304" b="1" i="0">
                 <a:solidFill>
                   <a:srgbClr val="FFFFFF"/>
                 </a:solidFill>
@@ -11896,7 +11896,7 @@
               </a:lnSpc>
             </a:pPr>
             <a:r>
-              <a:rPr sz="1540" b="0" i="0">
+              <a:rPr sz="1652" b="0" i="0">
                 <a:solidFill>
                   <a:srgbClr val="334455"/>
                 </a:solidFill>
@@ -11979,7 +11979,7 @@
               </a:lnSpc>
             </a:pPr>
             <a:r>
-              <a:rPr sz="3080" b="1" i="0">
+              <a:rPr sz="3304" b="1" i="0">
                 <a:solidFill>
                   <a:srgbClr val="FFFFFF"/>
                 </a:solidFill>
@@ -12062,7 +12062,7 @@
               </a:lnSpc>
             </a:pPr>
             <a:r>
-              <a:rPr sz="1540" b="0" i="0">
+              <a:rPr sz="1652" b="0" i="0">
                 <a:solidFill>
                   <a:srgbClr val="334455"/>
                 </a:solidFill>
@@ -12145,7 +12145,7 @@
               </a:lnSpc>
             </a:pPr>
             <a:r>
-              <a:rPr sz="3080" b="1" i="0">
+              <a:rPr sz="3304" b="1" i="0">
                 <a:solidFill>
                   <a:srgbClr val="FFFFFF"/>
                 </a:solidFill>
@@ -12228,7 +12228,7 @@
               </a:lnSpc>
             </a:pPr>
             <a:r>
-              <a:rPr sz="1540" b="0" i="0">
+              <a:rPr sz="1652" b="0" i="0">
                 <a:solidFill>
                   <a:srgbClr val="334455"/>
                 </a:solidFill>
@@ -12311,7 +12311,7 @@
               </a:lnSpc>
             </a:pPr>
             <a:r>
-              <a:rPr sz="3080" b="1" i="0">
+              <a:rPr sz="3304" b="1" i="0">
                 <a:solidFill>
                   <a:srgbClr val="FFFFFF"/>
                 </a:solidFill>
@@ -12394,7 +12394,7 @@
               </a:lnSpc>
             </a:pPr>
             <a:r>
-              <a:rPr sz="1540" b="0" i="0">
+              <a:rPr sz="1652" b="0" i="0">
                 <a:solidFill>
                   <a:srgbClr val="334455"/>
                 </a:solidFill>
@@ -12521,7 +12521,7 @@
               </a:lnSpc>
             </a:pPr>
             <a:r>
-              <a:rPr sz="1650" b="0" i="1">
+              <a:rPr sz="1770" b="0" i="1">
                 <a:solidFill>
                   <a:srgbClr val="0F2A43"/>
                 </a:solidFill>
@@ -12604,7 +12604,7 @@
               </a:lnSpc>
             </a:pPr>
             <a:r>
-              <a:rPr sz="1210" b="0" i="0">
+              <a:rPr sz="1297" b="0" i="0">
                 <a:solidFill>
                   <a:srgbClr val="6B7682"/>
                 </a:solidFill>
@@ -12757,7 +12757,7 @@
               </a:lnSpc>
             </a:pPr>
             <a:r>
-              <a:rPr sz="1430" b="1" i="0">
+              <a:rPr sz="1534" b="1" i="0">
                 <a:solidFill>
                   <a:srgbClr val="C08A2B"/>
                 </a:solidFill>
@@ -12796,7 +12796,7 @@
               </a:lnSpc>
             </a:pPr>
             <a:r>
-              <a:rPr sz="2860" b="1" i="0">
+              <a:rPr sz="3068" b="1" i="0">
                 <a:solidFill>
                   <a:srgbClr val="FFFFFF"/>
                 </a:solidFill>
@@ -12838,7 +12838,7 @@
               </a:spcAft>
             </a:pPr>
             <a:r>
-              <a:rPr sz="1980" b="1">
+              <a:rPr sz="2124" b="1">
                 <a:solidFill>
                   <a:srgbClr val="0F2A43"/>
                 </a:solidFill>
@@ -12847,7 +12847,7 @@
               <a:t>•  Recruitment: </a:t>
             </a:r>
             <a:r>
-              <a:rPr sz="1980">
+              <a:rPr sz="2124">
                 <a:solidFill>
                   <a:srgbClr val="334455"/>
                 </a:solidFill>
@@ -12866,7 +12866,7 @@
               </a:spcAft>
             </a:pPr>
             <a:r>
-              <a:rPr sz="1980" b="1">
+              <a:rPr sz="2124" b="1">
                 <a:solidFill>
                   <a:srgbClr val="0F2A43"/>
                 </a:solidFill>
@@ -12875,7 +12875,7 @@
               <a:t>•  Finance: </a:t>
             </a:r>
             <a:r>
-              <a:rPr sz="1980">
+              <a:rPr sz="2124">
                 <a:solidFill>
                   <a:srgbClr val="334455"/>
                 </a:solidFill>
@@ -12894,7 +12894,7 @@
               </a:spcAft>
             </a:pPr>
             <a:r>
-              <a:rPr sz="1980" b="1">
+              <a:rPr sz="2124" b="1">
                 <a:solidFill>
                   <a:srgbClr val="0F2A43"/>
                 </a:solidFill>
@@ -12903,7 +12903,7 @@
               <a:t>•  Property: </a:t>
             </a:r>
             <a:r>
-              <a:rPr sz="1980">
+              <a:rPr sz="2124">
                 <a:solidFill>
                   <a:srgbClr val="334455"/>
                 </a:solidFill>
@@ -12922,7 +12922,7 @@
               </a:spcAft>
             </a:pPr>
             <a:r>
-              <a:rPr sz="1980" b="1">
+              <a:rPr sz="2124" b="1">
                 <a:solidFill>
                   <a:srgbClr val="0F2A43"/>
                 </a:solidFill>
@@ -12931,7 +12931,7 @@
               <a:t>•  Identity: </a:t>
             </a:r>
             <a:r>
-              <a:rPr sz="1980">
+              <a:rPr sz="2124">
                 <a:solidFill>
                   <a:srgbClr val="334455"/>
                 </a:solidFill>
@@ -12950,7 +12950,7 @@
               </a:spcAft>
             </a:pPr>
             <a:r>
-              <a:rPr sz="1980" b="1">
+              <a:rPr sz="2124" b="1">
                 <a:solidFill>
                   <a:srgbClr val="0F2A43"/>
                 </a:solidFill>
@@ -12959,7 +12959,7 @@
               <a:t>•  Network: </a:t>
             </a:r>
             <a:r>
-              <a:rPr sz="1980">
+              <a:rPr sz="2124">
                 <a:solidFill>
                   <a:srgbClr val="334455"/>
                 </a:solidFill>
@@ -13086,7 +13086,7 @@
               </a:lnSpc>
             </a:pPr>
             <a:r>
-              <a:rPr sz="1540" b="1" i="0">
+              <a:rPr sz="1652" b="1" i="0">
                 <a:solidFill>
                   <a:srgbClr val="C08A2B"/>
                 </a:solidFill>
@@ -13125,7 +13125,7 @@
               </a:lnSpc>
             </a:pPr>
             <a:r>
-              <a:rPr sz="1760" b="0" i="1">
+              <a:rPr sz="1888" b="0" i="1">
                 <a:solidFill>
                   <a:srgbClr val="334455"/>
                 </a:solidFill>
@@ -13252,7 +13252,7 @@
               </a:lnSpc>
             </a:pPr>
             <a:r>
-              <a:rPr sz="1650" b="0" i="1">
+              <a:rPr sz="1770" b="0" i="1">
                 <a:solidFill>
                   <a:srgbClr val="0F2A43"/>
                 </a:solidFill>
@@ -13335,7 +13335,7 @@
               </a:lnSpc>
             </a:pPr>
             <a:r>
-              <a:rPr sz="1210" b="0" i="0">
+              <a:rPr sz="1297" b="0" i="0">
                 <a:solidFill>
                   <a:srgbClr val="6B7682"/>
                 </a:solidFill>
@@ -13400,7 +13400,7 @@
               </a:lnSpc>
             </a:pPr>
             <a:r>
-              <a:rPr sz="23100" b="1" i="0">
+              <a:rPr sz="24780" b="1" i="0">
                 <a:solidFill>
                   <a:srgbClr val="1C3A56"/>
                 </a:solidFill>
@@ -13439,7 +13439,7 @@
               </a:lnSpc>
             </a:pPr>
             <a:r>
-              <a:rPr sz="1430" b="1" i="0">
+              <a:rPr sz="1534" b="1" i="0">
                 <a:solidFill>
                   <a:srgbClr val="C08A2B"/>
                 </a:solidFill>
@@ -13522,7 +13522,7 @@
               </a:lnSpc>
             </a:pPr>
             <a:r>
-              <a:rPr sz="3630" b="1" i="0">
+              <a:rPr sz="3894" b="1" i="0">
                 <a:solidFill>
                   <a:srgbClr val="FFFFFF"/>
                 </a:solidFill>
@@ -13538,7 +13538,7 @@
               </a:lnSpc>
             </a:pPr>
             <a:r>
-              <a:rPr sz="3630" b="1" i="0">
+              <a:rPr sz="3894" b="1" i="0">
                 <a:solidFill>
                   <a:srgbClr val="FFFFFF"/>
                 </a:solidFill>
@@ -13577,7 +13577,7 @@
               </a:lnSpc>
             </a:pPr>
             <a:r>
-              <a:rPr sz="1980" b="0" i="1">
+              <a:rPr sz="2124" b="0" i="1">
                 <a:solidFill>
                   <a:srgbClr val="F2F4F7"/>
                 </a:solidFill>
@@ -13660,7 +13660,7 @@
               </a:lnSpc>
             </a:pPr>
             <a:r>
-              <a:rPr sz="1210" b="0" i="0">
+              <a:rPr sz="1297" b="0" i="0">
                 <a:solidFill>
                   <a:srgbClr val="909CAA"/>
                 </a:solidFill>
@@ -13813,7 +13813,7 @@
               </a:lnSpc>
             </a:pPr>
             <a:r>
-              <a:rPr sz="1430" b="1" i="0">
+              <a:rPr sz="1534" b="1" i="0">
                 <a:solidFill>
                   <a:srgbClr val="C08A2B"/>
                 </a:solidFill>
@@ -13852,7 +13852,7 @@
               </a:lnSpc>
             </a:pPr>
             <a:r>
-              <a:rPr sz="2860" b="1" i="0">
+              <a:rPr sz="3068" b="1" i="0">
                 <a:solidFill>
                   <a:srgbClr val="FFFFFF"/>
                 </a:solidFill>
@@ -13894,7 +13894,7 @@
               </a:spcAft>
             </a:pPr>
             <a:r>
-              <a:rPr sz="2090">
+              <a:rPr sz="2242">
                 <a:solidFill>
                   <a:srgbClr val="334455"/>
                 </a:solidFill>
@@ -13913,7 +13913,7 @@
               </a:spcAft>
             </a:pPr>
             <a:r>
-              <a:rPr sz="2090">
+              <a:rPr sz="2242">
                 <a:solidFill>
                   <a:srgbClr val="334455"/>
                 </a:solidFill>
@@ -13932,7 +13932,7 @@
               </a:spcAft>
             </a:pPr>
             <a:r>
-              <a:rPr sz="2090">
+              <a:rPr sz="2242">
                 <a:solidFill>
                   <a:srgbClr val="334455"/>
                 </a:solidFill>
@@ -13951,7 +13951,7 @@
               </a:spcAft>
             </a:pPr>
             <a:r>
-              <a:rPr sz="2090">
+              <a:rPr sz="2242">
                 <a:solidFill>
                   <a:srgbClr val="334455"/>
                 </a:solidFill>
@@ -14078,7 +14078,7 @@
               </a:lnSpc>
             </a:pPr>
             <a:r>
-              <a:rPr sz="1650" b="0" i="1">
+              <a:rPr sz="1770" b="0" i="1">
                 <a:solidFill>
                   <a:srgbClr val="0F2A43"/>
                 </a:solidFill>
@@ -14161,7 +14161,7 @@
               </a:lnSpc>
             </a:pPr>
             <a:r>
-              <a:rPr sz="1210" b="0" i="0">
+              <a:rPr sz="1297" b="0" i="0">
                 <a:solidFill>
                   <a:srgbClr val="6B7682"/>
                 </a:solidFill>
@@ -14314,7 +14314,7 @@
               </a:lnSpc>
             </a:pPr>
             <a:r>
-              <a:rPr sz="1430" b="1" i="0">
+              <a:rPr sz="1534" b="1" i="0">
                 <a:solidFill>
                   <a:srgbClr val="C08A2B"/>
                 </a:solidFill>
@@ -14353,7 +14353,7 @@
               </a:lnSpc>
             </a:pPr>
             <a:r>
-              <a:rPr sz="2860" b="1" i="0">
+              <a:rPr sz="3068" b="1" i="0">
                 <a:solidFill>
                   <a:srgbClr val="FFFFFF"/>
                 </a:solidFill>
@@ -14395,7 +14395,7 @@
               </a:spcAft>
             </a:pPr>
             <a:r>
-              <a:rPr sz="2090" b="1">
+              <a:rPr sz="2242" b="1">
                 <a:solidFill>
                   <a:srgbClr val="0F2A43"/>
                 </a:solidFill>
@@ -14404,7 +14404,7 @@
               <a:t>•  Full name: </a:t>
             </a:r>
             <a:r>
-              <a:rPr sz="2090">
+              <a:rPr sz="2242">
                 <a:solidFill>
                   <a:srgbClr val="334455"/>
                 </a:solidFill>
@@ -14423,7 +14423,7 @@
               </a:spcAft>
             </a:pPr>
             <a:r>
-              <a:rPr sz="2090">
+              <a:rPr sz="2242">
                 <a:solidFill>
                   <a:srgbClr val="334455"/>
                 </a:solidFill>
@@ -14442,7 +14442,7 @@
               </a:spcAft>
             </a:pPr>
             <a:r>
-              <a:rPr sz="2090" b="1">
+              <a:rPr sz="2242" b="1">
                 <a:solidFill>
                   <a:srgbClr val="0F2A43"/>
                 </a:solidFill>
@@ -14451,7 +14451,7 @@
               <a:t>•  Three elements: </a:t>
             </a:r>
             <a:r>
-              <a:rPr sz="2090">
+              <a:rPr sz="2242">
                 <a:solidFill>
                   <a:srgbClr val="334455"/>
                 </a:solidFill>
@@ -14470,7 +14470,7 @@
               </a:spcAft>
             </a:pPr>
             <a:r>
-              <a:rPr sz="2090">
+              <a:rPr sz="2242">
                 <a:solidFill>
                   <a:srgbClr val="334455"/>
                 </a:solidFill>
@@ -14489,7 +14489,7 @@
               </a:spcAft>
             </a:pPr>
             <a:r>
-              <a:rPr sz="2090">
+              <a:rPr sz="2242">
                 <a:solidFill>
                   <a:srgbClr val="334455"/>
                 </a:solidFill>
@@ -14616,7 +14616,7 @@
               </a:lnSpc>
             </a:pPr>
             <a:r>
-              <a:rPr sz="1650" b="0" i="1">
+              <a:rPr sz="1770" b="0" i="1">
                 <a:solidFill>
                   <a:srgbClr val="0F2A43"/>
                 </a:solidFill>
@@ -14699,7 +14699,7 @@
               </a:lnSpc>
             </a:pPr>
             <a:r>
-              <a:rPr sz="1210" b="0" i="0">
+              <a:rPr sz="1297" b="0" i="0">
                 <a:solidFill>
                   <a:srgbClr val="6B7682"/>
                 </a:solidFill>

--- a/Epstein_Transnational_Justice.pptx
+++ b/Epstein_Transnational_Justice.pptx
@@ -3364,9 +3364,33 @@
           </a:p>
         </p:txBody>
       </p:sp>
-      <p:sp>
-        <p:nvSpPr>
-          <p:cNvPr id="8" name="TextBox 7"/>
+      <p:pic>
+        <p:nvPicPr>
+          <p:cNvPr id="8" name="Picture 7" descr="image.png"/>
+          <p:cNvPicPr>
+            <a:picLocks noChangeAspect="1"/>
+          </p:cNvPicPr>
+          <p:nvPr/>
+        </p:nvPicPr>
+        <p:blipFill>
+          <a:blip r:embed="rId2"/>
+          <a:stretch>
+            <a:fillRect/>
+          </a:stretch>
+        </p:blipFill>
+        <p:spPr>
+          <a:xfrm>
+            <a:off x="5524347" y="4526280"/>
+            <a:ext cx="1143000" cy="1143000"/>
+          </a:xfrm>
+          <a:prstGeom prst="rect">
+            <a:avLst/>
+          </a:prstGeom>
+        </p:spPr>
+      </p:pic>
+      <p:sp>
+        <p:nvSpPr>
+          <p:cNvPr id="9" name="TextBox 8"/>
           <p:cNvSpPr txBox="1"/>
           <p:nvPr/>
         </p:nvSpPr>
@@ -3565,7 +3589,7 @@
         <p:spPr>
           <a:xfrm>
             <a:off x="548640" y="475488"/>
-            <a:ext cx="11064240" cy="731520"/>
+            <a:ext cx="10058400" cy="731520"/>
           </a:xfrm>
           <a:prstGeom prst="rect">
             <a:avLst/>
@@ -3595,9 +3619,33 @@
           </a:p>
         </p:txBody>
       </p:sp>
-      <p:sp>
-        <p:nvSpPr>
-          <p:cNvPr id="6" name="TextBox 5"/>
+      <p:pic>
+        <p:nvPicPr>
+          <p:cNvPr id="6" name="Picture 5" descr="image.png"/>
+          <p:cNvPicPr>
+            <a:picLocks noChangeAspect="1"/>
+          </p:cNvPicPr>
+          <p:nvPr/>
+        </p:nvPicPr>
+        <p:blipFill>
+          <a:blip r:embed="rId2"/>
+          <a:stretch>
+            <a:fillRect/>
+          </a:stretch>
+        </p:blipFill>
+        <p:spPr>
+          <a:xfrm>
+            <a:off x="11045952" y="301752"/>
+            <a:ext cx="548640" cy="548640"/>
+          </a:xfrm>
+          <a:prstGeom prst="rect">
+            <a:avLst/>
+          </a:prstGeom>
+        </p:spPr>
+      </p:pic>
+      <p:sp>
+        <p:nvSpPr>
+          <p:cNvPr id="7" name="TextBox 6"/>
           <p:cNvSpPr txBox="1"/>
           <p:nvPr/>
         </p:nvSpPr>
@@ -3724,7 +3772,7 @@
       </p:sp>
       <p:sp>
         <p:nvSpPr>
-          <p:cNvPr id="7" name="Rectangle 6"/>
+          <p:cNvPr id="8" name="Rectangle 7"/>
           <p:cNvSpPr/>
           <p:nvPr/>
         </p:nvSpPr>
@@ -3768,7 +3816,7 @@
       </p:sp>
       <p:sp>
         <p:nvSpPr>
-          <p:cNvPr id="8" name="Rectangle 7"/>
+          <p:cNvPr id="9" name="Rectangle 8"/>
           <p:cNvSpPr/>
           <p:nvPr/>
         </p:nvSpPr>
@@ -3812,7 +3860,7 @@
       </p:sp>
       <p:sp>
         <p:nvSpPr>
-          <p:cNvPr id="9" name="TextBox 8"/>
+          <p:cNvPr id="10" name="TextBox 9"/>
           <p:cNvSpPr txBox="1"/>
           <p:nvPr/>
         </p:nvSpPr>
@@ -3851,7 +3899,7 @@
       </p:sp>
       <p:sp>
         <p:nvSpPr>
-          <p:cNvPr id="10" name="Rectangle 9"/>
+          <p:cNvPr id="11" name="Rectangle 10"/>
           <p:cNvSpPr/>
           <p:nvPr/>
         </p:nvSpPr>
@@ -3895,7 +3943,7 @@
       </p:sp>
       <p:sp>
         <p:nvSpPr>
-          <p:cNvPr id="11" name="TextBox 10"/>
+          <p:cNvPr id="12" name="TextBox 11"/>
           <p:cNvSpPr txBox="1"/>
           <p:nvPr/>
         </p:nvSpPr>
@@ -4094,7 +4142,7 @@
         <p:spPr>
           <a:xfrm>
             <a:off x="548640" y="475488"/>
-            <a:ext cx="11064240" cy="731520"/>
+            <a:ext cx="10058400" cy="731520"/>
           </a:xfrm>
           <a:prstGeom prst="rect">
             <a:avLst/>
@@ -4124,9 +4172,33 @@
           </a:p>
         </p:txBody>
       </p:sp>
-      <p:sp>
-        <p:nvSpPr>
-          <p:cNvPr id="6" name="TextBox 5"/>
+      <p:pic>
+        <p:nvPicPr>
+          <p:cNvPr id="6" name="Picture 5" descr="image.png"/>
+          <p:cNvPicPr>
+            <a:picLocks noChangeAspect="1"/>
+          </p:cNvPicPr>
+          <p:nvPr/>
+        </p:nvPicPr>
+        <p:blipFill>
+          <a:blip r:embed="rId2"/>
+          <a:stretch>
+            <a:fillRect/>
+          </a:stretch>
+        </p:blipFill>
+        <p:spPr>
+          <a:xfrm>
+            <a:off x="11045952" y="301752"/>
+            <a:ext cx="548640" cy="548640"/>
+          </a:xfrm>
+          <a:prstGeom prst="rect">
+            <a:avLst/>
+          </a:prstGeom>
+        </p:spPr>
+      </p:pic>
+      <p:sp>
+        <p:nvSpPr>
+          <p:cNvPr id="7" name="TextBox 6"/>
           <p:cNvSpPr txBox="1"/>
           <p:nvPr/>
         </p:nvSpPr>
@@ -4289,7 +4361,7 @@
       </p:sp>
       <p:sp>
         <p:nvSpPr>
-          <p:cNvPr id="7" name="Rectangle 6"/>
+          <p:cNvPr id="8" name="Rectangle 7"/>
           <p:cNvSpPr/>
           <p:nvPr/>
         </p:nvSpPr>
@@ -4333,7 +4405,7 @@
       </p:sp>
       <p:sp>
         <p:nvSpPr>
-          <p:cNvPr id="8" name="Rectangle 7"/>
+          <p:cNvPr id="9" name="Rectangle 8"/>
           <p:cNvSpPr/>
           <p:nvPr/>
         </p:nvSpPr>
@@ -4377,7 +4449,7 @@
       </p:sp>
       <p:sp>
         <p:nvSpPr>
-          <p:cNvPr id="9" name="TextBox 8"/>
+          <p:cNvPr id="10" name="TextBox 9"/>
           <p:cNvSpPr txBox="1"/>
           <p:nvPr/>
         </p:nvSpPr>
@@ -4416,7 +4488,7 @@
       </p:sp>
       <p:sp>
         <p:nvSpPr>
-          <p:cNvPr id="10" name="Rectangle 9"/>
+          <p:cNvPr id="11" name="Rectangle 10"/>
           <p:cNvSpPr/>
           <p:nvPr/>
         </p:nvSpPr>
@@ -4460,7 +4532,7 @@
       </p:sp>
       <p:sp>
         <p:nvSpPr>
-          <p:cNvPr id="11" name="TextBox 10"/>
+          <p:cNvPr id="12" name="TextBox 11"/>
           <p:cNvSpPr txBox="1"/>
           <p:nvPr/>
         </p:nvSpPr>
@@ -4659,7 +4731,7 @@
         <p:spPr>
           <a:xfrm>
             <a:off x="548640" y="475488"/>
-            <a:ext cx="11064240" cy="731520"/>
+            <a:ext cx="10058400" cy="731520"/>
           </a:xfrm>
           <a:prstGeom prst="rect">
             <a:avLst/>
@@ -4689,9 +4761,33 @@
           </a:p>
         </p:txBody>
       </p:sp>
-      <p:sp>
-        <p:nvSpPr>
-          <p:cNvPr id="6" name="TextBox 5"/>
+      <p:pic>
+        <p:nvPicPr>
+          <p:cNvPr id="6" name="Picture 5" descr="image.png"/>
+          <p:cNvPicPr>
+            <a:picLocks noChangeAspect="1"/>
+          </p:cNvPicPr>
+          <p:nvPr/>
+        </p:nvPicPr>
+        <p:blipFill>
+          <a:blip r:embed="rId2"/>
+          <a:stretch>
+            <a:fillRect/>
+          </a:stretch>
+        </p:blipFill>
+        <p:spPr>
+          <a:xfrm>
+            <a:off x="11045952" y="301752"/>
+            <a:ext cx="548640" cy="548640"/>
+          </a:xfrm>
+          <a:prstGeom prst="rect">
+            <a:avLst/>
+          </a:prstGeom>
+        </p:spPr>
+      </p:pic>
+      <p:sp>
+        <p:nvSpPr>
+          <p:cNvPr id="7" name="TextBox 6"/>
           <p:cNvSpPr txBox="1"/>
           <p:nvPr/>
         </p:nvSpPr>
@@ -4808,7 +4904,7 @@
       </p:sp>
       <p:sp>
         <p:nvSpPr>
-          <p:cNvPr id="7" name="Rectangle 6"/>
+          <p:cNvPr id="8" name="Rectangle 7"/>
           <p:cNvSpPr/>
           <p:nvPr/>
         </p:nvSpPr>
@@ -4852,7 +4948,7 @@
       </p:sp>
       <p:sp>
         <p:nvSpPr>
-          <p:cNvPr id="8" name="Rectangle 7"/>
+          <p:cNvPr id="9" name="Rectangle 8"/>
           <p:cNvSpPr/>
           <p:nvPr/>
         </p:nvSpPr>
@@ -4896,7 +4992,7 @@
       </p:sp>
       <p:sp>
         <p:nvSpPr>
-          <p:cNvPr id="9" name="TextBox 8"/>
+          <p:cNvPr id="10" name="TextBox 9"/>
           <p:cNvSpPr txBox="1"/>
           <p:nvPr/>
         </p:nvSpPr>
@@ -4935,7 +5031,7 @@
       </p:sp>
       <p:sp>
         <p:nvSpPr>
-          <p:cNvPr id="10" name="Rectangle 9"/>
+          <p:cNvPr id="11" name="Rectangle 10"/>
           <p:cNvSpPr/>
           <p:nvPr/>
         </p:nvSpPr>
@@ -4979,7 +5075,7 @@
       </p:sp>
       <p:sp>
         <p:nvSpPr>
-          <p:cNvPr id="11" name="TextBox 10"/>
+          <p:cNvPr id="12" name="TextBox 11"/>
           <p:cNvSpPr txBox="1"/>
           <p:nvPr/>
         </p:nvSpPr>
@@ -5258,9 +5354,33 @@
           </a:p>
         </p:txBody>
       </p:sp>
-      <p:sp>
-        <p:nvSpPr>
-          <p:cNvPr id="7" name="Rectangle 6"/>
+      <p:pic>
+        <p:nvPicPr>
+          <p:cNvPr id="7" name="Picture 6" descr="image.png"/>
+          <p:cNvPicPr>
+            <a:picLocks noChangeAspect="1"/>
+          </p:cNvPicPr>
+          <p:nvPr/>
+        </p:nvPicPr>
+        <p:blipFill>
+          <a:blip r:embed="rId2"/>
+          <a:stretch>
+            <a:fillRect/>
+          </a:stretch>
+        </p:blipFill>
+        <p:spPr>
+          <a:xfrm>
+            <a:off x="9646920" y="4206240"/>
+            <a:ext cx="1691640" cy="1691640"/>
+          </a:xfrm>
+          <a:prstGeom prst="rect">
+            <a:avLst/>
+          </a:prstGeom>
+        </p:spPr>
+      </p:pic>
+      <p:sp>
+        <p:nvSpPr>
+          <p:cNvPr id="8" name="Rectangle 7"/>
           <p:cNvSpPr/>
           <p:nvPr/>
         </p:nvSpPr>
@@ -5304,7 +5424,7 @@
       </p:sp>
       <p:sp>
         <p:nvSpPr>
-          <p:cNvPr id="8" name="TextBox 7"/>
+          <p:cNvPr id="9" name="TextBox 8"/>
           <p:cNvSpPr txBox="1"/>
           <p:nvPr/>
         </p:nvSpPr>
@@ -5503,7 +5623,7 @@
         <p:spPr>
           <a:xfrm>
             <a:off x="548640" y="475488"/>
-            <a:ext cx="11064240" cy="731520"/>
+            <a:ext cx="10058400" cy="731520"/>
           </a:xfrm>
           <a:prstGeom prst="rect">
             <a:avLst/>
@@ -5533,9 +5653,33 @@
           </a:p>
         </p:txBody>
       </p:sp>
-      <p:sp>
-        <p:nvSpPr>
-          <p:cNvPr id="6" name="TextBox 5"/>
+      <p:pic>
+        <p:nvPicPr>
+          <p:cNvPr id="6" name="Picture 5" descr="image.png"/>
+          <p:cNvPicPr>
+            <a:picLocks noChangeAspect="1"/>
+          </p:cNvPicPr>
+          <p:nvPr/>
+        </p:nvPicPr>
+        <p:blipFill>
+          <a:blip r:embed="rId2"/>
+          <a:stretch>
+            <a:fillRect/>
+          </a:stretch>
+        </p:blipFill>
+        <p:spPr>
+          <a:xfrm>
+            <a:off x="11045952" y="301752"/>
+            <a:ext cx="548640" cy="548640"/>
+          </a:xfrm>
+          <a:prstGeom prst="rect">
+            <a:avLst/>
+          </a:prstGeom>
+        </p:spPr>
+      </p:pic>
+      <p:sp>
+        <p:nvSpPr>
+          <p:cNvPr id="7" name="TextBox 6"/>
           <p:cNvSpPr txBox="1"/>
           <p:nvPr/>
         </p:nvSpPr>
@@ -5653,7 +5797,7 @@
       </p:sp>
       <p:sp>
         <p:nvSpPr>
-          <p:cNvPr id="7" name="Rectangle 6"/>
+          <p:cNvPr id="8" name="Rectangle 7"/>
           <p:cNvSpPr/>
           <p:nvPr/>
         </p:nvSpPr>
@@ -5697,7 +5841,7 @@
       </p:sp>
       <p:sp>
         <p:nvSpPr>
-          <p:cNvPr id="8" name="Rectangle 7"/>
+          <p:cNvPr id="9" name="Rectangle 8"/>
           <p:cNvSpPr/>
           <p:nvPr/>
         </p:nvSpPr>
@@ -5741,7 +5885,7 @@
       </p:sp>
       <p:sp>
         <p:nvSpPr>
-          <p:cNvPr id="9" name="TextBox 8"/>
+          <p:cNvPr id="10" name="TextBox 9"/>
           <p:cNvSpPr txBox="1"/>
           <p:nvPr/>
         </p:nvSpPr>
@@ -5780,7 +5924,7 @@
       </p:sp>
       <p:sp>
         <p:nvSpPr>
-          <p:cNvPr id="10" name="Rectangle 9"/>
+          <p:cNvPr id="11" name="Rectangle 10"/>
           <p:cNvSpPr/>
           <p:nvPr/>
         </p:nvSpPr>
@@ -5824,7 +5968,7 @@
       </p:sp>
       <p:sp>
         <p:nvSpPr>
-          <p:cNvPr id="11" name="TextBox 10"/>
+          <p:cNvPr id="12" name="TextBox 11"/>
           <p:cNvSpPr txBox="1"/>
           <p:nvPr/>
         </p:nvSpPr>
@@ -6023,7 +6167,7 @@
         <p:spPr>
           <a:xfrm>
             <a:off x="548640" y="475488"/>
-            <a:ext cx="11064240" cy="731520"/>
+            <a:ext cx="10058400" cy="731520"/>
           </a:xfrm>
           <a:prstGeom prst="rect">
             <a:avLst/>
@@ -6053,9 +6197,33 @@
           </a:p>
         </p:txBody>
       </p:sp>
-      <p:sp>
-        <p:nvSpPr>
-          <p:cNvPr id="6" name="Rectangle 5"/>
+      <p:pic>
+        <p:nvPicPr>
+          <p:cNvPr id="6" name="Picture 5" descr="image.png"/>
+          <p:cNvPicPr>
+            <a:picLocks noChangeAspect="1"/>
+          </p:cNvPicPr>
+          <p:nvPr/>
+        </p:nvPicPr>
+        <p:blipFill>
+          <a:blip r:embed="rId2"/>
+          <a:stretch>
+            <a:fillRect/>
+          </a:stretch>
+        </p:blipFill>
+        <p:spPr>
+          <a:xfrm>
+            <a:off x="11045952" y="301752"/>
+            <a:ext cx="548640" cy="548640"/>
+          </a:xfrm>
+          <a:prstGeom prst="rect">
+            <a:avLst/>
+          </a:prstGeom>
+        </p:spPr>
+      </p:pic>
+      <p:sp>
+        <p:nvSpPr>
+          <p:cNvPr id="7" name="Rectangle 6"/>
           <p:cNvSpPr/>
           <p:nvPr/>
         </p:nvSpPr>
@@ -6099,7 +6267,7 @@
       </p:sp>
       <p:sp>
         <p:nvSpPr>
-          <p:cNvPr id="7" name="Rectangle 6"/>
+          <p:cNvPr id="8" name="Rectangle 7"/>
           <p:cNvSpPr/>
           <p:nvPr/>
         </p:nvSpPr>
@@ -6143,7 +6311,7 @@
       </p:sp>
       <p:sp>
         <p:nvSpPr>
-          <p:cNvPr id="8" name="TextBox 7"/>
+          <p:cNvPr id="9" name="TextBox 8"/>
           <p:cNvSpPr txBox="1"/>
           <p:nvPr/>
         </p:nvSpPr>
@@ -6182,7 +6350,7 @@
       </p:sp>
       <p:sp>
         <p:nvSpPr>
-          <p:cNvPr id="9" name="TextBox 8"/>
+          <p:cNvPr id="10" name="TextBox 9"/>
           <p:cNvSpPr txBox="1"/>
           <p:nvPr/>
         </p:nvSpPr>
@@ -6281,7 +6449,7 @@
       </p:sp>
       <p:sp>
         <p:nvSpPr>
-          <p:cNvPr id="10" name="Rectangle 9"/>
+          <p:cNvPr id="11" name="Rectangle 10"/>
           <p:cNvSpPr/>
           <p:nvPr/>
         </p:nvSpPr>
@@ -6325,7 +6493,7 @@
       </p:sp>
       <p:sp>
         <p:nvSpPr>
-          <p:cNvPr id="11" name="Rectangle 10"/>
+          <p:cNvPr id="12" name="Rectangle 11"/>
           <p:cNvSpPr/>
           <p:nvPr/>
         </p:nvSpPr>
@@ -6369,7 +6537,7 @@
       </p:sp>
       <p:sp>
         <p:nvSpPr>
-          <p:cNvPr id="12" name="TextBox 11"/>
+          <p:cNvPr id="13" name="TextBox 12"/>
           <p:cNvSpPr txBox="1"/>
           <p:nvPr/>
         </p:nvSpPr>
@@ -6408,7 +6576,7 @@
       </p:sp>
       <p:sp>
         <p:nvSpPr>
-          <p:cNvPr id="13" name="TextBox 12"/>
+          <p:cNvPr id="14" name="TextBox 13"/>
           <p:cNvSpPr txBox="1"/>
           <p:nvPr/>
         </p:nvSpPr>
@@ -6507,7 +6675,7 @@
       </p:sp>
       <p:sp>
         <p:nvSpPr>
-          <p:cNvPr id="14" name="Rectangle 13"/>
+          <p:cNvPr id="15" name="Rectangle 14"/>
           <p:cNvSpPr/>
           <p:nvPr/>
         </p:nvSpPr>
@@ -6551,7 +6719,7 @@
       </p:sp>
       <p:sp>
         <p:nvSpPr>
-          <p:cNvPr id="15" name="Rectangle 14"/>
+          <p:cNvPr id="16" name="Rectangle 15"/>
           <p:cNvSpPr/>
           <p:nvPr/>
         </p:nvSpPr>
@@ -6595,7 +6763,7 @@
       </p:sp>
       <p:sp>
         <p:nvSpPr>
-          <p:cNvPr id="16" name="TextBox 15"/>
+          <p:cNvPr id="17" name="TextBox 16"/>
           <p:cNvSpPr txBox="1"/>
           <p:nvPr/>
         </p:nvSpPr>
@@ -6634,7 +6802,7 @@
       </p:sp>
       <p:sp>
         <p:nvSpPr>
-          <p:cNvPr id="17" name="Rectangle 16"/>
+          <p:cNvPr id="18" name="Rectangle 17"/>
           <p:cNvSpPr/>
           <p:nvPr/>
         </p:nvSpPr>
@@ -6678,7 +6846,7 @@
       </p:sp>
       <p:sp>
         <p:nvSpPr>
-          <p:cNvPr id="18" name="TextBox 17"/>
+          <p:cNvPr id="19" name="TextBox 18"/>
           <p:cNvSpPr txBox="1"/>
           <p:nvPr/>
         </p:nvSpPr>
@@ -6877,7 +7045,7 @@
         <p:spPr>
           <a:xfrm>
             <a:off x="548640" y="475488"/>
-            <a:ext cx="11064240" cy="731520"/>
+            <a:ext cx="10058400" cy="731520"/>
           </a:xfrm>
           <a:prstGeom prst="rect">
             <a:avLst/>
@@ -6907,9 +7075,33 @@
           </a:p>
         </p:txBody>
       </p:sp>
-      <p:sp>
-        <p:nvSpPr>
-          <p:cNvPr id="6" name="TextBox 5"/>
+      <p:pic>
+        <p:nvPicPr>
+          <p:cNvPr id="6" name="Picture 5" descr="image.png"/>
+          <p:cNvPicPr>
+            <a:picLocks noChangeAspect="1"/>
+          </p:cNvPicPr>
+          <p:nvPr/>
+        </p:nvPicPr>
+        <p:blipFill>
+          <a:blip r:embed="rId2"/>
+          <a:stretch>
+            <a:fillRect/>
+          </a:stretch>
+        </p:blipFill>
+        <p:spPr>
+          <a:xfrm>
+            <a:off x="11045952" y="301752"/>
+            <a:ext cx="548640" cy="548640"/>
+          </a:xfrm>
+          <a:prstGeom prst="rect">
+            <a:avLst/>
+          </a:prstGeom>
+        </p:spPr>
+      </p:pic>
+      <p:sp>
+        <p:nvSpPr>
+          <p:cNvPr id="7" name="TextBox 6"/>
           <p:cNvSpPr txBox="1"/>
           <p:nvPr/>
         </p:nvSpPr>
@@ -7044,7 +7236,7 @@
       </p:sp>
       <p:sp>
         <p:nvSpPr>
-          <p:cNvPr id="7" name="Rectangle 6"/>
+          <p:cNvPr id="8" name="Rectangle 7"/>
           <p:cNvSpPr/>
           <p:nvPr/>
         </p:nvSpPr>
@@ -7088,7 +7280,7 @@
       </p:sp>
       <p:sp>
         <p:nvSpPr>
-          <p:cNvPr id="8" name="Rectangle 7"/>
+          <p:cNvPr id="9" name="Rectangle 8"/>
           <p:cNvSpPr/>
           <p:nvPr/>
         </p:nvSpPr>
@@ -7132,7 +7324,7 @@
       </p:sp>
       <p:sp>
         <p:nvSpPr>
-          <p:cNvPr id="9" name="TextBox 8"/>
+          <p:cNvPr id="10" name="TextBox 9"/>
           <p:cNvSpPr txBox="1"/>
           <p:nvPr/>
         </p:nvSpPr>
@@ -7171,7 +7363,7 @@
       </p:sp>
       <p:sp>
         <p:nvSpPr>
-          <p:cNvPr id="10" name="Rectangle 9"/>
+          <p:cNvPr id="11" name="Rectangle 10"/>
           <p:cNvSpPr/>
           <p:nvPr/>
         </p:nvSpPr>
@@ -7215,7 +7407,7 @@
       </p:sp>
       <p:sp>
         <p:nvSpPr>
-          <p:cNvPr id="11" name="TextBox 10"/>
+          <p:cNvPr id="12" name="TextBox 11"/>
           <p:cNvSpPr txBox="1"/>
           <p:nvPr/>
         </p:nvSpPr>
@@ -7494,9 +7686,33 @@
           </a:p>
         </p:txBody>
       </p:sp>
-      <p:sp>
-        <p:nvSpPr>
-          <p:cNvPr id="7" name="Rectangle 6"/>
+      <p:pic>
+        <p:nvPicPr>
+          <p:cNvPr id="7" name="Picture 6" descr="image.png"/>
+          <p:cNvPicPr>
+            <a:picLocks noChangeAspect="1"/>
+          </p:cNvPicPr>
+          <p:nvPr/>
+        </p:nvPicPr>
+        <p:blipFill>
+          <a:blip r:embed="rId2"/>
+          <a:stretch>
+            <a:fillRect/>
+          </a:stretch>
+        </p:blipFill>
+        <p:spPr>
+          <a:xfrm>
+            <a:off x="9646920" y="4206240"/>
+            <a:ext cx="1691640" cy="1691640"/>
+          </a:xfrm>
+          <a:prstGeom prst="rect">
+            <a:avLst/>
+          </a:prstGeom>
+        </p:spPr>
+      </p:pic>
+      <p:sp>
+        <p:nvSpPr>
+          <p:cNvPr id="8" name="Rectangle 7"/>
           <p:cNvSpPr/>
           <p:nvPr/>
         </p:nvSpPr>
@@ -7540,7 +7756,7 @@
       </p:sp>
       <p:sp>
         <p:nvSpPr>
-          <p:cNvPr id="8" name="TextBox 7"/>
+          <p:cNvPr id="9" name="TextBox 8"/>
           <p:cNvSpPr txBox="1"/>
           <p:nvPr/>
         </p:nvSpPr>
@@ -7739,7 +7955,7 @@
         <p:spPr>
           <a:xfrm>
             <a:off x="548640" y="475488"/>
-            <a:ext cx="11064240" cy="731520"/>
+            <a:ext cx="10058400" cy="731520"/>
           </a:xfrm>
           <a:prstGeom prst="rect">
             <a:avLst/>
@@ -7769,9 +7985,33 @@
           </a:p>
         </p:txBody>
       </p:sp>
-      <p:sp>
-        <p:nvSpPr>
-          <p:cNvPr id="6" name="TextBox 5"/>
+      <p:pic>
+        <p:nvPicPr>
+          <p:cNvPr id="6" name="Picture 5" descr="image.png"/>
+          <p:cNvPicPr>
+            <a:picLocks noChangeAspect="1"/>
+          </p:cNvPicPr>
+          <p:nvPr/>
+        </p:nvPicPr>
+        <p:blipFill>
+          <a:blip r:embed="rId2"/>
+          <a:stretch>
+            <a:fillRect/>
+          </a:stretch>
+        </p:blipFill>
+        <p:spPr>
+          <a:xfrm>
+            <a:off x="11045952" y="301752"/>
+            <a:ext cx="548640" cy="548640"/>
+          </a:xfrm>
+          <a:prstGeom prst="rect">
+            <a:avLst/>
+          </a:prstGeom>
+        </p:spPr>
+      </p:pic>
+      <p:sp>
+        <p:nvSpPr>
+          <p:cNvPr id="7" name="TextBox 6"/>
           <p:cNvSpPr txBox="1"/>
           <p:nvPr/>
         </p:nvSpPr>
@@ -7879,7 +8119,7 @@
       </p:sp>
       <p:sp>
         <p:nvSpPr>
-          <p:cNvPr id="7" name="Rectangle 6"/>
+          <p:cNvPr id="8" name="Rectangle 7"/>
           <p:cNvSpPr/>
           <p:nvPr/>
         </p:nvSpPr>
@@ -7923,7 +8163,7 @@
       </p:sp>
       <p:sp>
         <p:nvSpPr>
-          <p:cNvPr id="8" name="Rectangle 7"/>
+          <p:cNvPr id="9" name="Rectangle 8"/>
           <p:cNvSpPr/>
           <p:nvPr/>
         </p:nvSpPr>
@@ -7967,7 +8207,7 @@
       </p:sp>
       <p:sp>
         <p:nvSpPr>
-          <p:cNvPr id="9" name="TextBox 8"/>
+          <p:cNvPr id="10" name="TextBox 9"/>
           <p:cNvSpPr txBox="1"/>
           <p:nvPr/>
         </p:nvSpPr>
@@ -8006,7 +8246,7 @@
       </p:sp>
       <p:sp>
         <p:nvSpPr>
-          <p:cNvPr id="10" name="Rectangle 9"/>
+          <p:cNvPr id="11" name="Rectangle 10"/>
           <p:cNvSpPr/>
           <p:nvPr/>
         </p:nvSpPr>
@@ -8050,7 +8290,7 @@
       </p:sp>
       <p:sp>
         <p:nvSpPr>
-          <p:cNvPr id="11" name="TextBox 10"/>
+          <p:cNvPr id="12" name="TextBox 11"/>
           <p:cNvSpPr txBox="1"/>
           <p:nvPr/>
         </p:nvSpPr>
@@ -8249,7 +8489,7 @@
         <p:spPr>
           <a:xfrm>
             <a:off x="548640" y="475488"/>
-            <a:ext cx="11064240" cy="731520"/>
+            <a:ext cx="10058400" cy="731520"/>
           </a:xfrm>
           <a:prstGeom prst="rect">
             <a:avLst/>
@@ -8279,9 +8519,33 @@
           </a:p>
         </p:txBody>
       </p:sp>
-      <p:sp>
-        <p:nvSpPr>
-          <p:cNvPr id="6" name="TextBox 5"/>
+      <p:pic>
+        <p:nvPicPr>
+          <p:cNvPr id="6" name="Picture 5" descr="image.png"/>
+          <p:cNvPicPr>
+            <a:picLocks noChangeAspect="1"/>
+          </p:cNvPicPr>
+          <p:nvPr/>
+        </p:nvPicPr>
+        <p:blipFill>
+          <a:blip r:embed="rId2"/>
+          <a:stretch>
+            <a:fillRect/>
+          </a:stretch>
+        </p:blipFill>
+        <p:spPr>
+          <a:xfrm>
+            <a:off x="11045952" y="301752"/>
+            <a:ext cx="548640" cy="548640"/>
+          </a:xfrm>
+          <a:prstGeom prst="rect">
+            <a:avLst/>
+          </a:prstGeom>
+        </p:spPr>
+      </p:pic>
+      <p:sp>
+        <p:nvSpPr>
+          <p:cNvPr id="7" name="TextBox 6"/>
           <p:cNvSpPr txBox="1"/>
           <p:nvPr/>
         </p:nvSpPr>
@@ -8380,7 +8644,7 @@
       </p:sp>
       <p:sp>
         <p:nvSpPr>
-          <p:cNvPr id="7" name="Rectangle 6"/>
+          <p:cNvPr id="8" name="Rectangle 7"/>
           <p:cNvSpPr/>
           <p:nvPr/>
         </p:nvSpPr>
@@ -8424,7 +8688,7 @@
       </p:sp>
       <p:sp>
         <p:nvSpPr>
-          <p:cNvPr id="8" name="Rectangle 7"/>
+          <p:cNvPr id="9" name="Rectangle 8"/>
           <p:cNvSpPr/>
           <p:nvPr/>
         </p:nvSpPr>
@@ -8468,7 +8732,7 @@
       </p:sp>
       <p:sp>
         <p:nvSpPr>
-          <p:cNvPr id="9" name="TextBox 8"/>
+          <p:cNvPr id="10" name="TextBox 9"/>
           <p:cNvSpPr txBox="1"/>
           <p:nvPr/>
         </p:nvSpPr>
@@ -8507,7 +8771,7 @@
       </p:sp>
       <p:sp>
         <p:nvSpPr>
-          <p:cNvPr id="10" name="TextBox 9"/>
+          <p:cNvPr id="11" name="TextBox 10"/>
           <p:cNvSpPr txBox="1"/>
           <p:nvPr/>
         </p:nvSpPr>
@@ -8546,7 +8810,7 @@
       </p:sp>
       <p:sp>
         <p:nvSpPr>
-          <p:cNvPr id="11" name="Rectangle 10"/>
+          <p:cNvPr id="12" name="Rectangle 11"/>
           <p:cNvSpPr/>
           <p:nvPr/>
         </p:nvSpPr>
@@ -8590,7 +8854,7 @@
       </p:sp>
       <p:sp>
         <p:nvSpPr>
-          <p:cNvPr id="12" name="Rectangle 11"/>
+          <p:cNvPr id="13" name="Rectangle 12"/>
           <p:cNvSpPr/>
           <p:nvPr/>
         </p:nvSpPr>
@@ -8634,7 +8898,7 @@
       </p:sp>
       <p:sp>
         <p:nvSpPr>
-          <p:cNvPr id="13" name="TextBox 12"/>
+          <p:cNvPr id="14" name="TextBox 13"/>
           <p:cNvSpPr txBox="1"/>
           <p:nvPr/>
         </p:nvSpPr>
@@ -8673,7 +8937,7 @@
       </p:sp>
       <p:sp>
         <p:nvSpPr>
-          <p:cNvPr id="14" name="Rectangle 13"/>
+          <p:cNvPr id="15" name="Rectangle 14"/>
           <p:cNvSpPr/>
           <p:nvPr/>
         </p:nvSpPr>
@@ -8717,7 +8981,7 @@
       </p:sp>
       <p:sp>
         <p:nvSpPr>
-          <p:cNvPr id="15" name="TextBox 14"/>
+          <p:cNvPr id="16" name="TextBox 15"/>
           <p:cNvSpPr txBox="1"/>
           <p:nvPr/>
         </p:nvSpPr>
@@ -8916,7 +9180,7 @@
         <p:spPr>
           <a:xfrm>
             <a:off x="548640" y="475488"/>
-            <a:ext cx="11064240" cy="731520"/>
+            <a:ext cx="10058400" cy="731520"/>
           </a:xfrm>
           <a:prstGeom prst="rect">
             <a:avLst/>
@@ -8946,9 +9210,33 @@
           </a:p>
         </p:txBody>
       </p:sp>
-      <p:sp>
-        <p:nvSpPr>
-          <p:cNvPr id="6" name="Rectangle 5"/>
+      <p:pic>
+        <p:nvPicPr>
+          <p:cNvPr id="6" name="Picture 5" descr="image.png"/>
+          <p:cNvPicPr>
+            <a:picLocks noChangeAspect="1"/>
+          </p:cNvPicPr>
+          <p:nvPr/>
+        </p:nvPicPr>
+        <p:blipFill>
+          <a:blip r:embed="rId2"/>
+          <a:stretch>
+            <a:fillRect/>
+          </a:stretch>
+        </p:blipFill>
+        <p:spPr>
+          <a:xfrm>
+            <a:off x="11045952" y="301752"/>
+            <a:ext cx="548640" cy="548640"/>
+          </a:xfrm>
+          <a:prstGeom prst="rect">
+            <a:avLst/>
+          </a:prstGeom>
+        </p:spPr>
+      </p:pic>
+      <p:sp>
+        <p:nvSpPr>
+          <p:cNvPr id="7" name="Rectangle 6"/>
           <p:cNvSpPr/>
           <p:nvPr/>
         </p:nvSpPr>
@@ -8992,7 +9280,7 @@
       </p:sp>
       <p:sp>
         <p:nvSpPr>
-          <p:cNvPr id="7" name="Rectangle 6"/>
+          <p:cNvPr id="8" name="Rectangle 7"/>
           <p:cNvSpPr/>
           <p:nvPr/>
         </p:nvSpPr>
@@ -9036,7 +9324,7 @@
       </p:sp>
       <p:sp>
         <p:nvSpPr>
-          <p:cNvPr id="8" name="TextBox 7"/>
+          <p:cNvPr id="9" name="TextBox 8"/>
           <p:cNvSpPr txBox="1"/>
           <p:nvPr/>
         </p:nvSpPr>
@@ -9075,7 +9363,7 @@
       </p:sp>
       <p:sp>
         <p:nvSpPr>
-          <p:cNvPr id="9" name="TextBox 8"/>
+          <p:cNvPr id="10" name="TextBox 9"/>
           <p:cNvSpPr txBox="1"/>
           <p:nvPr/>
         </p:nvSpPr>
@@ -9174,7 +9462,7 @@
       </p:sp>
       <p:sp>
         <p:nvSpPr>
-          <p:cNvPr id="10" name="Rectangle 9"/>
+          <p:cNvPr id="11" name="Rectangle 10"/>
           <p:cNvSpPr/>
           <p:nvPr/>
         </p:nvSpPr>
@@ -9218,7 +9506,7 @@
       </p:sp>
       <p:sp>
         <p:nvSpPr>
-          <p:cNvPr id="11" name="Rectangle 10"/>
+          <p:cNvPr id="12" name="Rectangle 11"/>
           <p:cNvSpPr/>
           <p:nvPr/>
         </p:nvSpPr>
@@ -9262,7 +9550,7 @@
       </p:sp>
       <p:sp>
         <p:nvSpPr>
-          <p:cNvPr id="12" name="TextBox 11"/>
+          <p:cNvPr id="13" name="TextBox 12"/>
           <p:cNvSpPr txBox="1"/>
           <p:nvPr/>
         </p:nvSpPr>
@@ -9301,7 +9589,7 @@
       </p:sp>
       <p:sp>
         <p:nvSpPr>
-          <p:cNvPr id="13" name="Rectangle 12"/>
+          <p:cNvPr id="14" name="Rectangle 13"/>
           <p:cNvSpPr/>
           <p:nvPr/>
         </p:nvSpPr>
@@ -9345,7 +9633,7 @@
       </p:sp>
       <p:sp>
         <p:nvSpPr>
-          <p:cNvPr id="14" name="TextBox 13"/>
+          <p:cNvPr id="15" name="TextBox 14"/>
           <p:cNvSpPr txBox="1"/>
           <p:nvPr/>
         </p:nvSpPr>
@@ -9544,7 +9832,7 @@
         <p:spPr>
           <a:xfrm>
             <a:off x="548640" y="475488"/>
-            <a:ext cx="11064240" cy="731520"/>
+            <a:ext cx="10058400" cy="731520"/>
           </a:xfrm>
           <a:prstGeom prst="rect">
             <a:avLst/>
@@ -9574,9 +9862,33 @@
           </a:p>
         </p:txBody>
       </p:sp>
-      <p:sp>
-        <p:nvSpPr>
-          <p:cNvPr id="6" name="Rectangle 5"/>
+      <p:pic>
+        <p:nvPicPr>
+          <p:cNvPr id="6" name="Picture 5" descr="image.png"/>
+          <p:cNvPicPr>
+            <a:picLocks noChangeAspect="1"/>
+          </p:cNvPicPr>
+          <p:nvPr/>
+        </p:nvPicPr>
+        <p:blipFill>
+          <a:blip r:embed="rId2"/>
+          <a:stretch>
+            <a:fillRect/>
+          </a:stretch>
+        </p:blipFill>
+        <p:spPr>
+          <a:xfrm>
+            <a:off x="11045952" y="301752"/>
+            <a:ext cx="548640" cy="548640"/>
+          </a:xfrm>
+          <a:prstGeom prst="rect">
+            <a:avLst/>
+          </a:prstGeom>
+        </p:spPr>
+      </p:pic>
+      <p:sp>
+        <p:nvSpPr>
+          <p:cNvPr id="7" name="Rectangle 6"/>
           <p:cNvSpPr/>
           <p:nvPr/>
         </p:nvSpPr>
@@ -9620,7 +9932,7 @@
       </p:sp>
       <p:sp>
         <p:nvSpPr>
-          <p:cNvPr id="7" name="TextBox 6"/>
+          <p:cNvPr id="8" name="TextBox 7"/>
           <p:cNvSpPr txBox="1"/>
           <p:nvPr/>
         </p:nvSpPr>
@@ -9659,7 +9971,7 @@
       </p:sp>
       <p:sp>
         <p:nvSpPr>
-          <p:cNvPr id="8" name="TextBox 7"/>
+          <p:cNvPr id="9" name="TextBox 8"/>
           <p:cNvSpPr txBox="1"/>
           <p:nvPr/>
         </p:nvSpPr>
@@ -9698,7 +10010,7 @@
       </p:sp>
       <p:sp>
         <p:nvSpPr>
-          <p:cNvPr id="9" name="TextBox 8"/>
+          <p:cNvPr id="10" name="TextBox 9"/>
           <p:cNvSpPr txBox="1"/>
           <p:nvPr/>
         </p:nvSpPr>
@@ -9737,7 +10049,7 @@
       </p:sp>
       <p:sp>
         <p:nvSpPr>
-          <p:cNvPr id="10" name="Rectangle 9"/>
+          <p:cNvPr id="11" name="Rectangle 10"/>
           <p:cNvSpPr/>
           <p:nvPr/>
         </p:nvSpPr>
@@ -9781,7 +10093,7 @@
       </p:sp>
       <p:sp>
         <p:nvSpPr>
-          <p:cNvPr id="11" name="TextBox 10"/>
+          <p:cNvPr id="12" name="TextBox 11"/>
           <p:cNvSpPr txBox="1"/>
           <p:nvPr/>
         </p:nvSpPr>
@@ -9820,7 +10132,7 @@
       </p:sp>
       <p:sp>
         <p:nvSpPr>
-          <p:cNvPr id="12" name="TextBox 11"/>
+          <p:cNvPr id="13" name="TextBox 12"/>
           <p:cNvSpPr txBox="1"/>
           <p:nvPr/>
         </p:nvSpPr>
@@ -9859,7 +10171,7 @@
       </p:sp>
       <p:sp>
         <p:nvSpPr>
-          <p:cNvPr id="13" name="TextBox 12"/>
+          <p:cNvPr id="14" name="TextBox 13"/>
           <p:cNvSpPr txBox="1"/>
           <p:nvPr/>
         </p:nvSpPr>
@@ -9898,7 +10210,7 @@
       </p:sp>
       <p:sp>
         <p:nvSpPr>
-          <p:cNvPr id="14" name="Rectangle 13"/>
+          <p:cNvPr id="15" name="Rectangle 14"/>
           <p:cNvSpPr/>
           <p:nvPr/>
         </p:nvSpPr>
@@ -9942,7 +10254,7 @@
       </p:sp>
       <p:sp>
         <p:nvSpPr>
-          <p:cNvPr id="15" name="TextBox 14"/>
+          <p:cNvPr id="16" name="TextBox 15"/>
           <p:cNvSpPr txBox="1"/>
           <p:nvPr/>
         </p:nvSpPr>
@@ -9981,7 +10293,7 @@
       </p:sp>
       <p:sp>
         <p:nvSpPr>
-          <p:cNvPr id="16" name="TextBox 15"/>
+          <p:cNvPr id="17" name="TextBox 16"/>
           <p:cNvSpPr txBox="1"/>
           <p:nvPr/>
         </p:nvSpPr>
@@ -10020,7 +10332,7 @@
       </p:sp>
       <p:sp>
         <p:nvSpPr>
-          <p:cNvPr id="17" name="TextBox 16"/>
+          <p:cNvPr id="18" name="TextBox 17"/>
           <p:cNvSpPr txBox="1"/>
           <p:nvPr/>
         </p:nvSpPr>
@@ -10059,7 +10371,7 @@
       </p:sp>
       <p:sp>
         <p:nvSpPr>
-          <p:cNvPr id="18" name="Rectangle 17"/>
+          <p:cNvPr id="19" name="Rectangle 18"/>
           <p:cNvSpPr/>
           <p:nvPr/>
         </p:nvSpPr>
@@ -10103,7 +10415,7 @@
       </p:sp>
       <p:sp>
         <p:nvSpPr>
-          <p:cNvPr id="19" name="TextBox 18"/>
+          <p:cNvPr id="20" name="TextBox 19"/>
           <p:cNvSpPr txBox="1"/>
           <p:nvPr/>
         </p:nvSpPr>
@@ -10142,7 +10454,7 @@
       </p:sp>
       <p:sp>
         <p:nvSpPr>
-          <p:cNvPr id="20" name="TextBox 19"/>
+          <p:cNvPr id="21" name="TextBox 20"/>
           <p:cNvSpPr txBox="1"/>
           <p:nvPr/>
         </p:nvSpPr>
@@ -10181,7 +10493,7 @@
       </p:sp>
       <p:sp>
         <p:nvSpPr>
-          <p:cNvPr id="21" name="TextBox 20"/>
+          <p:cNvPr id="22" name="TextBox 21"/>
           <p:cNvSpPr txBox="1"/>
           <p:nvPr/>
         </p:nvSpPr>
@@ -10220,7 +10532,7 @@
       </p:sp>
       <p:sp>
         <p:nvSpPr>
-          <p:cNvPr id="22" name="Rectangle 21"/>
+          <p:cNvPr id="23" name="Rectangle 22"/>
           <p:cNvSpPr/>
           <p:nvPr/>
         </p:nvSpPr>
@@ -10264,7 +10576,7 @@
       </p:sp>
       <p:sp>
         <p:nvSpPr>
-          <p:cNvPr id="23" name="Rectangle 22"/>
+          <p:cNvPr id="24" name="Rectangle 23"/>
           <p:cNvSpPr/>
           <p:nvPr/>
         </p:nvSpPr>
@@ -10308,7 +10620,7 @@
       </p:sp>
       <p:sp>
         <p:nvSpPr>
-          <p:cNvPr id="24" name="TextBox 23"/>
+          <p:cNvPr id="25" name="TextBox 24"/>
           <p:cNvSpPr txBox="1"/>
           <p:nvPr/>
         </p:nvSpPr>
@@ -10347,7 +10659,7 @@
       </p:sp>
       <p:sp>
         <p:nvSpPr>
-          <p:cNvPr id="25" name="TextBox 24"/>
+          <p:cNvPr id="26" name="TextBox 25"/>
           <p:cNvSpPr txBox="1"/>
           <p:nvPr/>
         </p:nvSpPr>
@@ -10386,7 +10698,7 @@
       </p:sp>
       <p:sp>
         <p:nvSpPr>
-          <p:cNvPr id="26" name="Rectangle 25"/>
+          <p:cNvPr id="27" name="Rectangle 26"/>
           <p:cNvSpPr/>
           <p:nvPr/>
         </p:nvSpPr>
@@ -10430,7 +10742,7 @@
       </p:sp>
       <p:sp>
         <p:nvSpPr>
-          <p:cNvPr id="27" name="TextBox 26"/>
+          <p:cNvPr id="28" name="TextBox 27"/>
           <p:cNvSpPr txBox="1"/>
           <p:nvPr/>
         </p:nvSpPr>
@@ -10709,9 +11021,33 @@
           </a:p>
         </p:txBody>
       </p:sp>
-      <p:sp>
-        <p:nvSpPr>
-          <p:cNvPr id="7" name="Rectangle 6"/>
+      <p:pic>
+        <p:nvPicPr>
+          <p:cNvPr id="7" name="Picture 6" descr="image.png"/>
+          <p:cNvPicPr>
+            <a:picLocks noChangeAspect="1"/>
+          </p:cNvPicPr>
+          <p:nvPr/>
+        </p:nvPicPr>
+        <p:blipFill>
+          <a:blip r:embed="rId2"/>
+          <a:stretch>
+            <a:fillRect/>
+          </a:stretch>
+        </p:blipFill>
+        <p:spPr>
+          <a:xfrm>
+            <a:off x="9646920" y="4206240"/>
+            <a:ext cx="1691640" cy="1691640"/>
+          </a:xfrm>
+          <a:prstGeom prst="rect">
+            <a:avLst/>
+          </a:prstGeom>
+        </p:spPr>
+      </p:pic>
+      <p:sp>
+        <p:nvSpPr>
+          <p:cNvPr id="8" name="Rectangle 7"/>
           <p:cNvSpPr/>
           <p:nvPr/>
         </p:nvSpPr>
@@ -10755,7 +11091,7 @@
       </p:sp>
       <p:sp>
         <p:nvSpPr>
-          <p:cNvPr id="8" name="TextBox 7"/>
+          <p:cNvPr id="9" name="TextBox 8"/>
           <p:cNvSpPr txBox="1"/>
           <p:nvPr/>
         </p:nvSpPr>
@@ -10954,7 +11290,7 @@
         <p:spPr>
           <a:xfrm>
             <a:off x="548640" y="475488"/>
-            <a:ext cx="11064240" cy="731520"/>
+            <a:ext cx="10058400" cy="731520"/>
           </a:xfrm>
           <a:prstGeom prst="rect">
             <a:avLst/>
@@ -10984,9 +11320,33 @@
           </a:p>
         </p:txBody>
       </p:sp>
-      <p:sp>
-        <p:nvSpPr>
-          <p:cNvPr id="6" name="TextBox 5"/>
+      <p:pic>
+        <p:nvPicPr>
+          <p:cNvPr id="6" name="Picture 5" descr="image.png"/>
+          <p:cNvPicPr>
+            <a:picLocks noChangeAspect="1"/>
+          </p:cNvPicPr>
+          <p:nvPr/>
+        </p:nvPicPr>
+        <p:blipFill>
+          <a:blip r:embed="rId2"/>
+          <a:stretch>
+            <a:fillRect/>
+          </a:stretch>
+        </p:blipFill>
+        <p:spPr>
+          <a:xfrm>
+            <a:off x="11045952" y="301752"/>
+            <a:ext cx="548640" cy="548640"/>
+          </a:xfrm>
+          <a:prstGeom prst="rect">
+            <a:avLst/>
+          </a:prstGeom>
+        </p:spPr>
+      </p:pic>
+      <p:sp>
+        <p:nvSpPr>
+          <p:cNvPr id="7" name="TextBox 6"/>
           <p:cNvSpPr txBox="1"/>
           <p:nvPr/>
         </p:nvSpPr>
@@ -11131,7 +11491,7 @@
       </p:sp>
       <p:sp>
         <p:nvSpPr>
-          <p:cNvPr id="7" name="Rectangle 6"/>
+          <p:cNvPr id="8" name="Rectangle 7"/>
           <p:cNvSpPr/>
           <p:nvPr/>
         </p:nvSpPr>
@@ -11175,7 +11535,7 @@
       </p:sp>
       <p:sp>
         <p:nvSpPr>
-          <p:cNvPr id="8" name="Rectangle 7"/>
+          <p:cNvPr id="9" name="Rectangle 8"/>
           <p:cNvSpPr/>
           <p:nvPr/>
         </p:nvSpPr>
@@ -11219,7 +11579,7 @@
       </p:sp>
       <p:sp>
         <p:nvSpPr>
-          <p:cNvPr id="9" name="TextBox 8"/>
+          <p:cNvPr id="10" name="TextBox 9"/>
           <p:cNvSpPr txBox="1"/>
           <p:nvPr/>
         </p:nvSpPr>
@@ -11258,7 +11618,7 @@
       </p:sp>
       <p:sp>
         <p:nvSpPr>
-          <p:cNvPr id="10" name="TextBox 9"/>
+          <p:cNvPr id="11" name="TextBox 10"/>
           <p:cNvSpPr txBox="1"/>
           <p:nvPr/>
         </p:nvSpPr>
@@ -11297,7 +11657,7 @@
       </p:sp>
       <p:sp>
         <p:nvSpPr>
-          <p:cNvPr id="11" name="Rectangle 10"/>
+          <p:cNvPr id="12" name="Rectangle 11"/>
           <p:cNvSpPr/>
           <p:nvPr/>
         </p:nvSpPr>
@@ -11341,7 +11701,7 @@
       </p:sp>
       <p:sp>
         <p:nvSpPr>
-          <p:cNvPr id="12" name="Rectangle 11"/>
+          <p:cNvPr id="13" name="Rectangle 12"/>
           <p:cNvSpPr/>
           <p:nvPr/>
         </p:nvSpPr>
@@ -11385,7 +11745,7 @@
       </p:sp>
       <p:sp>
         <p:nvSpPr>
-          <p:cNvPr id="13" name="TextBox 12"/>
+          <p:cNvPr id="14" name="TextBox 13"/>
           <p:cNvSpPr txBox="1"/>
           <p:nvPr/>
         </p:nvSpPr>
@@ -11424,7 +11784,7 @@
       </p:sp>
       <p:sp>
         <p:nvSpPr>
-          <p:cNvPr id="14" name="Rectangle 13"/>
+          <p:cNvPr id="15" name="Rectangle 14"/>
           <p:cNvSpPr/>
           <p:nvPr/>
         </p:nvSpPr>
@@ -11468,7 +11828,7 @@
       </p:sp>
       <p:sp>
         <p:nvSpPr>
-          <p:cNvPr id="15" name="TextBox 14"/>
+          <p:cNvPr id="16" name="TextBox 15"/>
           <p:cNvSpPr txBox="1"/>
           <p:nvPr/>
         </p:nvSpPr>
@@ -11667,7 +12027,7 @@
         <p:spPr>
           <a:xfrm>
             <a:off x="548640" y="475488"/>
-            <a:ext cx="11064240" cy="731520"/>
+            <a:ext cx="10058400" cy="731520"/>
           </a:xfrm>
           <a:prstGeom prst="rect">
             <a:avLst/>
@@ -11697,9 +12057,33 @@
           </a:p>
         </p:txBody>
       </p:sp>
-      <p:sp>
-        <p:nvSpPr>
-          <p:cNvPr id="6" name="Rectangle 5"/>
+      <p:pic>
+        <p:nvPicPr>
+          <p:cNvPr id="6" name="Picture 5" descr="image.png"/>
+          <p:cNvPicPr>
+            <a:picLocks noChangeAspect="1"/>
+          </p:cNvPicPr>
+          <p:nvPr/>
+        </p:nvPicPr>
+        <p:blipFill>
+          <a:blip r:embed="rId2"/>
+          <a:stretch>
+            <a:fillRect/>
+          </a:stretch>
+        </p:blipFill>
+        <p:spPr>
+          <a:xfrm>
+            <a:off x="11045952" y="301752"/>
+            <a:ext cx="548640" cy="548640"/>
+          </a:xfrm>
+          <a:prstGeom prst="rect">
+            <a:avLst/>
+          </a:prstGeom>
+        </p:spPr>
+      </p:pic>
+      <p:sp>
+        <p:nvSpPr>
+          <p:cNvPr id="7" name="Rectangle 6"/>
           <p:cNvSpPr/>
           <p:nvPr/>
         </p:nvSpPr>
@@ -11743,7 +12127,7 @@
       </p:sp>
       <p:sp>
         <p:nvSpPr>
-          <p:cNvPr id="7" name="Rectangle 6"/>
+          <p:cNvPr id="8" name="Rectangle 7"/>
           <p:cNvSpPr/>
           <p:nvPr/>
         </p:nvSpPr>
@@ -11787,7 +12171,7 @@
       </p:sp>
       <p:sp>
         <p:nvSpPr>
-          <p:cNvPr id="8" name="TextBox 7"/>
+          <p:cNvPr id="9" name="TextBox 8"/>
           <p:cNvSpPr txBox="1"/>
           <p:nvPr/>
         </p:nvSpPr>
@@ -11826,7 +12210,7 @@
       </p:sp>
       <p:sp>
         <p:nvSpPr>
-          <p:cNvPr id="9" name="Rectangle 8"/>
+          <p:cNvPr id="10" name="Rectangle 9"/>
           <p:cNvSpPr/>
           <p:nvPr/>
         </p:nvSpPr>
@@ -11870,7 +12254,7 @@
       </p:sp>
       <p:sp>
         <p:nvSpPr>
-          <p:cNvPr id="10" name="TextBox 9"/>
+          <p:cNvPr id="11" name="TextBox 10"/>
           <p:cNvSpPr txBox="1"/>
           <p:nvPr/>
         </p:nvSpPr>
@@ -11909,7 +12293,7 @@
       </p:sp>
       <p:sp>
         <p:nvSpPr>
-          <p:cNvPr id="11" name="Rectangle 10"/>
+          <p:cNvPr id="12" name="Rectangle 11"/>
           <p:cNvSpPr/>
           <p:nvPr/>
         </p:nvSpPr>
@@ -11953,7 +12337,7 @@
       </p:sp>
       <p:sp>
         <p:nvSpPr>
-          <p:cNvPr id="12" name="TextBox 11"/>
+          <p:cNvPr id="13" name="TextBox 12"/>
           <p:cNvSpPr txBox="1"/>
           <p:nvPr/>
         </p:nvSpPr>
@@ -11992,7 +12376,7 @@
       </p:sp>
       <p:sp>
         <p:nvSpPr>
-          <p:cNvPr id="13" name="Rectangle 12"/>
+          <p:cNvPr id="14" name="Rectangle 13"/>
           <p:cNvSpPr/>
           <p:nvPr/>
         </p:nvSpPr>
@@ -12036,7 +12420,7 @@
       </p:sp>
       <p:sp>
         <p:nvSpPr>
-          <p:cNvPr id="14" name="TextBox 13"/>
+          <p:cNvPr id="15" name="TextBox 14"/>
           <p:cNvSpPr txBox="1"/>
           <p:nvPr/>
         </p:nvSpPr>
@@ -12075,7 +12459,7 @@
       </p:sp>
       <p:sp>
         <p:nvSpPr>
-          <p:cNvPr id="15" name="Rectangle 14"/>
+          <p:cNvPr id="16" name="Rectangle 15"/>
           <p:cNvSpPr/>
           <p:nvPr/>
         </p:nvSpPr>
@@ -12119,7 +12503,7 @@
       </p:sp>
       <p:sp>
         <p:nvSpPr>
-          <p:cNvPr id="16" name="TextBox 15"/>
+          <p:cNvPr id="17" name="TextBox 16"/>
           <p:cNvSpPr txBox="1"/>
           <p:nvPr/>
         </p:nvSpPr>
@@ -12158,7 +12542,7 @@
       </p:sp>
       <p:sp>
         <p:nvSpPr>
-          <p:cNvPr id="17" name="Rectangle 16"/>
+          <p:cNvPr id="18" name="Rectangle 17"/>
           <p:cNvSpPr/>
           <p:nvPr/>
         </p:nvSpPr>
@@ -12202,7 +12586,7 @@
       </p:sp>
       <p:sp>
         <p:nvSpPr>
-          <p:cNvPr id="18" name="TextBox 17"/>
+          <p:cNvPr id="19" name="TextBox 18"/>
           <p:cNvSpPr txBox="1"/>
           <p:nvPr/>
         </p:nvSpPr>
@@ -12241,7 +12625,7 @@
       </p:sp>
       <p:sp>
         <p:nvSpPr>
-          <p:cNvPr id="19" name="Rectangle 18"/>
+          <p:cNvPr id="20" name="Rectangle 19"/>
           <p:cNvSpPr/>
           <p:nvPr/>
         </p:nvSpPr>
@@ -12285,7 +12669,7 @@
       </p:sp>
       <p:sp>
         <p:nvSpPr>
-          <p:cNvPr id="20" name="TextBox 19"/>
+          <p:cNvPr id="21" name="TextBox 20"/>
           <p:cNvSpPr txBox="1"/>
           <p:nvPr/>
         </p:nvSpPr>
@@ -12324,7 +12708,7 @@
       </p:sp>
       <p:sp>
         <p:nvSpPr>
-          <p:cNvPr id="21" name="Rectangle 20"/>
+          <p:cNvPr id="22" name="Rectangle 21"/>
           <p:cNvSpPr/>
           <p:nvPr/>
         </p:nvSpPr>
@@ -12368,7 +12752,7 @@
       </p:sp>
       <p:sp>
         <p:nvSpPr>
-          <p:cNvPr id="22" name="TextBox 21"/>
+          <p:cNvPr id="23" name="TextBox 22"/>
           <p:cNvSpPr txBox="1"/>
           <p:nvPr/>
         </p:nvSpPr>
@@ -12407,7 +12791,7 @@
       </p:sp>
       <p:sp>
         <p:nvSpPr>
-          <p:cNvPr id="23" name="Rectangle 22"/>
+          <p:cNvPr id="24" name="Rectangle 23"/>
           <p:cNvSpPr/>
           <p:nvPr/>
         </p:nvSpPr>
@@ -12451,7 +12835,7 @@
       </p:sp>
       <p:sp>
         <p:nvSpPr>
-          <p:cNvPr id="24" name="Rectangle 23"/>
+          <p:cNvPr id="25" name="Rectangle 24"/>
           <p:cNvSpPr/>
           <p:nvPr/>
         </p:nvSpPr>
@@ -12495,7 +12879,7 @@
       </p:sp>
       <p:sp>
         <p:nvSpPr>
-          <p:cNvPr id="25" name="TextBox 24"/>
+          <p:cNvPr id="26" name="TextBox 25"/>
           <p:cNvSpPr txBox="1"/>
           <p:nvPr/>
         </p:nvSpPr>
@@ -12534,7 +12918,7 @@
       </p:sp>
       <p:sp>
         <p:nvSpPr>
-          <p:cNvPr id="26" name="Rectangle 25"/>
+          <p:cNvPr id="27" name="Rectangle 26"/>
           <p:cNvSpPr/>
           <p:nvPr/>
         </p:nvSpPr>
@@ -12578,7 +12962,7 @@
       </p:sp>
       <p:sp>
         <p:nvSpPr>
-          <p:cNvPr id="27" name="TextBox 26"/>
+          <p:cNvPr id="28" name="TextBox 27"/>
           <p:cNvSpPr txBox="1"/>
           <p:nvPr/>
         </p:nvSpPr>
@@ -12777,7 +13161,7 @@
         <p:spPr>
           <a:xfrm>
             <a:off x="548640" y="475488"/>
-            <a:ext cx="11064240" cy="731520"/>
+            <a:ext cx="10058400" cy="731520"/>
           </a:xfrm>
           <a:prstGeom prst="rect">
             <a:avLst/>
@@ -12807,9 +13191,33 @@
           </a:p>
         </p:txBody>
       </p:sp>
-      <p:sp>
-        <p:nvSpPr>
-          <p:cNvPr id="6" name="TextBox 5"/>
+      <p:pic>
+        <p:nvPicPr>
+          <p:cNvPr id="6" name="Picture 5" descr="image.png"/>
+          <p:cNvPicPr>
+            <a:picLocks noChangeAspect="1"/>
+          </p:cNvPicPr>
+          <p:nvPr/>
+        </p:nvPicPr>
+        <p:blipFill>
+          <a:blip r:embed="rId2"/>
+          <a:stretch>
+            <a:fillRect/>
+          </a:stretch>
+        </p:blipFill>
+        <p:spPr>
+          <a:xfrm>
+            <a:off x="11045952" y="301752"/>
+            <a:ext cx="548640" cy="548640"/>
+          </a:xfrm>
+          <a:prstGeom prst="rect">
+            <a:avLst/>
+          </a:prstGeom>
+        </p:spPr>
+      </p:pic>
+      <p:sp>
+        <p:nvSpPr>
+          <p:cNvPr id="7" name="TextBox 6"/>
           <p:cNvSpPr txBox="1"/>
           <p:nvPr/>
         </p:nvSpPr>
@@ -12972,7 +13380,7 @@
       </p:sp>
       <p:sp>
         <p:nvSpPr>
-          <p:cNvPr id="7" name="Rectangle 6"/>
+          <p:cNvPr id="8" name="Rectangle 7"/>
           <p:cNvSpPr/>
           <p:nvPr/>
         </p:nvSpPr>
@@ -13016,7 +13424,7 @@
       </p:sp>
       <p:sp>
         <p:nvSpPr>
-          <p:cNvPr id="8" name="Rectangle 7"/>
+          <p:cNvPr id="9" name="Rectangle 8"/>
           <p:cNvSpPr/>
           <p:nvPr/>
         </p:nvSpPr>
@@ -13060,7 +13468,7 @@
       </p:sp>
       <p:sp>
         <p:nvSpPr>
-          <p:cNvPr id="9" name="TextBox 8"/>
+          <p:cNvPr id="10" name="TextBox 9"/>
           <p:cNvSpPr txBox="1"/>
           <p:nvPr/>
         </p:nvSpPr>
@@ -13099,7 +13507,7 @@
       </p:sp>
       <p:sp>
         <p:nvSpPr>
-          <p:cNvPr id="10" name="TextBox 9"/>
+          <p:cNvPr id="11" name="TextBox 10"/>
           <p:cNvSpPr txBox="1"/>
           <p:nvPr/>
         </p:nvSpPr>
@@ -13138,7 +13546,7 @@
       </p:sp>
       <p:sp>
         <p:nvSpPr>
-          <p:cNvPr id="11" name="Rectangle 10"/>
+          <p:cNvPr id="12" name="Rectangle 11"/>
           <p:cNvSpPr/>
           <p:nvPr/>
         </p:nvSpPr>
@@ -13182,7 +13590,7 @@
       </p:sp>
       <p:sp>
         <p:nvSpPr>
-          <p:cNvPr id="12" name="Rectangle 11"/>
+          <p:cNvPr id="13" name="Rectangle 12"/>
           <p:cNvSpPr/>
           <p:nvPr/>
         </p:nvSpPr>
@@ -13226,7 +13634,7 @@
       </p:sp>
       <p:sp>
         <p:nvSpPr>
-          <p:cNvPr id="13" name="TextBox 12"/>
+          <p:cNvPr id="14" name="TextBox 13"/>
           <p:cNvSpPr txBox="1"/>
           <p:nvPr/>
         </p:nvSpPr>
@@ -13265,7 +13673,7 @@
       </p:sp>
       <p:sp>
         <p:nvSpPr>
-          <p:cNvPr id="14" name="Rectangle 13"/>
+          <p:cNvPr id="15" name="Rectangle 14"/>
           <p:cNvSpPr/>
           <p:nvPr/>
         </p:nvSpPr>
@@ -13309,7 +13717,7 @@
       </p:sp>
       <p:sp>
         <p:nvSpPr>
-          <p:cNvPr id="15" name="TextBox 14"/>
+          <p:cNvPr id="16" name="TextBox 15"/>
           <p:cNvSpPr txBox="1"/>
           <p:nvPr/>
         </p:nvSpPr>
@@ -13588,9 +13996,33 @@
           </a:p>
         </p:txBody>
       </p:sp>
-      <p:sp>
-        <p:nvSpPr>
-          <p:cNvPr id="7" name="Rectangle 6"/>
+      <p:pic>
+        <p:nvPicPr>
+          <p:cNvPr id="7" name="Picture 6" descr="image.png"/>
+          <p:cNvPicPr>
+            <a:picLocks noChangeAspect="1"/>
+          </p:cNvPicPr>
+          <p:nvPr/>
+        </p:nvPicPr>
+        <p:blipFill>
+          <a:blip r:embed="rId2"/>
+          <a:stretch>
+            <a:fillRect/>
+          </a:stretch>
+        </p:blipFill>
+        <p:spPr>
+          <a:xfrm>
+            <a:off x="9646920" y="4206240"/>
+            <a:ext cx="1691640" cy="1691640"/>
+          </a:xfrm>
+          <a:prstGeom prst="rect">
+            <a:avLst/>
+          </a:prstGeom>
+        </p:spPr>
+      </p:pic>
+      <p:sp>
+        <p:nvSpPr>
+          <p:cNvPr id="8" name="Rectangle 7"/>
           <p:cNvSpPr/>
           <p:nvPr/>
         </p:nvSpPr>
@@ -13634,7 +14066,7 @@
       </p:sp>
       <p:sp>
         <p:nvSpPr>
-          <p:cNvPr id="8" name="TextBox 7"/>
+          <p:cNvPr id="9" name="TextBox 8"/>
           <p:cNvSpPr txBox="1"/>
           <p:nvPr/>
         </p:nvSpPr>
@@ -13833,7 +14265,7 @@
         <p:spPr>
           <a:xfrm>
             <a:off x="548640" y="475488"/>
-            <a:ext cx="11064240" cy="731520"/>
+            <a:ext cx="10058400" cy="731520"/>
           </a:xfrm>
           <a:prstGeom prst="rect">
             <a:avLst/>
@@ -13863,9 +14295,33 @@
           </a:p>
         </p:txBody>
       </p:sp>
-      <p:sp>
-        <p:nvSpPr>
-          <p:cNvPr id="6" name="TextBox 5"/>
+      <p:pic>
+        <p:nvPicPr>
+          <p:cNvPr id="6" name="Picture 5" descr="image.png"/>
+          <p:cNvPicPr>
+            <a:picLocks noChangeAspect="1"/>
+          </p:cNvPicPr>
+          <p:nvPr/>
+        </p:nvPicPr>
+        <p:blipFill>
+          <a:blip r:embed="rId2"/>
+          <a:stretch>
+            <a:fillRect/>
+          </a:stretch>
+        </p:blipFill>
+        <p:spPr>
+          <a:xfrm>
+            <a:off x="11045952" y="301752"/>
+            <a:ext cx="548640" cy="548640"/>
+          </a:xfrm>
+          <a:prstGeom prst="rect">
+            <a:avLst/>
+          </a:prstGeom>
+        </p:spPr>
+      </p:pic>
+      <p:sp>
+        <p:nvSpPr>
+          <p:cNvPr id="7" name="TextBox 6"/>
           <p:cNvSpPr txBox="1"/>
           <p:nvPr/>
         </p:nvSpPr>
@@ -13964,7 +14420,7 @@
       </p:sp>
       <p:sp>
         <p:nvSpPr>
-          <p:cNvPr id="7" name="Rectangle 6"/>
+          <p:cNvPr id="8" name="Rectangle 7"/>
           <p:cNvSpPr/>
           <p:nvPr/>
         </p:nvSpPr>
@@ -14008,7 +14464,7 @@
       </p:sp>
       <p:sp>
         <p:nvSpPr>
-          <p:cNvPr id="8" name="Rectangle 7"/>
+          <p:cNvPr id="9" name="Rectangle 8"/>
           <p:cNvSpPr/>
           <p:nvPr/>
         </p:nvSpPr>
@@ -14052,7 +14508,7 @@
       </p:sp>
       <p:sp>
         <p:nvSpPr>
-          <p:cNvPr id="9" name="TextBox 8"/>
+          <p:cNvPr id="10" name="TextBox 9"/>
           <p:cNvSpPr txBox="1"/>
           <p:nvPr/>
         </p:nvSpPr>
@@ -14091,7 +14547,7 @@
       </p:sp>
       <p:sp>
         <p:nvSpPr>
-          <p:cNvPr id="10" name="Rectangle 9"/>
+          <p:cNvPr id="11" name="Rectangle 10"/>
           <p:cNvSpPr/>
           <p:nvPr/>
         </p:nvSpPr>
@@ -14135,7 +14591,7 @@
       </p:sp>
       <p:sp>
         <p:nvSpPr>
-          <p:cNvPr id="11" name="TextBox 10"/>
+          <p:cNvPr id="12" name="TextBox 11"/>
           <p:cNvSpPr txBox="1"/>
           <p:nvPr/>
         </p:nvSpPr>
@@ -14334,7 +14790,7 @@
         <p:spPr>
           <a:xfrm>
             <a:off x="548640" y="475488"/>
-            <a:ext cx="11064240" cy="731520"/>
+            <a:ext cx="10058400" cy="731520"/>
           </a:xfrm>
           <a:prstGeom prst="rect">
             <a:avLst/>
@@ -14364,9 +14820,33 @@
           </a:p>
         </p:txBody>
       </p:sp>
-      <p:sp>
-        <p:nvSpPr>
-          <p:cNvPr id="6" name="TextBox 5"/>
+      <p:pic>
+        <p:nvPicPr>
+          <p:cNvPr id="6" name="Picture 5" descr="image.png"/>
+          <p:cNvPicPr>
+            <a:picLocks noChangeAspect="1"/>
+          </p:cNvPicPr>
+          <p:nvPr/>
+        </p:nvPicPr>
+        <p:blipFill>
+          <a:blip r:embed="rId2"/>
+          <a:stretch>
+            <a:fillRect/>
+          </a:stretch>
+        </p:blipFill>
+        <p:spPr>
+          <a:xfrm>
+            <a:off x="11045952" y="301752"/>
+            <a:ext cx="548640" cy="548640"/>
+          </a:xfrm>
+          <a:prstGeom prst="rect">
+            <a:avLst/>
+          </a:prstGeom>
+        </p:spPr>
+      </p:pic>
+      <p:sp>
+        <p:nvSpPr>
+          <p:cNvPr id="7" name="TextBox 6"/>
           <p:cNvSpPr txBox="1"/>
           <p:nvPr/>
         </p:nvSpPr>
@@ -14502,7 +14982,7 @@
       </p:sp>
       <p:sp>
         <p:nvSpPr>
-          <p:cNvPr id="7" name="Rectangle 6"/>
+          <p:cNvPr id="8" name="Rectangle 7"/>
           <p:cNvSpPr/>
           <p:nvPr/>
         </p:nvSpPr>
@@ -14546,7 +15026,7 @@
       </p:sp>
       <p:sp>
         <p:nvSpPr>
-          <p:cNvPr id="8" name="Rectangle 7"/>
+          <p:cNvPr id="9" name="Rectangle 8"/>
           <p:cNvSpPr/>
           <p:nvPr/>
         </p:nvSpPr>
@@ -14590,7 +15070,7 @@
       </p:sp>
       <p:sp>
         <p:nvSpPr>
-          <p:cNvPr id="9" name="TextBox 8"/>
+          <p:cNvPr id="10" name="TextBox 9"/>
           <p:cNvSpPr txBox="1"/>
           <p:nvPr/>
         </p:nvSpPr>
@@ -14629,7 +15109,7 @@
       </p:sp>
       <p:sp>
         <p:nvSpPr>
-          <p:cNvPr id="10" name="Rectangle 9"/>
+          <p:cNvPr id="11" name="Rectangle 10"/>
           <p:cNvSpPr/>
           <p:nvPr/>
         </p:nvSpPr>
@@ -14673,7 +15153,7 @@
       </p:sp>
       <p:sp>
         <p:nvSpPr>
-          <p:cNvPr id="11" name="TextBox 10"/>
+          <p:cNvPr id="12" name="TextBox 11"/>
           <p:cNvSpPr txBox="1"/>
           <p:nvPr/>
         </p:nvSpPr>
